--- a/corum-pitch/Corum-Westgate-I-Pitch-STYLED.pptx
+++ b/corum-pitch/Corum-Westgate-I-Pitch-STYLED.pptx
@@ -3175,7 +3175,7 @@
         </p:spPr>
         <p:txBody>
           <a:bodyPr wrap="square" anchor="t">
-            <a:spAutoFit/>
+            <a:normAutofit/>
           </a:bodyPr>
           <a:lstStyle/>
           <a:p>
@@ -3254,7 +3254,7 @@
         </p:spPr>
         <p:txBody>
           <a:bodyPr wrap="square" anchor="t">
-            <a:spAutoFit/>
+            <a:normAutofit/>
           </a:bodyPr>
           <a:lstStyle/>
           <a:p>
@@ -3289,7 +3289,7 @@
         </p:spPr>
         <p:txBody>
           <a:bodyPr wrap="square" anchor="t">
-            <a:spAutoFit/>
+            <a:normAutofit/>
           </a:bodyPr>
           <a:lstStyle/>
           <a:p>
@@ -3324,7 +3324,7 @@
         </p:spPr>
         <p:txBody>
           <a:bodyPr wrap="square" anchor="t">
-            <a:spAutoFit/>
+            <a:normAutofit/>
           </a:bodyPr>
           <a:lstStyle/>
           <a:p>
@@ -3349,8 +3349,8 @@
         </p:nvSpPr>
         <p:spPr>
           <a:xfrm>
-            <a:off x="10058400" y="5074920"/>
-            <a:ext cx="1645920" cy="822960"/>
+            <a:off x="10241280" y="5806440"/>
+            <a:ext cx="1691640" cy="713232"/>
           </a:xfrm>
           <a:prstGeom prst="rect">
             <a:avLst/>
@@ -3395,8 +3395,8 @@
         </p:nvSpPr>
         <p:spPr>
           <a:xfrm>
-            <a:off x="10058400" y="5349240"/>
-            <a:ext cx="1645920" cy="365760"/>
+            <a:off x="10241280" y="5989320"/>
+            <a:ext cx="1691640" cy="365760"/>
           </a:xfrm>
           <a:prstGeom prst="rect">
             <a:avLst/>
@@ -3405,7 +3405,7 @@
         </p:spPr>
         <p:txBody>
           <a:bodyPr wrap="square" anchor="t">
-            <a:spAutoFit/>
+            <a:normAutofit/>
           </a:bodyPr>
           <a:lstStyle/>
           <a:p>
@@ -3502,7 +3502,7 @@
         </p:spPr>
         <p:txBody>
           <a:bodyPr wrap="square" anchor="t">
-            <a:spAutoFit/>
+            <a:normAutofit/>
           </a:bodyPr>
           <a:lstStyle/>
           <a:p>
@@ -3537,7 +3537,7 @@
         </p:spPr>
         <p:txBody>
           <a:bodyPr wrap="square" anchor="t">
-            <a:spAutoFit/>
+            <a:normAutofit/>
           </a:bodyPr>
           <a:lstStyle/>
           <a:p>
@@ -3584,7 +3584,7 @@
         </p:spPr>
         <p:txBody>
           <a:bodyPr wrap="square" anchor="t">
-            <a:spAutoFit/>
+            <a:normAutofit/>
           </a:bodyPr>
           <a:lstStyle/>
           <a:p>
@@ -3619,7 +3619,7 @@
         </p:spPr>
         <p:txBody>
           <a:bodyPr wrap="square" anchor="t">
-            <a:spAutoFit/>
+            <a:normAutofit/>
           </a:bodyPr>
           <a:lstStyle/>
           <a:p>
@@ -3698,7 +3698,7 @@
         </p:spPr>
         <p:txBody>
           <a:bodyPr wrap="square" anchor="t">
-            <a:spAutoFit/>
+            <a:normAutofit/>
           </a:bodyPr>
           <a:lstStyle/>
           <a:p>
@@ -3733,7 +3733,7 @@
         </p:spPr>
         <p:txBody>
           <a:bodyPr wrap="square" anchor="t">
-            <a:spAutoFit/>
+            <a:normAutofit/>
           </a:bodyPr>
           <a:lstStyle/>
           <a:p>
@@ -3814,7 +3814,7 @@
         </p:spPr>
         <p:txBody>
           <a:bodyPr wrap="square" anchor="t">
-            <a:spAutoFit/>
+            <a:normAutofit/>
           </a:bodyPr>
           <a:lstStyle/>
           <a:p>
@@ -3849,7 +3849,7 @@
         </p:spPr>
         <p:txBody>
           <a:bodyPr wrap="square" anchor="t">
-            <a:spAutoFit/>
+            <a:normAutofit/>
           </a:bodyPr>
           <a:lstStyle/>
           <a:p>
@@ -3930,7 +3930,7 @@
         </p:spPr>
         <p:txBody>
           <a:bodyPr wrap="square" anchor="t">
-            <a:spAutoFit/>
+            <a:normAutofit/>
           </a:bodyPr>
           <a:lstStyle/>
           <a:p>
@@ -3965,7 +3965,7 @@
         </p:spPr>
         <p:txBody>
           <a:bodyPr wrap="square" anchor="t">
-            <a:spAutoFit/>
+            <a:normAutofit/>
           </a:bodyPr>
           <a:lstStyle/>
           <a:p>
@@ -4046,7 +4046,7 @@
         </p:spPr>
         <p:txBody>
           <a:bodyPr wrap="square" anchor="t">
-            <a:spAutoFit/>
+            <a:normAutofit/>
           </a:bodyPr>
           <a:lstStyle/>
           <a:p>
@@ -4081,7 +4081,7 @@
         </p:spPr>
         <p:txBody>
           <a:bodyPr wrap="square" anchor="t">
-            <a:spAutoFit/>
+            <a:normAutofit/>
           </a:bodyPr>
           <a:lstStyle/>
           <a:p>
@@ -4162,7 +4162,7 @@
         </p:spPr>
         <p:txBody>
           <a:bodyPr wrap="square" anchor="t">
-            <a:spAutoFit/>
+            <a:normAutofit/>
           </a:bodyPr>
           <a:lstStyle/>
           <a:p>
@@ -4197,7 +4197,7 @@
         </p:spPr>
         <p:txBody>
           <a:bodyPr wrap="square" anchor="t">
-            <a:spAutoFit/>
+            <a:normAutofit/>
           </a:bodyPr>
           <a:lstStyle/>
           <a:p>
@@ -4294,7 +4294,7 @@
         </p:spPr>
         <p:txBody>
           <a:bodyPr wrap="square" anchor="t">
-            <a:spAutoFit/>
+            <a:normAutofit/>
           </a:bodyPr>
           <a:lstStyle/>
           <a:p>
@@ -4329,7 +4329,7 @@
         </p:spPr>
         <p:txBody>
           <a:bodyPr wrap="square" anchor="t">
-            <a:spAutoFit/>
+            <a:normAutofit/>
           </a:bodyPr>
           <a:lstStyle/>
           <a:p>
@@ -4376,7 +4376,7 @@
         </p:spPr>
         <p:txBody>
           <a:bodyPr wrap="square" anchor="t">
-            <a:spAutoFit/>
+            <a:normAutofit/>
           </a:bodyPr>
           <a:lstStyle/>
           <a:p>
@@ -4411,7 +4411,7 @@
         </p:spPr>
         <p:txBody>
           <a:bodyPr wrap="square" anchor="t">
-            <a:spAutoFit/>
+            <a:normAutofit/>
           </a:bodyPr>
           <a:lstStyle/>
           <a:p>
@@ -4490,7 +4490,7 @@
         </p:spPr>
         <p:txBody>
           <a:bodyPr wrap="square" anchor="t">
-            <a:spAutoFit/>
+            <a:normAutofit/>
           </a:bodyPr>
           <a:lstStyle/>
           <a:p>
@@ -4525,7 +4525,7 @@
         </p:spPr>
         <p:txBody>
           <a:bodyPr wrap="square" anchor="t">
-            <a:spAutoFit/>
+            <a:normAutofit/>
           </a:bodyPr>
           <a:lstStyle/>
           <a:p>
@@ -4652,7 +4652,7 @@
         </p:spPr>
         <p:txBody>
           <a:bodyPr wrap="square" anchor="ctr">
-            <a:spAutoFit/>
+            <a:normAutofit/>
           </a:bodyPr>
           <a:lstStyle/>
           <a:p>
@@ -4687,7 +4687,7 @@
         </p:spPr>
         <p:txBody>
           <a:bodyPr wrap="square" anchor="t">
-            <a:spAutoFit/>
+            <a:normAutofit/>
           </a:bodyPr>
           <a:lstStyle/>
           <a:p>
@@ -4858,7 +4858,7 @@
         </p:spPr>
         <p:txBody>
           <a:bodyPr wrap="square" anchor="ctr">
-            <a:spAutoFit/>
+            <a:normAutofit/>
           </a:bodyPr>
           <a:lstStyle/>
           <a:p>
@@ -4893,7 +4893,7 @@
         </p:spPr>
         <p:txBody>
           <a:bodyPr wrap="square" anchor="t">
-            <a:spAutoFit/>
+            <a:normAutofit/>
           </a:bodyPr>
           <a:lstStyle/>
           <a:p>
@@ -5064,7 +5064,7 @@
         </p:spPr>
         <p:txBody>
           <a:bodyPr wrap="square" anchor="ctr">
-            <a:spAutoFit/>
+            <a:normAutofit/>
           </a:bodyPr>
           <a:lstStyle/>
           <a:p>
@@ -5099,7 +5099,7 @@
         </p:spPr>
         <p:txBody>
           <a:bodyPr wrap="square" anchor="t">
-            <a:spAutoFit/>
+            <a:normAutofit/>
           </a:bodyPr>
           <a:lstStyle/>
           <a:p>
@@ -5270,7 +5270,7 @@
         </p:spPr>
         <p:txBody>
           <a:bodyPr wrap="square" anchor="ctr">
-            <a:spAutoFit/>
+            <a:normAutofit/>
           </a:bodyPr>
           <a:lstStyle/>
           <a:p>
@@ -5305,7 +5305,7 @@
         </p:spPr>
         <p:txBody>
           <a:bodyPr wrap="square" anchor="t">
-            <a:spAutoFit/>
+            <a:normAutofit/>
           </a:bodyPr>
           <a:lstStyle/>
           <a:p>
@@ -5476,7 +5476,7 @@
         </p:spPr>
         <p:txBody>
           <a:bodyPr wrap="square" anchor="ctr">
-            <a:spAutoFit/>
+            <a:normAutofit/>
           </a:bodyPr>
           <a:lstStyle/>
           <a:p>
@@ -5511,7 +5511,7 @@
         </p:spPr>
         <p:txBody>
           <a:bodyPr wrap="square" anchor="t">
-            <a:spAutoFit/>
+            <a:normAutofit/>
           </a:bodyPr>
           <a:lstStyle/>
           <a:p>
@@ -5546,7 +5546,7 @@
         </p:spPr>
         <p:txBody>
           <a:bodyPr wrap="square" anchor="t">
-            <a:spAutoFit/>
+            <a:normAutofit/>
           </a:bodyPr>
           <a:lstStyle/>
           <a:p>
@@ -5643,7 +5643,7 @@
         </p:spPr>
         <p:txBody>
           <a:bodyPr wrap="square" anchor="t">
-            <a:spAutoFit/>
+            <a:normAutofit/>
           </a:bodyPr>
           <a:lstStyle/>
           <a:p>
@@ -5678,7 +5678,7 @@
         </p:spPr>
         <p:txBody>
           <a:bodyPr wrap="square" anchor="t">
-            <a:spAutoFit/>
+            <a:normAutofit/>
           </a:bodyPr>
           <a:lstStyle/>
           <a:p>
@@ -5713,7 +5713,7 @@
         </p:spPr>
         <p:txBody>
           <a:bodyPr wrap="square" anchor="t">
-            <a:spAutoFit/>
+            <a:normAutofit/>
           </a:bodyPr>
           <a:lstStyle/>
           <a:p>
@@ -5748,7 +5748,7 @@
         </p:spPr>
         <p:txBody>
           <a:bodyPr wrap="square" anchor="t">
-            <a:spAutoFit/>
+            <a:normAutofit/>
           </a:bodyPr>
           <a:lstStyle/>
           <a:p>
@@ -5827,7 +5827,7 @@
         </p:spPr>
         <p:txBody>
           <a:bodyPr wrap="square" anchor="t">
-            <a:spAutoFit/>
+            <a:normAutofit/>
           </a:bodyPr>
           <a:lstStyle/>
           <a:p>
@@ -5908,7 +5908,7 @@
         </p:spPr>
         <p:txBody>
           <a:bodyPr wrap="square" anchor="t">
-            <a:spAutoFit/>
+            <a:normAutofit/>
           </a:bodyPr>
           <a:lstStyle/>
           <a:p>
@@ -5943,7 +5943,7 @@
         </p:spPr>
         <p:txBody>
           <a:bodyPr wrap="square" anchor="t">
-            <a:spAutoFit/>
+            <a:normAutofit/>
           </a:bodyPr>
           <a:lstStyle/>
           <a:p>
@@ -6024,7 +6024,7 @@
         </p:spPr>
         <p:txBody>
           <a:bodyPr wrap="square" anchor="t">
-            <a:spAutoFit/>
+            <a:normAutofit/>
           </a:bodyPr>
           <a:lstStyle/>
           <a:p>
@@ -6059,7 +6059,7 @@
         </p:spPr>
         <p:txBody>
           <a:bodyPr wrap="square" anchor="t">
-            <a:spAutoFit/>
+            <a:normAutofit/>
           </a:bodyPr>
           <a:lstStyle/>
           <a:p>
@@ -6140,7 +6140,7 @@
         </p:spPr>
         <p:txBody>
           <a:bodyPr wrap="square" anchor="t">
-            <a:spAutoFit/>
+            <a:normAutofit/>
           </a:bodyPr>
           <a:lstStyle/>
           <a:p>
@@ -6175,7 +6175,7 @@
         </p:spPr>
         <p:txBody>
           <a:bodyPr wrap="square" anchor="t">
-            <a:spAutoFit/>
+            <a:normAutofit/>
           </a:bodyPr>
           <a:lstStyle/>
           <a:p>
@@ -6256,7 +6256,7 @@
         </p:spPr>
         <p:txBody>
           <a:bodyPr wrap="square" anchor="t">
-            <a:spAutoFit/>
+            <a:normAutofit/>
           </a:bodyPr>
           <a:lstStyle/>
           <a:p>
@@ -6291,7 +6291,7 @@
         </p:spPr>
         <p:txBody>
           <a:bodyPr wrap="square" anchor="t">
-            <a:spAutoFit/>
+            <a:normAutofit/>
           </a:bodyPr>
           <a:lstStyle/>
           <a:p>
@@ -6388,7 +6388,7 @@
         </p:spPr>
         <p:txBody>
           <a:bodyPr wrap="square" anchor="t">
-            <a:spAutoFit/>
+            <a:normAutofit/>
           </a:bodyPr>
           <a:lstStyle/>
           <a:p>
@@ -6423,7 +6423,7 @@
         </p:spPr>
         <p:txBody>
           <a:bodyPr wrap="square" anchor="t">
-            <a:spAutoFit/>
+            <a:normAutofit/>
           </a:bodyPr>
           <a:lstStyle/>
           <a:p>
@@ -6470,7 +6470,7 @@
         </p:spPr>
         <p:txBody>
           <a:bodyPr wrap="square" anchor="t">
-            <a:spAutoFit/>
+            <a:normAutofit/>
           </a:bodyPr>
           <a:lstStyle/>
           <a:p>
@@ -6505,7 +6505,7 @@
         </p:spPr>
         <p:txBody>
           <a:bodyPr wrap="square" anchor="t">
-            <a:spAutoFit/>
+            <a:normAutofit/>
           </a:bodyPr>
           <a:lstStyle/>
           <a:p>
@@ -6584,7 +6584,7 @@
         </p:spPr>
         <p:txBody>
           <a:bodyPr wrap="square" anchor="t">
-            <a:spAutoFit/>
+            <a:normAutofit/>
           </a:bodyPr>
           <a:lstStyle/>
           <a:p>
@@ -6709,7 +6709,7 @@
         </p:spPr>
         <p:txBody>
           <a:bodyPr wrap="square" anchor="t">
-            <a:spAutoFit/>
+            <a:normAutofit/>
           </a:bodyPr>
           <a:lstStyle/>
           <a:p>
@@ -6744,7 +6744,7 @@
         </p:spPr>
         <p:txBody>
           <a:bodyPr wrap="square" anchor="t">
-            <a:spAutoFit/>
+            <a:normAutofit/>
           </a:bodyPr>
           <a:lstStyle/>
           <a:p>
@@ -6779,7 +6779,7 @@
         </p:spPr>
         <p:txBody>
           <a:bodyPr wrap="square" anchor="t">
-            <a:spAutoFit/>
+            <a:normAutofit/>
           </a:bodyPr>
           <a:lstStyle/>
           <a:p>
@@ -6860,7 +6860,7 @@
         </p:spPr>
         <p:txBody>
           <a:bodyPr wrap="square" anchor="t">
-            <a:spAutoFit/>
+            <a:normAutofit/>
           </a:bodyPr>
           <a:lstStyle/>
           <a:p>
@@ -6895,7 +6895,7 @@
         </p:spPr>
         <p:txBody>
           <a:bodyPr wrap="square" anchor="t">
-            <a:spAutoFit/>
+            <a:normAutofit/>
           </a:bodyPr>
           <a:lstStyle/>
           <a:p>
@@ -6930,7 +6930,7 @@
         </p:spPr>
         <p:txBody>
           <a:bodyPr wrap="square" anchor="t">
-            <a:spAutoFit/>
+            <a:normAutofit/>
           </a:bodyPr>
           <a:lstStyle/>
           <a:p>
@@ -7011,7 +7011,7 @@
         </p:spPr>
         <p:txBody>
           <a:bodyPr wrap="square" anchor="t">
-            <a:spAutoFit/>
+            <a:normAutofit/>
           </a:bodyPr>
           <a:lstStyle/>
           <a:p>
@@ -7046,7 +7046,7 @@
         </p:spPr>
         <p:txBody>
           <a:bodyPr wrap="square" anchor="t">
-            <a:spAutoFit/>
+            <a:normAutofit/>
           </a:bodyPr>
           <a:lstStyle/>
           <a:p>
@@ -7081,7 +7081,7 @@
         </p:spPr>
         <p:txBody>
           <a:bodyPr wrap="square" anchor="t">
-            <a:spAutoFit/>
+            <a:normAutofit/>
           </a:bodyPr>
           <a:lstStyle/>
           <a:p>
@@ -7162,7 +7162,7 @@
         </p:spPr>
         <p:txBody>
           <a:bodyPr wrap="square" anchor="t">
-            <a:spAutoFit/>
+            <a:normAutofit/>
           </a:bodyPr>
           <a:lstStyle/>
           <a:p>
@@ -7197,7 +7197,7 @@
         </p:spPr>
         <p:txBody>
           <a:bodyPr wrap="square" anchor="t">
-            <a:spAutoFit/>
+            <a:normAutofit/>
           </a:bodyPr>
           <a:lstStyle/>
           <a:p>
@@ -7232,7 +7232,7 @@
         </p:spPr>
         <p:txBody>
           <a:bodyPr wrap="square" anchor="t">
-            <a:spAutoFit/>
+            <a:normAutofit/>
           </a:bodyPr>
           <a:lstStyle/>
           <a:p>
@@ -7313,7 +7313,7 @@
         </p:spPr>
         <p:txBody>
           <a:bodyPr wrap="square" anchor="t">
-            <a:spAutoFit/>
+            <a:normAutofit/>
           </a:bodyPr>
           <a:lstStyle/>
           <a:p>
@@ -7348,7 +7348,7 @@
         </p:spPr>
         <p:txBody>
           <a:bodyPr wrap="square" anchor="t">
-            <a:spAutoFit/>
+            <a:normAutofit/>
           </a:bodyPr>
           <a:lstStyle/>
           <a:p>
@@ -7383,7 +7383,7 @@
         </p:spPr>
         <p:txBody>
           <a:bodyPr wrap="square" anchor="t">
-            <a:spAutoFit/>
+            <a:normAutofit/>
           </a:bodyPr>
           <a:lstStyle/>
           <a:p>
@@ -7464,7 +7464,7 @@
         </p:spPr>
         <p:txBody>
           <a:bodyPr wrap="square" anchor="t">
-            <a:spAutoFit/>
+            <a:normAutofit/>
           </a:bodyPr>
           <a:lstStyle/>
           <a:p>
@@ -7499,7 +7499,7 @@
         </p:spPr>
         <p:txBody>
           <a:bodyPr wrap="square" anchor="t">
-            <a:spAutoFit/>
+            <a:normAutofit/>
           </a:bodyPr>
           <a:lstStyle/>
           <a:p>
@@ -7534,7 +7534,7 @@
         </p:spPr>
         <p:txBody>
           <a:bodyPr wrap="square" anchor="t">
-            <a:spAutoFit/>
+            <a:normAutofit/>
           </a:bodyPr>
           <a:lstStyle/>
           <a:p>
@@ -7569,7 +7569,7 @@
         </p:spPr>
         <p:txBody>
           <a:bodyPr wrap="square" anchor="t">
-            <a:spAutoFit/>
+            <a:normAutofit/>
           </a:bodyPr>
           <a:lstStyle/>
           <a:p>
@@ -7666,7 +7666,7 @@
         </p:spPr>
         <p:txBody>
           <a:bodyPr wrap="square" anchor="t">
-            <a:spAutoFit/>
+            <a:normAutofit/>
           </a:bodyPr>
           <a:lstStyle/>
           <a:p>
@@ -7701,7 +7701,7 @@
         </p:spPr>
         <p:txBody>
           <a:bodyPr wrap="square" anchor="t">
-            <a:spAutoFit/>
+            <a:normAutofit/>
           </a:bodyPr>
           <a:lstStyle/>
           <a:p>
@@ -7736,7 +7736,7 @@
         </p:spPr>
         <p:txBody>
           <a:bodyPr wrap="square" anchor="t">
-            <a:spAutoFit/>
+            <a:normAutofit/>
           </a:bodyPr>
           <a:lstStyle/>
           <a:p>
@@ -7771,7 +7771,7 @@
         </p:spPr>
         <p:txBody>
           <a:bodyPr wrap="square" anchor="t">
-            <a:spAutoFit/>
+            <a:normAutofit/>
           </a:bodyPr>
           <a:lstStyle/>
           <a:p>
@@ -7850,7 +7850,7 @@
         </p:spPr>
         <p:txBody>
           <a:bodyPr wrap="square" anchor="t">
-            <a:spAutoFit/>
+            <a:normAutofit/>
           </a:bodyPr>
           <a:lstStyle/>
           <a:p>
@@ -7977,7 +7977,7 @@
         </p:spPr>
         <p:txBody>
           <a:bodyPr wrap="square" anchor="t">
-            <a:spAutoFit/>
+            <a:normAutofit/>
           </a:bodyPr>
           <a:lstStyle/>
           <a:p>
@@ -8012,7 +8012,7 @@
         </p:spPr>
         <p:txBody>
           <a:bodyPr wrap="square" anchor="t">
-            <a:spAutoFit/>
+            <a:normAutofit/>
           </a:bodyPr>
           <a:lstStyle/>
           <a:p>
@@ -8047,7 +8047,7 @@
         </p:spPr>
         <p:txBody>
           <a:bodyPr wrap="square" anchor="t">
-            <a:spAutoFit/>
+            <a:normAutofit/>
           </a:bodyPr>
           <a:lstStyle/>
           <a:p>
@@ -8218,7 +8218,7 @@
         </p:spPr>
         <p:txBody>
           <a:bodyPr wrap="square" anchor="t">
-            <a:spAutoFit/>
+            <a:normAutofit/>
           </a:bodyPr>
           <a:lstStyle/>
           <a:p>
@@ -8253,7 +8253,7 @@
         </p:spPr>
         <p:txBody>
           <a:bodyPr wrap="square" anchor="t">
-            <a:spAutoFit/>
+            <a:normAutofit/>
           </a:bodyPr>
           <a:lstStyle/>
           <a:p>
@@ -8288,7 +8288,7 @@
         </p:spPr>
         <p:txBody>
           <a:bodyPr wrap="square" anchor="t">
-            <a:spAutoFit/>
+            <a:normAutofit/>
           </a:bodyPr>
           <a:lstStyle/>
           <a:p>
@@ -8459,7 +8459,7 @@
         </p:spPr>
         <p:txBody>
           <a:bodyPr wrap="square" anchor="t">
-            <a:spAutoFit/>
+            <a:normAutofit/>
           </a:bodyPr>
           <a:lstStyle/>
           <a:p>
@@ -8494,7 +8494,7 @@
         </p:spPr>
         <p:txBody>
           <a:bodyPr wrap="square" anchor="t">
-            <a:spAutoFit/>
+            <a:normAutofit/>
           </a:bodyPr>
           <a:lstStyle/>
           <a:p>
@@ -8529,7 +8529,7 @@
         </p:spPr>
         <p:txBody>
           <a:bodyPr wrap="square" anchor="t">
-            <a:spAutoFit/>
+            <a:normAutofit/>
           </a:bodyPr>
           <a:lstStyle/>
           <a:p>
@@ -8700,7 +8700,7 @@
         </p:spPr>
         <p:txBody>
           <a:bodyPr wrap="square" anchor="t">
-            <a:spAutoFit/>
+            <a:normAutofit/>
           </a:bodyPr>
           <a:lstStyle/>
           <a:p>
@@ -8735,7 +8735,7 @@
         </p:spPr>
         <p:txBody>
           <a:bodyPr wrap="square" anchor="t">
-            <a:spAutoFit/>
+            <a:normAutofit/>
           </a:bodyPr>
           <a:lstStyle/>
           <a:p>
@@ -8770,7 +8770,7 @@
         </p:spPr>
         <p:txBody>
           <a:bodyPr wrap="square" anchor="t">
-            <a:spAutoFit/>
+            <a:normAutofit/>
           </a:bodyPr>
           <a:lstStyle/>
           <a:p>
@@ -8851,7 +8851,7 @@
         </p:spPr>
         <p:txBody>
           <a:bodyPr wrap="square" anchor="t">
-            <a:spAutoFit/>
+            <a:normAutofit/>
           </a:bodyPr>
           <a:lstStyle/>
           <a:p>
@@ -8948,7 +8948,7 @@
         </p:spPr>
         <p:txBody>
           <a:bodyPr wrap="square" anchor="t">
-            <a:spAutoFit/>
+            <a:normAutofit/>
           </a:bodyPr>
           <a:lstStyle/>
           <a:p>
@@ -8983,7 +8983,7 @@
         </p:spPr>
         <p:txBody>
           <a:bodyPr wrap="square" anchor="t">
-            <a:spAutoFit/>
+            <a:normAutofit/>
           </a:bodyPr>
           <a:lstStyle/>
           <a:p>
@@ -9018,7 +9018,7 @@
         </p:spPr>
         <p:txBody>
           <a:bodyPr wrap="square" anchor="t">
-            <a:spAutoFit/>
+            <a:normAutofit/>
           </a:bodyPr>
           <a:lstStyle/>
           <a:p>
@@ -9053,7 +9053,7 @@
         </p:spPr>
         <p:txBody>
           <a:bodyPr wrap="square" anchor="t">
-            <a:spAutoFit/>
+            <a:normAutofit/>
           </a:bodyPr>
           <a:lstStyle/>
           <a:p>
@@ -9132,7 +9132,7 @@
         </p:spPr>
         <p:txBody>
           <a:bodyPr wrap="square" anchor="t">
-            <a:spAutoFit/>
+            <a:normAutofit/>
           </a:bodyPr>
           <a:lstStyle/>
           <a:p>
@@ -9167,7 +9167,7 @@
         </p:spPr>
         <p:txBody>
           <a:bodyPr wrap="square" anchor="t">
-            <a:spAutoFit/>
+            <a:normAutofit/>
           </a:bodyPr>
           <a:lstStyle/>
           <a:p>
@@ -9202,7 +9202,7 @@
         </p:spPr>
         <p:txBody>
           <a:bodyPr wrap="square" anchor="t">
-            <a:spAutoFit/>
+            <a:normAutofit/>
           </a:bodyPr>
           <a:lstStyle/>
           <a:p>
@@ -9237,7 +9237,7 @@
         </p:spPr>
         <p:txBody>
           <a:bodyPr wrap="square" anchor="t">
-            <a:spAutoFit/>
+            <a:normAutofit/>
           </a:bodyPr>
           <a:lstStyle/>
           <a:p>
@@ -9272,7 +9272,7 @@
         </p:spPr>
         <p:txBody>
           <a:bodyPr wrap="square" anchor="t">
-            <a:spAutoFit/>
+            <a:normAutofit/>
           </a:bodyPr>
           <a:lstStyle/>
           <a:p>
@@ -9307,7 +9307,7 @@
         </p:spPr>
         <p:txBody>
           <a:bodyPr wrap="square" anchor="t">
-            <a:spAutoFit/>
+            <a:normAutofit/>
           </a:bodyPr>
           <a:lstStyle/>
           <a:p>
@@ -9342,7 +9342,7 @@
         </p:spPr>
         <p:txBody>
           <a:bodyPr wrap="square" anchor="t">
-            <a:spAutoFit/>
+            <a:normAutofit/>
           </a:bodyPr>
           <a:lstStyle/>
           <a:p>
@@ -9377,7 +9377,7 @@
         </p:spPr>
         <p:txBody>
           <a:bodyPr wrap="square" anchor="t">
-            <a:spAutoFit/>
+            <a:normAutofit/>
           </a:bodyPr>
           <a:lstStyle/>
           <a:p>
@@ -9412,7 +9412,7 @@
         </p:spPr>
         <p:txBody>
           <a:bodyPr wrap="square" anchor="t">
-            <a:spAutoFit/>
+            <a:normAutofit/>
           </a:bodyPr>
           <a:lstStyle/>
           <a:p>
@@ -9447,7 +9447,7 @@
         </p:spPr>
         <p:txBody>
           <a:bodyPr wrap="square" anchor="t">
-            <a:spAutoFit/>
+            <a:normAutofit/>
           </a:bodyPr>
           <a:lstStyle/>
           <a:p>
@@ -9526,7 +9526,7 @@
         </p:spPr>
         <p:txBody>
           <a:bodyPr wrap="square" anchor="t">
-            <a:spAutoFit/>
+            <a:normAutofit/>
           </a:bodyPr>
           <a:lstStyle/>
           <a:p>
@@ -9605,7 +9605,7 @@
         </p:spPr>
         <p:txBody>
           <a:bodyPr wrap="square" anchor="t">
-            <a:spAutoFit/>
+            <a:normAutofit/>
           </a:bodyPr>
           <a:lstStyle/>
           <a:p>
@@ -9684,7 +9684,7 @@
         </p:spPr>
         <p:txBody>
           <a:bodyPr wrap="square" anchor="t">
-            <a:spAutoFit/>
+            <a:normAutofit/>
           </a:bodyPr>
           <a:lstStyle/>
           <a:p>
@@ -9763,7 +9763,7 @@
         </p:spPr>
         <p:txBody>
           <a:bodyPr wrap="square" anchor="t">
-            <a:spAutoFit/>
+            <a:normAutofit/>
           </a:bodyPr>
           <a:lstStyle/>
           <a:p>
@@ -9842,7 +9842,7 @@
         </p:spPr>
         <p:txBody>
           <a:bodyPr wrap="square" anchor="t">
-            <a:spAutoFit/>
+            <a:normAutofit/>
           </a:bodyPr>
           <a:lstStyle/>
           <a:p>
@@ -9921,7 +9921,7 @@
         </p:spPr>
         <p:txBody>
           <a:bodyPr wrap="square" anchor="t">
-            <a:spAutoFit/>
+            <a:normAutofit/>
           </a:bodyPr>
           <a:lstStyle/>
           <a:p>
@@ -10000,7 +10000,7 @@
         </p:spPr>
         <p:txBody>
           <a:bodyPr wrap="square" anchor="t">
-            <a:spAutoFit/>
+            <a:normAutofit/>
           </a:bodyPr>
           <a:lstStyle/>
           <a:p>
@@ -10079,7 +10079,7 @@
         </p:spPr>
         <p:txBody>
           <a:bodyPr wrap="square" anchor="t">
-            <a:spAutoFit/>
+            <a:normAutofit/>
           </a:bodyPr>
           <a:lstStyle/>
           <a:p>
@@ -10204,7 +10204,7 @@
         </p:spPr>
         <p:txBody>
           <a:bodyPr wrap="square" anchor="t">
-            <a:spAutoFit/>
+            <a:normAutofit/>
           </a:bodyPr>
           <a:lstStyle/>
           <a:p>
@@ -10239,7 +10239,7 @@
         </p:spPr>
         <p:txBody>
           <a:bodyPr wrap="square" anchor="t">
-            <a:spAutoFit/>
+            <a:normAutofit/>
           </a:bodyPr>
           <a:lstStyle/>
           <a:p>
@@ -10336,7 +10336,7 @@
         </p:spPr>
         <p:txBody>
           <a:bodyPr wrap="square" anchor="t">
-            <a:spAutoFit/>
+            <a:normAutofit/>
           </a:bodyPr>
           <a:lstStyle/>
           <a:p>
@@ -10371,7 +10371,7 @@
         </p:spPr>
         <p:txBody>
           <a:bodyPr wrap="square" anchor="t">
-            <a:spAutoFit/>
+            <a:normAutofit/>
           </a:bodyPr>
           <a:lstStyle/>
           <a:p>
@@ -10418,7 +10418,7 @@
         </p:spPr>
         <p:txBody>
           <a:bodyPr wrap="square" anchor="t">
-            <a:spAutoFit/>
+            <a:normAutofit/>
           </a:bodyPr>
           <a:lstStyle/>
           <a:p>
@@ -10453,7 +10453,7 @@
         </p:spPr>
         <p:txBody>
           <a:bodyPr wrap="square" anchor="t">
-            <a:spAutoFit/>
+            <a:normAutofit/>
           </a:bodyPr>
           <a:lstStyle/>
           <a:p>
@@ -10532,7 +10532,7 @@
         </p:spPr>
         <p:txBody>
           <a:bodyPr wrap="square" anchor="t">
-            <a:spAutoFit/>
+            <a:normAutofit/>
           </a:bodyPr>
           <a:lstStyle/>
           <a:p>
@@ -10613,7 +10613,7 @@
         </p:spPr>
         <p:txBody>
           <a:bodyPr wrap="square" anchor="ctr">
-            <a:spAutoFit/>
+            <a:normAutofit/>
           </a:bodyPr>
           <a:lstStyle/>
           <a:p>
@@ -10706,7 +10706,7 @@
         </p:spPr>
         <p:txBody>
           <a:bodyPr wrap="square" anchor="ctr">
-            <a:spAutoFit/>
+            <a:normAutofit/>
           </a:bodyPr>
           <a:lstStyle/>
           <a:p>
@@ -10799,7 +10799,7 @@
         </p:spPr>
         <p:txBody>
           <a:bodyPr wrap="square" anchor="ctr">
-            <a:spAutoFit/>
+            <a:normAutofit/>
           </a:bodyPr>
           <a:lstStyle/>
           <a:p>
@@ -10904,7 +10904,7 @@
         </p:spPr>
         <p:txBody>
           <a:bodyPr wrap="square" anchor="ctr">
-            <a:spAutoFit/>
+            <a:normAutofit/>
           </a:bodyPr>
           <a:lstStyle/>
           <a:p>
@@ -11021,7 +11021,7 @@
         </p:spPr>
         <p:txBody>
           <a:bodyPr wrap="square" anchor="ctr">
-            <a:spAutoFit/>
+            <a:normAutofit/>
           </a:bodyPr>
           <a:lstStyle/>
           <a:p>
@@ -11114,7 +11114,7 @@
         </p:spPr>
         <p:txBody>
           <a:bodyPr wrap="square" anchor="ctr">
-            <a:spAutoFit/>
+            <a:normAutofit/>
           </a:bodyPr>
           <a:lstStyle/>
           <a:p>
@@ -11207,7 +11207,7 @@
         </p:spPr>
         <p:txBody>
           <a:bodyPr wrap="square" anchor="t">
-            <a:spAutoFit/>
+            <a:normAutofit/>
           </a:bodyPr>
           <a:lstStyle/>
           <a:p>
@@ -11304,7 +11304,7 @@
         </p:spPr>
         <p:txBody>
           <a:bodyPr wrap="square" anchor="t">
-            <a:spAutoFit/>
+            <a:normAutofit/>
           </a:bodyPr>
           <a:lstStyle/>
           <a:p>
@@ -11339,7 +11339,7 @@
         </p:spPr>
         <p:txBody>
           <a:bodyPr wrap="square" anchor="t">
-            <a:spAutoFit/>
+            <a:normAutofit/>
           </a:bodyPr>
           <a:lstStyle/>
           <a:p>
@@ -11386,7 +11386,7 @@
         </p:spPr>
         <p:txBody>
           <a:bodyPr wrap="square" anchor="t">
-            <a:spAutoFit/>
+            <a:normAutofit/>
           </a:bodyPr>
           <a:lstStyle/>
           <a:p>
@@ -11421,7 +11421,7 @@
         </p:spPr>
         <p:txBody>
           <a:bodyPr wrap="square" anchor="t">
-            <a:spAutoFit/>
+            <a:normAutofit/>
           </a:bodyPr>
           <a:lstStyle/>
           <a:p>
@@ -11500,7 +11500,7 @@
         </p:spPr>
         <p:txBody>
           <a:bodyPr wrap="square" anchor="t">
-            <a:spAutoFit/>
+            <a:normAutofit/>
           </a:bodyPr>
           <a:lstStyle/>
           <a:p>
@@ -11581,7 +11581,7 @@
         </p:spPr>
         <p:txBody>
           <a:bodyPr wrap="square" anchor="t">
-            <a:spAutoFit/>
+            <a:normAutofit/>
           </a:bodyPr>
           <a:lstStyle/>
           <a:p>
@@ -11662,7 +11662,7 @@
         </p:spPr>
         <p:txBody>
           <a:bodyPr wrap="square" anchor="t">
-            <a:spAutoFit/>
+            <a:normAutofit/>
           </a:bodyPr>
           <a:lstStyle/>
           <a:p>
@@ -11743,7 +11743,7 @@
         </p:spPr>
         <p:txBody>
           <a:bodyPr wrap="square" anchor="t">
-            <a:spAutoFit/>
+            <a:normAutofit/>
           </a:bodyPr>
           <a:lstStyle/>
           <a:p>
@@ -11824,7 +11824,7 @@
         </p:spPr>
         <p:txBody>
           <a:bodyPr wrap="square" anchor="t">
-            <a:spAutoFit/>
+            <a:normAutofit/>
           </a:bodyPr>
           <a:lstStyle/>
           <a:p>
@@ -11905,7 +11905,7 @@
         </p:spPr>
         <p:txBody>
           <a:bodyPr wrap="square" anchor="t">
-            <a:spAutoFit/>
+            <a:normAutofit/>
           </a:bodyPr>
           <a:lstStyle/>
           <a:p>
@@ -11986,7 +11986,7 @@
         </p:spPr>
         <p:txBody>
           <a:bodyPr wrap="square" anchor="ctr">
-            <a:spAutoFit/>
+            <a:normAutofit/>
           </a:bodyPr>
           <a:lstStyle/>
           <a:p>
@@ -12067,7 +12067,7 @@
         </p:spPr>
         <p:txBody>
           <a:bodyPr wrap="square" anchor="ctr">
-            <a:spAutoFit/>
+            <a:normAutofit/>
           </a:bodyPr>
           <a:lstStyle/>
           <a:p>
@@ -12148,7 +12148,7 @@
         </p:spPr>
         <p:txBody>
           <a:bodyPr wrap="square" anchor="ctr">
-            <a:spAutoFit/>
+            <a:normAutofit/>
           </a:bodyPr>
           <a:lstStyle/>
           <a:p>
@@ -12229,7 +12229,7 @@
         </p:spPr>
         <p:txBody>
           <a:bodyPr wrap="square" anchor="ctr">
-            <a:spAutoFit/>
+            <a:normAutofit/>
           </a:bodyPr>
           <a:lstStyle/>
           <a:p>
@@ -12310,7 +12310,7 @@
         </p:spPr>
         <p:txBody>
           <a:bodyPr wrap="square" anchor="ctr">
-            <a:spAutoFit/>
+            <a:normAutofit/>
           </a:bodyPr>
           <a:lstStyle/>
           <a:p>
@@ -12391,7 +12391,7 @@
         </p:spPr>
         <p:txBody>
           <a:bodyPr wrap="square" anchor="ctr">
-            <a:spAutoFit/>
+            <a:normAutofit/>
           </a:bodyPr>
           <a:lstStyle/>
           <a:p>
@@ -12472,7 +12472,7 @@
         </p:spPr>
         <p:txBody>
           <a:bodyPr wrap="square" anchor="ctr">
-            <a:spAutoFit/>
+            <a:normAutofit/>
           </a:bodyPr>
           <a:lstStyle/>
           <a:p>
@@ -12553,7 +12553,7 @@
         </p:spPr>
         <p:txBody>
           <a:bodyPr wrap="square" anchor="ctr">
-            <a:spAutoFit/>
+            <a:normAutofit/>
           </a:bodyPr>
           <a:lstStyle/>
           <a:p>
@@ -12634,7 +12634,7 @@
         </p:spPr>
         <p:txBody>
           <a:bodyPr wrap="square" anchor="ctr">
-            <a:spAutoFit/>
+            <a:normAutofit/>
           </a:bodyPr>
           <a:lstStyle/>
           <a:p>
@@ -12715,7 +12715,7 @@
         </p:spPr>
         <p:txBody>
           <a:bodyPr wrap="square" anchor="ctr">
-            <a:spAutoFit/>
+            <a:normAutofit/>
           </a:bodyPr>
           <a:lstStyle/>
           <a:p>
@@ -12796,7 +12796,7 @@
         </p:spPr>
         <p:txBody>
           <a:bodyPr wrap="square" anchor="ctr">
-            <a:spAutoFit/>
+            <a:normAutofit/>
           </a:bodyPr>
           <a:lstStyle/>
           <a:p>
@@ -12877,7 +12877,7 @@
         </p:spPr>
         <p:txBody>
           <a:bodyPr wrap="square" anchor="ctr">
-            <a:spAutoFit/>
+            <a:normAutofit/>
           </a:bodyPr>
           <a:lstStyle/>
           <a:p>
@@ -12958,7 +12958,7 @@
         </p:spPr>
         <p:txBody>
           <a:bodyPr wrap="square" anchor="ctr">
-            <a:spAutoFit/>
+            <a:normAutofit/>
           </a:bodyPr>
           <a:lstStyle/>
           <a:p>
@@ -13039,7 +13039,7 @@
         </p:spPr>
         <p:txBody>
           <a:bodyPr wrap="square" anchor="ctr">
-            <a:spAutoFit/>
+            <a:normAutofit/>
           </a:bodyPr>
           <a:lstStyle/>
           <a:p>
@@ -13120,7 +13120,7 @@
         </p:spPr>
         <p:txBody>
           <a:bodyPr wrap="square" anchor="ctr">
-            <a:spAutoFit/>
+            <a:normAutofit/>
           </a:bodyPr>
           <a:lstStyle/>
           <a:p>
@@ -13201,7 +13201,7 @@
         </p:spPr>
         <p:txBody>
           <a:bodyPr wrap="square" anchor="ctr">
-            <a:spAutoFit/>
+            <a:normAutofit/>
           </a:bodyPr>
           <a:lstStyle/>
           <a:p>
@@ -13282,7 +13282,7 @@
         </p:spPr>
         <p:txBody>
           <a:bodyPr wrap="square" anchor="ctr">
-            <a:spAutoFit/>
+            <a:normAutofit/>
           </a:bodyPr>
           <a:lstStyle/>
           <a:p>
@@ -13363,7 +13363,7 @@
         </p:spPr>
         <p:txBody>
           <a:bodyPr wrap="square" anchor="ctr">
-            <a:spAutoFit/>
+            <a:normAutofit/>
           </a:bodyPr>
           <a:lstStyle/>
           <a:p>
@@ -13444,7 +13444,7 @@
         </p:spPr>
         <p:txBody>
           <a:bodyPr wrap="square" anchor="ctr">
-            <a:spAutoFit/>
+            <a:normAutofit/>
           </a:bodyPr>
           <a:lstStyle/>
           <a:p>
@@ -13525,7 +13525,7 @@
         </p:spPr>
         <p:txBody>
           <a:bodyPr wrap="square" anchor="ctr">
-            <a:spAutoFit/>
+            <a:normAutofit/>
           </a:bodyPr>
           <a:lstStyle/>
           <a:p>
@@ -13606,7 +13606,7 @@
         </p:spPr>
         <p:txBody>
           <a:bodyPr wrap="square" anchor="ctr">
-            <a:spAutoFit/>
+            <a:normAutofit/>
           </a:bodyPr>
           <a:lstStyle/>
           <a:p>
@@ -13687,7 +13687,7 @@
         </p:spPr>
         <p:txBody>
           <a:bodyPr wrap="square" anchor="ctr">
-            <a:spAutoFit/>
+            <a:normAutofit/>
           </a:bodyPr>
           <a:lstStyle/>
           <a:p>
@@ -13768,7 +13768,7 @@
         </p:spPr>
         <p:txBody>
           <a:bodyPr wrap="square" anchor="ctr">
-            <a:spAutoFit/>
+            <a:normAutofit/>
           </a:bodyPr>
           <a:lstStyle/>
           <a:p>
@@ -13849,7 +13849,7 @@
         </p:spPr>
         <p:txBody>
           <a:bodyPr wrap="square" anchor="ctr">
-            <a:spAutoFit/>
+            <a:normAutofit/>
           </a:bodyPr>
           <a:lstStyle/>
           <a:p>
@@ -13930,7 +13930,7 @@
         </p:spPr>
         <p:txBody>
           <a:bodyPr wrap="square" anchor="ctr">
-            <a:spAutoFit/>
+            <a:normAutofit/>
           </a:bodyPr>
           <a:lstStyle/>
           <a:p>
@@ -14011,7 +14011,7 @@
         </p:spPr>
         <p:txBody>
           <a:bodyPr wrap="square" anchor="ctr">
-            <a:spAutoFit/>
+            <a:normAutofit/>
           </a:bodyPr>
           <a:lstStyle/>
           <a:p>
@@ -14092,7 +14092,7 @@
         </p:spPr>
         <p:txBody>
           <a:bodyPr wrap="square" anchor="ctr">
-            <a:spAutoFit/>
+            <a:normAutofit/>
           </a:bodyPr>
           <a:lstStyle/>
           <a:p>
@@ -14173,7 +14173,7 @@
         </p:spPr>
         <p:txBody>
           <a:bodyPr wrap="square" anchor="ctr">
-            <a:spAutoFit/>
+            <a:normAutofit/>
           </a:bodyPr>
           <a:lstStyle/>
           <a:p>
@@ -14254,7 +14254,7 @@
         </p:spPr>
         <p:txBody>
           <a:bodyPr wrap="square" anchor="ctr">
-            <a:spAutoFit/>
+            <a:normAutofit/>
           </a:bodyPr>
           <a:lstStyle/>
           <a:p>
@@ -14335,7 +14335,7 @@
         </p:spPr>
         <p:txBody>
           <a:bodyPr wrap="square" anchor="ctr">
-            <a:spAutoFit/>
+            <a:normAutofit/>
           </a:bodyPr>
           <a:lstStyle/>
           <a:p>
@@ -14370,7 +14370,7 @@
         </p:spPr>
         <p:txBody>
           <a:bodyPr wrap="square" anchor="t">
-            <a:spAutoFit/>
+            <a:normAutofit/>
           </a:bodyPr>
           <a:lstStyle/>
           <a:p>
@@ -14467,7 +14467,7 @@
         </p:spPr>
         <p:txBody>
           <a:bodyPr wrap="square" anchor="t">
-            <a:spAutoFit/>
+            <a:normAutofit/>
           </a:bodyPr>
           <a:lstStyle/>
           <a:p>
@@ -14502,7 +14502,7 @@
         </p:spPr>
         <p:txBody>
           <a:bodyPr wrap="square" anchor="t">
-            <a:spAutoFit/>
+            <a:normAutofit/>
           </a:bodyPr>
           <a:lstStyle/>
           <a:p>
@@ -14537,7 +14537,7 @@
         </p:spPr>
         <p:txBody>
           <a:bodyPr wrap="square" anchor="t">
-            <a:spAutoFit/>
+            <a:normAutofit/>
           </a:bodyPr>
           <a:lstStyle/>
           <a:p>
@@ -14572,7 +14572,7 @@
         </p:spPr>
         <p:txBody>
           <a:bodyPr wrap="square" anchor="t">
-            <a:spAutoFit/>
+            <a:normAutofit/>
           </a:bodyPr>
           <a:lstStyle/>
           <a:p>
@@ -14651,7 +14651,7 @@
         </p:spPr>
         <p:txBody>
           <a:bodyPr wrap="square" anchor="t">
-            <a:spAutoFit/>
+            <a:normAutofit/>
           </a:bodyPr>
           <a:lstStyle/>
           <a:p>
@@ -14686,7 +14686,7 @@
         </p:spPr>
         <p:txBody>
           <a:bodyPr wrap="square" anchor="t">
-            <a:spAutoFit/>
+            <a:normAutofit/>
           </a:bodyPr>
           <a:lstStyle/>
           <a:p>
@@ -14915,7 +14915,7 @@
         </p:spPr>
         <p:txBody>
           <a:bodyPr wrap="square" anchor="t">
-            <a:spAutoFit/>
+            <a:normAutofit/>
           </a:bodyPr>
           <a:lstStyle/>
           <a:p>
@@ -14996,7 +14996,7 @@
         </p:spPr>
         <p:txBody>
           <a:bodyPr wrap="square" anchor="t">
-            <a:spAutoFit/>
+            <a:normAutofit/>
           </a:bodyPr>
           <a:lstStyle/>
           <a:p>
@@ -15031,7 +15031,7 @@
         </p:spPr>
         <p:txBody>
           <a:bodyPr wrap="square" anchor="t">
-            <a:spAutoFit/>
+            <a:normAutofit/>
           </a:bodyPr>
           <a:lstStyle/>
           <a:p>
@@ -15066,7 +15066,7 @@
         </p:spPr>
         <p:txBody>
           <a:bodyPr wrap="square" anchor="t">
-            <a:spAutoFit/>
+            <a:normAutofit/>
           </a:bodyPr>
           <a:lstStyle/>
           <a:p>
@@ -15147,7 +15147,7 @@
         </p:spPr>
         <p:txBody>
           <a:bodyPr wrap="square" anchor="t">
-            <a:spAutoFit/>
+            <a:normAutofit/>
           </a:bodyPr>
           <a:lstStyle/>
           <a:p>
@@ -15182,7 +15182,7 @@
         </p:spPr>
         <p:txBody>
           <a:bodyPr wrap="square" anchor="t">
-            <a:spAutoFit/>
+            <a:normAutofit/>
           </a:bodyPr>
           <a:lstStyle/>
           <a:p>
@@ -15217,7 +15217,7 @@
         </p:spPr>
         <p:txBody>
           <a:bodyPr wrap="square" anchor="t">
-            <a:spAutoFit/>
+            <a:normAutofit/>
           </a:bodyPr>
           <a:lstStyle/>
           <a:p>
@@ -15298,7 +15298,7 @@
         </p:spPr>
         <p:txBody>
           <a:bodyPr wrap="square" anchor="t">
-            <a:spAutoFit/>
+            <a:normAutofit/>
           </a:bodyPr>
           <a:lstStyle/>
           <a:p>
@@ -15333,7 +15333,7 @@
         </p:spPr>
         <p:txBody>
           <a:bodyPr wrap="square" anchor="t">
-            <a:spAutoFit/>
+            <a:normAutofit/>
           </a:bodyPr>
           <a:lstStyle/>
           <a:p>
@@ -15368,7 +15368,7 @@
         </p:spPr>
         <p:txBody>
           <a:bodyPr wrap="square" anchor="t">
-            <a:spAutoFit/>
+            <a:normAutofit/>
           </a:bodyPr>
           <a:lstStyle/>
           <a:p>
@@ -15449,7 +15449,7 @@
         </p:spPr>
         <p:txBody>
           <a:bodyPr wrap="square" anchor="t">
-            <a:spAutoFit/>
+            <a:normAutofit/>
           </a:bodyPr>
           <a:lstStyle/>
           <a:p>
@@ -15484,7 +15484,7 @@
         </p:spPr>
         <p:txBody>
           <a:bodyPr wrap="square" anchor="t">
-            <a:spAutoFit/>
+            <a:normAutofit/>
           </a:bodyPr>
           <a:lstStyle/>
           <a:p>
@@ -15519,7 +15519,7 @@
         </p:spPr>
         <p:txBody>
           <a:bodyPr wrap="square" anchor="t">
-            <a:spAutoFit/>
+            <a:normAutofit/>
           </a:bodyPr>
           <a:lstStyle/>
           <a:p>
@@ -15600,7 +15600,7 @@
         </p:spPr>
         <p:txBody>
           <a:bodyPr wrap="square" anchor="t">
-            <a:spAutoFit/>
+            <a:normAutofit/>
           </a:bodyPr>
           <a:lstStyle/>
           <a:p>
@@ -15635,7 +15635,7 @@
         </p:spPr>
         <p:txBody>
           <a:bodyPr wrap="square" anchor="t">
-            <a:spAutoFit/>
+            <a:normAutofit/>
           </a:bodyPr>
           <a:lstStyle/>
           <a:p>
@@ -15670,7 +15670,7 @@
         </p:spPr>
         <p:txBody>
           <a:bodyPr wrap="square" anchor="t">
-            <a:spAutoFit/>
+            <a:normAutofit/>
           </a:bodyPr>
           <a:lstStyle/>
           <a:p>
@@ -15751,7 +15751,7 @@
         </p:spPr>
         <p:txBody>
           <a:bodyPr wrap="square" anchor="t">
-            <a:spAutoFit/>
+            <a:normAutofit/>
           </a:bodyPr>
           <a:lstStyle/>
           <a:p>
@@ -15786,7 +15786,7 @@
         </p:spPr>
         <p:txBody>
           <a:bodyPr wrap="square" anchor="t">
-            <a:spAutoFit/>
+            <a:normAutofit/>
           </a:bodyPr>
           <a:lstStyle/>
           <a:p>
@@ -15821,7 +15821,7 @@
         </p:spPr>
         <p:txBody>
           <a:bodyPr wrap="square" anchor="t">
-            <a:spAutoFit/>
+            <a:normAutofit/>
           </a:bodyPr>
           <a:lstStyle/>
           <a:p>
@@ -15918,7 +15918,7 @@
         </p:spPr>
         <p:txBody>
           <a:bodyPr wrap="square" anchor="t">
-            <a:spAutoFit/>
+            <a:normAutofit/>
           </a:bodyPr>
           <a:lstStyle/>
           <a:p>
@@ -15953,7 +15953,7 @@
         </p:spPr>
         <p:txBody>
           <a:bodyPr wrap="square" anchor="t">
-            <a:spAutoFit/>
+            <a:normAutofit/>
           </a:bodyPr>
           <a:lstStyle/>
           <a:p>
@@ -15988,7 +15988,7 @@
         </p:spPr>
         <p:txBody>
           <a:bodyPr wrap="square" anchor="t">
-            <a:spAutoFit/>
+            <a:normAutofit/>
           </a:bodyPr>
           <a:lstStyle/>
           <a:p>
@@ -16023,7 +16023,7 @@
         </p:spPr>
         <p:txBody>
           <a:bodyPr wrap="square" anchor="t">
-            <a:spAutoFit/>
+            <a:normAutofit/>
           </a:bodyPr>
           <a:lstStyle/>
           <a:p>
@@ -16102,7 +16102,7 @@
         </p:spPr>
         <p:txBody>
           <a:bodyPr wrap="square" anchor="t">
-            <a:spAutoFit/>
+            <a:normAutofit/>
           </a:bodyPr>
           <a:lstStyle/>
           <a:p>
@@ -16137,7 +16137,7 @@
         </p:spPr>
         <p:txBody>
           <a:bodyPr wrap="square" anchor="t">
-            <a:spAutoFit/>
+            <a:normAutofit/>
           </a:bodyPr>
           <a:lstStyle/>
           <a:p>
@@ -16218,7 +16218,7 @@
         </p:spPr>
         <p:txBody>
           <a:bodyPr wrap="square" anchor="t">
-            <a:spAutoFit/>
+            <a:normAutofit/>
           </a:bodyPr>
           <a:lstStyle/>
           <a:p>
@@ -16299,7 +16299,7 @@
         </p:spPr>
         <p:txBody>
           <a:bodyPr wrap="square" anchor="t">
-            <a:spAutoFit/>
+            <a:normAutofit/>
           </a:bodyPr>
           <a:lstStyle/>
           <a:p>
@@ -16380,7 +16380,7 @@
         </p:spPr>
         <p:txBody>
           <a:bodyPr wrap="square" anchor="t">
-            <a:spAutoFit/>
+            <a:normAutofit/>
           </a:bodyPr>
           <a:lstStyle/>
           <a:p>
@@ -16461,7 +16461,7 @@
         </p:spPr>
         <p:txBody>
           <a:bodyPr wrap="square" anchor="t">
-            <a:spAutoFit/>
+            <a:normAutofit/>
           </a:bodyPr>
           <a:lstStyle/>
           <a:p>
@@ -16542,7 +16542,7 @@
         </p:spPr>
         <p:txBody>
           <a:bodyPr wrap="square" anchor="t">
-            <a:spAutoFit/>
+            <a:normAutofit/>
           </a:bodyPr>
           <a:lstStyle/>
           <a:p>
@@ -16623,7 +16623,7 @@
         </p:spPr>
         <p:txBody>
           <a:bodyPr wrap="square" anchor="t">
-            <a:spAutoFit/>
+            <a:normAutofit/>
           </a:bodyPr>
           <a:lstStyle/>
           <a:p>
@@ -16704,7 +16704,7 @@
         </p:spPr>
         <p:txBody>
           <a:bodyPr wrap="square" anchor="ctr">
-            <a:spAutoFit/>
+            <a:normAutofit/>
           </a:bodyPr>
           <a:lstStyle/>
           <a:p>
@@ -16785,7 +16785,7 @@
         </p:spPr>
         <p:txBody>
           <a:bodyPr wrap="square" anchor="ctr">
-            <a:spAutoFit/>
+            <a:normAutofit/>
           </a:bodyPr>
           <a:lstStyle/>
           <a:p>
@@ -16866,7 +16866,7 @@
         </p:spPr>
         <p:txBody>
           <a:bodyPr wrap="square" anchor="ctr">
-            <a:spAutoFit/>
+            <a:normAutofit/>
           </a:bodyPr>
           <a:lstStyle/>
           <a:p>
@@ -16947,7 +16947,7 @@
         </p:spPr>
         <p:txBody>
           <a:bodyPr wrap="square" anchor="ctr">
-            <a:spAutoFit/>
+            <a:normAutofit/>
           </a:bodyPr>
           <a:lstStyle/>
           <a:p>
@@ -17028,7 +17028,7 @@
         </p:spPr>
         <p:txBody>
           <a:bodyPr wrap="square" anchor="ctr">
-            <a:spAutoFit/>
+            <a:normAutofit/>
           </a:bodyPr>
           <a:lstStyle/>
           <a:p>
@@ -17109,7 +17109,7 @@
         </p:spPr>
         <p:txBody>
           <a:bodyPr wrap="square" anchor="ctr">
-            <a:spAutoFit/>
+            <a:normAutofit/>
           </a:bodyPr>
           <a:lstStyle/>
           <a:p>
@@ -17190,7 +17190,7 @@
         </p:spPr>
         <p:txBody>
           <a:bodyPr wrap="square" anchor="ctr">
-            <a:spAutoFit/>
+            <a:normAutofit/>
           </a:bodyPr>
           <a:lstStyle/>
           <a:p>
@@ -17271,7 +17271,7 @@
         </p:spPr>
         <p:txBody>
           <a:bodyPr wrap="square" anchor="ctr">
-            <a:spAutoFit/>
+            <a:normAutofit/>
           </a:bodyPr>
           <a:lstStyle/>
           <a:p>
@@ -17352,7 +17352,7 @@
         </p:spPr>
         <p:txBody>
           <a:bodyPr wrap="square" anchor="ctr">
-            <a:spAutoFit/>
+            <a:normAutofit/>
           </a:bodyPr>
           <a:lstStyle/>
           <a:p>
@@ -17433,7 +17433,7 @@
         </p:spPr>
         <p:txBody>
           <a:bodyPr wrap="square" anchor="ctr">
-            <a:spAutoFit/>
+            <a:normAutofit/>
           </a:bodyPr>
           <a:lstStyle/>
           <a:p>
@@ -17514,7 +17514,7 @@
         </p:spPr>
         <p:txBody>
           <a:bodyPr wrap="square" anchor="ctr">
-            <a:spAutoFit/>
+            <a:normAutofit/>
           </a:bodyPr>
           <a:lstStyle/>
           <a:p>
@@ -17595,7 +17595,7 @@
         </p:spPr>
         <p:txBody>
           <a:bodyPr wrap="square" anchor="ctr">
-            <a:spAutoFit/>
+            <a:normAutofit/>
           </a:bodyPr>
           <a:lstStyle/>
           <a:p>
@@ -17676,7 +17676,7 @@
         </p:spPr>
         <p:txBody>
           <a:bodyPr wrap="square" anchor="ctr">
-            <a:spAutoFit/>
+            <a:normAutofit/>
           </a:bodyPr>
           <a:lstStyle/>
           <a:p>
@@ -17757,7 +17757,7 @@
         </p:spPr>
         <p:txBody>
           <a:bodyPr wrap="square" anchor="ctr">
-            <a:spAutoFit/>
+            <a:normAutofit/>
           </a:bodyPr>
           <a:lstStyle/>
           <a:p>
@@ -17838,7 +17838,7 @@
         </p:spPr>
         <p:txBody>
           <a:bodyPr wrap="square" anchor="ctr">
-            <a:spAutoFit/>
+            <a:normAutofit/>
           </a:bodyPr>
           <a:lstStyle/>
           <a:p>
@@ -17919,7 +17919,7 @@
         </p:spPr>
         <p:txBody>
           <a:bodyPr wrap="square" anchor="ctr">
-            <a:spAutoFit/>
+            <a:normAutofit/>
           </a:bodyPr>
           <a:lstStyle/>
           <a:p>
@@ -18000,7 +18000,7 @@
         </p:spPr>
         <p:txBody>
           <a:bodyPr wrap="square" anchor="ctr">
-            <a:spAutoFit/>
+            <a:normAutofit/>
           </a:bodyPr>
           <a:lstStyle/>
           <a:p>
@@ -18081,7 +18081,7 @@
         </p:spPr>
         <p:txBody>
           <a:bodyPr wrap="square" anchor="ctr">
-            <a:spAutoFit/>
+            <a:normAutofit/>
           </a:bodyPr>
           <a:lstStyle/>
           <a:p>
@@ -18162,7 +18162,7 @@
         </p:spPr>
         <p:txBody>
           <a:bodyPr wrap="square" anchor="ctr">
-            <a:spAutoFit/>
+            <a:normAutofit/>
           </a:bodyPr>
           <a:lstStyle/>
           <a:p>
@@ -18243,7 +18243,7 @@
         </p:spPr>
         <p:txBody>
           <a:bodyPr wrap="square" anchor="ctr">
-            <a:spAutoFit/>
+            <a:normAutofit/>
           </a:bodyPr>
           <a:lstStyle/>
           <a:p>
@@ -18324,7 +18324,7 @@
         </p:spPr>
         <p:txBody>
           <a:bodyPr wrap="square" anchor="ctr">
-            <a:spAutoFit/>
+            <a:normAutofit/>
           </a:bodyPr>
           <a:lstStyle/>
           <a:p>
@@ -18405,7 +18405,7 @@
         </p:spPr>
         <p:txBody>
           <a:bodyPr wrap="square" anchor="ctr">
-            <a:spAutoFit/>
+            <a:normAutofit/>
           </a:bodyPr>
           <a:lstStyle/>
           <a:p>
@@ -18486,7 +18486,7 @@
         </p:spPr>
         <p:txBody>
           <a:bodyPr wrap="square" anchor="ctr">
-            <a:spAutoFit/>
+            <a:normAutofit/>
           </a:bodyPr>
           <a:lstStyle/>
           <a:p>
@@ -18567,7 +18567,7 @@
         </p:spPr>
         <p:txBody>
           <a:bodyPr wrap="square" anchor="ctr">
-            <a:spAutoFit/>
+            <a:normAutofit/>
           </a:bodyPr>
           <a:lstStyle/>
           <a:p>
@@ -18648,7 +18648,7 @@
         </p:spPr>
         <p:txBody>
           <a:bodyPr wrap="square" anchor="ctr">
-            <a:spAutoFit/>
+            <a:normAutofit/>
           </a:bodyPr>
           <a:lstStyle/>
           <a:p>
@@ -18729,7 +18729,7 @@
         </p:spPr>
         <p:txBody>
           <a:bodyPr wrap="square" anchor="ctr">
-            <a:spAutoFit/>
+            <a:normAutofit/>
           </a:bodyPr>
           <a:lstStyle/>
           <a:p>
@@ -18810,7 +18810,7 @@
         </p:spPr>
         <p:txBody>
           <a:bodyPr wrap="square" anchor="ctr">
-            <a:spAutoFit/>
+            <a:normAutofit/>
           </a:bodyPr>
           <a:lstStyle/>
           <a:p>
@@ -18891,7 +18891,7 @@
         </p:spPr>
         <p:txBody>
           <a:bodyPr wrap="square" anchor="ctr">
-            <a:spAutoFit/>
+            <a:normAutofit/>
           </a:bodyPr>
           <a:lstStyle/>
           <a:p>
@@ -18972,7 +18972,7 @@
         </p:spPr>
         <p:txBody>
           <a:bodyPr wrap="square" anchor="ctr">
-            <a:spAutoFit/>
+            <a:normAutofit/>
           </a:bodyPr>
           <a:lstStyle/>
           <a:p>
@@ -19053,7 +19053,7 @@
         </p:spPr>
         <p:txBody>
           <a:bodyPr wrap="square" anchor="ctr">
-            <a:spAutoFit/>
+            <a:normAutofit/>
           </a:bodyPr>
           <a:lstStyle/>
           <a:p>
@@ -19134,7 +19134,7 @@
         </p:spPr>
         <p:txBody>
           <a:bodyPr wrap="square" anchor="ctr">
-            <a:spAutoFit/>
+            <a:normAutofit/>
           </a:bodyPr>
           <a:lstStyle/>
           <a:p>
@@ -19215,7 +19215,7 @@
         </p:spPr>
         <p:txBody>
           <a:bodyPr wrap="square" anchor="ctr">
-            <a:spAutoFit/>
+            <a:normAutofit/>
           </a:bodyPr>
           <a:lstStyle/>
           <a:p>
@@ -19296,7 +19296,7 @@
         </p:spPr>
         <p:txBody>
           <a:bodyPr wrap="square" anchor="ctr">
-            <a:spAutoFit/>
+            <a:normAutofit/>
           </a:bodyPr>
           <a:lstStyle/>
           <a:p>
@@ -19377,7 +19377,7 @@
         </p:spPr>
         <p:txBody>
           <a:bodyPr wrap="square" anchor="ctr">
-            <a:spAutoFit/>
+            <a:normAutofit/>
           </a:bodyPr>
           <a:lstStyle/>
           <a:p>
@@ -19458,7 +19458,7 @@
         </p:spPr>
         <p:txBody>
           <a:bodyPr wrap="square" anchor="ctr">
-            <a:spAutoFit/>
+            <a:normAutofit/>
           </a:bodyPr>
           <a:lstStyle/>
           <a:p>
@@ -19539,7 +19539,7 @@
         </p:spPr>
         <p:txBody>
           <a:bodyPr wrap="square" anchor="ctr">
-            <a:spAutoFit/>
+            <a:normAutofit/>
           </a:bodyPr>
           <a:lstStyle/>
           <a:p>
@@ -19636,7 +19636,7 @@
         </p:spPr>
         <p:txBody>
           <a:bodyPr wrap="square" anchor="t">
-            <a:spAutoFit/>
+            <a:normAutofit/>
           </a:bodyPr>
           <a:lstStyle/>
           <a:p>
@@ -19671,7 +19671,7 @@
         </p:spPr>
         <p:txBody>
           <a:bodyPr wrap="square" anchor="t">
-            <a:spAutoFit/>
+            <a:normAutofit/>
           </a:bodyPr>
           <a:lstStyle/>
           <a:p>
@@ -19718,7 +19718,7 @@
         </p:spPr>
         <p:txBody>
           <a:bodyPr wrap="square" anchor="t">
-            <a:spAutoFit/>
+            <a:normAutofit/>
           </a:bodyPr>
           <a:lstStyle/>
           <a:p>
@@ -19753,7 +19753,7 @@
         </p:spPr>
         <p:txBody>
           <a:bodyPr wrap="square" anchor="t">
-            <a:spAutoFit/>
+            <a:normAutofit/>
           </a:bodyPr>
           <a:lstStyle/>
           <a:p>
@@ -19832,7 +19832,7 @@
         </p:spPr>
         <p:txBody>
           <a:bodyPr wrap="square" anchor="t">
-            <a:spAutoFit/>
+            <a:normAutofit/>
           </a:bodyPr>
           <a:lstStyle/>
           <a:p>
@@ -19913,7 +19913,7 @@
         </p:spPr>
         <p:txBody>
           <a:bodyPr wrap="square" anchor="ctr">
-            <a:spAutoFit/>
+            <a:normAutofit/>
           </a:bodyPr>
           <a:lstStyle/>
           <a:p>
@@ -19994,7 +19994,7 @@
         </p:spPr>
         <p:txBody>
           <a:bodyPr wrap="square" anchor="ctr">
-            <a:spAutoFit/>
+            <a:normAutofit/>
           </a:bodyPr>
           <a:lstStyle/>
           <a:p>
@@ -20075,7 +20075,7 @@
         </p:spPr>
         <p:txBody>
           <a:bodyPr wrap="square" anchor="ctr">
-            <a:spAutoFit/>
+            <a:normAutofit/>
           </a:bodyPr>
           <a:lstStyle/>
           <a:p>
@@ -20156,7 +20156,7 @@
         </p:spPr>
         <p:txBody>
           <a:bodyPr wrap="square" anchor="ctr">
-            <a:spAutoFit/>
+            <a:normAutofit/>
           </a:bodyPr>
           <a:lstStyle/>
           <a:p>
@@ -20237,7 +20237,7 @@
         </p:spPr>
         <p:txBody>
           <a:bodyPr wrap="square" anchor="ctr">
-            <a:spAutoFit/>
+            <a:normAutofit/>
           </a:bodyPr>
           <a:lstStyle/>
           <a:p>
@@ -20318,7 +20318,7 @@
         </p:spPr>
         <p:txBody>
           <a:bodyPr wrap="square" anchor="ctr">
-            <a:spAutoFit/>
+            <a:normAutofit/>
           </a:bodyPr>
           <a:lstStyle/>
           <a:p>
@@ -20399,7 +20399,7 @@
         </p:spPr>
         <p:txBody>
           <a:bodyPr wrap="square" anchor="ctr">
-            <a:spAutoFit/>
+            <a:normAutofit/>
           </a:bodyPr>
           <a:lstStyle/>
           <a:p>
@@ -20480,7 +20480,7 @@
         </p:spPr>
         <p:txBody>
           <a:bodyPr wrap="square" anchor="ctr">
-            <a:spAutoFit/>
+            <a:normAutofit/>
           </a:bodyPr>
           <a:lstStyle/>
           <a:p>
@@ -20577,7 +20577,7 @@
         </p:spPr>
         <p:txBody>
           <a:bodyPr wrap="square" anchor="t">
-            <a:spAutoFit/>
+            <a:normAutofit/>
           </a:bodyPr>
           <a:lstStyle/>
           <a:p>
@@ -20612,7 +20612,7 @@
         </p:spPr>
         <p:txBody>
           <a:bodyPr wrap="square" anchor="t">
-            <a:spAutoFit/>
+            <a:normAutofit/>
           </a:bodyPr>
           <a:lstStyle/>
           <a:p>
@@ -20647,7 +20647,7 @@
         </p:spPr>
         <p:txBody>
           <a:bodyPr wrap="square" anchor="t">
-            <a:spAutoFit/>
+            <a:normAutofit/>
           </a:bodyPr>
           <a:lstStyle/>
           <a:p>
@@ -20682,7 +20682,7 @@
         </p:spPr>
         <p:txBody>
           <a:bodyPr wrap="square" anchor="t">
-            <a:spAutoFit/>
+            <a:normAutofit/>
           </a:bodyPr>
           <a:lstStyle/>
           <a:p>
@@ -20761,7 +20761,7 @@
         </p:spPr>
         <p:txBody>
           <a:bodyPr wrap="square" anchor="t">
-            <a:spAutoFit/>
+            <a:normAutofit/>
           </a:bodyPr>
           <a:lstStyle/>
           <a:p>
@@ -20842,7 +20842,7 @@
         </p:spPr>
         <p:txBody>
           <a:bodyPr wrap="square" anchor="t">
-            <a:spAutoFit/>
+            <a:normAutofit/>
           </a:bodyPr>
           <a:lstStyle/>
           <a:p>
@@ -20877,7 +20877,7 @@
         </p:spPr>
         <p:txBody>
           <a:bodyPr wrap="square" anchor="t">
-            <a:spAutoFit/>
+            <a:normAutofit/>
           </a:bodyPr>
           <a:lstStyle/>
           <a:p>
@@ -20958,7 +20958,7 @@
         </p:spPr>
         <p:txBody>
           <a:bodyPr wrap="square" anchor="t">
-            <a:spAutoFit/>
+            <a:normAutofit/>
           </a:bodyPr>
           <a:lstStyle/>
           <a:p>
@@ -20993,7 +20993,7 @@
         </p:spPr>
         <p:txBody>
           <a:bodyPr wrap="square" anchor="t">
-            <a:spAutoFit/>
+            <a:normAutofit/>
           </a:bodyPr>
           <a:lstStyle/>
           <a:p>
@@ -21074,7 +21074,7 @@
         </p:spPr>
         <p:txBody>
           <a:bodyPr wrap="square" anchor="t">
-            <a:spAutoFit/>
+            <a:normAutofit/>
           </a:bodyPr>
           <a:lstStyle/>
           <a:p>
@@ -21109,7 +21109,7 @@
         </p:spPr>
         <p:txBody>
           <a:bodyPr wrap="square" anchor="t">
-            <a:spAutoFit/>
+            <a:normAutofit/>
           </a:bodyPr>
           <a:lstStyle/>
           <a:p>
@@ -21190,7 +21190,7 @@
         </p:spPr>
         <p:txBody>
           <a:bodyPr wrap="square" anchor="t">
-            <a:spAutoFit/>
+            <a:normAutofit/>
           </a:bodyPr>
           <a:lstStyle/>
           <a:p>
@@ -21225,7 +21225,7 @@
         </p:spPr>
         <p:txBody>
           <a:bodyPr wrap="square" anchor="t">
-            <a:spAutoFit/>
+            <a:normAutofit/>
           </a:bodyPr>
           <a:lstStyle/>
           <a:p>
@@ -21278,7 +21278,7 @@
         </p:spPr>
         <p:txBody>
           <a:bodyPr wrap="square" anchor="t">
-            <a:spAutoFit/>
+            <a:normAutofit/>
           </a:bodyPr>
           <a:lstStyle/>
           <a:p>
@@ -21313,7 +21313,7 @@
         </p:spPr>
         <p:txBody>
           <a:bodyPr wrap="square" anchor="t">
-            <a:spAutoFit/>
+            <a:normAutofit/>
           </a:bodyPr>
           <a:lstStyle/>
           <a:p>
@@ -21348,7 +21348,7 @@
         </p:spPr>
         <p:txBody>
           <a:bodyPr wrap="square" anchor="t">
-            <a:spAutoFit/>
+            <a:normAutofit/>
           </a:bodyPr>
           <a:lstStyle/>
           <a:p>
@@ -21445,7 +21445,7 @@
         </p:spPr>
         <p:txBody>
           <a:bodyPr wrap="square" anchor="t">
-            <a:spAutoFit/>
+            <a:normAutofit/>
           </a:bodyPr>
           <a:lstStyle/>
           <a:p>
@@ -21480,7 +21480,7 @@
         </p:spPr>
         <p:txBody>
           <a:bodyPr wrap="square" anchor="t">
-            <a:spAutoFit/>
+            <a:normAutofit/>
           </a:bodyPr>
           <a:lstStyle/>
           <a:p>
@@ -21527,7 +21527,7 @@
         </p:spPr>
         <p:txBody>
           <a:bodyPr wrap="square" anchor="t">
-            <a:spAutoFit/>
+            <a:normAutofit/>
           </a:bodyPr>
           <a:lstStyle/>
           <a:p>
@@ -21562,7 +21562,7 @@
         </p:spPr>
         <p:txBody>
           <a:bodyPr wrap="square" anchor="t">
-            <a:spAutoFit/>
+            <a:normAutofit/>
           </a:bodyPr>
           <a:lstStyle/>
           <a:p>
@@ -21641,7 +21641,7 @@
         </p:spPr>
         <p:txBody>
           <a:bodyPr wrap="square" anchor="t">
-            <a:spAutoFit/>
+            <a:normAutofit/>
           </a:bodyPr>
           <a:lstStyle/>
           <a:p>
@@ -21768,7 +21768,7 @@
         </p:spPr>
         <p:txBody>
           <a:bodyPr wrap="square" anchor="t">
-            <a:spAutoFit/>
+            <a:normAutofit/>
           </a:bodyPr>
           <a:lstStyle/>
           <a:p>
@@ -21803,7 +21803,7 @@
         </p:spPr>
         <p:txBody>
           <a:bodyPr wrap="square" anchor="t">
-            <a:spAutoFit/>
+            <a:normAutofit/>
           </a:bodyPr>
           <a:lstStyle/>
           <a:p>
@@ -21838,7 +21838,7 @@
         </p:spPr>
         <p:txBody>
           <a:bodyPr wrap="square" anchor="t">
-            <a:spAutoFit/>
+            <a:normAutofit/>
           </a:bodyPr>
           <a:lstStyle/>
           <a:p>
@@ -22001,7 +22001,7 @@
         </p:spPr>
         <p:txBody>
           <a:bodyPr wrap="square" anchor="t">
-            <a:spAutoFit/>
+            <a:normAutofit/>
           </a:bodyPr>
           <a:lstStyle/>
           <a:p>
@@ -22036,7 +22036,7 @@
         </p:spPr>
         <p:txBody>
           <a:bodyPr wrap="square" anchor="t">
-            <a:spAutoFit/>
+            <a:normAutofit/>
           </a:bodyPr>
           <a:lstStyle/>
           <a:p>
@@ -22071,7 +22071,7 @@
         </p:spPr>
         <p:txBody>
           <a:bodyPr wrap="square" anchor="t">
-            <a:spAutoFit/>
+            <a:normAutofit/>
           </a:bodyPr>
           <a:lstStyle/>
           <a:p>
@@ -22234,7 +22234,7 @@
         </p:spPr>
         <p:txBody>
           <a:bodyPr wrap="square" anchor="t">
-            <a:spAutoFit/>
+            <a:normAutofit/>
           </a:bodyPr>
           <a:lstStyle/>
           <a:p>
@@ -22269,7 +22269,7 @@
         </p:spPr>
         <p:txBody>
           <a:bodyPr wrap="square" anchor="t">
-            <a:spAutoFit/>
+            <a:normAutofit/>
           </a:bodyPr>
           <a:lstStyle/>
           <a:p>
@@ -22304,7 +22304,7 @@
         </p:spPr>
         <p:txBody>
           <a:bodyPr wrap="square" anchor="t">
-            <a:spAutoFit/>
+            <a:normAutofit/>
           </a:bodyPr>
           <a:lstStyle/>
           <a:p>
@@ -22467,7 +22467,7 @@
         </p:spPr>
         <p:txBody>
           <a:bodyPr wrap="square" anchor="t">
-            <a:spAutoFit/>
+            <a:normAutofit/>
           </a:bodyPr>
           <a:lstStyle/>
           <a:p>
@@ -22502,7 +22502,7 @@
         </p:spPr>
         <p:txBody>
           <a:bodyPr wrap="square" anchor="t">
-            <a:spAutoFit/>
+            <a:normAutofit/>
           </a:bodyPr>
           <a:lstStyle/>
           <a:p>
@@ -22537,7 +22537,7 @@
         </p:spPr>
         <p:txBody>
           <a:bodyPr wrap="square" anchor="t">
-            <a:spAutoFit/>
+            <a:normAutofit/>
           </a:bodyPr>
           <a:lstStyle/>
           <a:p>
@@ -22670,7 +22670,7 @@
         </p:spPr>
         <p:txBody>
           <a:bodyPr wrap="square" anchor="t">
-            <a:spAutoFit/>
+            <a:normAutofit/>
           </a:bodyPr>
           <a:lstStyle/>
           <a:p>
@@ -22705,7 +22705,7 @@
         </p:spPr>
         <p:txBody>
           <a:bodyPr wrap="square" anchor="t">
-            <a:spAutoFit/>
+            <a:normAutofit/>
           </a:bodyPr>
           <a:lstStyle/>
           <a:p>
@@ -22752,7 +22752,7 @@
         </p:spPr>
         <p:txBody>
           <a:bodyPr wrap="square" anchor="t">
-            <a:spAutoFit/>
+            <a:normAutofit/>
           </a:bodyPr>
           <a:lstStyle/>
           <a:p>
@@ -22787,7 +22787,7 @@
         </p:spPr>
         <p:txBody>
           <a:bodyPr wrap="square" anchor="t">
-            <a:spAutoFit/>
+            <a:normAutofit/>
           </a:bodyPr>
           <a:lstStyle/>
           <a:p>
@@ -22866,7 +22866,7 @@
         </p:spPr>
         <p:txBody>
           <a:bodyPr wrap="square" anchor="t">
-            <a:spAutoFit/>
+            <a:normAutofit/>
           </a:bodyPr>
           <a:lstStyle/>
           <a:p>
@@ -22947,7 +22947,7 @@
         </p:spPr>
         <p:txBody>
           <a:bodyPr wrap="square" anchor="ctr">
-            <a:spAutoFit/>
+            <a:normAutofit/>
           </a:bodyPr>
           <a:lstStyle/>
           <a:p>
@@ -22982,7 +22982,7 @@
         </p:spPr>
         <p:txBody>
           <a:bodyPr wrap="square" anchor="ctr">
-            <a:spAutoFit/>
+            <a:normAutofit/>
           </a:bodyPr>
           <a:lstStyle/>
           <a:p>
@@ -23017,7 +23017,7 @@
         </p:spPr>
         <p:txBody>
           <a:bodyPr wrap="square" anchor="ctr">
-            <a:spAutoFit/>
+            <a:normAutofit/>
           </a:bodyPr>
           <a:lstStyle/>
           <a:p>
@@ -23098,7 +23098,7 @@
         </p:spPr>
         <p:txBody>
           <a:bodyPr wrap="square" anchor="ctr">
-            <a:spAutoFit/>
+            <a:normAutofit/>
           </a:bodyPr>
           <a:lstStyle/>
           <a:p>
@@ -23133,7 +23133,7 @@
         </p:spPr>
         <p:txBody>
           <a:bodyPr wrap="square" anchor="ctr">
-            <a:spAutoFit/>
+            <a:normAutofit/>
           </a:bodyPr>
           <a:lstStyle/>
           <a:p>
@@ -23168,7 +23168,7 @@
         </p:spPr>
         <p:txBody>
           <a:bodyPr wrap="square" anchor="ctr">
-            <a:spAutoFit/>
+            <a:normAutofit/>
           </a:bodyPr>
           <a:lstStyle/>
           <a:p>
@@ -23249,7 +23249,7 @@
         </p:spPr>
         <p:txBody>
           <a:bodyPr wrap="square" anchor="ctr">
-            <a:spAutoFit/>
+            <a:normAutofit/>
           </a:bodyPr>
           <a:lstStyle/>
           <a:p>
@@ -23284,7 +23284,7 @@
         </p:spPr>
         <p:txBody>
           <a:bodyPr wrap="square" anchor="ctr">
-            <a:spAutoFit/>
+            <a:normAutofit/>
           </a:bodyPr>
           <a:lstStyle/>
           <a:p>
@@ -23319,7 +23319,7 @@
         </p:spPr>
         <p:txBody>
           <a:bodyPr wrap="square" anchor="ctr">
-            <a:spAutoFit/>
+            <a:normAutofit/>
           </a:bodyPr>
           <a:lstStyle/>
           <a:p>
@@ -23400,7 +23400,7 @@
         </p:spPr>
         <p:txBody>
           <a:bodyPr wrap="square" anchor="ctr">
-            <a:spAutoFit/>
+            <a:normAutofit/>
           </a:bodyPr>
           <a:lstStyle/>
           <a:p>
@@ -23435,7 +23435,7 @@
         </p:spPr>
         <p:txBody>
           <a:bodyPr wrap="square" anchor="ctr">
-            <a:spAutoFit/>
+            <a:normAutofit/>
           </a:bodyPr>
           <a:lstStyle/>
           <a:p>
@@ -23470,7 +23470,7 @@
         </p:spPr>
         <p:txBody>
           <a:bodyPr wrap="square" anchor="ctr">
-            <a:spAutoFit/>
+            <a:normAutofit/>
           </a:bodyPr>
           <a:lstStyle/>
           <a:p>
@@ -23551,7 +23551,7 @@
         </p:spPr>
         <p:txBody>
           <a:bodyPr wrap="square" anchor="t">
-            <a:spAutoFit/>
+            <a:normAutofit/>
           </a:bodyPr>
           <a:lstStyle/>
           <a:p>
@@ -23586,7 +23586,7 @@
         </p:spPr>
         <p:txBody>
           <a:bodyPr wrap="square" anchor="t">
-            <a:spAutoFit/>
+            <a:normAutofit/>
           </a:bodyPr>
           <a:lstStyle/>
           <a:p>
@@ -23767,7 +23767,7 @@
         </p:spPr>
         <p:txBody>
           <a:bodyPr wrap="square" anchor="t">
-            <a:spAutoFit/>
+            <a:normAutofit/>
           </a:bodyPr>
           <a:lstStyle/>
           <a:p>
@@ -23802,7 +23802,7 @@
         </p:spPr>
         <p:txBody>
           <a:bodyPr wrap="square" anchor="t">
-            <a:spAutoFit/>
+            <a:normAutofit/>
           </a:bodyPr>
           <a:lstStyle/>
           <a:p>
@@ -23981,7 +23981,7 @@
         </p:spPr>
         <p:txBody>
           <a:bodyPr wrap="square" anchor="t">
-            <a:spAutoFit/>
+            <a:normAutofit/>
           </a:bodyPr>
           <a:lstStyle/>
           <a:p>
@@ -24016,7 +24016,7 @@
         </p:spPr>
         <p:txBody>
           <a:bodyPr wrap="square" anchor="t">
-            <a:spAutoFit/>
+            <a:normAutofit/>
           </a:bodyPr>
           <a:lstStyle/>
           <a:p>
@@ -24051,7 +24051,7 @@
         </p:spPr>
         <p:txBody>
           <a:bodyPr wrap="square" anchor="t">
-            <a:spAutoFit/>
+            <a:normAutofit/>
           </a:bodyPr>
           <a:lstStyle/>
           <a:p>
@@ -24086,7 +24086,7 @@
         </p:spPr>
         <p:txBody>
           <a:bodyPr wrap="square" anchor="t">
-            <a:spAutoFit/>
+            <a:normAutofit/>
           </a:bodyPr>
           <a:lstStyle/>
           <a:p>
@@ -24167,7 +24167,7 @@
         </p:spPr>
         <p:txBody>
           <a:bodyPr wrap="square" anchor="t">
-            <a:spAutoFit/>
+            <a:normAutofit/>
           </a:bodyPr>
           <a:lstStyle/>
           <a:p>
@@ -24202,7 +24202,7 @@
         </p:spPr>
         <p:txBody>
           <a:bodyPr wrap="square" anchor="ctr">
-            <a:spAutoFit/>
+            <a:normAutofit/>
           </a:bodyPr>
           <a:lstStyle/>
           <a:p>
@@ -24237,7 +24237,7 @@
         </p:spPr>
         <p:txBody>
           <a:bodyPr wrap="square" anchor="ctr">
-            <a:spAutoFit/>
+            <a:normAutofit/>
           </a:bodyPr>
           <a:lstStyle/>
           <a:p>
@@ -24318,7 +24318,7 @@
         </p:spPr>
         <p:txBody>
           <a:bodyPr wrap="square" anchor="t">
-            <a:spAutoFit/>
+            <a:normAutofit/>
           </a:bodyPr>
           <a:lstStyle/>
           <a:p>
@@ -24353,7 +24353,7 @@
         </p:spPr>
         <p:txBody>
           <a:bodyPr wrap="square" anchor="ctr">
-            <a:spAutoFit/>
+            <a:normAutofit/>
           </a:bodyPr>
           <a:lstStyle/>
           <a:p>
@@ -24388,7 +24388,7 @@
         </p:spPr>
         <p:txBody>
           <a:bodyPr wrap="square" anchor="ctr">
-            <a:spAutoFit/>
+            <a:normAutofit/>
           </a:bodyPr>
           <a:lstStyle/>
           <a:p>
@@ -24469,7 +24469,7 @@
         </p:spPr>
         <p:txBody>
           <a:bodyPr wrap="square" anchor="t">
-            <a:spAutoFit/>
+            <a:normAutofit/>
           </a:bodyPr>
           <a:lstStyle/>
           <a:p>
@@ -24504,7 +24504,7 @@
         </p:spPr>
         <p:txBody>
           <a:bodyPr wrap="square" anchor="ctr">
-            <a:spAutoFit/>
+            <a:normAutofit/>
           </a:bodyPr>
           <a:lstStyle/>
           <a:p>
@@ -24539,7 +24539,7 @@
         </p:spPr>
         <p:txBody>
           <a:bodyPr wrap="square" anchor="ctr">
-            <a:spAutoFit/>
+            <a:normAutofit/>
           </a:bodyPr>
           <a:lstStyle/>
           <a:p>
@@ -24620,7 +24620,7 @@
         </p:spPr>
         <p:txBody>
           <a:bodyPr wrap="square" anchor="t">
-            <a:spAutoFit/>
+            <a:normAutofit/>
           </a:bodyPr>
           <a:lstStyle/>
           <a:p>
@@ -24655,7 +24655,7 @@
         </p:spPr>
         <p:txBody>
           <a:bodyPr wrap="square" anchor="ctr">
-            <a:spAutoFit/>
+            <a:normAutofit/>
           </a:bodyPr>
           <a:lstStyle/>
           <a:p>
@@ -24690,7 +24690,7 @@
         </p:spPr>
         <p:txBody>
           <a:bodyPr wrap="square" anchor="ctr">
-            <a:spAutoFit/>
+            <a:normAutofit/>
           </a:bodyPr>
           <a:lstStyle/>
           <a:p>
@@ -24771,7 +24771,7 @@
         </p:spPr>
         <p:txBody>
           <a:bodyPr wrap="square" anchor="t">
-            <a:spAutoFit/>
+            <a:normAutofit/>
           </a:bodyPr>
           <a:lstStyle/>
           <a:p>
@@ -24806,7 +24806,7 @@
         </p:spPr>
         <p:txBody>
           <a:bodyPr wrap="square" anchor="ctr">
-            <a:spAutoFit/>
+            <a:normAutofit/>
           </a:bodyPr>
           <a:lstStyle/>
           <a:p>
@@ -24841,7 +24841,7 @@
         </p:spPr>
         <p:txBody>
           <a:bodyPr wrap="square" anchor="ctr">
-            <a:spAutoFit/>
+            <a:normAutofit/>
           </a:bodyPr>
           <a:lstStyle/>
           <a:p>
@@ -24922,7 +24922,7 @@
         </p:spPr>
         <p:txBody>
           <a:bodyPr wrap="square" anchor="t">
-            <a:spAutoFit/>
+            <a:normAutofit/>
           </a:bodyPr>
           <a:lstStyle/>
           <a:p>
@@ -25019,7 +25019,7 @@
         </p:spPr>
         <p:txBody>
           <a:bodyPr wrap="square" anchor="t">
-            <a:spAutoFit/>
+            <a:normAutofit/>
           </a:bodyPr>
           <a:lstStyle/>
           <a:p>
@@ -25054,7 +25054,7 @@
         </p:spPr>
         <p:txBody>
           <a:bodyPr wrap="square" anchor="t">
-            <a:spAutoFit/>
+            <a:normAutofit/>
           </a:bodyPr>
           <a:lstStyle/>
           <a:p>
@@ -25089,7 +25089,7 @@
         </p:spPr>
         <p:txBody>
           <a:bodyPr wrap="square" anchor="t">
-            <a:spAutoFit/>
+            <a:normAutofit/>
           </a:bodyPr>
           <a:lstStyle/>
           <a:p>
@@ -25124,7 +25124,7 @@
         </p:spPr>
         <p:txBody>
           <a:bodyPr wrap="square" anchor="t">
-            <a:spAutoFit/>
+            <a:normAutofit/>
           </a:bodyPr>
           <a:lstStyle/>
           <a:p>
@@ -25203,7 +25203,7 @@
         </p:spPr>
         <p:txBody>
           <a:bodyPr wrap="square" anchor="t">
-            <a:spAutoFit/>
+            <a:normAutofit/>
           </a:bodyPr>
           <a:lstStyle/>
           <a:p>
@@ -25284,7 +25284,7 @@
         </p:spPr>
         <p:txBody>
           <a:bodyPr wrap="square" anchor="t">
-            <a:spAutoFit/>
+            <a:normAutofit/>
           </a:bodyPr>
           <a:lstStyle/>
           <a:p>
@@ -25319,7 +25319,7 @@
         </p:spPr>
         <p:txBody>
           <a:bodyPr wrap="square" anchor="t">
-            <a:spAutoFit/>
+            <a:normAutofit/>
           </a:bodyPr>
           <a:lstStyle/>
           <a:p>
@@ -25354,7 +25354,7 @@
         </p:spPr>
         <p:txBody>
           <a:bodyPr wrap="square" anchor="t">
-            <a:spAutoFit/>
+            <a:normAutofit/>
           </a:bodyPr>
           <a:lstStyle/>
           <a:p>
@@ -25447,7 +25447,7 @@
         </p:spPr>
         <p:txBody>
           <a:bodyPr wrap="square" anchor="t">
-            <a:spAutoFit/>
+            <a:normAutofit/>
           </a:bodyPr>
           <a:lstStyle/>
           <a:p>
@@ -25482,7 +25482,7 @@
         </p:spPr>
         <p:txBody>
           <a:bodyPr wrap="square" anchor="t">
-            <a:spAutoFit/>
+            <a:normAutofit/>
           </a:bodyPr>
           <a:lstStyle/>
           <a:p>
@@ -25529,7 +25529,7 @@
         </p:spPr>
         <p:txBody>
           <a:bodyPr wrap="square" anchor="t">
-            <a:spAutoFit/>
+            <a:normAutofit/>
           </a:bodyPr>
           <a:lstStyle/>
           <a:p>
@@ -25622,7 +25622,7 @@
         </p:spPr>
         <p:txBody>
           <a:bodyPr wrap="square" anchor="t">
-            <a:spAutoFit/>
+            <a:normAutofit/>
           </a:bodyPr>
           <a:lstStyle/>
           <a:p>
@@ -25657,7 +25657,7 @@
         </p:spPr>
         <p:txBody>
           <a:bodyPr wrap="square" anchor="t">
-            <a:spAutoFit/>
+            <a:normAutofit/>
           </a:bodyPr>
           <a:lstStyle/>
           <a:p>
@@ -25692,7 +25692,7 @@
         </p:spPr>
         <p:txBody>
           <a:bodyPr wrap="square" anchor="t">
-            <a:spAutoFit/>
+            <a:normAutofit/>
           </a:bodyPr>
           <a:lstStyle/>
           <a:p>
@@ -25785,7 +25785,7 @@
         </p:spPr>
         <p:txBody>
           <a:bodyPr wrap="square" anchor="t">
-            <a:spAutoFit/>
+            <a:normAutofit/>
           </a:bodyPr>
           <a:lstStyle/>
           <a:p>
@@ -25820,7 +25820,7 @@
         </p:spPr>
         <p:txBody>
           <a:bodyPr wrap="square" anchor="t">
-            <a:spAutoFit/>
+            <a:normAutofit/>
           </a:bodyPr>
           <a:lstStyle/>
           <a:p>
@@ -25867,7 +25867,7 @@
         </p:spPr>
         <p:txBody>
           <a:bodyPr wrap="square" anchor="t">
-            <a:spAutoFit/>
+            <a:normAutofit/>
           </a:bodyPr>
           <a:lstStyle/>
           <a:p>
@@ -25960,7 +25960,7 @@
         </p:spPr>
         <p:txBody>
           <a:bodyPr wrap="square" anchor="t">
-            <a:spAutoFit/>
+            <a:normAutofit/>
           </a:bodyPr>
           <a:lstStyle/>
           <a:p>
@@ -25995,7 +25995,7 @@
         </p:spPr>
         <p:txBody>
           <a:bodyPr wrap="square" anchor="t">
-            <a:spAutoFit/>
+            <a:normAutofit/>
           </a:bodyPr>
           <a:lstStyle/>
           <a:p>
@@ -26042,7 +26042,7 @@
         </p:spPr>
         <p:txBody>
           <a:bodyPr wrap="square" anchor="t">
-            <a:spAutoFit/>
+            <a:normAutofit/>
           </a:bodyPr>
           <a:lstStyle/>
           <a:p>
@@ -26135,7 +26135,7 @@
         </p:spPr>
         <p:txBody>
           <a:bodyPr wrap="square" anchor="t">
-            <a:spAutoFit/>
+            <a:normAutofit/>
           </a:bodyPr>
           <a:lstStyle/>
           <a:p>
@@ -26170,7 +26170,7 @@
         </p:spPr>
         <p:txBody>
           <a:bodyPr wrap="square" anchor="t">
-            <a:spAutoFit/>
+            <a:normAutofit/>
           </a:bodyPr>
           <a:lstStyle/>
           <a:p>
@@ -26217,7 +26217,7 @@
         </p:spPr>
         <p:txBody>
           <a:bodyPr wrap="square" anchor="t">
-            <a:spAutoFit/>
+            <a:normAutofit/>
           </a:bodyPr>
           <a:lstStyle/>
           <a:p>
@@ -26326,7 +26326,7 @@
         </p:spPr>
         <p:txBody>
           <a:bodyPr wrap="square" anchor="t">
-            <a:spAutoFit/>
+            <a:normAutofit/>
           </a:bodyPr>
           <a:lstStyle/>
           <a:p>
@@ -26361,7 +26361,7 @@
         </p:spPr>
         <p:txBody>
           <a:bodyPr wrap="square" anchor="t">
-            <a:spAutoFit/>
+            <a:normAutofit/>
           </a:bodyPr>
           <a:lstStyle/>
           <a:p>
@@ -26408,7 +26408,7 @@
         </p:spPr>
         <p:txBody>
           <a:bodyPr wrap="square" anchor="t">
-            <a:spAutoFit/>
+            <a:normAutofit/>
           </a:bodyPr>
           <a:lstStyle/>
           <a:p>
@@ -26443,7 +26443,7 @@
         </p:spPr>
         <p:txBody>
           <a:bodyPr wrap="square" anchor="t">
-            <a:spAutoFit/>
+            <a:normAutofit/>
           </a:bodyPr>
           <a:lstStyle/>
           <a:p>
@@ -26522,7 +26522,7 @@
         </p:spPr>
         <p:txBody>
           <a:bodyPr wrap="square" anchor="t">
-            <a:spAutoFit/>
+            <a:normAutofit/>
           </a:bodyPr>
           <a:lstStyle/>
           <a:p>
@@ -26603,7 +26603,7 @@
         </p:spPr>
         <p:txBody>
           <a:bodyPr wrap="square" anchor="ctr">
-            <a:spAutoFit/>
+            <a:normAutofit/>
           </a:bodyPr>
           <a:lstStyle/>
           <a:p>
@@ -26638,7 +26638,7 @@
         </p:spPr>
         <p:txBody>
           <a:bodyPr wrap="square" anchor="ctr">
-            <a:spAutoFit/>
+            <a:normAutofit/>
           </a:bodyPr>
           <a:lstStyle/>
           <a:p>
@@ -26719,7 +26719,7 @@
         </p:spPr>
         <p:txBody>
           <a:bodyPr wrap="square" anchor="ctr">
-            <a:spAutoFit/>
+            <a:normAutofit/>
           </a:bodyPr>
           <a:lstStyle/>
           <a:p>
@@ -26754,7 +26754,7 @@
         </p:spPr>
         <p:txBody>
           <a:bodyPr wrap="square" anchor="ctr">
-            <a:spAutoFit/>
+            <a:normAutofit/>
           </a:bodyPr>
           <a:lstStyle/>
           <a:p>
@@ -26835,7 +26835,7 @@
         </p:spPr>
         <p:txBody>
           <a:bodyPr wrap="square" anchor="ctr">
-            <a:spAutoFit/>
+            <a:normAutofit/>
           </a:bodyPr>
           <a:lstStyle/>
           <a:p>
@@ -26870,7 +26870,7 @@
         </p:spPr>
         <p:txBody>
           <a:bodyPr wrap="square" anchor="ctr">
-            <a:spAutoFit/>
+            <a:normAutofit/>
           </a:bodyPr>
           <a:lstStyle/>
           <a:p>
@@ -26951,7 +26951,7 @@
         </p:spPr>
         <p:txBody>
           <a:bodyPr wrap="square" anchor="ctr">
-            <a:spAutoFit/>
+            <a:normAutofit/>
           </a:bodyPr>
           <a:lstStyle/>
           <a:p>
@@ -26986,7 +26986,7 @@
         </p:spPr>
         <p:txBody>
           <a:bodyPr wrap="square" anchor="ctr">
-            <a:spAutoFit/>
+            <a:normAutofit/>
           </a:bodyPr>
           <a:lstStyle/>
           <a:p>
@@ -27067,7 +27067,7 @@
         </p:spPr>
         <p:txBody>
           <a:bodyPr wrap="square" anchor="t">
-            <a:spAutoFit/>
+            <a:normAutofit/>
           </a:bodyPr>
           <a:lstStyle/>
           <a:p>
@@ -27102,7 +27102,7 @@
         </p:spPr>
         <p:txBody>
           <a:bodyPr wrap="square" anchor="t">
-            <a:spAutoFit/>
+            <a:normAutofit/>
           </a:bodyPr>
           <a:lstStyle/>
           <a:p>
@@ -27331,7 +27331,7 @@
         </p:spPr>
         <p:txBody>
           <a:bodyPr wrap="square" anchor="t">
-            <a:spAutoFit/>
+            <a:normAutofit/>
           </a:bodyPr>
           <a:lstStyle/>
           <a:p>
@@ -27366,7 +27366,7 @@
         </p:spPr>
         <p:txBody>
           <a:bodyPr wrap="square" anchor="t">
-            <a:spAutoFit/>
+            <a:normAutofit/>
           </a:bodyPr>
           <a:lstStyle/>
           <a:p>
@@ -27413,7 +27413,7 @@
         </p:spPr>
         <p:txBody>
           <a:bodyPr wrap="square" anchor="t">
-            <a:spAutoFit/>
+            <a:normAutofit/>
           </a:bodyPr>
           <a:lstStyle/>
           <a:p>
@@ -27448,7 +27448,7 @@
         </p:spPr>
         <p:txBody>
           <a:bodyPr wrap="square" anchor="t">
-            <a:spAutoFit/>
+            <a:normAutofit/>
           </a:bodyPr>
           <a:lstStyle/>
           <a:p>
@@ -27527,7 +27527,7 @@
         </p:spPr>
         <p:txBody>
           <a:bodyPr wrap="square" anchor="t">
-            <a:spAutoFit/>
+            <a:normAutofit/>
           </a:bodyPr>
           <a:lstStyle/>
           <a:p>
@@ -27654,7 +27654,7 @@
         </p:spPr>
         <p:txBody>
           <a:bodyPr wrap="square" anchor="t">
-            <a:spAutoFit/>
+            <a:normAutofit/>
           </a:bodyPr>
           <a:lstStyle/>
           <a:p>
@@ -27689,7 +27689,7 @@
         </p:spPr>
         <p:txBody>
           <a:bodyPr wrap="square" anchor="t">
-            <a:spAutoFit/>
+            <a:normAutofit/>
           </a:bodyPr>
           <a:lstStyle/>
           <a:p>
@@ -27724,7 +27724,7 @@
         </p:spPr>
         <p:txBody>
           <a:bodyPr wrap="square" anchor="t">
-            <a:spAutoFit/>
+            <a:normAutofit/>
           </a:bodyPr>
           <a:lstStyle/>
           <a:p>
@@ -27759,7 +27759,7 @@
         </p:spPr>
         <p:txBody>
           <a:bodyPr wrap="square" anchor="t">
-            <a:spAutoFit/>
+            <a:normAutofit/>
           </a:bodyPr>
           <a:lstStyle/>
           <a:p>
@@ -27886,7 +27886,7 @@
         </p:spPr>
         <p:txBody>
           <a:bodyPr wrap="square" anchor="t">
-            <a:spAutoFit/>
+            <a:normAutofit/>
           </a:bodyPr>
           <a:lstStyle/>
           <a:p>
@@ -27921,7 +27921,7 @@
         </p:spPr>
         <p:txBody>
           <a:bodyPr wrap="square" anchor="t">
-            <a:spAutoFit/>
+            <a:normAutofit/>
           </a:bodyPr>
           <a:lstStyle/>
           <a:p>
@@ -27956,7 +27956,7 @@
         </p:spPr>
         <p:txBody>
           <a:bodyPr wrap="square" anchor="t">
-            <a:spAutoFit/>
+            <a:normAutofit/>
           </a:bodyPr>
           <a:lstStyle/>
           <a:p>
@@ -27991,7 +27991,7 @@
         </p:spPr>
         <p:txBody>
           <a:bodyPr wrap="square" anchor="t">
-            <a:spAutoFit/>
+            <a:normAutofit/>
           </a:bodyPr>
           <a:lstStyle/>
           <a:p>
@@ -28118,7 +28118,7 @@
         </p:spPr>
         <p:txBody>
           <a:bodyPr wrap="square" anchor="t">
-            <a:spAutoFit/>
+            <a:normAutofit/>
           </a:bodyPr>
           <a:lstStyle/>
           <a:p>
@@ -28153,7 +28153,7 @@
         </p:spPr>
         <p:txBody>
           <a:bodyPr wrap="square" anchor="t">
-            <a:spAutoFit/>
+            <a:normAutofit/>
           </a:bodyPr>
           <a:lstStyle/>
           <a:p>
@@ -28188,7 +28188,7 @@
         </p:spPr>
         <p:txBody>
           <a:bodyPr wrap="square" anchor="t">
-            <a:spAutoFit/>
+            <a:normAutofit/>
           </a:bodyPr>
           <a:lstStyle/>
           <a:p>
@@ -28223,7 +28223,7 @@
         </p:spPr>
         <p:txBody>
           <a:bodyPr wrap="square" anchor="t">
-            <a:spAutoFit/>
+            <a:normAutofit/>
           </a:bodyPr>
           <a:lstStyle/>
           <a:p>
@@ -28258,7 +28258,7 @@
         </p:spPr>
         <p:txBody>
           <a:bodyPr wrap="square" anchor="t">
-            <a:spAutoFit/>
+            <a:normAutofit/>
           </a:bodyPr>
           <a:lstStyle/>
           <a:p>
@@ -28401,7 +28401,7 @@
         </p:spPr>
         <p:txBody>
           <a:bodyPr wrap="square" anchor="t">
-            <a:spAutoFit/>
+            <a:normAutofit/>
           </a:bodyPr>
           <a:lstStyle/>
           <a:p>
@@ -28436,7 +28436,7 @@
         </p:spPr>
         <p:txBody>
           <a:bodyPr wrap="square" anchor="t">
-            <a:spAutoFit/>
+            <a:normAutofit/>
           </a:bodyPr>
           <a:lstStyle/>
           <a:p>
@@ -28483,7 +28483,7 @@
         </p:spPr>
         <p:txBody>
           <a:bodyPr wrap="square" anchor="t">
-            <a:spAutoFit/>
+            <a:normAutofit/>
           </a:bodyPr>
           <a:lstStyle/>
           <a:p>
@@ -28562,7 +28562,7 @@
         </p:spPr>
         <p:txBody>
           <a:bodyPr wrap="square" anchor="t">
-            <a:spAutoFit/>
+            <a:normAutofit/>
           </a:bodyPr>
           <a:lstStyle/>
           <a:p>
@@ -28659,7 +28659,7 @@
         </p:spPr>
         <p:txBody>
           <a:bodyPr wrap="square" anchor="t">
-            <a:spAutoFit/>
+            <a:normAutofit/>
           </a:bodyPr>
           <a:lstStyle/>
           <a:p>
@@ -28694,7 +28694,7 @@
         </p:spPr>
         <p:txBody>
           <a:bodyPr wrap="square" anchor="t">
-            <a:spAutoFit/>
+            <a:normAutofit/>
           </a:bodyPr>
           <a:lstStyle/>
           <a:p>
@@ -28729,7 +28729,7 @@
         </p:spPr>
         <p:txBody>
           <a:bodyPr wrap="square" anchor="t">
-            <a:spAutoFit/>
+            <a:normAutofit/>
           </a:bodyPr>
           <a:lstStyle/>
           <a:p>
@@ -28764,7 +28764,7 @@
         </p:spPr>
         <p:txBody>
           <a:bodyPr wrap="square" anchor="t">
-            <a:spAutoFit/>
+            <a:normAutofit/>
           </a:bodyPr>
           <a:lstStyle/>
           <a:p>
@@ -28843,7 +28843,7 @@
         </p:spPr>
         <p:txBody>
           <a:bodyPr wrap="square" anchor="t">
-            <a:spAutoFit/>
+            <a:normAutofit/>
           </a:bodyPr>
           <a:lstStyle/>
           <a:p>
@@ -28970,7 +28970,7 @@
         </p:spPr>
         <p:txBody>
           <a:bodyPr wrap="square" anchor="ctr">
-            <a:spAutoFit/>
+            <a:normAutofit/>
           </a:bodyPr>
           <a:lstStyle/>
           <a:p>
@@ -29017,7 +29017,7 @@
         </p:spPr>
         <p:txBody>
           <a:bodyPr wrap="square" anchor="t">
-            <a:spAutoFit/>
+            <a:normAutofit/>
           </a:bodyPr>
           <a:lstStyle/>
           <a:p>
@@ -29212,7 +29212,7 @@
         </p:spPr>
         <p:txBody>
           <a:bodyPr wrap="square" anchor="ctr">
-            <a:spAutoFit/>
+            <a:normAutofit/>
           </a:bodyPr>
           <a:lstStyle/>
           <a:p>
@@ -29259,7 +29259,7 @@
         </p:spPr>
         <p:txBody>
           <a:bodyPr wrap="square" anchor="t">
-            <a:spAutoFit/>
+            <a:normAutofit/>
           </a:bodyPr>
           <a:lstStyle/>
           <a:p>
@@ -29454,7 +29454,7 @@
         </p:spPr>
         <p:txBody>
           <a:bodyPr wrap="square" anchor="ctr">
-            <a:spAutoFit/>
+            <a:normAutofit/>
           </a:bodyPr>
           <a:lstStyle/>
           <a:p>
@@ -29501,7 +29501,7 @@
         </p:spPr>
         <p:txBody>
           <a:bodyPr wrap="square" anchor="t">
-            <a:spAutoFit/>
+            <a:normAutofit/>
           </a:bodyPr>
           <a:lstStyle/>
           <a:p>
@@ -29604,7 +29604,7 @@
         </p:spPr>
         <p:txBody>
           <a:bodyPr wrap="square" anchor="t">
-            <a:spAutoFit/>
+            <a:normAutofit/>
           </a:bodyPr>
           <a:lstStyle/>
           <a:p>
@@ -29701,7 +29701,7 @@
         </p:spPr>
         <p:txBody>
           <a:bodyPr wrap="square" anchor="t">
-            <a:spAutoFit/>
+            <a:normAutofit/>
           </a:bodyPr>
           <a:lstStyle/>
           <a:p>
@@ -29736,7 +29736,7 @@
         </p:spPr>
         <p:txBody>
           <a:bodyPr wrap="square" anchor="t">
-            <a:spAutoFit/>
+            <a:normAutofit/>
           </a:bodyPr>
           <a:lstStyle/>
           <a:p>
@@ -29783,7 +29783,7 @@
         </p:spPr>
         <p:txBody>
           <a:bodyPr wrap="square" anchor="t">
-            <a:spAutoFit/>
+            <a:normAutofit/>
           </a:bodyPr>
           <a:lstStyle/>
           <a:p>
@@ -29818,7 +29818,7 @@
         </p:spPr>
         <p:txBody>
           <a:bodyPr wrap="square" anchor="t">
-            <a:spAutoFit/>
+            <a:normAutofit/>
           </a:bodyPr>
           <a:lstStyle/>
           <a:p>
@@ -29897,7 +29897,7 @@
         </p:spPr>
         <p:txBody>
           <a:bodyPr wrap="square" anchor="t">
-            <a:spAutoFit/>
+            <a:normAutofit/>
           </a:bodyPr>
           <a:lstStyle/>
           <a:p>
@@ -29978,7 +29978,7 @@
         </p:spPr>
         <p:txBody>
           <a:bodyPr wrap="square" anchor="t">
-            <a:spAutoFit/>
+            <a:normAutofit/>
           </a:bodyPr>
           <a:lstStyle/>
           <a:p>
@@ -30013,7 +30013,7 @@
         </p:spPr>
         <p:txBody>
           <a:bodyPr wrap="square" anchor="t">
-            <a:spAutoFit/>
+            <a:normAutofit/>
           </a:bodyPr>
           <a:lstStyle/>
           <a:p>
@@ -30048,7 +30048,7 @@
         </p:spPr>
         <p:txBody>
           <a:bodyPr wrap="square" anchor="t">
-            <a:spAutoFit/>
+            <a:normAutofit/>
           </a:bodyPr>
           <a:lstStyle/>
           <a:p>
@@ -30083,7 +30083,7 @@
         </p:spPr>
         <p:txBody>
           <a:bodyPr wrap="square" anchor="t">
-            <a:spAutoFit/>
+            <a:normAutofit/>
           </a:bodyPr>
           <a:lstStyle/>
           <a:p>
@@ -30118,7 +30118,7 @@
         </p:spPr>
         <p:txBody>
           <a:bodyPr wrap="square" anchor="t">
-            <a:spAutoFit/>
+            <a:normAutofit/>
           </a:bodyPr>
           <a:lstStyle/>
           <a:p>
@@ -30153,7 +30153,7 @@
         </p:spPr>
         <p:txBody>
           <a:bodyPr wrap="square" anchor="t">
-            <a:spAutoFit/>
+            <a:normAutofit/>
           </a:bodyPr>
           <a:lstStyle/>
           <a:p>
@@ -30188,7 +30188,7 @@
         </p:spPr>
         <p:txBody>
           <a:bodyPr wrap="square" anchor="t">
-            <a:spAutoFit/>
+            <a:normAutofit/>
           </a:bodyPr>
           <a:lstStyle/>
           <a:p>
@@ -30223,7 +30223,7 @@
         </p:spPr>
         <p:txBody>
           <a:bodyPr wrap="square" anchor="t">
-            <a:spAutoFit/>
+            <a:normAutofit/>
           </a:bodyPr>
           <a:lstStyle/>
           <a:p>
@@ -30258,7 +30258,7 @@
         </p:spPr>
         <p:txBody>
           <a:bodyPr wrap="square" anchor="t">
-            <a:spAutoFit/>
+            <a:normAutofit/>
           </a:bodyPr>
           <a:lstStyle/>
           <a:p>
@@ -30339,7 +30339,7 @@
         </p:spPr>
         <p:txBody>
           <a:bodyPr wrap="square" anchor="t">
-            <a:spAutoFit/>
+            <a:normAutofit/>
           </a:bodyPr>
           <a:lstStyle/>
           <a:p>
@@ -30420,7 +30420,7 @@
         </p:spPr>
         <p:txBody>
           <a:bodyPr wrap="square" anchor="t">
-            <a:spAutoFit/>
+            <a:normAutofit/>
           </a:bodyPr>
           <a:lstStyle/>
           <a:p>
@@ -30501,7 +30501,7 @@
         </p:spPr>
         <p:txBody>
           <a:bodyPr wrap="square" anchor="t">
-            <a:spAutoFit/>
+            <a:normAutofit/>
           </a:bodyPr>
           <a:lstStyle/>
           <a:p>
@@ -30582,7 +30582,7 @@
         </p:spPr>
         <p:txBody>
           <a:bodyPr wrap="square" anchor="t">
-            <a:spAutoFit/>
+            <a:normAutofit/>
           </a:bodyPr>
           <a:lstStyle/>
           <a:p>
@@ -30663,7 +30663,7 @@
         </p:spPr>
         <p:txBody>
           <a:bodyPr wrap="square" anchor="t">
-            <a:spAutoFit/>
+            <a:normAutofit/>
           </a:bodyPr>
           <a:lstStyle/>
           <a:p>
@@ -30744,7 +30744,7 @@
         </p:spPr>
         <p:txBody>
           <a:bodyPr wrap="square" anchor="t">
-            <a:spAutoFit/>
+            <a:normAutofit/>
           </a:bodyPr>
           <a:lstStyle/>
           <a:p>
@@ -30865,7 +30865,7 @@
         </p:spPr>
         <p:txBody>
           <a:bodyPr wrap="square" anchor="t">
-            <a:spAutoFit/>
+            <a:normAutofit/>
           </a:bodyPr>
           <a:lstStyle/>
           <a:p>
@@ -30900,7 +30900,7 @@
         </p:spPr>
         <p:txBody>
           <a:bodyPr wrap="square" anchor="t">
-            <a:spAutoFit/>
+            <a:normAutofit/>
           </a:bodyPr>
           <a:lstStyle/>
           <a:p>
@@ -30947,7 +30947,7 @@
         </p:spPr>
         <p:txBody>
           <a:bodyPr wrap="square" anchor="t">
-            <a:spAutoFit/>
+            <a:normAutofit/>
           </a:bodyPr>
           <a:lstStyle/>
           <a:p>
@@ -30982,7 +30982,7 @@
         </p:spPr>
         <p:txBody>
           <a:bodyPr wrap="square" anchor="t">
-            <a:spAutoFit/>
+            <a:normAutofit/>
           </a:bodyPr>
           <a:lstStyle/>
           <a:p>
@@ -31061,7 +31061,7 @@
         </p:spPr>
         <p:txBody>
           <a:bodyPr wrap="square" anchor="t">
-            <a:spAutoFit/>
+            <a:normAutofit/>
           </a:bodyPr>
           <a:lstStyle/>
           <a:p>
@@ -31096,7 +31096,7 @@
         </p:spPr>
         <p:txBody>
           <a:bodyPr wrap="square" anchor="t">
-            <a:spAutoFit/>
+            <a:normAutofit/>
           </a:bodyPr>
           <a:lstStyle/>
           <a:p>
@@ -31223,7 +31223,7 @@
         </p:spPr>
         <p:txBody>
           <a:bodyPr wrap="square" anchor="t">
-            <a:spAutoFit/>
+            <a:normAutofit/>
           </a:bodyPr>
           <a:lstStyle/>
           <a:p>
@@ -31258,7 +31258,7 @@
         </p:spPr>
         <p:txBody>
           <a:bodyPr wrap="square" anchor="t">
-            <a:spAutoFit/>
+            <a:normAutofit/>
           </a:bodyPr>
           <a:lstStyle/>
           <a:p>
@@ -31485,7 +31485,7 @@
         </p:spPr>
         <p:txBody>
           <a:bodyPr wrap="square" anchor="t">
-            <a:spAutoFit/>
+            <a:normAutofit/>
           </a:bodyPr>
           <a:lstStyle/>
           <a:p>
@@ -31520,7 +31520,7 @@
         </p:spPr>
         <p:txBody>
           <a:bodyPr wrap="square" anchor="t">
-            <a:spAutoFit/>
+            <a:normAutofit/>
           </a:bodyPr>
           <a:lstStyle/>
           <a:p>
@@ -31701,7 +31701,7 @@
         </p:spPr>
         <p:txBody>
           <a:bodyPr wrap="square" anchor="t">
-            <a:spAutoFit/>
+            <a:normAutofit/>
           </a:bodyPr>
           <a:lstStyle/>
           <a:p>

--- a/corum-pitch/Corum-Westgate-I-Pitch-STYLED.pptx
+++ b/corum-pitch/Corum-Westgate-I-Pitch-STYLED.pptx
@@ -3130,7 +3130,7 @@
           </a:solidFill>
           <a:ln w="6350">
             <a:solidFill>
-              <a:srgbClr val="E2E2E2"/>
+              <a:srgbClr val="E2DED6"/>
             </a:solidFill>
           </a:ln>
           <a:effectLst/>
@@ -3183,7 +3183,7 @@
             <a:r>
               <a:rPr sz="1400" b="0" i="0">
                 <a:solidFill>
-                  <a:srgbClr val="7A7A7A"/>
+                  <a:srgbClr val="6B6467"/>
                 </a:solidFill>
                 <a:latin typeface="Arial"/>
               </a:rPr>
@@ -3207,7 +3207,7 @@
             <a:avLst/>
           </a:prstGeom>
           <a:solidFill>
-            <a:srgbClr val="C3002B"/>
+            <a:srgbClr val="2A2250"/>
           </a:solidFill>
           <a:ln>
             <a:noFill/>
@@ -3262,7 +3262,7 @@
             <a:r>
               <a:rPr sz="4000" b="1" i="0">
                 <a:solidFill>
-                  <a:srgbClr val="1C1C1C"/>
+                  <a:srgbClr val="1F1942"/>
                 </a:solidFill>
                 <a:latin typeface="Arial"/>
               </a:rPr>
@@ -3297,7 +3297,7 @@
             <a:r>
               <a:rPr sz="1500" b="1" i="0">
                 <a:solidFill>
-                  <a:srgbClr val="C3002B"/>
+                  <a:srgbClr val="2A2250"/>
                 </a:solidFill>
                 <a:latin typeface="Arial"/>
               </a:rPr>
@@ -3332,7 +3332,7 @@
             <a:r>
               <a:rPr sz="1200" b="0" i="0">
                 <a:solidFill>
-                  <a:srgbClr val="7A7A7A"/>
+                  <a:srgbClr val="6B6467"/>
                 </a:solidFill>
                 <a:latin typeface="Arial"/>
               </a:rPr>
@@ -3356,11 +3356,11 @@
             <a:avLst/>
           </a:prstGeom>
           <a:solidFill>
-            <a:srgbClr val="F3F3F3"/>
+            <a:srgbClr val="F4EFE6"/>
           </a:solidFill>
           <a:ln w="6350">
             <a:solidFill>
-              <a:srgbClr val="E2E2E2"/>
+              <a:srgbClr val="E2DED6"/>
             </a:solidFill>
           </a:ln>
           <a:effectLst/>
@@ -3413,7 +3413,7 @@
             <a:r>
               <a:rPr sz="1000" b="0" i="0">
                 <a:solidFill>
-                  <a:srgbClr val="7A7A7A"/>
+                  <a:srgbClr val="6B6467"/>
                 </a:solidFill>
                 <a:latin typeface="Arial"/>
               </a:rPr>
@@ -3449,13 +3449,13 @@
         <p:spPr>
           <a:xfrm>
             <a:off x="0" y="0"/>
-            <a:ext cx="164592" cy="6858000"/>
+            <a:ext cx="128016" cy="6858000"/>
           </a:xfrm>
           <a:prstGeom prst="rect">
             <a:avLst/>
           </a:prstGeom>
           <a:solidFill>
-            <a:srgbClr val="C3002B"/>
+            <a:srgbClr val="F4B634"/>
           </a:solidFill>
           <a:ln>
             <a:noFill/>
@@ -3510,7 +3510,7 @@
             <a:r>
               <a:rPr sz="1000" b="1" i="0">
                 <a:solidFill>
-                  <a:srgbClr val="C3002B"/>
+                  <a:srgbClr val="F4B634"/>
                 </a:solidFill>
                 <a:latin typeface="Arial"/>
               </a:rPr>
@@ -3545,7 +3545,7 @@
             <a:r>
               <a:rPr sz="2300" b="1" i="0">
                 <a:solidFill>
-                  <a:srgbClr val="1C1C1C"/>
+                  <a:srgbClr val="1F1942"/>
                 </a:solidFill>
                 <a:latin typeface="Arial"/>
               </a:rPr>
@@ -3557,7 +3557,7 @@
             <a:r>
               <a:rPr sz="2300" b="1" i="0">
                 <a:solidFill>
-                  <a:srgbClr val="1C1C1C"/>
+                  <a:srgbClr val="1F1942"/>
                 </a:solidFill>
                 <a:latin typeface="Arial"/>
               </a:rPr>
@@ -3592,7 +3592,7 @@
             <a:r>
               <a:rPr sz="800" b="0" i="0">
                 <a:solidFill>
-                  <a:srgbClr val="7A7A7A"/>
+                  <a:srgbClr val="6B6467"/>
                 </a:solidFill>
                 <a:latin typeface="Arial"/>
               </a:rPr>
@@ -3627,7 +3627,7 @@
             <a:r>
               <a:rPr sz="1000" b="0" i="0">
                 <a:solidFill>
-                  <a:srgbClr val="7A7A7A"/>
+                  <a:srgbClr val="6B6467"/>
                 </a:solidFill>
                 <a:latin typeface="Arial"/>
               </a:rPr>
@@ -3651,7 +3651,7 @@
             <a:avLst/>
           </a:prstGeom>
           <a:solidFill>
-            <a:srgbClr val="C3002B"/>
+            <a:srgbClr val="1F1942"/>
           </a:solidFill>
           <a:ln>
             <a:noFill/>
@@ -3706,7 +3706,7 @@
             <a:r>
               <a:rPr sz="800" b="1" i="0">
                 <a:solidFill>
-                  <a:srgbClr val="FFFFFF"/>
+                  <a:srgbClr val="F4B634"/>
                 </a:solidFill>
                 <a:latin typeface="Arial"/>
               </a:rPr>
@@ -3741,7 +3741,7 @@
             <a:r>
               <a:rPr sz="1150" b="0" i="0">
                 <a:solidFill>
-                  <a:srgbClr val="1C1C1C"/>
+                  <a:srgbClr val="1F1942"/>
                 </a:solidFill>
                 <a:latin typeface="Arial"/>
               </a:rPr>
@@ -3769,7 +3769,7 @@
           </a:solidFill>
           <a:ln w="6350">
             <a:solidFill>
-              <a:srgbClr val="E2E2E2"/>
+              <a:srgbClr val="E2DED6"/>
             </a:solidFill>
           </a:ln>
           <a:effectLst/>
@@ -3822,7 +3822,7 @@
             <a:r>
               <a:rPr sz="1200" b="1" i="0">
                 <a:solidFill>
-                  <a:srgbClr val="C3002B"/>
+                  <a:srgbClr val="2A2250"/>
                 </a:solidFill>
                 <a:latin typeface="Arial"/>
               </a:rPr>
@@ -3857,7 +3857,7 @@
             <a:r>
               <a:rPr sz="1050" b="0" i="0">
                 <a:solidFill>
-                  <a:srgbClr val="1C1C1C"/>
+                  <a:srgbClr val="1F1942"/>
                 </a:solidFill>
                 <a:latin typeface="Arial"/>
               </a:rPr>
@@ -3885,7 +3885,7 @@
           </a:solidFill>
           <a:ln w="6350">
             <a:solidFill>
-              <a:srgbClr val="E2E2E2"/>
+              <a:srgbClr val="E2DED6"/>
             </a:solidFill>
           </a:ln>
           <a:effectLst/>
@@ -3938,7 +3938,7 @@
             <a:r>
               <a:rPr sz="1200" b="1" i="0">
                 <a:solidFill>
-                  <a:srgbClr val="C3002B"/>
+                  <a:srgbClr val="2A2250"/>
                 </a:solidFill>
                 <a:latin typeface="Arial"/>
               </a:rPr>
@@ -3973,7 +3973,7 @@
             <a:r>
               <a:rPr sz="1050" b="0" i="0">
                 <a:solidFill>
-                  <a:srgbClr val="1C1C1C"/>
+                  <a:srgbClr val="1F1942"/>
                 </a:solidFill>
                 <a:latin typeface="Arial"/>
               </a:rPr>
@@ -4001,7 +4001,7 @@
           </a:solidFill>
           <a:ln w="6350">
             <a:solidFill>
-              <a:srgbClr val="E2E2E2"/>
+              <a:srgbClr val="E2DED6"/>
             </a:solidFill>
           </a:ln>
           <a:effectLst/>
@@ -4054,7 +4054,7 @@
             <a:r>
               <a:rPr sz="1200" b="1" i="0">
                 <a:solidFill>
-                  <a:srgbClr val="C3002B"/>
+                  <a:srgbClr val="2A2250"/>
                 </a:solidFill>
                 <a:latin typeface="Arial"/>
               </a:rPr>
@@ -4089,7 +4089,7 @@
             <a:r>
               <a:rPr sz="1050" b="0" i="0">
                 <a:solidFill>
-                  <a:srgbClr val="1C1C1C"/>
+                  <a:srgbClr val="1F1942"/>
                 </a:solidFill>
                 <a:latin typeface="Arial"/>
               </a:rPr>
@@ -4117,7 +4117,7 @@
           </a:solidFill>
           <a:ln w="6350">
             <a:solidFill>
-              <a:srgbClr val="E2E2E2"/>
+              <a:srgbClr val="E2DED6"/>
             </a:solidFill>
           </a:ln>
           <a:effectLst/>
@@ -4170,7 +4170,7 @@
             <a:r>
               <a:rPr sz="1200" b="1" i="0">
                 <a:solidFill>
-                  <a:srgbClr val="C3002B"/>
+                  <a:srgbClr val="2A2250"/>
                 </a:solidFill>
                 <a:latin typeface="Arial"/>
               </a:rPr>
@@ -4205,7 +4205,7 @@
             <a:r>
               <a:rPr sz="1050" b="0" i="0">
                 <a:solidFill>
-                  <a:srgbClr val="1C1C1C"/>
+                  <a:srgbClr val="1F1942"/>
                 </a:solidFill>
                 <a:latin typeface="Arial"/>
               </a:rPr>
@@ -4241,13 +4241,13 @@
         <p:spPr>
           <a:xfrm>
             <a:off x="0" y="0"/>
-            <a:ext cx="164592" cy="6858000"/>
+            <a:ext cx="128016" cy="6858000"/>
           </a:xfrm>
           <a:prstGeom prst="rect">
             <a:avLst/>
           </a:prstGeom>
           <a:solidFill>
-            <a:srgbClr val="C3002B"/>
+            <a:srgbClr val="F4B634"/>
           </a:solidFill>
           <a:ln>
             <a:noFill/>
@@ -4302,7 +4302,7 @@
             <a:r>
               <a:rPr sz="1000" b="1" i="0">
                 <a:solidFill>
-                  <a:srgbClr val="C3002B"/>
+                  <a:srgbClr val="F4B634"/>
                 </a:solidFill>
                 <a:latin typeface="Arial"/>
               </a:rPr>
@@ -4337,7 +4337,7 @@
             <a:r>
               <a:rPr sz="2300" b="1" i="0">
                 <a:solidFill>
-                  <a:srgbClr val="1C1C1C"/>
+                  <a:srgbClr val="1F1942"/>
                 </a:solidFill>
                 <a:latin typeface="Arial"/>
               </a:rPr>
@@ -4349,7 +4349,7 @@
             <a:r>
               <a:rPr sz="2300" b="1" i="0">
                 <a:solidFill>
-                  <a:srgbClr val="1C1C1C"/>
+                  <a:srgbClr val="1F1942"/>
                 </a:solidFill>
                 <a:latin typeface="Arial"/>
               </a:rPr>
@@ -4384,7 +4384,7 @@
             <a:r>
               <a:rPr sz="800" b="0" i="0">
                 <a:solidFill>
-                  <a:srgbClr val="7A7A7A"/>
+                  <a:srgbClr val="6B6467"/>
                 </a:solidFill>
                 <a:latin typeface="Arial"/>
               </a:rPr>
@@ -4419,7 +4419,7 @@
             <a:r>
               <a:rPr sz="1000" b="0" i="0">
                 <a:solidFill>
-                  <a:srgbClr val="7A7A7A"/>
+                  <a:srgbClr val="6B6467"/>
                 </a:solidFill>
                 <a:latin typeface="Arial"/>
               </a:rPr>
@@ -4443,7 +4443,7 @@
             <a:avLst/>
           </a:prstGeom>
           <a:solidFill>
-            <a:srgbClr val="C3002B"/>
+            <a:srgbClr val="1F1942"/>
           </a:solidFill>
           <a:ln>
             <a:noFill/>
@@ -4498,7 +4498,7 @@
             <a:r>
               <a:rPr sz="800" b="1" i="0">
                 <a:solidFill>
-                  <a:srgbClr val="FFFFFF"/>
+                  <a:srgbClr val="F4B634"/>
                 </a:solidFill>
                 <a:latin typeface="Arial"/>
               </a:rPr>
@@ -4533,7 +4533,7 @@
             <a:r>
               <a:rPr sz="1150" b="0" i="0">
                 <a:solidFill>
-                  <a:srgbClr val="1C1C1C"/>
+                  <a:srgbClr val="1F1942"/>
                 </a:solidFill>
                 <a:latin typeface="Arial"/>
               </a:rPr>
@@ -4561,7 +4561,7 @@
           </a:solidFill>
           <a:ln w="6350">
             <a:solidFill>
-              <a:srgbClr val="E2E2E2"/>
+              <a:srgbClr val="E2DED6"/>
             </a:solidFill>
           </a:ln>
           <a:effectLst/>
@@ -4603,11 +4603,11 @@
             <a:avLst/>
           </a:prstGeom>
           <a:solidFill>
-            <a:srgbClr val="C3002B"/>
+            <a:srgbClr val="2A2250"/>
           </a:solidFill>
           <a:ln w="6350">
             <a:solidFill>
-              <a:srgbClr val="E2E2E2"/>
+              <a:srgbClr val="E2DED6"/>
             </a:solidFill>
           </a:ln>
           <a:effectLst/>
@@ -4695,7 +4695,7 @@
             <a:r>
               <a:rPr sz="1050" b="0" i="0">
                 <a:solidFill>
-                  <a:srgbClr val="1C1C1C"/>
+                  <a:srgbClr val="1F1942"/>
                 </a:solidFill>
                 <a:latin typeface="Arial"/>
               </a:rPr>
@@ -4719,7 +4719,7 @@
             <a:avLst/>
           </a:prstGeom>
           <a:solidFill>
-            <a:srgbClr val="C3002B"/>
+            <a:srgbClr val="2A2250"/>
           </a:solidFill>
           <a:ln>
             <a:noFill/>
@@ -4767,7 +4767,7 @@
           </a:solidFill>
           <a:ln w="6350">
             <a:solidFill>
-              <a:srgbClr val="E2E2E2"/>
+              <a:srgbClr val="E2DED6"/>
             </a:solidFill>
           </a:ln>
           <a:effectLst/>
@@ -4809,11 +4809,11 @@
             <a:avLst/>
           </a:prstGeom>
           <a:solidFill>
-            <a:srgbClr val="1C1C1C"/>
+            <a:srgbClr val="1F1942"/>
           </a:solidFill>
           <a:ln w="6350">
             <a:solidFill>
-              <a:srgbClr val="E2E2E2"/>
+              <a:srgbClr val="E2DED6"/>
             </a:solidFill>
           </a:ln>
           <a:effectLst/>
@@ -4901,7 +4901,7 @@
             <a:r>
               <a:rPr sz="1050" b="0" i="0">
                 <a:solidFill>
-                  <a:srgbClr val="1C1C1C"/>
+                  <a:srgbClr val="1F1942"/>
                 </a:solidFill>
                 <a:latin typeface="Arial"/>
               </a:rPr>
@@ -4925,7 +4925,7 @@
             <a:avLst/>
           </a:prstGeom>
           <a:solidFill>
-            <a:srgbClr val="C3002B"/>
+            <a:srgbClr val="2A2250"/>
           </a:solidFill>
           <a:ln>
             <a:noFill/>
@@ -4973,7 +4973,7 @@
           </a:solidFill>
           <a:ln w="6350">
             <a:solidFill>
-              <a:srgbClr val="E2E2E2"/>
+              <a:srgbClr val="E2DED6"/>
             </a:solidFill>
           </a:ln>
           <a:effectLst/>
@@ -5015,11 +5015,11 @@
             <a:avLst/>
           </a:prstGeom>
           <a:solidFill>
-            <a:srgbClr val="1C1C1C"/>
+            <a:srgbClr val="1F1942"/>
           </a:solidFill>
           <a:ln w="6350">
             <a:solidFill>
-              <a:srgbClr val="E2E2E2"/>
+              <a:srgbClr val="E2DED6"/>
             </a:solidFill>
           </a:ln>
           <a:effectLst/>
@@ -5107,7 +5107,7 @@
             <a:r>
               <a:rPr sz="1050" b="0" i="0">
                 <a:solidFill>
-                  <a:srgbClr val="1C1C1C"/>
+                  <a:srgbClr val="1F1942"/>
                 </a:solidFill>
                 <a:latin typeface="Arial"/>
               </a:rPr>
@@ -5131,7 +5131,7 @@
             <a:avLst/>
           </a:prstGeom>
           <a:solidFill>
-            <a:srgbClr val="C3002B"/>
+            <a:srgbClr val="2A2250"/>
           </a:solidFill>
           <a:ln>
             <a:noFill/>
@@ -5179,7 +5179,7 @@
           </a:solidFill>
           <a:ln w="6350">
             <a:solidFill>
-              <a:srgbClr val="E2E2E2"/>
+              <a:srgbClr val="E2DED6"/>
             </a:solidFill>
           </a:ln>
           <a:effectLst/>
@@ -5221,11 +5221,11 @@
             <a:avLst/>
           </a:prstGeom>
           <a:solidFill>
-            <a:srgbClr val="1C1C1C"/>
+            <a:srgbClr val="1F1942"/>
           </a:solidFill>
           <a:ln w="6350">
             <a:solidFill>
-              <a:srgbClr val="E2E2E2"/>
+              <a:srgbClr val="E2DED6"/>
             </a:solidFill>
           </a:ln>
           <a:effectLst/>
@@ -5313,7 +5313,7 @@
             <a:r>
               <a:rPr sz="1050" b="0" i="0">
                 <a:solidFill>
-                  <a:srgbClr val="1C1C1C"/>
+                  <a:srgbClr val="1F1942"/>
                 </a:solidFill>
                 <a:latin typeface="Arial"/>
               </a:rPr>
@@ -5337,7 +5337,7 @@
             <a:avLst/>
           </a:prstGeom>
           <a:solidFill>
-            <a:srgbClr val="C3002B"/>
+            <a:srgbClr val="2A2250"/>
           </a:solidFill>
           <a:ln>
             <a:noFill/>
@@ -5385,7 +5385,7 @@
           </a:solidFill>
           <a:ln w="6350">
             <a:solidFill>
-              <a:srgbClr val="E2E2E2"/>
+              <a:srgbClr val="E2DED6"/>
             </a:solidFill>
           </a:ln>
           <a:effectLst/>
@@ -5427,11 +5427,11 @@
             <a:avLst/>
           </a:prstGeom>
           <a:solidFill>
-            <a:srgbClr val="C3002B"/>
+            <a:srgbClr val="2A2250"/>
           </a:solidFill>
           <a:ln w="6350">
             <a:solidFill>
-              <a:srgbClr val="E2E2E2"/>
+              <a:srgbClr val="E2DED6"/>
             </a:solidFill>
           </a:ln>
           <a:effectLst/>
@@ -5519,7 +5519,7 @@
             <a:r>
               <a:rPr sz="1050" b="0" i="0">
                 <a:solidFill>
-                  <a:srgbClr val="1C1C1C"/>
+                  <a:srgbClr val="1F1942"/>
                 </a:solidFill>
                 <a:latin typeface="Arial"/>
               </a:rPr>
@@ -5554,7 +5554,7 @@
             <a:r>
               <a:rPr sz="1100" b="1" i="1">
                 <a:solidFill>
-                  <a:srgbClr val="1C1C1C"/>
+                  <a:srgbClr val="1F1942"/>
                 </a:solidFill>
                 <a:latin typeface="Arial"/>
               </a:rPr>
@@ -5590,13 +5590,13 @@
         <p:spPr>
           <a:xfrm>
             <a:off x="0" y="0"/>
-            <a:ext cx="164592" cy="6858000"/>
+            <a:ext cx="128016" cy="6858000"/>
           </a:xfrm>
           <a:prstGeom prst="rect">
             <a:avLst/>
           </a:prstGeom>
           <a:solidFill>
-            <a:srgbClr val="C3002B"/>
+            <a:srgbClr val="F4B634"/>
           </a:solidFill>
           <a:ln>
             <a:noFill/>
@@ -5651,7 +5651,7 @@
             <a:r>
               <a:rPr sz="1000" b="1" i="0">
                 <a:solidFill>
-                  <a:srgbClr val="C3002B"/>
+                  <a:srgbClr val="F4B634"/>
                 </a:solidFill>
                 <a:latin typeface="Arial"/>
               </a:rPr>
@@ -5686,7 +5686,7 @@
             <a:r>
               <a:rPr sz="2300" b="1" i="0">
                 <a:solidFill>
-                  <a:srgbClr val="1C1C1C"/>
+                  <a:srgbClr val="1F1942"/>
                 </a:solidFill>
                 <a:latin typeface="Arial"/>
               </a:rPr>
@@ -5721,7 +5721,7 @@
             <a:r>
               <a:rPr sz="800" b="0" i="0">
                 <a:solidFill>
-                  <a:srgbClr val="7A7A7A"/>
+                  <a:srgbClr val="6B6467"/>
                 </a:solidFill>
                 <a:latin typeface="Arial"/>
               </a:rPr>
@@ -5756,7 +5756,7 @@
             <a:r>
               <a:rPr sz="1000" b="0" i="0">
                 <a:solidFill>
-                  <a:srgbClr val="7A7A7A"/>
+                  <a:srgbClr val="6B6467"/>
                 </a:solidFill>
                 <a:latin typeface="Arial"/>
               </a:rPr>
@@ -5780,7 +5780,7 @@
             <a:avLst/>
           </a:prstGeom>
           <a:solidFill>
-            <a:srgbClr val="C3002B"/>
+            <a:srgbClr val="1F1942"/>
           </a:solidFill>
           <a:ln>
             <a:noFill/>
@@ -5835,7 +5835,7 @@
             <a:r>
               <a:rPr sz="800" b="1" i="0">
                 <a:solidFill>
-                  <a:srgbClr val="FFFFFF"/>
+                  <a:srgbClr val="F4B634"/>
                 </a:solidFill>
                 <a:latin typeface="Arial"/>
               </a:rPr>
@@ -5863,7 +5863,7 @@
           </a:solidFill>
           <a:ln w="6350">
             <a:solidFill>
-              <a:srgbClr val="E2E2E2"/>
+              <a:srgbClr val="E2DED6"/>
             </a:solidFill>
           </a:ln>
           <a:effectLst/>
@@ -5916,7 +5916,7 @@
             <a:r>
               <a:rPr sz="1300" b="1" i="0">
                 <a:solidFill>
-                  <a:srgbClr val="C3002B"/>
+                  <a:srgbClr val="2A2250"/>
                 </a:solidFill>
                 <a:latin typeface="Arial"/>
               </a:rPr>
@@ -5951,7 +5951,7 @@
             <a:r>
               <a:rPr sz="1050" b="0" i="0">
                 <a:solidFill>
-                  <a:srgbClr val="1C1C1C"/>
+                  <a:srgbClr val="1F1942"/>
                 </a:solidFill>
                 <a:latin typeface="Arial"/>
               </a:rPr>
@@ -5979,7 +5979,7 @@
           </a:solidFill>
           <a:ln w="6350">
             <a:solidFill>
-              <a:srgbClr val="E2E2E2"/>
+              <a:srgbClr val="E2DED6"/>
             </a:solidFill>
           </a:ln>
           <a:effectLst/>
@@ -6032,7 +6032,7 @@
             <a:r>
               <a:rPr sz="1300" b="1" i="0">
                 <a:solidFill>
-                  <a:srgbClr val="C3002B"/>
+                  <a:srgbClr val="2A2250"/>
                 </a:solidFill>
                 <a:latin typeface="Arial"/>
               </a:rPr>
@@ -6067,7 +6067,7 @@
             <a:r>
               <a:rPr sz="1050" b="0" i="0">
                 <a:solidFill>
-                  <a:srgbClr val="1C1C1C"/>
+                  <a:srgbClr val="1F1942"/>
                 </a:solidFill>
                 <a:latin typeface="Arial"/>
               </a:rPr>
@@ -6095,7 +6095,7 @@
           </a:solidFill>
           <a:ln w="6350">
             <a:solidFill>
-              <a:srgbClr val="E2E2E2"/>
+              <a:srgbClr val="E2DED6"/>
             </a:solidFill>
           </a:ln>
           <a:effectLst/>
@@ -6148,7 +6148,7 @@
             <a:r>
               <a:rPr sz="1300" b="1" i="0">
                 <a:solidFill>
-                  <a:srgbClr val="C3002B"/>
+                  <a:srgbClr val="2A2250"/>
                 </a:solidFill>
                 <a:latin typeface="Arial"/>
               </a:rPr>
@@ -6183,7 +6183,7 @@
             <a:r>
               <a:rPr sz="1050" b="0" i="0">
                 <a:solidFill>
-                  <a:srgbClr val="1C1C1C"/>
+                  <a:srgbClr val="1F1942"/>
                 </a:solidFill>
                 <a:latin typeface="Arial"/>
               </a:rPr>
@@ -6211,7 +6211,7 @@
           </a:solidFill>
           <a:ln w="6350">
             <a:solidFill>
-              <a:srgbClr val="E2E2E2"/>
+              <a:srgbClr val="E2DED6"/>
             </a:solidFill>
           </a:ln>
           <a:effectLst/>
@@ -6264,7 +6264,7 @@
             <a:r>
               <a:rPr sz="1300" b="1" i="0">
                 <a:solidFill>
-                  <a:srgbClr val="C3002B"/>
+                  <a:srgbClr val="2A2250"/>
                 </a:solidFill>
                 <a:latin typeface="Arial"/>
               </a:rPr>
@@ -6299,7 +6299,7 @@
             <a:r>
               <a:rPr sz="1050" b="0" i="0">
                 <a:solidFill>
-                  <a:srgbClr val="1C1C1C"/>
+                  <a:srgbClr val="1F1942"/>
                 </a:solidFill>
                 <a:latin typeface="Arial"/>
               </a:rPr>
@@ -6335,13 +6335,13 @@
         <p:spPr>
           <a:xfrm>
             <a:off x="0" y="0"/>
-            <a:ext cx="164592" cy="6858000"/>
+            <a:ext cx="128016" cy="6858000"/>
           </a:xfrm>
           <a:prstGeom prst="rect">
             <a:avLst/>
           </a:prstGeom>
           <a:solidFill>
-            <a:srgbClr val="C3002B"/>
+            <a:srgbClr val="F4B634"/>
           </a:solidFill>
           <a:ln>
             <a:noFill/>
@@ -6396,7 +6396,7 @@
             <a:r>
               <a:rPr sz="1000" b="1" i="0">
                 <a:solidFill>
-                  <a:srgbClr val="C3002B"/>
+                  <a:srgbClr val="F4B634"/>
                 </a:solidFill>
                 <a:latin typeface="Arial"/>
               </a:rPr>
@@ -6431,7 +6431,7 @@
             <a:r>
               <a:rPr sz="2300" b="1" i="0">
                 <a:solidFill>
-                  <a:srgbClr val="1C1C1C"/>
+                  <a:srgbClr val="1F1942"/>
                 </a:solidFill>
                 <a:latin typeface="Arial"/>
               </a:rPr>
@@ -6443,7 +6443,7 @@
             <a:r>
               <a:rPr sz="2300" b="1" i="0">
                 <a:solidFill>
-                  <a:srgbClr val="1C1C1C"/>
+                  <a:srgbClr val="1F1942"/>
                 </a:solidFill>
                 <a:latin typeface="Arial"/>
               </a:rPr>
@@ -6478,7 +6478,7 @@
             <a:r>
               <a:rPr sz="800" b="0" i="0">
                 <a:solidFill>
-                  <a:srgbClr val="7A7A7A"/>
+                  <a:srgbClr val="6B6467"/>
                 </a:solidFill>
                 <a:latin typeface="Arial"/>
               </a:rPr>
@@ -6513,7 +6513,7 @@
             <a:r>
               <a:rPr sz="1000" b="0" i="0">
                 <a:solidFill>
-                  <a:srgbClr val="7A7A7A"/>
+                  <a:srgbClr val="6B6467"/>
                 </a:solidFill>
                 <a:latin typeface="Arial"/>
               </a:rPr>
@@ -6537,7 +6537,7 @@
             <a:avLst/>
           </a:prstGeom>
           <a:solidFill>
-            <a:srgbClr val="C3002B"/>
+            <a:srgbClr val="1F1942"/>
           </a:solidFill>
           <a:ln>
             <a:noFill/>
@@ -6592,7 +6592,7 @@
             <a:r>
               <a:rPr sz="800" b="1" i="0">
                 <a:solidFill>
-                  <a:srgbClr val="FFFFFF"/>
+                  <a:srgbClr val="F4B634"/>
                 </a:solidFill>
                 <a:latin typeface="Arial"/>
               </a:rPr>
@@ -6616,7 +6616,7 @@
             <a:avLst/>
           </a:prstGeom>
           <a:solidFill>
-            <a:srgbClr val="C3002B"/>
+            <a:srgbClr val="F4B634"/>
           </a:solidFill>
           <a:ln>
             <a:noFill/>
@@ -6660,7 +6660,7 @@
             <a:avLst/>
           </a:prstGeom>
           <a:solidFill>
-            <a:srgbClr val="C3002B"/>
+            <a:srgbClr val="F4B634"/>
           </a:solidFill>
           <a:ln>
             <a:solidFill>
@@ -6717,7 +6717,7 @@
             <a:r>
               <a:rPr sz="1100" b="1" i="0">
                 <a:solidFill>
-                  <a:srgbClr val="C3002B"/>
+                  <a:srgbClr val="2A2250"/>
                 </a:solidFill>
                 <a:latin typeface="Arial"/>
               </a:rPr>
@@ -6752,7 +6752,7 @@
             <a:r>
               <a:rPr sz="900" b="1" i="0">
                 <a:solidFill>
-                  <a:srgbClr val="7A7A7A"/>
+                  <a:srgbClr val="6B6467"/>
                 </a:solidFill>
                 <a:latin typeface="Arial"/>
               </a:rPr>
@@ -6787,7 +6787,7 @@
             <a:r>
               <a:rPr sz="900" b="0" i="0">
                 <a:solidFill>
-                  <a:srgbClr val="1C1C1C"/>
+                  <a:srgbClr val="1F1942"/>
                 </a:solidFill>
                 <a:latin typeface="Arial"/>
               </a:rPr>
@@ -6811,7 +6811,7 @@
             <a:avLst/>
           </a:prstGeom>
           <a:solidFill>
-            <a:srgbClr val="1C1C1C"/>
+            <a:srgbClr val="1F1942"/>
           </a:solidFill>
           <a:ln>
             <a:solidFill>
@@ -6868,7 +6868,7 @@
             <a:r>
               <a:rPr sz="1100" b="1" i="0">
                 <a:solidFill>
-                  <a:srgbClr val="C3002B"/>
+                  <a:srgbClr val="2A2250"/>
                 </a:solidFill>
                 <a:latin typeface="Arial"/>
               </a:rPr>
@@ -6903,7 +6903,7 @@
             <a:r>
               <a:rPr sz="900" b="1" i="0">
                 <a:solidFill>
-                  <a:srgbClr val="7A7A7A"/>
+                  <a:srgbClr val="6B6467"/>
                 </a:solidFill>
                 <a:latin typeface="Arial"/>
               </a:rPr>
@@ -6938,7 +6938,7 @@
             <a:r>
               <a:rPr sz="900" b="0" i="0">
                 <a:solidFill>
-                  <a:srgbClr val="1C1C1C"/>
+                  <a:srgbClr val="1F1942"/>
                 </a:solidFill>
                 <a:latin typeface="Arial"/>
               </a:rPr>
@@ -6962,7 +6962,7 @@
             <a:avLst/>
           </a:prstGeom>
           <a:solidFill>
-            <a:srgbClr val="1C1C1C"/>
+            <a:srgbClr val="1F1942"/>
           </a:solidFill>
           <a:ln>
             <a:solidFill>
@@ -7019,7 +7019,7 @@
             <a:r>
               <a:rPr sz="1100" b="1" i="0">
                 <a:solidFill>
-                  <a:srgbClr val="C3002B"/>
+                  <a:srgbClr val="2A2250"/>
                 </a:solidFill>
                 <a:latin typeface="Arial"/>
               </a:rPr>
@@ -7054,7 +7054,7 @@
             <a:r>
               <a:rPr sz="900" b="1" i="0">
                 <a:solidFill>
-                  <a:srgbClr val="7A7A7A"/>
+                  <a:srgbClr val="6B6467"/>
                 </a:solidFill>
                 <a:latin typeface="Arial"/>
               </a:rPr>
@@ -7089,7 +7089,7 @@
             <a:r>
               <a:rPr sz="900" b="0" i="0">
                 <a:solidFill>
-                  <a:srgbClr val="1C1C1C"/>
+                  <a:srgbClr val="1F1942"/>
                 </a:solidFill>
                 <a:latin typeface="Arial"/>
               </a:rPr>
@@ -7113,7 +7113,7 @@
             <a:avLst/>
           </a:prstGeom>
           <a:solidFill>
-            <a:srgbClr val="1C1C1C"/>
+            <a:srgbClr val="1F1942"/>
           </a:solidFill>
           <a:ln>
             <a:solidFill>
@@ -7170,7 +7170,7 @@
             <a:r>
               <a:rPr sz="1100" b="1" i="0">
                 <a:solidFill>
-                  <a:srgbClr val="C3002B"/>
+                  <a:srgbClr val="2A2250"/>
                 </a:solidFill>
                 <a:latin typeface="Arial"/>
               </a:rPr>
@@ -7205,7 +7205,7 @@
             <a:r>
               <a:rPr sz="900" b="1" i="0">
                 <a:solidFill>
-                  <a:srgbClr val="7A7A7A"/>
+                  <a:srgbClr val="6B6467"/>
                 </a:solidFill>
                 <a:latin typeface="Arial"/>
               </a:rPr>
@@ -7240,7 +7240,7 @@
             <a:r>
               <a:rPr sz="900" b="0" i="0">
                 <a:solidFill>
-                  <a:srgbClr val="1C1C1C"/>
+                  <a:srgbClr val="1F1942"/>
                 </a:solidFill>
                 <a:latin typeface="Arial"/>
               </a:rPr>
@@ -7264,7 +7264,7 @@
             <a:avLst/>
           </a:prstGeom>
           <a:solidFill>
-            <a:srgbClr val="1C1C1C"/>
+            <a:srgbClr val="1F1942"/>
           </a:solidFill>
           <a:ln>
             <a:solidFill>
@@ -7321,7 +7321,7 @@
             <a:r>
               <a:rPr sz="1100" b="1" i="0">
                 <a:solidFill>
-                  <a:srgbClr val="C3002B"/>
+                  <a:srgbClr val="2A2250"/>
                 </a:solidFill>
                 <a:latin typeface="Arial"/>
               </a:rPr>
@@ -7356,7 +7356,7 @@
             <a:r>
               <a:rPr sz="900" b="1" i="0">
                 <a:solidFill>
-                  <a:srgbClr val="7A7A7A"/>
+                  <a:srgbClr val="6B6467"/>
                 </a:solidFill>
                 <a:latin typeface="Arial"/>
               </a:rPr>
@@ -7391,7 +7391,7 @@
             <a:r>
               <a:rPr sz="900" b="0" i="0">
                 <a:solidFill>
-                  <a:srgbClr val="1C1C1C"/>
+                  <a:srgbClr val="1F1942"/>
                 </a:solidFill>
                 <a:latin typeface="Arial"/>
               </a:rPr>
@@ -7415,7 +7415,7 @@
             <a:avLst/>
           </a:prstGeom>
           <a:solidFill>
-            <a:srgbClr val="C3002B"/>
+            <a:srgbClr val="F4B634"/>
           </a:solidFill>
           <a:ln>
             <a:solidFill>
@@ -7472,7 +7472,7 @@
             <a:r>
               <a:rPr sz="1100" b="1" i="0">
                 <a:solidFill>
-                  <a:srgbClr val="C3002B"/>
+                  <a:srgbClr val="2A2250"/>
                 </a:solidFill>
                 <a:latin typeface="Arial"/>
               </a:rPr>
@@ -7507,7 +7507,7 @@
             <a:r>
               <a:rPr sz="900" b="1" i="0">
                 <a:solidFill>
-                  <a:srgbClr val="7A7A7A"/>
+                  <a:srgbClr val="6B6467"/>
                 </a:solidFill>
                 <a:latin typeface="Arial"/>
               </a:rPr>
@@ -7542,7 +7542,7 @@
             <a:r>
               <a:rPr sz="900" b="0" i="0">
                 <a:solidFill>
-                  <a:srgbClr val="1C1C1C"/>
+                  <a:srgbClr val="1F1942"/>
                 </a:solidFill>
                 <a:latin typeface="Arial"/>
               </a:rPr>
@@ -7577,7 +7577,7 @@
             <a:r>
               <a:rPr sz="800" b="0" i="1">
                 <a:solidFill>
-                  <a:srgbClr val="7A7A7A"/>
+                  <a:srgbClr val="6B6467"/>
                 </a:solidFill>
                 <a:latin typeface="Arial"/>
               </a:rPr>
@@ -7613,13 +7613,13 @@
         <p:spPr>
           <a:xfrm>
             <a:off x="0" y="0"/>
-            <a:ext cx="164592" cy="6858000"/>
+            <a:ext cx="128016" cy="6858000"/>
           </a:xfrm>
           <a:prstGeom prst="rect">
             <a:avLst/>
           </a:prstGeom>
           <a:solidFill>
-            <a:srgbClr val="C3002B"/>
+            <a:srgbClr val="F4B634"/>
           </a:solidFill>
           <a:ln>
             <a:noFill/>
@@ -7674,7 +7674,7 @@
             <a:r>
               <a:rPr sz="1000" b="1" i="0">
                 <a:solidFill>
-                  <a:srgbClr val="C3002B"/>
+                  <a:srgbClr val="F4B634"/>
                 </a:solidFill>
                 <a:latin typeface="Arial"/>
               </a:rPr>
@@ -7709,7 +7709,7 @@
             <a:r>
               <a:rPr sz="2300" b="1" i="0">
                 <a:solidFill>
-                  <a:srgbClr val="1C1C1C"/>
+                  <a:srgbClr val="1F1942"/>
                 </a:solidFill>
                 <a:latin typeface="Arial"/>
               </a:rPr>
@@ -7744,7 +7744,7 @@
             <a:r>
               <a:rPr sz="800" b="0" i="0">
                 <a:solidFill>
-                  <a:srgbClr val="7A7A7A"/>
+                  <a:srgbClr val="6B6467"/>
                 </a:solidFill>
                 <a:latin typeface="Arial"/>
               </a:rPr>
@@ -7779,7 +7779,7 @@
             <a:r>
               <a:rPr sz="1000" b="0" i="0">
                 <a:solidFill>
-                  <a:srgbClr val="7A7A7A"/>
+                  <a:srgbClr val="6B6467"/>
                 </a:solidFill>
                 <a:latin typeface="Arial"/>
               </a:rPr>
@@ -7803,7 +7803,7 @@
             <a:avLst/>
           </a:prstGeom>
           <a:solidFill>
-            <a:srgbClr val="C3002B"/>
+            <a:srgbClr val="1F1942"/>
           </a:solidFill>
           <a:ln>
             <a:noFill/>
@@ -7858,7 +7858,7 @@
             <a:r>
               <a:rPr sz="800" b="1" i="0">
                 <a:solidFill>
-                  <a:srgbClr val="FFFFFF"/>
+                  <a:srgbClr val="F4B634"/>
                 </a:solidFill>
                 <a:latin typeface="Arial"/>
               </a:rPr>
@@ -7886,7 +7886,7 @@
           </a:solidFill>
           <a:ln w="6350">
             <a:solidFill>
-              <a:srgbClr val="E2E2E2"/>
+              <a:srgbClr val="E2DED6"/>
             </a:solidFill>
           </a:ln>
           <a:effectLst/>
@@ -7928,11 +7928,11 @@
             <a:avLst/>
           </a:prstGeom>
           <a:solidFill>
-            <a:srgbClr val="C3002B"/>
+            <a:srgbClr val="2A2250"/>
           </a:solidFill>
           <a:ln w="6350">
             <a:solidFill>
-              <a:srgbClr val="E2E2E2"/>
+              <a:srgbClr val="E2DED6"/>
             </a:solidFill>
           </a:ln>
           <a:effectLst/>
@@ -8055,7 +8055,7 @@
             <a:r>
               <a:rPr sz="1000" b="0" i="0">
                 <a:solidFill>
-                  <a:srgbClr val="1C1C1C"/>
+                  <a:srgbClr val="1F1942"/>
                 </a:solidFill>
                 <a:latin typeface="Arial"/>
               </a:rPr>
@@ -8079,7 +8079,7 @@
             <a:avLst/>
           </a:prstGeom>
           <a:solidFill>
-            <a:srgbClr val="C3002B"/>
+            <a:srgbClr val="2A2250"/>
           </a:solidFill>
           <a:ln>
             <a:noFill/>
@@ -8127,7 +8127,7 @@
           </a:solidFill>
           <a:ln w="6350">
             <a:solidFill>
-              <a:srgbClr val="E2E2E2"/>
+              <a:srgbClr val="E2DED6"/>
             </a:solidFill>
           </a:ln>
           <a:effectLst/>
@@ -8169,11 +8169,11 @@
             <a:avLst/>
           </a:prstGeom>
           <a:solidFill>
-            <a:srgbClr val="1C1C1C"/>
+            <a:srgbClr val="1F1942"/>
           </a:solidFill>
           <a:ln w="6350">
             <a:solidFill>
-              <a:srgbClr val="E2E2E2"/>
+              <a:srgbClr val="E2DED6"/>
             </a:solidFill>
           </a:ln>
           <a:effectLst/>
@@ -8296,7 +8296,7 @@
             <a:r>
               <a:rPr sz="1000" b="0" i="0">
                 <a:solidFill>
-                  <a:srgbClr val="1C1C1C"/>
+                  <a:srgbClr val="1F1942"/>
                 </a:solidFill>
                 <a:latin typeface="Arial"/>
               </a:rPr>
@@ -8320,7 +8320,7 @@
             <a:avLst/>
           </a:prstGeom>
           <a:solidFill>
-            <a:srgbClr val="C3002B"/>
+            <a:srgbClr val="2A2250"/>
           </a:solidFill>
           <a:ln>
             <a:noFill/>
@@ -8368,7 +8368,7 @@
           </a:solidFill>
           <a:ln w="6350">
             <a:solidFill>
-              <a:srgbClr val="E2E2E2"/>
+              <a:srgbClr val="E2DED6"/>
             </a:solidFill>
           </a:ln>
           <a:effectLst/>
@@ -8410,11 +8410,11 @@
             <a:avLst/>
           </a:prstGeom>
           <a:solidFill>
-            <a:srgbClr val="1C1C1C"/>
+            <a:srgbClr val="1F1942"/>
           </a:solidFill>
           <a:ln w="6350">
             <a:solidFill>
-              <a:srgbClr val="E2E2E2"/>
+              <a:srgbClr val="E2DED6"/>
             </a:solidFill>
           </a:ln>
           <a:effectLst/>
@@ -8537,7 +8537,7 @@
             <a:r>
               <a:rPr sz="1000" b="0" i="0">
                 <a:solidFill>
-                  <a:srgbClr val="1C1C1C"/>
+                  <a:srgbClr val="1F1942"/>
                 </a:solidFill>
                 <a:latin typeface="Arial"/>
               </a:rPr>
@@ -8561,7 +8561,7 @@
             <a:avLst/>
           </a:prstGeom>
           <a:solidFill>
-            <a:srgbClr val="C3002B"/>
+            <a:srgbClr val="2A2250"/>
           </a:solidFill>
           <a:ln>
             <a:noFill/>
@@ -8609,7 +8609,7 @@
           </a:solidFill>
           <a:ln w="6350">
             <a:solidFill>
-              <a:srgbClr val="E2E2E2"/>
+              <a:srgbClr val="E2DED6"/>
             </a:solidFill>
           </a:ln>
           <a:effectLst/>
@@ -8651,11 +8651,11 @@
             <a:avLst/>
           </a:prstGeom>
           <a:solidFill>
-            <a:srgbClr val="1C1C1C"/>
+            <a:srgbClr val="1F1942"/>
           </a:solidFill>
           <a:ln w="6350">
             <a:solidFill>
-              <a:srgbClr val="E2E2E2"/>
+              <a:srgbClr val="E2DED6"/>
             </a:solidFill>
           </a:ln>
           <a:effectLst/>
@@ -8778,7 +8778,7 @@
             <a:r>
               <a:rPr sz="1000" b="0" i="0">
                 <a:solidFill>
-                  <a:srgbClr val="1C1C1C"/>
+                  <a:srgbClr val="1F1942"/>
                 </a:solidFill>
                 <a:latin typeface="Arial"/>
               </a:rPr>
@@ -8802,11 +8802,11 @@
             <a:avLst/>
           </a:prstGeom>
           <a:solidFill>
-            <a:srgbClr val="F3F3F3"/>
+            <a:srgbClr val="F4EFE6"/>
           </a:solidFill>
           <a:ln w="6350">
             <a:solidFill>
-              <a:srgbClr val="E2E2E2"/>
+              <a:srgbClr val="E2DED6"/>
             </a:solidFill>
           </a:ln>
           <a:effectLst/>
@@ -8859,7 +8859,7 @@
             <a:r>
               <a:rPr sz="1150" b="1" i="0">
                 <a:solidFill>
-                  <a:srgbClr val="1C1C1C"/>
+                  <a:srgbClr val="1F1942"/>
                 </a:solidFill>
                 <a:latin typeface="Arial"/>
               </a:rPr>
@@ -8895,13 +8895,13 @@
         <p:spPr>
           <a:xfrm>
             <a:off x="0" y="0"/>
-            <a:ext cx="164592" cy="6858000"/>
+            <a:ext cx="128016" cy="6858000"/>
           </a:xfrm>
           <a:prstGeom prst="rect">
             <a:avLst/>
           </a:prstGeom>
           <a:solidFill>
-            <a:srgbClr val="C3002B"/>
+            <a:srgbClr val="F4B634"/>
           </a:solidFill>
           <a:ln>
             <a:noFill/>
@@ -8956,7 +8956,7 @@
             <a:r>
               <a:rPr sz="1000" b="1" i="0">
                 <a:solidFill>
-                  <a:srgbClr val="C3002B"/>
+                  <a:srgbClr val="F4B634"/>
                 </a:solidFill>
                 <a:latin typeface="Arial"/>
               </a:rPr>
@@ -8991,7 +8991,7 @@
             <a:r>
               <a:rPr sz="2300" b="1" i="0">
                 <a:solidFill>
-                  <a:srgbClr val="1C1C1C"/>
+                  <a:srgbClr val="1F1942"/>
                 </a:solidFill>
                 <a:latin typeface="Arial"/>
               </a:rPr>
@@ -9026,7 +9026,7 @@
             <a:r>
               <a:rPr sz="800" b="0" i="0">
                 <a:solidFill>
-                  <a:srgbClr val="7A7A7A"/>
+                  <a:srgbClr val="6B6467"/>
                 </a:solidFill>
                 <a:latin typeface="Arial"/>
               </a:rPr>
@@ -9061,7 +9061,7 @@
             <a:r>
               <a:rPr sz="1000" b="0" i="0">
                 <a:solidFill>
-                  <a:srgbClr val="7A7A7A"/>
+                  <a:srgbClr val="6B6467"/>
                 </a:solidFill>
                 <a:latin typeface="Arial"/>
               </a:rPr>
@@ -9085,7 +9085,7 @@
             <a:avLst/>
           </a:prstGeom>
           <a:solidFill>
-            <a:srgbClr val="C3002B"/>
+            <a:srgbClr val="1F1942"/>
           </a:solidFill>
           <a:ln>
             <a:noFill/>
@@ -9140,7 +9140,7 @@
             <a:r>
               <a:rPr sz="800" b="1" i="0">
                 <a:solidFill>
-                  <a:srgbClr val="FFFFFF"/>
+                  <a:srgbClr val="F4B634"/>
                 </a:solidFill>
                 <a:latin typeface="Arial"/>
               </a:rPr>
@@ -9175,7 +9175,7 @@
             <a:r>
               <a:rPr sz="850" b="0" i="0">
                 <a:solidFill>
-                  <a:srgbClr val="7A7A7A"/>
+                  <a:srgbClr val="6B6467"/>
                 </a:solidFill>
                 <a:latin typeface="Arial"/>
               </a:rPr>
@@ -9210,7 +9210,7 @@
             <a:r>
               <a:rPr sz="850" b="0" i="0">
                 <a:solidFill>
-                  <a:srgbClr val="7A7A7A"/>
+                  <a:srgbClr val="6B6467"/>
                 </a:solidFill>
                 <a:latin typeface="Arial"/>
               </a:rPr>
@@ -9245,7 +9245,7 @@
             <a:r>
               <a:rPr sz="850" b="0" i="0">
                 <a:solidFill>
-                  <a:srgbClr val="7A7A7A"/>
+                  <a:srgbClr val="6B6467"/>
                 </a:solidFill>
                 <a:latin typeface="Arial"/>
               </a:rPr>
@@ -9280,7 +9280,7 @@
             <a:r>
               <a:rPr sz="850" b="0" i="0">
                 <a:solidFill>
-                  <a:srgbClr val="7A7A7A"/>
+                  <a:srgbClr val="6B6467"/>
                 </a:solidFill>
                 <a:latin typeface="Arial"/>
               </a:rPr>
@@ -9315,7 +9315,7 @@
             <a:r>
               <a:rPr sz="850" b="0" i="0">
                 <a:solidFill>
-                  <a:srgbClr val="7A7A7A"/>
+                  <a:srgbClr val="6B6467"/>
                 </a:solidFill>
                 <a:latin typeface="Arial"/>
               </a:rPr>
@@ -9350,7 +9350,7 @@
             <a:r>
               <a:rPr sz="850" b="0" i="0">
                 <a:solidFill>
-                  <a:srgbClr val="7A7A7A"/>
+                  <a:srgbClr val="6B6467"/>
                 </a:solidFill>
                 <a:latin typeface="Arial"/>
               </a:rPr>
@@ -9385,7 +9385,7 @@
             <a:r>
               <a:rPr sz="850" b="0" i="0">
                 <a:solidFill>
-                  <a:srgbClr val="7A7A7A"/>
+                  <a:srgbClr val="6B6467"/>
                 </a:solidFill>
                 <a:latin typeface="Arial"/>
               </a:rPr>
@@ -9420,7 +9420,7 @@
             <a:r>
               <a:rPr sz="850" b="0" i="0">
                 <a:solidFill>
-                  <a:srgbClr val="7A7A7A"/>
+                  <a:srgbClr val="6B6467"/>
                 </a:solidFill>
                 <a:latin typeface="Arial"/>
               </a:rPr>
@@ -9455,7 +9455,7 @@
             <a:r>
               <a:rPr sz="900" b="0" i="0">
                 <a:solidFill>
-                  <a:srgbClr val="1C1C1C"/>
+                  <a:srgbClr val="1F1942"/>
                 </a:solidFill>
                 <a:latin typeface="Arial"/>
               </a:rPr>
@@ -9479,7 +9479,7 @@
             <a:avLst/>
           </a:prstGeom>
           <a:solidFill>
-            <a:srgbClr val="C3002B"/>
+            <a:srgbClr val="F4B634"/>
           </a:solidFill>
           <a:ln>
             <a:noFill/>
@@ -9534,7 +9534,7 @@
             <a:r>
               <a:rPr sz="900" b="0" i="0">
                 <a:solidFill>
-                  <a:srgbClr val="1C1C1C"/>
+                  <a:srgbClr val="1F1942"/>
                 </a:solidFill>
                 <a:latin typeface="Arial"/>
               </a:rPr>
@@ -9613,7 +9613,7 @@
             <a:r>
               <a:rPr sz="900" b="0" i="0">
                 <a:solidFill>
-                  <a:srgbClr val="1C1C1C"/>
+                  <a:srgbClr val="1F1942"/>
                 </a:solidFill>
                 <a:latin typeface="Arial"/>
               </a:rPr>
@@ -9637,7 +9637,7 @@
             <a:avLst/>
           </a:prstGeom>
           <a:solidFill>
-            <a:srgbClr val="C3002B"/>
+            <a:srgbClr val="F4B634"/>
           </a:solidFill>
           <a:ln>
             <a:noFill/>
@@ -9692,7 +9692,7 @@
             <a:r>
               <a:rPr sz="900" b="0" i="0">
                 <a:solidFill>
-                  <a:srgbClr val="1C1C1C"/>
+                  <a:srgbClr val="1F1942"/>
                 </a:solidFill>
                 <a:latin typeface="Arial"/>
               </a:rPr>
@@ -9771,7 +9771,7 @@
             <a:r>
               <a:rPr sz="900" b="0" i="0">
                 <a:solidFill>
-                  <a:srgbClr val="1C1C1C"/>
+                  <a:srgbClr val="1F1942"/>
                 </a:solidFill>
                 <a:latin typeface="Arial"/>
               </a:rPr>
@@ -9850,7 +9850,7 @@
             <a:r>
               <a:rPr sz="900" b="0" i="0">
                 <a:solidFill>
-                  <a:srgbClr val="1C1C1C"/>
+                  <a:srgbClr val="1F1942"/>
                 </a:solidFill>
                 <a:latin typeface="Arial"/>
               </a:rPr>
@@ -9874,7 +9874,7 @@
             <a:avLst/>
           </a:prstGeom>
           <a:solidFill>
-            <a:srgbClr val="C3002B"/>
+            <a:srgbClr val="F4B634"/>
           </a:solidFill>
           <a:ln>
             <a:noFill/>
@@ -9929,7 +9929,7 @@
             <a:r>
               <a:rPr sz="900" b="0" i="0">
                 <a:solidFill>
-                  <a:srgbClr val="1C1C1C"/>
+                  <a:srgbClr val="1F1942"/>
                 </a:solidFill>
                 <a:latin typeface="Arial"/>
               </a:rPr>
@@ -10008,7 +10008,7 @@
             <a:r>
               <a:rPr sz="900" b="0" i="0">
                 <a:solidFill>
-                  <a:srgbClr val="1C1C1C"/>
+                  <a:srgbClr val="1F1942"/>
                 </a:solidFill>
                 <a:latin typeface="Arial"/>
               </a:rPr>
@@ -10032,7 +10032,7 @@
             <a:avLst/>
           </a:prstGeom>
           <a:solidFill>
-            <a:srgbClr val="C3002B"/>
+            <a:srgbClr val="F4B634"/>
           </a:solidFill>
           <a:ln>
             <a:noFill/>
@@ -10087,7 +10087,7 @@
             <a:r>
               <a:rPr sz="900" b="0" i="0">
                 <a:solidFill>
-                  <a:srgbClr val="1C1C1C"/>
+                  <a:srgbClr val="1F1942"/>
                 </a:solidFill>
                 <a:latin typeface="Arial"/>
               </a:rPr>
@@ -10155,11 +10155,11 @@
             <a:avLst/>
           </a:prstGeom>
           <a:solidFill>
-            <a:srgbClr val="F3F3F3"/>
+            <a:srgbClr val="F4EFE6"/>
           </a:solidFill>
           <a:ln w="6350">
             <a:solidFill>
-              <a:srgbClr val="E2E2E2"/>
+              <a:srgbClr val="E2DED6"/>
             </a:solidFill>
           </a:ln>
           <a:effectLst/>
@@ -10212,7 +10212,7 @@
             <a:r>
               <a:rPr sz="900" b="0" i="0">
                 <a:solidFill>
-                  <a:srgbClr val="1C1C1C"/>
+                  <a:srgbClr val="1F1942"/>
                 </a:solidFill>
                 <a:latin typeface="Arial"/>
               </a:rPr>
@@ -10247,7 +10247,7 @@
             <a:r>
               <a:rPr sz="800" b="0" i="1">
                 <a:solidFill>
-                  <a:srgbClr val="7A7A7A"/>
+                  <a:srgbClr val="6B6467"/>
                 </a:solidFill>
                 <a:latin typeface="Arial"/>
               </a:rPr>
@@ -10283,13 +10283,13 @@
         <p:spPr>
           <a:xfrm>
             <a:off x="0" y="0"/>
-            <a:ext cx="164592" cy="6858000"/>
+            <a:ext cx="128016" cy="6858000"/>
           </a:xfrm>
           <a:prstGeom prst="rect">
             <a:avLst/>
           </a:prstGeom>
           <a:solidFill>
-            <a:srgbClr val="C3002B"/>
+            <a:srgbClr val="F4B634"/>
           </a:solidFill>
           <a:ln>
             <a:noFill/>
@@ -10344,7 +10344,7 @@
             <a:r>
               <a:rPr sz="1000" b="1" i="0">
                 <a:solidFill>
-                  <a:srgbClr val="C3002B"/>
+                  <a:srgbClr val="F4B634"/>
                 </a:solidFill>
                 <a:latin typeface="Arial"/>
               </a:rPr>
@@ -10379,7 +10379,7 @@
             <a:r>
               <a:rPr sz="2300" b="1" i="0">
                 <a:solidFill>
-                  <a:srgbClr val="1C1C1C"/>
+                  <a:srgbClr val="1F1942"/>
                 </a:solidFill>
                 <a:latin typeface="Arial"/>
               </a:rPr>
@@ -10391,7 +10391,7 @@
             <a:r>
               <a:rPr sz="2300" b="1" i="0">
                 <a:solidFill>
-                  <a:srgbClr val="1C1C1C"/>
+                  <a:srgbClr val="1F1942"/>
                 </a:solidFill>
                 <a:latin typeface="Arial"/>
               </a:rPr>
@@ -10426,7 +10426,7 @@
             <a:r>
               <a:rPr sz="800" b="0" i="0">
                 <a:solidFill>
-                  <a:srgbClr val="7A7A7A"/>
+                  <a:srgbClr val="6B6467"/>
                 </a:solidFill>
                 <a:latin typeface="Arial"/>
               </a:rPr>
@@ -10461,7 +10461,7 @@
             <a:r>
               <a:rPr sz="1000" b="0" i="0">
                 <a:solidFill>
-                  <a:srgbClr val="7A7A7A"/>
+                  <a:srgbClr val="6B6467"/>
                 </a:solidFill>
                 <a:latin typeface="Arial"/>
               </a:rPr>
@@ -10485,7 +10485,7 @@
             <a:avLst/>
           </a:prstGeom>
           <a:solidFill>
-            <a:srgbClr val="C3002B"/>
+            <a:srgbClr val="1F1942"/>
           </a:solidFill>
           <a:ln>
             <a:noFill/>
@@ -10540,7 +10540,7 @@
             <a:r>
               <a:rPr sz="800" b="1" i="0">
                 <a:solidFill>
-                  <a:srgbClr val="FFFFFF"/>
+                  <a:srgbClr val="F4B634"/>
                 </a:solidFill>
                 <a:latin typeface="Arial"/>
               </a:rPr>
@@ -10568,7 +10568,7 @@
           </a:solidFill>
           <a:ln w="9525">
             <a:solidFill>
-              <a:srgbClr val="7A7A7A"/>
+              <a:srgbClr val="6B6467"/>
             </a:solidFill>
           </a:ln>
           <a:effectLst/>
@@ -10621,7 +10621,7 @@
             <a:r>
               <a:rPr sz="1000" b="1" i="0">
                 <a:solidFill>
-                  <a:srgbClr val="1C1C1C"/>
+                  <a:srgbClr val="1F1942"/>
                 </a:solidFill>
                 <a:latin typeface="Arial"/>
               </a:rPr>
@@ -10633,7 +10633,7 @@
             <a:r>
               <a:rPr sz="1000" b="1" i="0">
                 <a:solidFill>
-                  <a:srgbClr val="1C1C1C"/>
+                  <a:srgbClr val="1F1942"/>
                 </a:solidFill>
                 <a:latin typeface="Arial"/>
               </a:rPr>
@@ -10661,7 +10661,7 @@
           </a:solidFill>
           <a:ln w="9525">
             <a:solidFill>
-              <a:srgbClr val="7A7A7A"/>
+              <a:srgbClr val="6B6467"/>
             </a:solidFill>
           </a:ln>
           <a:effectLst/>
@@ -10714,7 +10714,7 @@
             <a:r>
               <a:rPr sz="1000" b="1" i="0">
                 <a:solidFill>
-                  <a:srgbClr val="1C1C1C"/>
+                  <a:srgbClr val="1F1942"/>
                 </a:solidFill>
                 <a:latin typeface="Arial"/>
               </a:rPr>
@@ -10726,7 +10726,7 @@
             <a:r>
               <a:rPr sz="1000" b="1" i="0">
                 <a:solidFill>
-                  <a:srgbClr val="1C1C1C"/>
+                  <a:srgbClr val="1F1942"/>
                 </a:solidFill>
                 <a:latin typeface="Arial"/>
               </a:rPr>
@@ -10750,11 +10750,11 @@
             <a:avLst/>
           </a:prstGeom>
           <a:solidFill>
-            <a:srgbClr val="C3002B"/>
+            <a:srgbClr val="2A2250"/>
           </a:solidFill>
           <a:ln w="9525">
             <a:solidFill>
-              <a:srgbClr val="C3002B"/>
+              <a:srgbClr val="2A2250"/>
             </a:solidFill>
           </a:ln>
           <a:effectLst/>
@@ -10855,11 +10855,11 @@
             <a:avLst/>
           </a:prstGeom>
           <a:solidFill>
-            <a:srgbClr val="C3002B"/>
+            <a:srgbClr val="2A2250"/>
           </a:solidFill>
           <a:ln w="9525">
             <a:solidFill>
-              <a:srgbClr val="C3002B"/>
+              <a:srgbClr val="2A2250"/>
             </a:solidFill>
           </a:ln>
           <a:effectLst/>
@@ -10976,7 +10976,7 @@
           </a:solidFill>
           <a:ln w="9525">
             <a:solidFill>
-              <a:srgbClr val="7A7A7A"/>
+              <a:srgbClr val="6B6467"/>
             </a:solidFill>
           </a:ln>
           <a:effectLst/>
@@ -11029,7 +11029,7 @@
             <a:r>
               <a:rPr sz="1000" b="1" i="0">
                 <a:solidFill>
-                  <a:srgbClr val="1C1C1C"/>
+                  <a:srgbClr val="1F1942"/>
                 </a:solidFill>
                 <a:latin typeface="Arial"/>
               </a:rPr>
@@ -11041,7 +11041,7 @@
             <a:r>
               <a:rPr sz="1000" b="1" i="0">
                 <a:solidFill>
-                  <a:srgbClr val="1C1C1C"/>
+                  <a:srgbClr val="1F1942"/>
                 </a:solidFill>
                 <a:latin typeface="Arial"/>
               </a:rPr>
@@ -11069,7 +11069,7 @@
           </a:solidFill>
           <a:ln w="9525">
             <a:solidFill>
-              <a:srgbClr val="7A7A7A"/>
+              <a:srgbClr val="6B6467"/>
             </a:solidFill>
           </a:ln>
           <a:effectLst/>
@@ -11122,7 +11122,7 @@
             <a:r>
               <a:rPr sz="1000" b="1" i="0">
                 <a:solidFill>
-                  <a:srgbClr val="1C1C1C"/>
+                  <a:srgbClr val="1F1942"/>
                 </a:solidFill>
                 <a:latin typeface="Arial"/>
               </a:rPr>
@@ -11134,7 +11134,7 @@
             <a:r>
               <a:rPr sz="1000" b="1" i="0">
                 <a:solidFill>
-                  <a:srgbClr val="1C1C1C"/>
+                  <a:srgbClr val="1F1942"/>
                 </a:solidFill>
                 <a:latin typeface="Arial"/>
               </a:rPr>
@@ -11158,11 +11158,11 @@
             <a:avLst/>
           </a:prstGeom>
           <a:solidFill>
-            <a:srgbClr val="F3F3F3"/>
+            <a:srgbClr val="F4EFE6"/>
           </a:solidFill>
           <a:ln w="6350">
             <a:solidFill>
-              <a:srgbClr val="E2E2E2"/>
+              <a:srgbClr val="E2DED6"/>
             </a:solidFill>
           </a:ln>
           <a:effectLst/>
@@ -11215,7 +11215,7 @@
             <a:r>
               <a:rPr sz="1150" b="1" i="0">
                 <a:solidFill>
-                  <a:srgbClr val="1C1C1C"/>
+                  <a:srgbClr val="1F1942"/>
                 </a:solidFill>
                 <a:latin typeface="Arial"/>
               </a:rPr>
@@ -11251,13 +11251,13 @@
         <p:spPr>
           <a:xfrm>
             <a:off x="0" y="0"/>
-            <a:ext cx="164592" cy="6858000"/>
+            <a:ext cx="128016" cy="6858000"/>
           </a:xfrm>
           <a:prstGeom prst="rect">
             <a:avLst/>
           </a:prstGeom>
           <a:solidFill>
-            <a:srgbClr val="C3002B"/>
+            <a:srgbClr val="F4B634"/>
           </a:solidFill>
           <a:ln>
             <a:noFill/>
@@ -11312,7 +11312,7 @@
             <a:r>
               <a:rPr sz="1000" b="1" i="0">
                 <a:solidFill>
-                  <a:srgbClr val="C3002B"/>
+                  <a:srgbClr val="F4B634"/>
                 </a:solidFill>
                 <a:latin typeface="Arial"/>
               </a:rPr>
@@ -11347,7 +11347,7 @@
             <a:r>
               <a:rPr sz="2300" b="1" i="0">
                 <a:solidFill>
-                  <a:srgbClr val="1C1C1C"/>
+                  <a:srgbClr val="1F1942"/>
                 </a:solidFill>
                 <a:latin typeface="Arial"/>
               </a:rPr>
@@ -11359,7 +11359,7 @@
             <a:r>
               <a:rPr sz="2300" b="1" i="0">
                 <a:solidFill>
-                  <a:srgbClr val="1C1C1C"/>
+                  <a:srgbClr val="1F1942"/>
                 </a:solidFill>
                 <a:latin typeface="Arial"/>
               </a:rPr>
@@ -11394,7 +11394,7 @@
             <a:r>
               <a:rPr sz="800" b="0" i="0">
                 <a:solidFill>
-                  <a:srgbClr val="7A7A7A"/>
+                  <a:srgbClr val="6B6467"/>
                 </a:solidFill>
                 <a:latin typeface="Arial"/>
               </a:rPr>
@@ -11429,7 +11429,7 @@
             <a:r>
               <a:rPr sz="1000" b="0" i="0">
                 <a:solidFill>
-                  <a:srgbClr val="7A7A7A"/>
+                  <a:srgbClr val="6B6467"/>
                 </a:solidFill>
                 <a:latin typeface="Arial"/>
               </a:rPr>
@@ -11453,7 +11453,7 @@
             <a:avLst/>
           </a:prstGeom>
           <a:solidFill>
-            <a:srgbClr val="C3002B"/>
+            <a:srgbClr val="1F1942"/>
           </a:solidFill>
           <a:ln>
             <a:noFill/>
@@ -11508,7 +11508,7 @@
             <a:r>
               <a:rPr sz="800" b="1" i="0">
                 <a:solidFill>
-                  <a:srgbClr val="FFFFFF"/>
+                  <a:srgbClr val="F4B634"/>
                 </a:solidFill>
                 <a:latin typeface="Arial"/>
               </a:rPr>
@@ -11532,11 +11532,11 @@
             <a:avLst/>
           </a:prstGeom>
           <a:solidFill>
-            <a:srgbClr val="1C1C1C"/>
+            <a:srgbClr val="1F1942"/>
           </a:solidFill>
           <a:ln w="6350">
             <a:solidFill>
-              <a:srgbClr val="E2E2E2"/>
+              <a:srgbClr val="E2DED6"/>
             </a:solidFill>
           </a:ln>
           <a:effectLst/>
@@ -11613,11 +11613,11 @@
             <a:avLst/>
           </a:prstGeom>
           <a:solidFill>
-            <a:srgbClr val="1C1C1C"/>
+            <a:srgbClr val="1F1942"/>
           </a:solidFill>
           <a:ln w="6350">
             <a:solidFill>
-              <a:srgbClr val="E2E2E2"/>
+              <a:srgbClr val="E2DED6"/>
             </a:solidFill>
           </a:ln>
           <a:effectLst/>
@@ -11694,11 +11694,11 @@
             <a:avLst/>
           </a:prstGeom>
           <a:solidFill>
-            <a:srgbClr val="1C1C1C"/>
+            <a:srgbClr val="1F1942"/>
           </a:solidFill>
           <a:ln w="6350">
             <a:solidFill>
-              <a:srgbClr val="E2E2E2"/>
+              <a:srgbClr val="E2DED6"/>
             </a:solidFill>
           </a:ln>
           <a:effectLst/>
@@ -11775,11 +11775,11 @@
             <a:avLst/>
           </a:prstGeom>
           <a:solidFill>
-            <a:srgbClr val="1C1C1C"/>
+            <a:srgbClr val="1F1942"/>
           </a:solidFill>
           <a:ln w="6350">
             <a:solidFill>
-              <a:srgbClr val="E2E2E2"/>
+              <a:srgbClr val="E2DED6"/>
             </a:solidFill>
           </a:ln>
           <a:effectLst/>
@@ -11856,11 +11856,11 @@
             <a:avLst/>
           </a:prstGeom>
           <a:solidFill>
-            <a:srgbClr val="1C1C1C"/>
+            <a:srgbClr val="1F1942"/>
           </a:solidFill>
           <a:ln w="6350">
             <a:solidFill>
-              <a:srgbClr val="E2E2E2"/>
+              <a:srgbClr val="E2DED6"/>
             </a:solidFill>
           </a:ln>
           <a:effectLst/>
@@ -11941,7 +11941,7 @@
           </a:solidFill>
           <a:ln w="6350">
             <a:solidFill>
-              <a:srgbClr val="E2E2E2"/>
+              <a:srgbClr val="E2DED6"/>
             </a:solidFill>
           </a:ln>
           <a:effectLst/>
@@ -11994,7 +11994,7 @@
             <a:r>
               <a:rPr sz="900" b="0" i="0">
                 <a:solidFill>
-                  <a:srgbClr val="1C1C1C"/>
+                  <a:srgbClr val="1F1942"/>
                 </a:solidFill>
                 <a:latin typeface="Arial"/>
               </a:rPr>
@@ -12022,7 +12022,7 @@
           </a:solidFill>
           <a:ln w="6350">
             <a:solidFill>
-              <a:srgbClr val="E2E2E2"/>
+              <a:srgbClr val="E2DED6"/>
             </a:solidFill>
           </a:ln>
           <a:effectLst/>
@@ -12075,7 +12075,7 @@
             <a:r>
               <a:rPr sz="900" b="1" i="0">
                 <a:solidFill>
-                  <a:srgbClr val="C3002B"/>
+                  <a:srgbClr val="2A2250"/>
                 </a:solidFill>
                 <a:latin typeface="Arial"/>
               </a:rPr>
@@ -12103,7 +12103,7 @@
           </a:solidFill>
           <a:ln w="6350">
             <a:solidFill>
-              <a:srgbClr val="E2E2E2"/>
+              <a:srgbClr val="E2DED6"/>
             </a:solidFill>
           </a:ln>
           <a:effectLst/>
@@ -12156,7 +12156,7 @@
             <a:r>
               <a:rPr sz="900" b="0" i="0">
                 <a:solidFill>
-                  <a:srgbClr val="1C1C1C"/>
+                  <a:srgbClr val="1F1942"/>
                 </a:solidFill>
                 <a:latin typeface="Arial"/>
               </a:rPr>
@@ -12184,7 +12184,7 @@
           </a:solidFill>
           <a:ln w="6350">
             <a:solidFill>
-              <a:srgbClr val="E2E2E2"/>
+              <a:srgbClr val="E2DED6"/>
             </a:solidFill>
           </a:ln>
           <a:effectLst/>
@@ -12237,7 +12237,7 @@
             <a:r>
               <a:rPr sz="900" b="0" i="0">
                 <a:solidFill>
-                  <a:srgbClr val="1C1C1C"/>
+                  <a:srgbClr val="1F1942"/>
                 </a:solidFill>
                 <a:latin typeface="Arial"/>
               </a:rPr>
@@ -12265,7 +12265,7 @@
           </a:solidFill>
           <a:ln w="6350">
             <a:solidFill>
-              <a:srgbClr val="E2E2E2"/>
+              <a:srgbClr val="E2DED6"/>
             </a:solidFill>
           </a:ln>
           <a:effectLst/>
@@ -12318,7 +12318,7 @@
             <a:r>
               <a:rPr sz="900" b="1" i="0">
                 <a:solidFill>
-                  <a:srgbClr val="1C1C1C"/>
+                  <a:srgbClr val="1F1942"/>
                 </a:solidFill>
                 <a:latin typeface="Arial"/>
               </a:rPr>
@@ -12342,11 +12342,11 @@
             <a:avLst/>
           </a:prstGeom>
           <a:solidFill>
-            <a:srgbClr val="F3F3F3"/>
+            <a:srgbClr val="F4EFE6"/>
           </a:solidFill>
           <a:ln w="6350">
             <a:solidFill>
-              <a:srgbClr val="E2E2E2"/>
+              <a:srgbClr val="E2DED6"/>
             </a:solidFill>
           </a:ln>
           <a:effectLst/>
@@ -12399,7 +12399,7 @@
             <a:r>
               <a:rPr sz="900" b="0" i="0">
                 <a:solidFill>
-                  <a:srgbClr val="1C1C1C"/>
+                  <a:srgbClr val="1F1942"/>
                 </a:solidFill>
                 <a:latin typeface="Arial"/>
               </a:rPr>
@@ -12423,11 +12423,11 @@
             <a:avLst/>
           </a:prstGeom>
           <a:solidFill>
-            <a:srgbClr val="F3F3F3"/>
+            <a:srgbClr val="F4EFE6"/>
           </a:solidFill>
           <a:ln w="6350">
             <a:solidFill>
-              <a:srgbClr val="E2E2E2"/>
+              <a:srgbClr val="E2DED6"/>
             </a:solidFill>
           </a:ln>
           <a:effectLst/>
@@ -12480,7 +12480,7 @@
             <a:r>
               <a:rPr sz="900" b="1" i="0">
                 <a:solidFill>
-                  <a:srgbClr val="C3002B"/>
+                  <a:srgbClr val="2A2250"/>
                 </a:solidFill>
                 <a:latin typeface="Arial"/>
               </a:rPr>
@@ -12504,11 +12504,11 @@
             <a:avLst/>
           </a:prstGeom>
           <a:solidFill>
-            <a:srgbClr val="F3F3F3"/>
+            <a:srgbClr val="F4EFE6"/>
           </a:solidFill>
           <a:ln w="6350">
             <a:solidFill>
-              <a:srgbClr val="E2E2E2"/>
+              <a:srgbClr val="E2DED6"/>
             </a:solidFill>
           </a:ln>
           <a:effectLst/>
@@ -12561,7 +12561,7 @@
             <a:r>
               <a:rPr sz="900" b="0" i="0">
                 <a:solidFill>
-                  <a:srgbClr val="1C1C1C"/>
+                  <a:srgbClr val="1F1942"/>
                 </a:solidFill>
                 <a:latin typeface="Arial"/>
               </a:rPr>
@@ -12585,11 +12585,11 @@
             <a:avLst/>
           </a:prstGeom>
           <a:solidFill>
-            <a:srgbClr val="F3F3F3"/>
+            <a:srgbClr val="F4EFE6"/>
           </a:solidFill>
           <a:ln w="6350">
             <a:solidFill>
-              <a:srgbClr val="E2E2E2"/>
+              <a:srgbClr val="E2DED6"/>
             </a:solidFill>
           </a:ln>
           <a:effectLst/>
@@ -12642,7 +12642,7 @@
             <a:r>
               <a:rPr sz="900" b="0" i="0">
                 <a:solidFill>
-                  <a:srgbClr val="1C1C1C"/>
+                  <a:srgbClr val="1F1942"/>
                 </a:solidFill>
                 <a:latin typeface="Arial"/>
               </a:rPr>
@@ -12666,11 +12666,11 @@
             <a:avLst/>
           </a:prstGeom>
           <a:solidFill>
-            <a:srgbClr val="F3F3F3"/>
+            <a:srgbClr val="F4EFE6"/>
           </a:solidFill>
           <a:ln w="6350">
             <a:solidFill>
-              <a:srgbClr val="E2E2E2"/>
+              <a:srgbClr val="E2DED6"/>
             </a:solidFill>
           </a:ln>
           <a:effectLst/>
@@ -12723,7 +12723,7 @@
             <a:r>
               <a:rPr sz="900" b="1" i="0">
                 <a:solidFill>
-                  <a:srgbClr val="1C1C1C"/>
+                  <a:srgbClr val="1F1942"/>
                 </a:solidFill>
                 <a:latin typeface="Arial"/>
               </a:rPr>
@@ -12751,7 +12751,7 @@
           </a:solidFill>
           <a:ln w="6350">
             <a:solidFill>
-              <a:srgbClr val="E2E2E2"/>
+              <a:srgbClr val="E2DED6"/>
             </a:solidFill>
           </a:ln>
           <a:effectLst/>
@@ -12804,7 +12804,7 @@
             <a:r>
               <a:rPr sz="900" b="0" i="0">
                 <a:solidFill>
-                  <a:srgbClr val="1C1C1C"/>
+                  <a:srgbClr val="1F1942"/>
                 </a:solidFill>
                 <a:latin typeface="Arial"/>
               </a:rPr>
@@ -12832,7 +12832,7 @@
           </a:solidFill>
           <a:ln w="6350">
             <a:solidFill>
-              <a:srgbClr val="E2E2E2"/>
+              <a:srgbClr val="E2DED6"/>
             </a:solidFill>
           </a:ln>
           <a:effectLst/>
@@ -12885,7 +12885,7 @@
             <a:r>
               <a:rPr sz="900" b="0" i="0">
                 <a:solidFill>
-                  <a:srgbClr val="1C1C1C"/>
+                  <a:srgbClr val="1F1942"/>
                 </a:solidFill>
                 <a:latin typeface="Arial"/>
               </a:rPr>
@@ -12913,7 +12913,7 @@
           </a:solidFill>
           <a:ln w="6350">
             <a:solidFill>
-              <a:srgbClr val="E2E2E2"/>
+              <a:srgbClr val="E2DED6"/>
             </a:solidFill>
           </a:ln>
           <a:effectLst/>
@@ -12966,7 +12966,7 @@
             <a:r>
               <a:rPr sz="900" b="1" i="0">
                 <a:solidFill>
-                  <a:srgbClr val="C3002B"/>
+                  <a:srgbClr val="2A2250"/>
                 </a:solidFill>
                 <a:latin typeface="Arial"/>
               </a:rPr>
@@ -12994,7 +12994,7 @@
           </a:solidFill>
           <a:ln w="6350">
             <a:solidFill>
-              <a:srgbClr val="E2E2E2"/>
+              <a:srgbClr val="E2DED6"/>
             </a:solidFill>
           </a:ln>
           <a:effectLst/>
@@ -13047,7 +13047,7 @@
             <a:r>
               <a:rPr sz="900" b="0" i="0">
                 <a:solidFill>
-                  <a:srgbClr val="1C1C1C"/>
+                  <a:srgbClr val="1F1942"/>
                 </a:solidFill>
                 <a:latin typeface="Arial"/>
               </a:rPr>
@@ -13075,7 +13075,7 @@
           </a:solidFill>
           <a:ln w="6350">
             <a:solidFill>
-              <a:srgbClr val="E2E2E2"/>
+              <a:srgbClr val="E2DED6"/>
             </a:solidFill>
           </a:ln>
           <a:effectLst/>
@@ -13128,7 +13128,7 @@
             <a:r>
               <a:rPr sz="900" b="1" i="0">
                 <a:solidFill>
-                  <a:srgbClr val="1C1C1C"/>
+                  <a:srgbClr val="1F1942"/>
                 </a:solidFill>
                 <a:latin typeface="Arial"/>
               </a:rPr>
@@ -13152,11 +13152,11 @@
             <a:avLst/>
           </a:prstGeom>
           <a:solidFill>
-            <a:srgbClr val="F3F3F3"/>
+            <a:srgbClr val="F4EFE6"/>
           </a:solidFill>
           <a:ln w="6350">
             <a:solidFill>
-              <a:srgbClr val="E2E2E2"/>
+              <a:srgbClr val="E2DED6"/>
             </a:solidFill>
           </a:ln>
           <a:effectLst/>
@@ -13209,7 +13209,7 @@
             <a:r>
               <a:rPr sz="900" b="0" i="0">
                 <a:solidFill>
-                  <a:srgbClr val="1C1C1C"/>
+                  <a:srgbClr val="1F1942"/>
                 </a:solidFill>
                 <a:latin typeface="Arial"/>
               </a:rPr>
@@ -13233,11 +13233,11 @@
             <a:avLst/>
           </a:prstGeom>
           <a:solidFill>
-            <a:srgbClr val="F3F3F3"/>
+            <a:srgbClr val="F4EFE6"/>
           </a:solidFill>
           <a:ln w="6350">
             <a:solidFill>
-              <a:srgbClr val="E2E2E2"/>
+              <a:srgbClr val="E2DED6"/>
             </a:solidFill>
           </a:ln>
           <a:effectLst/>
@@ -13290,7 +13290,7 @@
             <a:r>
               <a:rPr sz="900" b="0" i="0">
                 <a:solidFill>
-                  <a:srgbClr val="1C1C1C"/>
+                  <a:srgbClr val="1F1942"/>
                 </a:solidFill>
                 <a:latin typeface="Arial"/>
               </a:rPr>
@@ -13314,11 +13314,11 @@
             <a:avLst/>
           </a:prstGeom>
           <a:solidFill>
-            <a:srgbClr val="F3F3F3"/>
+            <a:srgbClr val="F4EFE6"/>
           </a:solidFill>
           <a:ln w="6350">
             <a:solidFill>
-              <a:srgbClr val="E2E2E2"/>
+              <a:srgbClr val="E2DED6"/>
             </a:solidFill>
           </a:ln>
           <a:effectLst/>
@@ -13371,7 +13371,7 @@
             <a:r>
               <a:rPr sz="900" b="0" i="0">
                 <a:solidFill>
-                  <a:srgbClr val="1C1C1C"/>
+                  <a:srgbClr val="1F1942"/>
                 </a:solidFill>
                 <a:latin typeface="Arial"/>
               </a:rPr>
@@ -13395,11 +13395,11 @@
             <a:avLst/>
           </a:prstGeom>
           <a:solidFill>
-            <a:srgbClr val="F3F3F3"/>
+            <a:srgbClr val="F4EFE6"/>
           </a:solidFill>
           <a:ln w="6350">
             <a:solidFill>
-              <a:srgbClr val="E2E2E2"/>
+              <a:srgbClr val="E2DED6"/>
             </a:solidFill>
           </a:ln>
           <a:effectLst/>
@@ -13452,7 +13452,7 @@
             <a:r>
               <a:rPr sz="900" b="0" i="0">
                 <a:solidFill>
-                  <a:srgbClr val="1C1C1C"/>
+                  <a:srgbClr val="1F1942"/>
                 </a:solidFill>
                 <a:latin typeface="Arial"/>
               </a:rPr>
@@ -13476,11 +13476,11 @@
             <a:avLst/>
           </a:prstGeom>
           <a:solidFill>
-            <a:srgbClr val="F3F3F3"/>
+            <a:srgbClr val="F4EFE6"/>
           </a:solidFill>
           <a:ln w="6350">
             <a:solidFill>
-              <a:srgbClr val="E2E2E2"/>
+              <a:srgbClr val="E2DED6"/>
             </a:solidFill>
           </a:ln>
           <a:effectLst/>
@@ -13533,7 +13533,7 @@
             <a:r>
               <a:rPr sz="900" b="0" i="0">
                 <a:solidFill>
-                  <a:srgbClr val="1C1C1C"/>
+                  <a:srgbClr val="1F1942"/>
                 </a:solidFill>
                 <a:latin typeface="Arial"/>
               </a:rPr>
@@ -13561,7 +13561,7 @@
           </a:solidFill>
           <a:ln w="6350">
             <a:solidFill>
-              <a:srgbClr val="E2E2E2"/>
+              <a:srgbClr val="E2DED6"/>
             </a:solidFill>
           </a:ln>
           <a:effectLst/>
@@ -13614,7 +13614,7 @@
             <a:r>
               <a:rPr sz="900" b="0" i="0">
                 <a:solidFill>
-                  <a:srgbClr val="1C1C1C"/>
+                  <a:srgbClr val="1F1942"/>
                 </a:solidFill>
                 <a:latin typeface="Arial"/>
               </a:rPr>
@@ -13642,7 +13642,7 @@
           </a:solidFill>
           <a:ln w="6350">
             <a:solidFill>
-              <a:srgbClr val="E2E2E2"/>
+              <a:srgbClr val="E2DED6"/>
             </a:solidFill>
           </a:ln>
           <a:effectLst/>
@@ -13695,7 +13695,7 @@
             <a:r>
               <a:rPr sz="900" b="0" i="0">
                 <a:solidFill>
-                  <a:srgbClr val="1C1C1C"/>
+                  <a:srgbClr val="1F1942"/>
                 </a:solidFill>
                 <a:latin typeface="Arial"/>
               </a:rPr>
@@ -13723,7 +13723,7 @@
           </a:solidFill>
           <a:ln w="6350">
             <a:solidFill>
-              <a:srgbClr val="E2E2E2"/>
+              <a:srgbClr val="E2DED6"/>
             </a:solidFill>
           </a:ln>
           <a:effectLst/>
@@ -13776,7 +13776,7 @@
             <a:r>
               <a:rPr sz="900" b="1" i="0">
                 <a:solidFill>
-                  <a:srgbClr val="C3002B"/>
+                  <a:srgbClr val="2A2250"/>
                 </a:solidFill>
                 <a:latin typeface="Arial"/>
               </a:rPr>
@@ -13804,7 +13804,7 @@
           </a:solidFill>
           <a:ln w="6350">
             <a:solidFill>
-              <a:srgbClr val="E2E2E2"/>
+              <a:srgbClr val="E2DED6"/>
             </a:solidFill>
           </a:ln>
           <a:effectLst/>
@@ -13857,7 +13857,7 @@
             <a:r>
               <a:rPr sz="900" b="0" i="0">
                 <a:solidFill>
-                  <a:srgbClr val="1C1C1C"/>
+                  <a:srgbClr val="1F1942"/>
                 </a:solidFill>
                 <a:latin typeface="Arial"/>
               </a:rPr>
@@ -13885,7 +13885,7 @@
           </a:solidFill>
           <a:ln w="6350">
             <a:solidFill>
-              <a:srgbClr val="E2E2E2"/>
+              <a:srgbClr val="E2DED6"/>
             </a:solidFill>
           </a:ln>
           <a:effectLst/>
@@ -13938,7 +13938,7 @@
             <a:r>
               <a:rPr sz="900" b="1" i="0">
                 <a:solidFill>
-                  <a:srgbClr val="1C1C1C"/>
+                  <a:srgbClr val="1F1942"/>
                 </a:solidFill>
                 <a:latin typeface="Arial"/>
               </a:rPr>
@@ -13962,11 +13962,11 @@
             <a:avLst/>
           </a:prstGeom>
           <a:solidFill>
-            <a:srgbClr val="F3F3F3"/>
+            <a:srgbClr val="F4EFE6"/>
           </a:solidFill>
           <a:ln w="6350">
             <a:solidFill>
-              <a:srgbClr val="E2E2E2"/>
+              <a:srgbClr val="E2DED6"/>
             </a:solidFill>
           </a:ln>
           <a:effectLst/>
@@ -14019,7 +14019,7 @@
             <a:r>
               <a:rPr sz="900" b="0" i="0">
                 <a:solidFill>
-                  <a:srgbClr val="1C1C1C"/>
+                  <a:srgbClr val="1F1942"/>
                 </a:solidFill>
                 <a:latin typeface="Arial"/>
               </a:rPr>
@@ -14043,11 +14043,11 @@
             <a:avLst/>
           </a:prstGeom>
           <a:solidFill>
-            <a:srgbClr val="F3F3F3"/>
+            <a:srgbClr val="F4EFE6"/>
           </a:solidFill>
           <a:ln w="6350">
             <a:solidFill>
-              <a:srgbClr val="E2E2E2"/>
+              <a:srgbClr val="E2DED6"/>
             </a:solidFill>
           </a:ln>
           <a:effectLst/>
@@ -14100,7 +14100,7 @@
             <a:r>
               <a:rPr sz="900" b="0" i="0">
                 <a:solidFill>
-                  <a:srgbClr val="1C1C1C"/>
+                  <a:srgbClr val="1F1942"/>
                 </a:solidFill>
                 <a:latin typeface="Arial"/>
               </a:rPr>
@@ -14124,11 +14124,11 @@
             <a:avLst/>
           </a:prstGeom>
           <a:solidFill>
-            <a:srgbClr val="F3F3F3"/>
+            <a:srgbClr val="F4EFE6"/>
           </a:solidFill>
           <a:ln w="6350">
             <a:solidFill>
-              <a:srgbClr val="E2E2E2"/>
+              <a:srgbClr val="E2DED6"/>
             </a:solidFill>
           </a:ln>
           <a:effectLst/>
@@ -14181,7 +14181,7 @@
             <a:r>
               <a:rPr sz="900" b="0" i="0">
                 <a:solidFill>
-                  <a:srgbClr val="1C1C1C"/>
+                  <a:srgbClr val="1F1942"/>
                 </a:solidFill>
                 <a:latin typeface="Arial"/>
               </a:rPr>
@@ -14205,11 +14205,11 @@
             <a:avLst/>
           </a:prstGeom>
           <a:solidFill>
-            <a:srgbClr val="F3F3F3"/>
+            <a:srgbClr val="F4EFE6"/>
           </a:solidFill>
           <a:ln w="6350">
             <a:solidFill>
-              <a:srgbClr val="E2E2E2"/>
+              <a:srgbClr val="E2DED6"/>
             </a:solidFill>
           </a:ln>
           <a:effectLst/>
@@ -14262,7 +14262,7 @@
             <a:r>
               <a:rPr sz="900" b="0" i="0">
                 <a:solidFill>
-                  <a:srgbClr val="1C1C1C"/>
+                  <a:srgbClr val="1F1942"/>
                 </a:solidFill>
                 <a:latin typeface="Arial"/>
               </a:rPr>
@@ -14286,11 +14286,11 @@
             <a:avLst/>
           </a:prstGeom>
           <a:solidFill>
-            <a:srgbClr val="F3F3F3"/>
+            <a:srgbClr val="F4EFE6"/>
           </a:solidFill>
           <a:ln w="6350">
             <a:solidFill>
-              <a:srgbClr val="E2E2E2"/>
+              <a:srgbClr val="E2DED6"/>
             </a:solidFill>
           </a:ln>
           <a:effectLst/>
@@ -14343,7 +14343,7 @@
             <a:r>
               <a:rPr sz="900" b="0" i="0">
                 <a:solidFill>
-                  <a:srgbClr val="1C1C1C"/>
+                  <a:srgbClr val="1F1942"/>
                 </a:solidFill>
                 <a:latin typeface="Arial"/>
               </a:rPr>
@@ -14378,7 +14378,7 @@
             <a:r>
               <a:rPr sz="1050" b="0" i="1">
                 <a:solidFill>
-                  <a:srgbClr val="1C1C1C"/>
+                  <a:srgbClr val="1F1942"/>
                 </a:solidFill>
                 <a:latin typeface="Arial"/>
               </a:rPr>
@@ -14414,13 +14414,13 @@
         <p:spPr>
           <a:xfrm>
             <a:off x="0" y="0"/>
-            <a:ext cx="164592" cy="6858000"/>
+            <a:ext cx="128016" cy="6858000"/>
           </a:xfrm>
           <a:prstGeom prst="rect">
             <a:avLst/>
           </a:prstGeom>
           <a:solidFill>
-            <a:srgbClr val="C3002B"/>
+            <a:srgbClr val="F4B634"/>
           </a:solidFill>
           <a:ln>
             <a:noFill/>
@@ -14475,7 +14475,7 @@
             <a:r>
               <a:rPr sz="1000" b="1" i="0">
                 <a:solidFill>
-                  <a:srgbClr val="C3002B"/>
+                  <a:srgbClr val="F4B634"/>
                 </a:solidFill>
                 <a:latin typeface="Arial"/>
               </a:rPr>
@@ -14510,7 +14510,7 @@
             <a:r>
               <a:rPr sz="2300" b="1" i="0">
                 <a:solidFill>
-                  <a:srgbClr val="1C1C1C"/>
+                  <a:srgbClr val="1F1942"/>
                 </a:solidFill>
                 <a:latin typeface="Arial"/>
               </a:rPr>
@@ -14545,7 +14545,7 @@
             <a:r>
               <a:rPr sz="800" b="0" i="0">
                 <a:solidFill>
-                  <a:srgbClr val="7A7A7A"/>
+                  <a:srgbClr val="6B6467"/>
                 </a:solidFill>
                 <a:latin typeface="Arial"/>
               </a:rPr>
@@ -14580,7 +14580,7 @@
             <a:r>
               <a:rPr sz="1000" b="0" i="0">
                 <a:solidFill>
-                  <a:srgbClr val="7A7A7A"/>
+                  <a:srgbClr val="6B6467"/>
                 </a:solidFill>
                 <a:latin typeface="Arial"/>
               </a:rPr>
@@ -14604,7 +14604,7 @@
             <a:avLst/>
           </a:prstGeom>
           <a:solidFill>
-            <a:srgbClr val="C3002B"/>
+            <a:srgbClr val="1F1942"/>
           </a:solidFill>
           <a:ln>
             <a:noFill/>
@@ -14659,7 +14659,7 @@
             <a:r>
               <a:rPr sz="800" b="1" i="0">
                 <a:solidFill>
-                  <a:srgbClr val="FFFFFF"/>
+                  <a:srgbClr val="F4B634"/>
                 </a:solidFill>
                 <a:latin typeface="Arial"/>
               </a:rPr>
@@ -14698,7 +14698,7 @@
             <a:r>
               <a:rPr sz="1150" b="0" i="0">
                 <a:solidFill>
-                  <a:srgbClr val="1C1C1C"/>
+                  <a:srgbClr val="1F1942"/>
                 </a:solidFill>
                 <a:latin typeface="Arial"/>
               </a:rPr>
@@ -14714,7 +14714,7 @@
             <a:r>
               <a:rPr sz="1150" b="0" i="0">
                 <a:solidFill>
-                  <a:srgbClr val="1C1C1C"/>
+                  <a:srgbClr val="1F1942"/>
                 </a:solidFill>
                 <a:latin typeface="Arial"/>
               </a:rPr>
@@ -14730,7 +14730,7 @@
             <a:r>
               <a:rPr sz="1150" b="0" i="0">
                 <a:solidFill>
-                  <a:srgbClr val="1C1C1C"/>
+                  <a:srgbClr val="1F1942"/>
                 </a:solidFill>
                 <a:latin typeface="Arial"/>
               </a:rPr>
@@ -14746,7 +14746,7 @@
             <a:r>
               <a:rPr sz="1150" b="0" i="0">
                 <a:solidFill>
-                  <a:srgbClr val="1C1C1C"/>
+                  <a:srgbClr val="1F1942"/>
                 </a:solidFill>
                 <a:latin typeface="Arial"/>
               </a:rPr>
@@ -14762,7 +14762,7 @@
             <a:r>
               <a:rPr sz="1150" b="0" i="0">
                 <a:solidFill>
-                  <a:srgbClr val="1C1C1C"/>
+                  <a:srgbClr val="1F1942"/>
                 </a:solidFill>
                 <a:latin typeface="Arial"/>
               </a:rPr>
@@ -14778,7 +14778,7 @@
             <a:r>
               <a:rPr sz="1150" b="0" i="0">
                 <a:solidFill>
-                  <a:srgbClr val="1C1C1C"/>
+                  <a:srgbClr val="1F1942"/>
                 </a:solidFill>
                 <a:latin typeface="Arial"/>
               </a:rPr>
@@ -14794,7 +14794,7 @@
             <a:r>
               <a:rPr sz="1150" b="0" i="0">
                 <a:solidFill>
-                  <a:srgbClr val="1C1C1C"/>
+                  <a:srgbClr val="1F1942"/>
                 </a:solidFill>
                 <a:latin typeface="Arial"/>
               </a:rPr>
@@ -14810,7 +14810,7 @@
             <a:r>
               <a:rPr sz="1150" b="0" i="0">
                 <a:solidFill>
-                  <a:srgbClr val="1C1C1C"/>
+                  <a:srgbClr val="1F1942"/>
                 </a:solidFill>
                 <a:latin typeface="Arial"/>
               </a:rPr>
@@ -14826,7 +14826,7 @@
             <a:r>
               <a:rPr sz="1150" b="0" i="0">
                 <a:solidFill>
-                  <a:srgbClr val="1C1C1C"/>
+                  <a:srgbClr val="1F1942"/>
                 </a:solidFill>
                 <a:latin typeface="Arial"/>
               </a:rPr>
@@ -14842,7 +14842,7 @@
             <a:r>
               <a:rPr sz="1150" b="0" i="0">
                 <a:solidFill>
-                  <a:srgbClr val="1C1C1C"/>
+                  <a:srgbClr val="1F1942"/>
                 </a:solidFill>
                 <a:latin typeface="Arial"/>
               </a:rPr>
@@ -14870,7 +14870,7 @@
           </a:solidFill>
           <a:ln w="6350">
             <a:solidFill>
-              <a:srgbClr val="E2E2E2"/>
+              <a:srgbClr val="E2DED6"/>
             </a:solidFill>
           </a:ln>
           <a:effectLst/>
@@ -14923,7 +14923,7 @@
             <a:r>
               <a:rPr sz="1100" b="1" i="0">
                 <a:solidFill>
-                  <a:srgbClr val="C3002B"/>
+                  <a:srgbClr val="2A2250"/>
                 </a:solidFill>
                 <a:latin typeface="Arial"/>
               </a:rPr>
@@ -14947,11 +14947,11 @@
             <a:avLst/>
           </a:prstGeom>
           <a:solidFill>
-            <a:srgbClr val="F3F3F3"/>
+            <a:srgbClr val="F4EFE6"/>
           </a:solidFill>
           <a:ln w="6350">
             <a:solidFill>
-              <a:srgbClr val="E2E2E2"/>
+              <a:srgbClr val="E2DED6"/>
             </a:solidFill>
           </a:ln>
           <a:effectLst/>
@@ -15004,7 +15004,7 @@
             <a:r>
               <a:rPr sz="1000" b="1" i="0">
                 <a:solidFill>
-                  <a:srgbClr val="1C1C1C"/>
+                  <a:srgbClr val="1F1942"/>
                 </a:solidFill>
                 <a:latin typeface="Arial"/>
               </a:rPr>
@@ -15039,7 +15039,7 @@
             <a:r>
               <a:rPr sz="900" b="0" i="0">
                 <a:solidFill>
-                  <a:srgbClr val="7A7A7A"/>
+                  <a:srgbClr val="6B6467"/>
                 </a:solidFill>
                 <a:latin typeface="Arial"/>
               </a:rPr>
@@ -15074,7 +15074,7 @@
             <a:r>
               <a:rPr sz="1200" b="1" i="0">
                 <a:solidFill>
-                  <a:srgbClr val="C3002B"/>
+                  <a:srgbClr val="2A2250"/>
                 </a:solidFill>
                 <a:latin typeface="Arial"/>
               </a:rPr>
@@ -15098,11 +15098,11 @@
             <a:avLst/>
           </a:prstGeom>
           <a:solidFill>
-            <a:srgbClr val="F3F3F3"/>
+            <a:srgbClr val="F4EFE6"/>
           </a:solidFill>
           <a:ln w="6350">
             <a:solidFill>
-              <a:srgbClr val="E2E2E2"/>
+              <a:srgbClr val="E2DED6"/>
             </a:solidFill>
           </a:ln>
           <a:effectLst/>
@@ -15155,7 +15155,7 @@
             <a:r>
               <a:rPr sz="1000" b="1" i="0">
                 <a:solidFill>
-                  <a:srgbClr val="1C1C1C"/>
+                  <a:srgbClr val="1F1942"/>
                 </a:solidFill>
                 <a:latin typeface="Arial"/>
               </a:rPr>
@@ -15190,7 +15190,7 @@
             <a:r>
               <a:rPr sz="900" b="0" i="0">
                 <a:solidFill>
-                  <a:srgbClr val="7A7A7A"/>
+                  <a:srgbClr val="6B6467"/>
                 </a:solidFill>
                 <a:latin typeface="Arial"/>
               </a:rPr>
@@ -15225,7 +15225,7 @@
             <a:r>
               <a:rPr sz="1200" b="1" i="0">
                 <a:solidFill>
-                  <a:srgbClr val="C3002B"/>
+                  <a:srgbClr val="2A2250"/>
                 </a:solidFill>
                 <a:latin typeface="Arial"/>
               </a:rPr>
@@ -15249,11 +15249,11 @@
             <a:avLst/>
           </a:prstGeom>
           <a:solidFill>
-            <a:srgbClr val="F3F3F3"/>
+            <a:srgbClr val="F4EFE6"/>
           </a:solidFill>
           <a:ln w="6350">
             <a:solidFill>
-              <a:srgbClr val="E2E2E2"/>
+              <a:srgbClr val="E2DED6"/>
             </a:solidFill>
           </a:ln>
           <a:effectLst/>
@@ -15306,7 +15306,7 @@
             <a:r>
               <a:rPr sz="1000" b="1" i="0">
                 <a:solidFill>
-                  <a:srgbClr val="1C1C1C"/>
+                  <a:srgbClr val="1F1942"/>
                 </a:solidFill>
                 <a:latin typeface="Arial"/>
               </a:rPr>
@@ -15341,7 +15341,7 @@
             <a:r>
               <a:rPr sz="900" b="0" i="0">
                 <a:solidFill>
-                  <a:srgbClr val="7A7A7A"/>
+                  <a:srgbClr val="6B6467"/>
                 </a:solidFill>
                 <a:latin typeface="Arial"/>
               </a:rPr>
@@ -15376,7 +15376,7 @@
             <a:r>
               <a:rPr sz="1200" b="1" i="0">
                 <a:solidFill>
-                  <a:srgbClr val="C3002B"/>
+                  <a:srgbClr val="2A2250"/>
                 </a:solidFill>
                 <a:latin typeface="Arial"/>
               </a:rPr>
@@ -15400,11 +15400,11 @@
             <a:avLst/>
           </a:prstGeom>
           <a:solidFill>
-            <a:srgbClr val="F3F3F3"/>
+            <a:srgbClr val="F4EFE6"/>
           </a:solidFill>
           <a:ln w="6350">
             <a:solidFill>
-              <a:srgbClr val="E2E2E2"/>
+              <a:srgbClr val="E2DED6"/>
             </a:solidFill>
           </a:ln>
           <a:effectLst/>
@@ -15457,7 +15457,7 @@
             <a:r>
               <a:rPr sz="1000" b="1" i="0">
                 <a:solidFill>
-                  <a:srgbClr val="1C1C1C"/>
+                  <a:srgbClr val="1F1942"/>
                 </a:solidFill>
                 <a:latin typeface="Arial"/>
               </a:rPr>
@@ -15492,7 +15492,7 @@
             <a:r>
               <a:rPr sz="900" b="0" i="0">
                 <a:solidFill>
-                  <a:srgbClr val="7A7A7A"/>
+                  <a:srgbClr val="6B6467"/>
                 </a:solidFill>
                 <a:latin typeface="Arial"/>
               </a:rPr>
@@ -15527,7 +15527,7 @@
             <a:r>
               <a:rPr sz="1200" b="1" i="0">
                 <a:solidFill>
-                  <a:srgbClr val="C3002B"/>
+                  <a:srgbClr val="2A2250"/>
                 </a:solidFill>
                 <a:latin typeface="Arial"/>
               </a:rPr>
@@ -15551,11 +15551,11 @@
             <a:avLst/>
           </a:prstGeom>
           <a:solidFill>
-            <a:srgbClr val="F3F3F3"/>
+            <a:srgbClr val="F4EFE6"/>
           </a:solidFill>
           <a:ln w="6350">
             <a:solidFill>
-              <a:srgbClr val="E2E2E2"/>
+              <a:srgbClr val="E2DED6"/>
             </a:solidFill>
           </a:ln>
           <a:effectLst/>
@@ -15608,7 +15608,7 @@
             <a:r>
               <a:rPr sz="1000" b="1" i="0">
                 <a:solidFill>
-                  <a:srgbClr val="1C1C1C"/>
+                  <a:srgbClr val="1F1942"/>
                 </a:solidFill>
                 <a:latin typeface="Arial"/>
               </a:rPr>
@@ -15643,7 +15643,7 @@
             <a:r>
               <a:rPr sz="900" b="0" i="0">
                 <a:solidFill>
-                  <a:srgbClr val="7A7A7A"/>
+                  <a:srgbClr val="6B6467"/>
                 </a:solidFill>
                 <a:latin typeface="Arial"/>
               </a:rPr>
@@ -15678,7 +15678,7 @@
             <a:r>
               <a:rPr sz="1200" b="1" i="0">
                 <a:solidFill>
-                  <a:srgbClr val="C3002B"/>
+                  <a:srgbClr val="2A2250"/>
                 </a:solidFill>
                 <a:latin typeface="Arial"/>
               </a:rPr>
@@ -15702,11 +15702,11 @@
             <a:avLst/>
           </a:prstGeom>
           <a:solidFill>
-            <a:srgbClr val="F3F3F3"/>
+            <a:srgbClr val="F4EFE6"/>
           </a:solidFill>
           <a:ln w="6350">
             <a:solidFill>
-              <a:srgbClr val="E2E2E2"/>
+              <a:srgbClr val="E2DED6"/>
             </a:solidFill>
           </a:ln>
           <a:effectLst/>
@@ -15759,7 +15759,7 @@
             <a:r>
               <a:rPr sz="1000" b="1" i="0">
                 <a:solidFill>
-                  <a:srgbClr val="1C1C1C"/>
+                  <a:srgbClr val="1F1942"/>
                 </a:solidFill>
                 <a:latin typeface="Arial"/>
               </a:rPr>
@@ -15794,7 +15794,7 @@
             <a:r>
               <a:rPr sz="900" b="0" i="0">
                 <a:solidFill>
-                  <a:srgbClr val="7A7A7A"/>
+                  <a:srgbClr val="6B6467"/>
                 </a:solidFill>
                 <a:latin typeface="Arial"/>
               </a:rPr>
@@ -15829,7 +15829,7 @@
             <a:r>
               <a:rPr sz="1200" b="1" i="0">
                 <a:solidFill>
-                  <a:srgbClr val="C3002B"/>
+                  <a:srgbClr val="2A2250"/>
                 </a:solidFill>
                 <a:latin typeface="Arial"/>
               </a:rPr>
@@ -15865,13 +15865,13 @@
         <p:spPr>
           <a:xfrm>
             <a:off x="0" y="0"/>
-            <a:ext cx="164592" cy="6858000"/>
+            <a:ext cx="128016" cy="6858000"/>
           </a:xfrm>
           <a:prstGeom prst="rect">
             <a:avLst/>
           </a:prstGeom>
           <a:solidFill>
-            <a:srgbClr val="C3002B"/>
+            <a:srgbClr val="F4B634"/>
           </a:solidFill>
           <a:ln>
             <a:noFill/>
@@ -15926,7 +15926,7 @@
             <a:r>
               <a:rPr sz="1000" b="1" i="0">
                 <a:solidFill>
-                  <a:srgbClr val="C3002B"/>
+                  <a:srgbClr val="F4B634"/>
                 </a:solidFill>
                 <a:latin typeface="Arial"/>
               </a:rPr>
@@ -15961,7 +15961,7 @@
             <a:r>
               <a:rPr sz="2300" b="1" i="0">
                 <a:solidFill>
-                  <a:srgbClr val="1C1C1C"/>
+                  <a:srgbClr val="1F1942"/>
                 </a:solidFill>
                 <a:latin typeface="Arial"/>
               </a:rPr>
@@ -15996,7 +15996,7 @@
             <a:r>
               <a:rPr sz="800" b="0" i="0">
                 <a:solidFill>
-                  <a:srgbClr val="7A7A7A"/>
+                  <a:srgbClr val="6B6467"/>
                 </a:solidFill>
                 <a:latin typeface="Arial"/>
               </a:rPr>
@@ -16031,7 +16031,7 @@
             <a:r>
               <a:rPr sz="1000" b="0" i="0">
                 <a:solidFill>
-                  <a:srgbClr val="7A7A7A"/>
+                  <a:srgbClr val="6B6467"/>
                 </a:solidFill>
                 <a:latin typeface="Arial"/>
               </a:rPr>
@@ -16055,7 +16055,7 @@
             <a:avLst/>
           </a:prstGeom>
           <a:solidFill>
-            <a:srgbClr val="C3002B"/>
+            <a:srgbClr val="1F1942"/>
           </a:solidFill>
           <a:ln>
             <a:noFill/>
@@ -16110,7 +16110,7 @@
             <a:r>
               <a:rPr sz="800" b="1" i="0">
                 <a:solidFill>
-                  <a:srgbClr val="FFFFFF"/>
+                  <a:srgbClr val="F4B634"/>
                 </a:solidFill>
                 <a:latin typeface="Arial"/>
               </a:rPr>
@@ -16145,7 +16145,7 @@
             <a:r>
               <a:rPr sz="1100" b="0" i="0">
                 <a:solidFill>
-                  <a:srgbClr val="1C1C1C"/>
+                  <a:srgbClr val="1F1942"/>
                 </a:solidFill>
                 <a:latin typeface="Arial"/>
               </a:rPr>
@@ -16169,11 +16169,11 @@
             <a:avLst/>
           </a:prstGeom>
           <a:solidFill>
-            <a:srgbClr val="1C1C1C"/>
+            <a:srgbClr val="1F1942"/>
           </a:solidFill>
           <a:ln w="6350">
             <a:solidFill>
-              <a:srgbClr val="E2E2E2"/>
+              <a:srgbClr val="E2DED6"/>
             </a:solidFill>
           </a:ln>
           <a:effectLst/>
@@ -16250,11 +16250,11 @@
             <a:avLst/>
           </a:prstGeom>
           <a:solidFill>
-            <a:srgbClr val="1C1C1C"/>
+            <a:srgbClr val="1F1942"/>
           </a:solidFill>
           <a:ln w="6350">
             <a:solidFill>
-              <a:srgbClr val="E2E2E2"/>
+              <a:srgbClr val="E2DED6"/>
             </a:solidFill>
           </a:ln>
           <a:effectLst/>
@@ -16331,11 +16331,11 @@
             <a:avLst/>
           </a:prstGeom>
           <a:solidFill>
-            <a:srgbClr val="1C1C1C"/>
+            <a:srgbClr val="1F1942"/>
           </a:solidFill>
           <a:ln w="6350">
             <a:solidFill>
-              <a:srgbClr val="E2E2E2"/>
+              <a:srgbClr val="E2DED6"/>
             </a:solidFill>
           </a:ln>
           <a:effectLst/>
@@ -16412,11 +16412,11 @@
             <a:avLst/>
           </a:prstGeom>
           <a:solidFill>
-            <a:srgbClr val="1C1C1C"/>
+            <a:srgbClr val="1F1942"/>
           </a:solidFill>
           <a:ln w="6350">
             <a:solidFill>
-              <a:srgbClr val="E2E2E2"/>
+              <a:srgbClr val="E2DED6"/>
             </a:solidFill>
           </a:ln>
           <a:effectLst/>
@@ -16493,11 +16493,11 @@
             <a:avLst/>
           </a:prstGeom>
           <a:solidFill>
-            <a:srgbClr val="1C1C1C"/>
+            <a:srgbClr val="1F1942"/>
           </a:solidFill>
           <a:ln w="6350">
             <a:solidFill>
-              <a:srgbClr val="E2E2E2"/>
+              <a:srgbClr val="E2DED6"/>
             </a:solidFill>
           </a:ln>
           <a:effectLst/>
@@ -16574,11 +16574,11 @@
             <a:avLst/>
           </a:prstGeom>
           <a:solidFill>
-            <a:srgbClr val="1C1C1C"/>
+            <a:srgbClr val="1F1942"/>
           </a:solidFill>
           <a:ln w="6350">
             <a:solidFill>
-              <a:srgbClr val="E2E2E2"/>
+              <a:srgbClr val="E2DED6"/>
             </a:solidFill>
           </a:ln>
           <a:effectLst/>
@@ -16659,7 +16659,7 @@
           </a:solidFill>
           <a:ln w="6350">
             <a:solidFill>
-              <a:srgbClr val="E2E2E2"/>
+              <a:srgbClr val="E2DED6"/>
             </a:solidFill>
           </a:ln>
           <a:effectLst/>
@@ -16712,7 +16712,7 @@
             <a:r>
               <a:rPr sz="850" b="0" i="0">
                 <a:solidFill>
-                  <a:srgbClr val="1C1C1C"/>
+                  <a:srgbClr val="1F1942"/>
                 </a:solidFill>
                 <a:latin typeface="Arial"/>
               </a:rPr>
@@ -16740,7 +16740,7 @@
           </a:solidFill>
           <a:ln w="6350">
             <a:solidFill>
-              <a:srgbClr val="E2E2E2"/>
+              <a:srgbClr val="E2DED6"/>
             </a:solidFill>
           </a:ln>
           <a:effectLst/>
@@ -16793,7 +16793,7 @@
             <a:r>
               <a:rPr sz="850" b="0" i="0">
                 <a:solidFill>
-                  <a:srgbClr val="1C1C1C"/>
+                  <a:srgbClr val="1F1942"/>
                 </a:solidFill>
                 <a:latin typeface="Arial"/>
               </a:rPr>
@@ -16821,7 +16821,7 @@
           </a:solidFill>
           <a:ln w="6350">
             <a:solidFill>
-              <a:srgbClr val="E2E2E2"/>
+              <a:srgbClr val="E2DED6"/>
             </a:solidFill>
           </a:ln>
           <a:effectLst/>
@@ -16874,7 +16874,7 @@
             <a:r>
               <a:rPr sz="850" b="1" i="0">
                 <a:solidFill>
-                  <a:srgbClr val="C3002B"/>
+                  <a:srgbClr val="2A2250"/>
                 </a:solidFill>
                 <a:latin typeface="Arial"/>
               </a:rPr>
@@ -16902,7 +16902,7 @@
           </a:solidFill>
           <a:ln w="6350">
             <a:solidFill>
-              <a:srgbClr val="E2E2E2"/>
+              <a:srgbClr val="E2DED6"/>
             </a:solidFill>
           </a:ln>
           <a:effectLst/>
@@ -16955,7 +16955,7 @@
             <a:r>
               <a:rPr sz="850" b="0" i="0">
                 <a:solidFill>
-                  <a:srgbClr val="1C1C1C"/>
+                  <a:srgbClr val="1F1942"/>
                 </a:solidFill>
                 <a:latin typeface="Arial"/>
               </a:rPr>
@@ -16983,7 +16983,7 @@
           </a:solidFill>
           <a:ln w="6350">
             <a:solidFill>
-              <a:srgbClr val="E2E2E2"/>
+              <a:srgbClr val="E2DED6"/>
             </a:solidFill>
           </a:ln>
           <a:effectLst/>
@@ -17036,7 +17036,7 @@
             <a:r>
               <a:rPr sz="850" b="0" i="0">
                 <a:solidFill>
-                  <a:srgbClr val="1C1C1C"/>
+                  <a:srgbClr val="1F1942"/>
                 </a:solidFill>
                 <a:latin typeface="Arial"/>
               </a:rPr>
@@ -17064,7 +17064,7 @@
           </a:solidFill>
           <a:ln w="6350">
             <a:solidFill>
-              <a:srgbClr val="E2E2E2"/>
+              <a:srgbClr val="E2DED6"/>
             </a:solidFill>
           </a:ln>
           <a:effectLst/>
@@ -17117,7 +17117,7 @@
             <a:r>
               <a:rPr sz="850" b="1" i="0">
                 <a:solidFill>
-                  <a:srgbClr val="E89A00"/>
+                  <a:srgbClr val="F4B634"/>
                 </a:solidFill>
                 <a:latin typeface="Arial"/>
               </a:rPr>
@@ -17141,11 +17141,11 @@
             <a:avLst/>
           </a:prstGeom>
           <a:solidFill>
-            <a:srgbClr val="F3F3F3"/>
+            <a:srgbClr val="F4EFE6"/>
           </a:solidFill>
           <a:ln w="6350">
             <a:solidFill>
-              <a:srgbClr val="E2E2E2"/>
+              <a:srgbClr val="E2DED6"/>
             </a:solidFill>
           </a:ln>
           <a:effectLst/>
@@ -17198,7 +17198,7 @@
             <a:r>
               <a:rPr sz="850" b="0" i="0">
                 <a:solidFill>
-                  <a:srgbClr val="1C1C1C"/>
+                  <a:srgbClr val="1F1942"/>
                 </a:solidFill>
                 <a:latin typeface="Arial"/>
               </a:rPr>
@@ -17222,11 +17222,11 @@
             <a:avLst/>
           </a:prstGeom>
           <a:solidFill>
-            <a:srgbClr val="F3F3F3"/>
+            <a:srgbClr val="F4EFE6"/>
           </a:solidFill>
           <a:ln w="6350">
             <a:solidFill>
-              <a:srgbClr val="E2E2E2"/>
+              <a:srgbClr val="E2DED6"/>
             </a:solidFill>
           </a:ln>
           <a:effectLst/>
@@ -17279,7 +17279,7 @@
             <a:r>
               <a:rPr sz="850" b="0" i="0">
                 <a:solidFill>
-                  <a:srgbClr val="1C1C1C"/>
+                  <a:srgbClr val="1F1942"/>
                 </a:solidFill>
                 <a:latin typeface="Arial"/>
               </a:rPr>
@@ -17303,11 +17303,11 @@
             <a:avLst/>
           </a:prstGeom>
           <a:solidFill>
-            <a:srgbClr val="F3F3F3"/>
+            <a:srgbClr val="F4EFE6"/>
           </a:solidFill>
           <a:ln w="6350">
             <a:solidFill>
-              <a:srgbClr val="E2E2E2"/>
+              <a:srgbClr val="E2DED6"/>
             </a:solidFill>
           </a:ln>
           <a:effectLst/>
@@ -17360,7 +17360,7 @@
             <a:r>
               <a:rPr sz="850" b="1" i="0">
                 <a:solidFill>
-                  <a:srgbClr val="C3002B"/>
+                  <a:srgbClr val="2A2250"/>
                 </a:solidFill>
                 <a:latin typeface="Arial"/>
               </a:rPr>
@@ -17384,11 +17384,11 @@
             <a:avLst/>
           </a:prstGeom>
           <a:solidFill>
-            <a:srgbClr val="F3F3F3"/>
+            <a:srgbClr val="F4EFE6"/>
           </a:solidFill>
           <a:ln w="6350">
             <a:solidFill>
-              <a:srgbClr val="E2E2E2"/>
+              <a:srgbClr val="E2DED6"/>
             </a:solidFill>
           </a:ln>
           <a:effectLst/>
@@ -17441,7 +17441,7 @@
             <a:r>
               <a:rPr sz="850" b="0" i="0">
                 <a:solidFill>
-                  <a:srgbClr val="1C1C1C"/>
+                  <a:srgbClr val="1F1942"/>
                 </a:solidFill>
                 <a:latin typeface="Arial"/>
               </a:rPr>
@@ -17465,11 +17465,11 @@
             <a:avLst/>
           </a:prstGeom>
           <a:solidFill>
-            <a:srgbClr val="F3F3F3"/>
+            <a:srgbClr val="F4EFE6"/>
           </a:solidFill>
           <a:ln w="6350">
             <a:solidFill>
-              <a:srgbClr val="E2E2E2"/>
+              <a:srgbClr val="E2DED6"/>
             </a:solidFill>
           </a:ln>
           <a:effectLst/>
@@ -17522,7 +17522,7 @@
             <a:r>
               <a:rPr sz="850" b="0" i="0">
                 <a:solidFill>
-                  <a:srgbClr val="1C1C1C"/>
+                  <a:srgbClr val="1F1942"/>
                 </a:solidFill>
                 <a:latin typeface="Arial"/>
               </a:rPr>
@@ -17546,11 +17546,11 @@
             <a:avLst/>
           </a:prstGeom>
           <a:solidFill>
-            <a:srgbClr val="F3F3F3"/>
+            <a:srgbClr val="F4EFE6"/>
           </a:solidFill>
           <a:ln w="6350">
             <a:solidFill>
-              <a:srgbClr val="E2E2E2"/>
+              <a:srgbClr val="E2DED6"/>
             </a:solidFill>
           </a:ln>
           <a:effectLst/>
@@ -17603,7 +17603,7 @@
             <a:r>
               <a:rPr sz="850" b="1" i="0">
                 <a:solidFill>
-                  <a:srgbClr val="C3002B"/>
+                  <a:srgbClr val="C0392B"/>
                 </a:solidFill>
                 <a:latin typeface="Arial"/>
               </a:rPr>
@@ -17631,7 +17631,7 @@
           </a:solidFill>
           <a:ln w="6350">
             <a:solidFill>
-              <a:srgbClr val="E2E2E2"/>
+              <a:srgbClr val="E2DED6"/>
             </a:solidFill>
           </a:ln>
           <a:effectLst/>
@@ -17684,7 +17684,7 @@
             <a:r>
               <a:rPr sz="850" b="0" i="0">
                 <a:solidFill>
-                  <a:srgbClr val="1C1C1C"/>
+                  <a:srgbClr val="1F1942"/>
                 </a:solidFill>
                 <a:latin typeface="Arial"/>
               </a:rPr>
@@ -17712,7 +17712,7 @@
           </a:solidFill>
           <a:ln w="6350">
             <a:solidFill>
-              <a:srgbClr val="E2E2E2"/>
+              <a:srgbClr val="E2DED6"/>
             </a:solidFill>
           </a:ln>
           <a:effectLst/>
@@ -17765,7 +17765,7 @@
             <a:r>
               <a:rPr sz="850" b="0" i="0">
                 <a:solidFill>
-                  <a:srgbClr val="1C1C1C"/>
+                  <a:srgbClr val="1F1942"/>
                 </a:solidFill>
                 <a:latin typeface="Arial"/>
               </a:rPr>
@@ -17793,7 +17793,7 @@
           </a:solidFill>
           <a:ln w="6350">
             <a:solidFill>
-              <a:srgbClr val="E2E2E2"/>
+              <a:srgbClr val="E2DED6"/>
             </a:solidFill>
           </a:ln>
           <a:effectLst/>
@@ -17846,7 +17846,7 @@
             <a:r>
               <a:rPr sz="850" b="1" i="0">
                 <a:solidFill>
-                  <a:srgbClr val="C3002B"/>
+                  <a:srgbClr val="2A2250"/>
                 </a:solidFill>
                 <a:latin typeface="Arial"/>
               </a:rPr>
@@ -17874,7 +17874,7 @@
           </a:solidFill>
           <a:ln w="6350">
             <a:solidFill>
-              <a:srgbClr val="E2E2E2"/>
+              <a:srgbClr val="E2DED6"/>
             </a:solidFill>
           </a:ln>
           <a:effectLst/>
@@ -17927,7 +17927,7 @@
             <a:r>
               <a:rPr sz="850" b="0" i="0">
                 <a:solidFill>
-                  <a:srgbClr val="1C1C1C"/>
+                  <a:srgbClr val="1F1942"/>
                 </a:solidFill>
                 <a:latin typeface="Arial"/>
               </a:rPr>
@@ -17955,7 +17955,7 @@
           </a:solidFill>
           <a:ln w="6350">
             <a:solidFill>
-              <a:srgbClr val="E2E2E2"/>
+              <a:srgbClr val="E2DED6"/>
             </a:solidFill>
           </a:ln>
           <a:effectLst/>
@@ -18008,7 +18008,7 @@
             <a:r>
               <a:rPr sz="850" b="0" i="0">
                 <a:solidFill>
-                  <a:srgbClr val="1C1C1C"/>
+                  <a:srgbClr val="1F1942"/>
                 </a:solidFill>
                 <a:latin typeface="Arial"/>
               </a:rPr>
@@ -18036,7 +18036,7 @@
           </a:solidFill>
           <a:ln w="6350">
             <a:solidFill>
-              <a:srgbClr val="E2E2E2"/>
+              <a:srgbClr val="E2DED6"/>
             </a:solidFill>
           </a:ln>
           <a:effectLst/>
@@ -18089,7 +18089,7 @@
             <a:r>
               <a:rPr sz="850" b="1" i="0">
                 <a:solidFill>
-                  <a:srgbClr val="C3002B"/>
+                  <a:srgbClr val="C0392B"/>
                 </a:solidFill>
                 <a:latin typeface="Arial"/>
               </a:rPr>
@@ -18113,11 +18113,11 @@
             <a:avLst/>
           </a:prstGeom>
           <a:solidFill>
-            <a:srgbClr val="F3F3F3"/>
+            <a:srgbClr val="F4EFE6"/>
           </a:solidFill>
           <a:ln w="6350">
             <a:solidFill>
-              <a:srgbClr val="E2E2E2"/>
+              <a:srgbClr val="E2DED6"/>
             </a:solidFill>
           </a:ln>
           <a:effectLst/>
@@ -18170,7 +18170,7 @@
             <a:r>
               <a:rPr sz="850" b="0" i="0">
                 <a:solidFill>
-                  <a:srgbClr val="1C1C1C"/>
+                  <a:srgbClr val="1F1942"/>
                 </a:solidFill>
                 <a:latin typeface="Arial"/>
               </a:rPr>
@@ -18194,11 +18194,11 @@
             <a:avLst/>
           </a:prstGeom>
           <a:solidFill>
-            <a:srgbClr val="F3F3F3"/>
+            <a:srgbClr val="F4EFE6"/>
           </a:solidFill>
           <a:ln w="6350">
             <a:solidFill>
-              <a:srgbClr val="E2E2E2"/>
+              <a:srgbClr val="E2DED6"/>
             </a:solidFill>
           </a:ln>
           <a:effectLst/>
@@ -18251,7 +18251,7 @@
             <a:r>
               <a:rPr sz="850" b="0" i="0">
                 <a:solidFill>
-                  <a:srgbClr val="1C1C1C"/>
+                  <a:srgbClr val="1F1942"/>
                 </a:solidFill>
                 <a:latin typeface="Arial"/>
               </a:rPr>
@@ -18275,11 +18275,11 @@
             <a:avLst/>
           </a:prstGeom>
           <a:solidFill>
-            <a:srgbClr val="F3F3F3"/>
+            <a:srgbClr val="F4EFE6"/>
           </a:solidFill>
           <a:ln w="6350">
             <a:solidFill>
-              <a:srgbClr val="E2E2E2"/>
+              <a:srgbClr val="E2DED6"/>
             </a:solidFill>
           </a:ln>
           <a:effectLst/>
@@ -18332,7 +18332,7 @@
             <a:r>
               <a:rPr sz="850" b="1" i="0">
                 <a:solidFill>
-                  <a:srgbClr val="C3002B"/>
+                  <a:srgbClr val="2A2250"/>
                 </a:solidFill>
                 <a:latin typeface="Arial"/>
               </a:rPr>
@@ -18356,11 +18356,11 @@
             <a:avLst/>
           </a:prstGeom>
           <a:solidFill>
-            <a:srgbClr val="F3F3F3"/>
+            <a:srgbClr val="F4EFE6"/>
           </a:solidFill>
           <a:ln w="6350">
             <a:solidFill>
-              <a:srgbClr val="E2E2E2"/>
+              <a:srgbClr val="E2DED6"/>
             </a:solidFill>
           </a:ln>
           <a:effectLst/>
@@ -18413,7 +18413,7 @@
             <a:r>
               <a:rPr sz="850" b="0" i="0">
                 <a:solidFill>
-                  <a:srgbClr val="1C1C1C"/>
+                  <a:srgbClr val="1F1942"/>
                 </a:solidFill>
                 <a:latin typeface="Arial"/>
               </a:rPr>
@@ -18437,11 +18437,11 @@
             <a:avLst/>
           </a:prstGeom>
           <a:solidFill>
-            <a:srgbClr val="F3F3F3"/>
+            <a:srgbClr val="F4EFE6"/>
           </a:solidFill>
           <a:ln w="6350">
             <a:solidFill>
-              <a:srgbClr val="E2E2E2"/>
+              <a:srgbClr val="E2DED6"/>
             </a:solidFill>
           </a:ln>
           <a:effectLst/>
@@ -18494,7 +18494,7 @@
             <a:r>
               <a:rPr sz="850" b="0" i="0">
                 <a:solidFill>
-                  <a:srgbClr val="1C1C1C"/>
+                  <a:srgbClr val="1F1942"/>
                 </a:solidFill>
                 <a:latin typeface="Arial"/>
               </a:rPr>
@@ -18518,11 +18518,11 @@
             <a:avLst/>
           </a:prstGeom>
           <a:solidFill>
-            <a:srgbClr val="F3F3F3"/>
+            <a:srgbClr val="F4EFE6"/>
           </a:solidFill>
           <a:ln w="6350">
             <a:solidFill>
-              <a:srgbClr val="E2E2E2"/>
+              <a:srgbClr val="E2DED6"/>
             </a:solidFill>
           </a:ln>
           <a:effectLst/>
@@ -18575,7 +18575,7 @@
             <a:r>
               <a:rPr sz="850" b="1" i="0">
                 <a:solidFill>
-                  <a:srgbClr val="E89A00"/>
+                  <a:srgbClr val="F4B634"/>
                 </a:solidFill>
                 <a:latin typeface="Arial"/>
               </a:rPr>
@@ -18603,7 +18603,7 @@
           </a:solidFill>
           <a:ln w="6350">
             <a:solidFill>
-              <a:srgbClr val="E2E2E2"/>
+              <a:srgbClr val="E2DED6"/>
             </a:solidFill>
           </a:ln>
           <a:effectLst/>
@@ -18656,7 +18656,7 @@
             <a:r>
               <a:rPr sz="850" b="0" i="0">
                 <a:solidFill>
-                  <a:srgbClr val="1C1C1C"/>
+                  <a:srgbClr val="1F1942"/>
                 </a:solidFill>
                 <a:latin typeface="Arial"/>
               </a:rPr>
@@ -18684,7 +18684,7 @@
           </a:solidFill>
           <a:ln w="6350">
             <a:solidFill>
-              <a:srgbClr val="E2E2E2"/>
+              <a:srgbClr val="E2DED6"/>
             </a:solidFill>
           </a:ln>
           <a:effectLst/>
@@ -18737,7 +18737,7 @@
             <a:r>
               <a:rPr sz="850" b="0" i="0">
                 <a:solidFill>
-                  <a:srgbClr val="1C1C1C"/>
+                  <a:srgbClr val="1F1942"/>
                 </a:solidFill>
                 <a:latin typeface="Arial"/>
               </a:rPr>
@@ -18765,7 +18765,7 @@
           </a:solidFill>
           <a:ln w="6350">
             <a:solidFill>
-              <a:srgbClr val="E2E2E2"/>
+              <a:srgbClr val="E2DED6"/>
             </a:solidFill>
           </a:ln>
           <a:effectLst/>
@@ -18818,7 +18818,7 @@
             <a:r>
               <a:rPr sz="850" b="1" i="0">
                 <a:solidFill>
-                  <a:srgbClr val="C3002B"/>
+                  <a:srgbClr val="2A2250"/>
                 </a:solidFill>
                 <a:latin typeface="Arial"/>
               </a:rPr>
@@ -18846,7 +18846,7 @@
           </a:solidFill>
           <a:ln w="6350">
             <a:solidFill>
-              <a:srgbClr val="E2E2E2"/>
+              <a:srgbClr val="E2DED6"/>
             </a:solidFill>
           </a:ln>
           <a:effectLst/>
@@ -18899,7 +18899,7 @@
             <a:r>
               <a:rPr sz="850" b="0" i="0">
                 <a:solidFill>
-                  <a:srgbClr val="1C1C1C"/>
+                  <a:srgbClr val="1F1942"/>
                 </a:solidFill>
                 <a:latin typeface="Arial"/>
               </a:rPr>
@@ -18927,7 +18927,7 @@
           </a:solidFill>
           <a:ln w="6350">
             <a:solidFill>
-              <a:srgbClr val="E2E2E2"/>
+              <a:srgbClr val="E2DED6"/>
             </a:solidFill>
           </a:ln>
           <a:effectLst/>
@@ -18980,7 +18980,7 @@
             <a:r>
               <a:rPr sz="850" b="0" i="0">
                 <a:solidFill>
-                  <a:srgbClr val="1C1C1C"/>
+                  <a:srgbClr val="1F1942"/>
                 </a:solidFill>
                 <a:latin typeface="Arial"/>
               </a:rPr>
@@ -19008,7 +19008,7 @@
           </a:solidFill>
           <a:ln w="6350">
             <a:solidFill>
-              <a:srgbClr val="E2E2E2"/>
+              <a:srgbClr val="E2DED6"/>
             </a:solidFill>
           </a:ln>
           <a:effectLst/>
@@ -19061,7 +19061,7 @@
             <a:r>
               <a:rPr sz="850" b="1" i="0">
                 <a:solidFill>
-                  <a:srgbClr val="E89A00"/>
+                  <a:srgbClr val="F4B634"/>
                 </a:solidFill>
                 <a:latin typeface="Arial"/>
               </a:rPr>
@@ -19085,11 +19085,11 @@
             <a:avLst/>
           </a:prstGeom>
           <a:solidFill>
-            <a:srgbClr val="F3F3F3"/>
+            <a:srgbClr val="F4EFE6"/>
           </a:solidFill>
           <a:ln w="6350">
             <a:solidFill>
-              <a:srgbClr val="E2E2E2"/>
+              <a:srgbClr val="E2DED6"/>
             </a:solidFill>
           </a:ln>
           <a:effectLst/>
@@ -19142,7 +19142,7 @@
             <a:r>
               <a:rPr sz="850" b="0" i="0">
                 <a:solidFill>
-                  <a:srgbClr val="1C1C1C"/>
+                  <a:srgbClr val="1F1942"/>
                 </a:solidFill>
                 <a:latin typeface="Arial"/>
               </a:rPr>
@@ -19166,11 +19166,11 @@
             <a:avLst/>
           </a:prstGeom>
           <a:solidFill>
-            <a:srgbClr val="F3F3F3"/>
+            <a:srgbClr val="F4EFE6"/>
           </a:solidFill>
           <a:ln w="6350">
             <a:solidFill>
-              <a:srgbClr val="E2E2E2"/>
+              <a:srgbClr val="E2DED6"/>
             </a:solidFill>
           </a:ln>
           <a:effectLst/>
@@ -19223,7 +19223,7 @@
             <a:r>
               <a:rPr sz="850" b="0" i="0">
                 <a:solidFill>
-                  <a:srgbClr val="1C1C1C"/>
+                  <a:srgbClr val="1F1942"/>
                 </a:solidFill>
                 <a:latin typeface="Arial"/>
               </a:rPr>
@@ -19247,11 +19247,11 @@
             <a:avLst/>
           </a:prstGeom>
           <a:solidFill>
-            <a:srgbClr val="F3F3F3"/>
+            <a:srgbClr val="F4EFE6"/>
           </a:solidFill>
           <a:ln w="6350">
             <a:solidFill>
-              <a:srgbClr val="E2E2E2"/>
+              <a:srgbClr val="E2DED6"/>
             </a:solidFill>
           </a:ln>
           <a:effectLst/>
@@ -19304,7 +19304,7 @@
             <a:r>
               <a:rPr sz="850" b="1" i="0">
                 <a:solidFill>
-                  <a:srgbClr val="C3002B"/>
+                  <a:srgbClr val="2A2250"/>
                 </a:solidFill>
                 <a:latin typeface="Arial"/>
               </a:rPr>
@@ -19328,11 +19328,11 @@
             <a:avLst/>
           </a:prstGeom>
           <a:solidFill>
-            <a:srgbClr val="F3F3F3"/>
+            <a:srgbClr val="F4EFE6"/>
           </a:solidFill>
           <a:ln w="6350">
             <a:solidFill>
-              <a:srgbClr val="E2E2E2"/>
+              <a:srgbClr val="E2DED6"/>
             </a:solidFill>
           </a:ln>
           <a:effectLst/>
@@ -19385,7 +19385,7 @@
             <a:r>
               <a:rPr sz="850" b="0" i="0">
                 <a:solidFill>
-                  <a:srgbClr val="1C1C1C"/>
+                  <a:srgbClr val="1F1942"/>
                 </a:solidFill>
                 <a:latin typeface="Arial"/>
               </a:rPr>
@@ -19409,11 +19409,11 @@
             <a:avLst/>
           </a:prstGeom>
           <a:solidFill>
-            <a:srgbClr val="F3F3F3"/>
+            <a:srgbClr val="F4EFE6"/>
           </a:solidFill>
           <a:ln w="6350">
             <a:solidFill>
-              <a:srgbClr val="E2E2E2"/>
+              <a:srgbClr val="E2DED6"/>
             </a:solidFill>
           </a:ln>
           <a:effectLst/>
@@ -19466,7 +19466,7 @@
             <a:r>
               <a:rPr sz="850" b="0" i="0">
                 <a:solidFill>
-                  <a:srgbClr val="1C1C1C"/>
+                  <a:srgbClr val="1F1942"/>
                 </a:solidFill>
                 <a:latin typeface="Arial"/>
               </a:rPr>
@@ -19490,11 +19490,11 @@
             <a:avLst/>
           </a:prstGeom>
           <a:solidFill>
-            <a:srgbClr val="F3F3F3"/>
+            <a:srgbClr val="F4EFE6"/>
           </a:solidFill>
           <a:ln w="6350">
             <a:solidFill>
-              <a:srgbClr val="E2E2E2"/>
+              <a:srgbClr val="E2DED6"/>
             </a:solidFill>
           </a:ln>
           <a:effectLst/>
@@ -19547,7 +19547,7 @@
             <a:r>
               <a:rPr sz="850" b="1" i="0">
                 <a:solidFill>
-                  <a:srgbClr val="E89A00"/>
+                  <a:srgbClr val="F4B634"/>
                 </a:solidFill>
                 <a:latin typeface="Arial"/>
               </a:rPr>
@@ -19583,13 +19583,13 @@
         <p:spPr>
           <a:xfrm>
             <a:off x="0" y="0"/>
-            <a:ext cx="164592" cy="6858000"/>
+            <a:ext cx="128016" cy="6858000"/>
           </a:xfrm>
           <a:prstGeom prst="rect">
             <a:avLst/>
           </a:prstGeom>
           <a:solidFill>
-            <a:srgbClr val="C3002B"/>
+            <a:srgbClr val="F4B634"/>
           </a:solidFill>
           <a:ln>
             <a:noFill/>
@@ -19644,7 +19644,7 @@
             <a:r>
               <a:rPr sz="1000" b="1" i="0">
                 <a:solidFill>
-                  <a:srgbClr val="C3002B"/>
+                  <a:srgbClr val="F4B634"/>
                 </a:solidFill>
                 <a:latin typeface="Arial"/>
               </a:rPr>
@@ -19679,7 +19679,7 @@
             <a:r>
               <a:rPr sz="2300" b="1" i="0">
                 <a:solidFill>
-                  <a:srgbClr val="1C1C1C"/>
+                  <a:srgbClr val="1F1942"/>
                 </a:solidFill>
                 <a:latin typeface="Arial"/>
               </a:rPr>
@@ -19691,7 +19691,7 @@
             <a:r>
               <a:rPr sz="2300" b="1" i="0">
                 <a:solidFill>
-                  <a:srgbClr val="1C1C1C"/>
+                  <a:srgbClr val="1F1942"/>
                 </a:solidFill>
                 <a:latin typeface="Arial"/>
               </a:rPr>
@@ -19726,7 +19726,7 @@
             <a:r>
               <a:rPr sz="800" b="0" i="0">
                 <a:solidFill>
-                  <a:srgbClr val="7A7A7A"/>
+                  <a:srgbClr val="6B6467"/>
                 </a:solidFill>
                 <a:latin typeface="Arial"/>
               </a:rPr>
@@ -19761,7 +19761,7 @@
             <a:r>
               <a:rPr sz="1000" b="0" i="0">
                 <a:solidFill>
-                  <a:srgbClr val="7A7A7A"/>
+                  <a:srgbClr val="6B6467"/>
                 </a:solidFill>
                 <a:latin typeface="Arial"/>
               </a:rPr>
@@ -19785,7 +19785,7 @@
             <a:avLst/>
           </a:prstGeom>
           <a:solidFill>
-            <a:srgbClr val="C3002B"/>
+            <a:srgbClr val="1F1942"/>
           </a:solidFill>
           <a:ln>
             <a:noFill/>
@@ -19840,7 +19840,7 @@
             <a:r>
               <a:rPr sz="800" b="1" i="0">
                 <a:solidFill>
-                  <a:srgbClr val="FFFFFF"/>
+                  <a:srgbClr val="F4B634"/>
                 </a:solidFill>
                 <a:latin typeface="Arial"/>
               </a:rPr>
@@ -19864,11 +19864,11 @@
             <a:avLst/>
           </a:prstGeom>
           <a:solidFill>
-            <a:srgbClr val="1C1C1C"/>
+            <a:srgbClr val="1F1942"/>
           </a:solidFill>
           <a:ln w="6350">
             <a:solidFill>
-              <a:srgbClr val="E2E2E2"/>
+              <a:srgbClr val="E2DED6"/>
             </a:solidFill>
           </a:ln>
           <a:effectLst/>
@@ -19945,11 +19945,11 @@
             <a:avLst/>
           </a:prstGeom>
           <a:solidFill>
-            <a:srgbClr val="F3F3F3"/>
+            <a:srgbClr val="F4EFE6"/>
           </a:solidFill>
           <a:ln w="9525">
             <a:solidFill>
-              <a:srgbClr val="7A7A7A"/>
+              <a:srgbClr val="6B6467"/>
             </a:solidFill>
           </a:ln>
           <a:effectLst/>
@@ -20002,7 +20002,7 @@
             <a:r>
               <a:rPr sz="1150" b="0" i="0">
                 <a:solidFill>
-                  <a:srgbClr val="1C1C1C"/>
+                  <a:srgbClr val="1F1942"/>
                 </a:solidFill>
                 <a:latin typeface="Arial"/>
               </a:rPr>
@@ -20026,11 +20026,11 @@
             <a:avLst/>
           </a:prstGeom>
           <a:solidFill>
-            <a:srgbClr val="1C1C1C"/>
+            <a:srgbClr val="1F1942"/>
           </a:solidFill>
           <a:ln w="6350">
             <a:solidFill>
-              <a:srgbClr val="E2E2E2"/>
+              <a:srgbClr val="E2DED6"/>
             </a:solidFill>
           </a:ln>
           <a:effectLst/>
@@ -20107,11 +20107,11 @@
             <a:avLst/>
           </a:prstGeom>
           <a:solidFill>
-            <a:srgbClr val="F3F3F3"/>
+            <a:srgbClr val="F4EFE6"/>
           </a:solidFill>
           <a:ln w="9525">
             <a:solidFill>
-              <a:srgbClr val="7A7A7A"/>
+              <a:srgbClr val="6B6467"/>
             </a:solidFill>
           </a:ln>
           <a:effectLst/>
@@ -20164,7 +20164,7 @@
             <a:r>
               <a:rPr sz="1150" b="0" i="0">
                 <a:solidFill>
-                  <a:srgbClr val="1C1C1C"/>
+                  <a:srgbClr val="1F1942"/>
                 </a:solidFill>
                 <a:latin typeface="Arial"/>
               </a:rPr>
@@ -20188,11 +20188,11 @@
             <a:avLst/>
           </a:prstGeom>
           <a:solidFill>
-            <a:srgbClr val="C3002B"/>
+            <a:srgbClr val="2A2250"/>
           </a:solidFill>
           <a:ln w="6350">
             <a:solidFill>
-              <a:srgbClr val="E2E2E2"/>
+              <a:srgbClr val="E2DED6"/>
             </a:solidFill>
           </a:ln>
           <a:effectLst/>
@@ -20273,7 +20273,7 @@
           </a:solidFill>
           <a:ln w="9525">
             <a:solidFill>
-              <a:srgbClr val="C3002B"/>
+              <a:srgbClr val="2A2250"/>
             </a:solidFill>
           </a:ln>
           <a:effectLst/>
@@ -20326,7 +20326,7 @@
             <a:r>
               <a:rPr sz="1150" b="1" i="0">
                 <a:solidFill>
-                  <a:srgbClr val="1C1C1C"/>
+                  <a:srgbClr val="1F1942"/>
                 </a:solidFill>
                 <a:latin typeface="Arial"/>
               </a:rPr>
@@ -20350,11 +20350,11 @@
             <a:avLst/>
           </a:prstGeom>
           <a:solidFill>
-            <a:srgbClr val="C3002B"/>
+            <a:srgbClr val="2A2250"/>
           </a:solidFill>
           <a:ln w="6350">
             <a:solidFill>
-              <a:srgbClr val="E2E2E2"/>
+              <a:srgbClr val="E2DED6"/>
             </a:solidFill>
           </a:ln>
           <a:effectLst/>
@@ -20435,7 +20435,7 @@
           </a:solidFill>
           <a:ln w="9525">
             <a:solidFill>
-              <a:srgbClr val="C3002B"/>
+              <a:srgbClr val="2A2250"/>
             </a:solidFill>
           </a:ln>
           <a:effectLst/>
@@ -20488,7 +20488,7 @@
             <a:r>
               <a:rPr sz="1150" b="1" i="0">
                 <a:solidFill>
-                  <a:srgbClr val="1C1C1C"/>
+                  <a:srgbClr val="1F1942"/>
                 </a:solidFill>
                 <a:latin typeface="Arial"/>
               </a:rPr>
@@ -20524,13 +20524,13 @@
         <p:spPr>
           <a:xfrm>
             <a:off x="0" y="0"/>
-            <a:ext cx="164592" cy="6858000"/>
+            <a:ext cx="128016" cy="6858000"/>
           </a:xfrm>
           <a:prstGeom prst="rect">
             <a:avLst/>
           </a:prstGeom>
           <a:solidFill>
-            <a:srgbClr val="C3002B"/>
+            <a:srgbClr val="F4B634"/>
           </a:solidFill>
           <a:ln>
             <a:noFill/>
@@ -20585,7 +20585,7 @@
             <a:r>
               <a:rPr sz="1000" b="1" i="0">
                 <a:solidFill>
-                  <a:srgbClr val="C3002B"/>
+                  <a:srgbClr val="F4B634"/>
                 </a:solidFill>
                 <a:latin typeface="Arial"/>
               </a:rPr>
@@ -20620,7 +20620,7 @@
             <a:r>
               <a:rPr sz="2300" b="1" i="0">
                 <a:solidFill>
-                  <a:srgbClr val="1C1C1C"/>
+                  <a:srgbClr val="1F1942"/>
                 </a:solidFill>
                 <a:latin typeface="Arial"/>
               </a:rPr>
@@ -20655,7 +20655,7 @@
             <a:r>
               <a:rPr sz="800" b="0" i="0">
                 <a:solidFill>
-                  <a:srgbClr val="7A7A7A"/>
+                  <a:srgbClr val="6B6467"/>
                 </a:solidFill>
                 <a:latin typeface="Arial"/>
               </a:rPr>
@@ -20690,7 +20690,7 @@
             <a:r>
               <a:rPr sz="1000" b="0" i="0">
                 <a:solidFill>
-                  <a:srgbClr val="7A7A7A"/>
+                  <a:srgbClr val="6B6467"/>
                 </a:solidFill>
                 <a:latin typeface="Arial"/>
               </a:rPr>
@@ -20714,7 +20714,7 @@
             <a:avLst/>
           </a:prstGeom>
           <a:solidFill>
-            <a:srgbClr val="C3002B"/>
+            <a:srgbClr val="1F1942"/>
           </a:solidFill>
           <a:ln>
             <a:noFill/>
@@ -20769,7 +20769,7 @@
             <a:r>
               <a:rPr sz="800" b="1" i="0">
                 <a:solidFill>
-                  <a:srgbClr val="FFFFFF"/>
+                  <a:srgbClr val="F4B634"/>
                 </a:solidFill>
                 <a:latin typeface="Arial"/>
               </a:rPr>
@@ -20797,7 +20797,7 @@
           </a:solidFill>
           <a:ln w="6350">
             <a:solidFill>
-              <a:srgbClr val="E2E2E2"/>
+              <a:srgbClr val="E2DED6"/>
             </a:solidFill>
           </a:ln>
           <a:effectLst/>
@@ -20850,7 +20850,7 @@
             <a:r>
               <a:rPr sz="1300" b="1" i="0">
                 <a:solidFill>
-                  <a:srgbClr val="C3002B"/>
+                  <a:srgbClr val="2A2250"/>
                 </a:solidFill>
                 <a:latin typeface="Arial"/>
               </a:rPr>
@@ -20885,7 +20885,7 @@
             <a:r>
               <a:rPr sz="1100" b="0" i="0">
                 <a:solidFill>
-                  <a:srgbClr val="1C1C1C"/>
+                  <a:srgbClr val="1F1942"/>
                 </a:solidFill>
                 <a:latin typeface="Arial"/>
               </a:rPr>
@@ -20913,7 +20913,7 @@
           </a:solidFill>
           <a:ln w="6350">
             <a:solidFill>
-              <a:srgbClr val="E2E2E2"/>
+              <a:srgbClr val="E2DED6"/>
             </a:solidFill>
           </a:ln>
           <a:effectLst/>
@@ -20966,7 +20966,7 @@
             <a:r>
               <a:rPr sz="1300" b="1" i="0">
                 <a:solidFill>
-                  <a:srgbClr val="C3002B"/>
+                  <a:srgbClr val="2A2250"/>
                 </a:solidFill>
                 <a:latin typeface="Arial"/>
               </a:rPr>
@@ -21001,7 +21001,7 @@
             <a:r>
               <a:rPr sz="1100" b="0" i="0">
                 <a:solidFill>
-                  <a:srgbClr val="1C1C1C"/>
+                  <a:srgbClr val="1F1942"/>
                 </a:solidFill>
                 <a:latin typeface="Arial"/>
               </a:rPr>
@@ -21029,7 +21029,7 @@
           </a:solidFill>
           <a:ln w="6350">
             <a:solidFill>
-              <a:srgbClr val="E2E2E2"/>
+              <a:srgbClr val="E2DED6"/>
             </a:solidFill>
           </a:ln>
           <a:effectLst/>
@@ -21082,7 +21082,7 @@
             <a:r>
               <a:rPr sz="1300" b="1" i="0">
                 <a:solidFill>
-                  <a:srgbClr val="C3002B"/>
+                  <a:srgbClr val="2A2250"/>
                 </a:solidFill>
                 <a:latin typeface="Arial"/>
               </a:rPr>
@@ -21117,7 +21117,7 @@
             <a:r>
               <a:rPr sz="1100" b="0" i="0">
                 <a:solidFill>
-                  <a:srgbClr val="1C1C1C"/>
+                  <a:srgbClr val="1F1942"/>
                 </a:solidFill>
                 <a:latin typeface="Arial"/>
               </a:rPr>
@@ -21145,7 +21145,7 @@
           </a:solidFill>
           <a:ln w="6350">
             <a:solidFill>
-              <a:srgbClr val="E2E2E2"/>
+              <a:srgbClr val="E2DED6"/>
             </a:solidFill>
           </a:ln>
           <a:effectLst/>
@@ -21198,7 +21198,7 @@
             <a:r>
               <a:rPr sz="1300" b="1" i="0">
                 <a:solidFill>
-                  <a:srgbClr val="C3002B"/>
+                  <a:srgbClr val="2A2250"/>
                 </a:solidFill>
                 <a:latin typeface="Arial"/>
               </a:rPr>
@@ -21233,7 +21233,7 @@
             <a:r>
               <a:rPr sz="1100" b="0" i="0">
                 <a:solidFill>
-                  <a:srgbClr val="1C1C1C"/>
+                  <a:srgbClr val="1F1942"/>
                 </a:solidFill>
                 <a:latin typeface="Arial"/>
               </a:rPr>
@@ -21392,13 +21392,13 @@
         <p:spPr>
           <a:xfrm>
             <a:off x="0" y="0"/>
-            <a:ext cx="164592" cy="6858000"/>
+            <a:ext cx="128016" cy="6858000"/>
           </a:xfrm>
           <a:prstGeom prst="rect">
             <a:avLst/>
           </a:prstGeom>
           <a:solidFill>
-            <a:srgbClr val="C3002B"/>
+            <a:srgbClr val="F4B634"/>
           </a:solidFill>
           <a:ln>
             <a:noFill/>
@@ -21453,7 +21453,7 @@
             <a:r>
               <a:rPr sz="1000" b="1" i="0">
                 <a:solidFill>
-                  <a:srgbClr val="C3002B"/>
+                  <a:srgbClr val="F4B634"/>
                 </a:solidFill>
                 <a:latin typeface="Arial"/>
               </a:rPr>
@@ -21488,7 +21488,7 @@
             <a:r>
               <a:rPr sz="2300" b="1" i="0">
                 <a:solidFill>
-                  <a:srgbClr val="1C1C1C"/>
+                  <a:srgbClr val="1F1942"/>
                 </a:solidFill>
                 <a:latin typeface="Arial"/>
               </a:rPr>
@@ -21500,7 +21500,7 @@
             <a:r>
               <a:rPr sz="2300" b="1" i="0">
                 <a:solidFill>
-                  <a:srgbClr val="1C1C1C"/>
+                  <a:srgbClr val="1F1942"/>
                 </a:solidFill>
                 <a:latin typeface="Arial"/>
               </a:rPr>
@@ -21535,7 +21535,7 @@
             <a:r>
               <a:rPr sz="800" b="0" i="0">
                 <a:solidFill>
-                  <a:srgbClr val="7A7A7A"/>
+                  <a:srgbClr val="6B6467"/>
                 </a:solidFill>
                 <a:latin typeface="Arial"/>
               </a:rPr>
@@ -21570,7 +21570,7 @@
             <a:r>
               <a:rPr sz="1000" b="0" i="0">
                 <a:solidFill>
-                  <a:srgbClr val="7A7A7A"/>
+                  <a:srgbClr val="6B6467"/>
                 </a:solidFill>
                 <a:latin typeface="Arial"/>
               </a:rPr>
@@ -21594,7 +21594,7 @@
             <a:avLst/>
           </a:prstGeom>
           <a:solidFill>
-            <a:srgbClr val="C3002B"/>
+            <a:srgbClr val="1F1942"/>
           </a:solidFill>
           <a:ln>
             <a:noFill/>
@@ -21649,7 +21649,7 @@
             <a:r>
               <a:rPr sz="800" b="1" i="0">
                 <a:solidFill>
-                  <a:srgbClr val="FFFFFF"/>
+                  <a:srgbClr val="F4B634"/>
                 </a:solidFill>
                 <a:latin typeface="Arial"/>
               </a:rPr>
@@ -21673,11 +21673,11 @@
             <a:avLst/>
           </a:prstGeom>
           <a:solidFill>
-            <a:srgbClr val="F3F3F3"/>
+            <a:srgbClr val="F4EFE6"/>
           </a:solidFill>
           <a:ln w="6350">
             <a:solidFill>
-              <a:srgbClr val="E2E2E2"/>
+              <a:srgbClr val="E2DED6"/>
             </a:solidFill>
           </a:ln>
           <a:effectLst/>
@@ -21723,7 +21723,7 @@
           </a:solidFill>
           <a:ln w="6350">
             <a:solidFill>
-              <a:srgbClr val="E2E2E2"/>
+              <a:srgbClr val="E2DED6"/>
             </a:solidFill>
           </a:ln>
           <a:effectLst/>
@@ -21776,7 +21776,7 @@
             <a:r>
               <a:rPr sz="1000" b="0" i="0">
                 <a:solidFill>
-                  <a:srgbClr val="7A7A7A"/>
+                  <a:srgbClr val="6B6467"/>
                 </a:solidFill>
                 <a:latin typeface="Arial"/>
               </a:rPr>
@@ -21811,7 +21811,7 @@
             <a:r>
               <a:rPr sz="1100" b="1" i="0">
                 <a:solidFill>
-                  <a:srgbClr val="C3002B"/>
+                  <a:srgbClr val="2A2250"/>
                 </a:solidFill>
                 <a:latin typeface="Arial"/>
               </a:rPr>
@@ -21846,7 +21846,7 @@
             <a:r>
               <a:rPr sz="900" b="0" i="0">
                 <a:solidFill>
-                  <a:srgbClr val="7A7A7A"/>
+                  <a:srgbClr val="6B6467"/>
                 </a:solidFill>
                 <a:latin typeface="Arial"/>
               </a:rPr>
@@ -21858,7 +21858,7 @@
             <a:r>
               <a:rPr sz="900" b="0" i="0">
                 <a:solidFill>
-                  <a:srgbClr val="7A7A7A"/>
+                  <a:srgbClr val="6B6467"/>
                 </a:solidFill>
                 <a:latin typeface="Arial"/>
               </a:rPr>
@@ -21870,7 +21870,7 @@
             <a:r>
               <a:rPr sz="900" b="0" i="0">
                 <a:solidFill>
-                  <a:srgbClr val="7A7A7A"/>
+                  <a:srgbClr val="6B6467"/>
                 </a:solidFill>
                 <a:latin typeface="Arial"/>
               </a:rPr>
@@ -21882,7 +21882,7 @@
             <a:r>
               <a:rPr sz="900" b="0" i="0">
                 <a:solidFill>
-                  <a:srgbClr val="7A7A7A"/>
+                  <a:srgbClr val="6B6467"/>
                 </a:solidFill>
                 <a:latin typeface="Arial"/>
               </a:rPr>
@@ -21906,11 +21906,11 @@
             <a:avLst/>
           </a:prstGeom>
           <a:solidFill>
-            <a:srgbClr val="F3F3F3"/>
+            <a:srgbClr val="F4EFE6"/>
           </a:solidFill>
           <a:ln w="6350">
             <a:solidFill>
-              <a:srgbClr val="E2E2E2"/>
+              <a:srgbClr val="E2DED6"/>
             </a:solidFill>
           </a:ln>
           <a:effectLst/>
@@ -21956,7 +21956,7 @@
           </a:solidFill>
           <a:ln w="6350">
             <a:solidFill>
-              <a:srgbClr val="E2E2E2"/>
+              <a:srgbClr val="E2DED6"/>
             </a:solidFill>
           </a:ln>
           <a:effectLst/>
@@ -22009,7 +22009,7 @@
             <a:r>
               <a:rPr sz="1000" b="0" i="0">
                 <a:solidFill>
-                  <a:srgbClr val="7A7A7A"/>
+                  <a:srgbClr val="6B6467"/>
                 </a:solidFill>
                 <a:latin typeface="Arial"/>
               </a:rPr>
@@ -22044,7 +22044,7 @@
             <a:r>
               <a:rPr sz="1100" b="1" i="0">
                 <a:solidFill>
-                  <a:srgbClr val="C3002B"/>
+                  <a:srgbClr val="2A2250"/>
                 </a:solidFill>
                 <a:latin typeface="Arial"/>
               </a:rPr>
@@ -22079,7 +22079,7 @@
             <a:r>
               <a:rPr sz="900" b="0" i="0">
                 <a:solidFill>
-                  <a:srgbClr val="7A7A7A"/>
+                  <a:srgbClr val="6B6467"/>
                 </a:solidFill>
                 <a:latin typeface="Arial"/>
               </a:rPr>
@@ -22091,7 +22091,7 @@
             <a:r>
               <a:rPr sz="900" b="0" i="0">
                 <a:solidFill>
-                  <a:srgbClr val="7A7A7A"/>
+                  <a:srgbClr val="6B6467"/>
                 </a:solidFill>
                 <a:latin typeface="Arial"/>
               </a:rPr>
@@ -22103,7 +22103,7 @@
             <a:r>
               <a:rPr sz="900" b="0" i="0">
                 <a:solidFill>
-                  <a:srgbClr val="7A7A7A"/>
+                  <a:srgbClr val="6B6467"/>
                 </a:solidFill>
                 <a:latin typeface="Arial"/>
               </a:rPr>
@@ -22115,7 +22115,7 @@
             <a:r>
               <a:rPr sz="900" b="0" i="0">
                 <a:solidFill>
-                  <a:srgbClr val="7A7A7A"/>
+                  <a:srgbClr val="6B6467"/>
                 </a:solidFill>
                 <a:latin typeface="Arial"/>
               </a:rPr>
@@ -22139,11 +22139,11 @@
             <a:avLst/>
           </a:prstGeom>
           <a:solidFill>
-            <a:srgbClr val="F3F3F3"/>
+            <a:srgbClr val="F4EFE6"/>
           </a:solidFill>
           <a:ln w="6350">
             <a:solidFill>
-              <a:srgbClr val="E2E2E2"/>
+              <a:srgbClr val="E2DED6"/>
             </a:solidFill>
           </a:ln>
           <a:effectLst/>
@@ -22189,7 +22189,7 @@
           </a:solidFill>
           <a:ln w="6350">
             <a:solidFill>
-              <a:srgbClr val="E2E2E2"/>
+              <a:srgbClr val="E2DED6"/>
             </a:solidFill>
           </a:ln>
           <a:effectLst/>
@@ -22242,7 +22242,7 @@
             <a:r>
               <a:rPr sz="1000" b="0" i="0">
                 <a:solidFill>
-                  <a:srgbClr val="7A7A7A"/>
+                  <a:srgbClr val="6B6467"/>
                 </a:solidFill>
                 <a:latin typeface="Arial"/>
               </a:rPr>
@@ -22277,7 +22277,7 @@
             <a:r>
               <a:rPr sz="1100" b="1" i="0">
                 <a:solidFill>
-                  <a:srgbClr val="C3002B"/>
+                  <a:srgbClr val="2A2250"/>
                 </a:solidFill>
                 <a:latin typeface="Arial"/>
               </a:rPr>
@@ -22312,7 +22312,7 @@
             <a:r>
               <a:rPr sz="900" b="0" i="0">
                 <a:solidFill>
-                  <a:srgbClr val="7A7A7A"/>
+                  <a:srgbClr val="6B6467"/>
                 </a:solidFill>
                 <a:latin typeface="Arial"/>
               </a:rPr>
@@ -22324,7 +22324,7 @@
             <a:r>
               <a:rPr sz="900" b="0" i="0">
                 <a:solidFill>
-                  <a:srgbClr val="7A7A7A"/>
+                  <a:srgbClr val="6B6467"/>
                 </a:solidFill>
                 <a:latin typeface="Arial"/>
               </a:rPr>
@@ -22336,7 +22336,7 @@
             <a:r>
               <a:rPr sz="900" b="0" i="0">
                 <a:solidFill>
-                  <a:srgbClr val="7A7A7A"/>
+                  <a:srgbClr val="6B6467"/>
                 </a:solidFill>
                 <a:latin typeface="Arial"/>
               </a:rPr>
@@ -22348,7 +22348,7 @@
             <a:r>
               <a:rPr sz="900" b="0" i="0">
                 <a:solidFill>
-                  <a:srgbClr val="7A7A7A"/>
+                  <a:srgbClr val="6B6467"/>
                 </a:solidFill>
                 <a:latin typeface="Arial"/>
               </a:rPr>
@@ -22372,11 +22372,11 @@
             <a:avLst/>
           </a:prstGeom>
           <a:solidFill>
-            <a:srgbClr val="F3F3F3"/>
+            <a:srgbClr val="F4EFE6"/>
           </a:solidFill>
           <a:ln w="6350">
             <a:solidFill>
-              <a:srgbClr val="E2E2E2"/>
+              <a:srgbClr val="E2DED6"/>
             </a:solidFill>
           </a:ln>
           <a:effectLst/>
@@ -22422,7 +22422,7 @@
           </a:solidFill>
           <a:ln w="6350">
             <a:solidFill>
-              <a:srgbClr val="E2E2E2"/>
+              <a:srgbClr val="E2DED6"/>
             </a:solidFill>
           </a:ln>
           <a:effectLst/>
@@ -22475,7 +22475,7 @@
             <a:r>
               <a:rPr sz="1000" b="0" i="0">
                 <a:solidFill>
-                  <a:srgbClr val="7A7A7A"/>
+                  <a:srgbClr val="6B6467"/>
                 </a:solidFill>
                 <a:latin typeface="Arial"/>
               </a:rPr>
@@ -22510,7 +22510,7 @@
             <a:r>
               <a:rPr sz="1100" b="1" i="0">
                 <a:solidFill>
-                  <a:srgbClr val="C3002B"/>
+                  <a:srgbClr val="2A2250"/>
                 </a:solidFill>
                 <a:latin typeface="Arial"/>
               </a:rPr>
@@ -22545,7 +22545,7 @@
             <a:r>
               <a:rPr sz="900" b="0" i="0">
                 <a:solidFill>
-                  <a:srgbClr val="7A7A7A"/>
+                  <a:srgbClr val="6B6467"/>
                 </a:solidFill>
                 <a:latin typeface="Arial"/>
               </a:rPr>
@@ -22557,7 +22557,7 @@
             <a:r>
               <a:rPr sz="900" b="0" i="0">
                 <a:solidFill>
-                  <a:srgbClr val="7A7A7A"/>
+                  <a:srgbClr val="6B6467"/>
                 </a:solidFill>
                 <a:latin typeface="Arial"/>
               </a:rPr>
@@ -22569,7 +22569,7 @@
             <a:r>
               <a:rPr sz="900" b="0" i="0">
                 <a:solidFill>
-                  <a:srgbClr val="7A7A7A"/>
+                  <a:srgbClr val="6B6467"/>
                 </a:solidFill>
                 <a:latin typeface="Arial"/>
               </a:rPr>
@@ -22581,7 +22581,7 @@
             <a:r>
               <a:rPr sz="900" b="0" i="0">
                 <a:solidFill>
-                  <a:srgbClr val="7A7A7A"/>
+                  <a:srgbClr val="6B6467"/>
                 </a:solidFill>
                 <a:latin typeface="Arial"/>
               </a:rPr>
@@ -22617,13 +22617,13 @@
         <p:spPr>
           <a:xfrm>
             <a:off x="0" y="0"/>
-            <a:ext cx="164592" cy="6858000"/>
+            <a:ext cx="128016" cy="6858000"/>
           </a:xfrm>
           <a:prstGeom prst="rect">
             <a:avLst/>
           </a:prstGeom>
           <a:solidFill>
-            <a:srgbClr val="C3002B"/>
+            <a:srgbClr val="F4B634"/>
           </a:solidFill>
           <a:ln>
             <a:noFill/>
@@ -22678,7 +22678,7 @@
             <a:r>
               <a:rPr sz="1000" b="1" i="0">
                 <a:solidFill>
-                  <a:srgbClr val="C3002B"/>
+                  <a:srgbClr val="F4B634"/>
                 </a:solidFill>
                 <a:latin typeface="Arial"/>
               </a:rPr>
@@ -22713,7 +22713,7 @@
             <a:r>
               <a:rPr sz="2300" b="1" i="0">
                 <a:solidFill>
-                  <a:srgbClr val="1C1C1C"/>
+                  <a:srgbClr val="1F1942"/>
                 </a:solidFill>
                 <a:latin typeface="Arial"/>
               </a:rPr>
@@ -22725,7 +22725,7 @@
             <a:r>
               <a:rPr sz="2300" b="1" i="0">
                 <a:solidFill>
-                  <a:srgbClr val="1C1C1C"/>
+                  <a:srgbClr val="1F1942"/>
                 </a:solidFill>
                 <a:latin typeface="Arial"/>
               </a:rPr>
@@ -22760,7 +22760,7 @@
             <a:r>
               <a:rPr sz="800" b="0" i="0">
                 <a:solidFill>
-                  <a:srgbClr val="7A7A7A"/>
+                  <a:srgbClr val="6B6467"/>
                 </a:solidFill>
                 <a:latin typeface="Arial"/>
               </a:rPr>
@@ -22795,7 +22795,7 @@
             <a:r>
               <a:rPr sz="1000" b="0" i="0">
                 <a:solidFill>
-                  <a:srgbClr val="7A7A7A"/>
+                  <a:srgbClr val="6B6467"/>
                 </a:solidFill>
                 <a:latin typeface="Arial"/>
               </a:rPr>
@@ -22819,7 +22819,7 @@
             <a:avLst/>
           </a:prstGeom>
           <a:solidFill>
-            <a:srgbClr val="C3002B"/>
+            <a:srgbClr val="1F1942"/>
           </a:solidFill>
           <a:ln>
             <a:noFill/>
@@ -22874,7 +22874,7 @@
             <a:r>
               <a:rPr sz="800" b="1" i="0">
                 <a:solidFill>
-                  <a:srgbClr val="FFFFFF"/>
+                  <a:srgbClr val="F4B634"/>
                 </a:solidFill>
                 <a:latin typeface="Arial"/>
               </a:rPr>
@@ -22902,7 +22902,7 @@
           </a:solidFill>
           <a:ln w="6350">
             <a:solidFill>
-              <a:srgbClr val="E2E2E2"/>
+              <a:srgbClr val="E2DED6"/>
             </a:solidFill>
           </a:ln>
           <a:effectLst/>
@@ -22955,7 +22955,7 @@
             <a:r>
               <a:rPr sz="1050" b="1" i="0">
                 <a:solidFill>
-                  <a:srgbClr val="1C1C1C"/>
+                  <a:srgbClr val="1F1942"/>
                 </a:solidFill>
                 <a:latin typeface="Arial"/>
               </a:rPr>
@@ -22990,7 +22990,7 @@
             <a:r>
               <a:rPr sz="950" b="0" i="0">
                 <a:solidFill>
-                  <a:srgbClr val="1C1C1C"/>
+                  <a:srgbClr val="1F1942"/>
                 </a:solidFill>
                 <a:latin typeface="Arial"/>
               </a:rPr>
@@ -23025,7 +23025,7 @@
             <a:r>
               <a:rPr sz="1050" b="1" i="0">
                 <a:solidFill>
-                  <a:srgbClr val="C3002B"/>
+                  <a:srgbClr val="2A2250"/>
                 </a:solidFill>
                 <a:latin typeface="Arial"/>
               </a:rPr>
@@ -23049,11 +23049,11 @@
             <a:avLst/>
           </a:prstGeom>
           <a:solidFill>
-            <a:srgbClr val="F3F3F3"/>
+            <a:srgbClr val="F4EFE6"/>
           </a:solidFill>
           <a:ln w="6350">
             <a:solidFill>
-              <a:srgbClr val="E2E2E2"/>
+              <a:srgbClr val="E2DED6"/>
             </a:solidFill>
           </a:ln>
           <a:effectLst/>
@@ -23106,7 +23106,7 @@
             <a:r>
               <a:rPr sz="1050" b="1" i="0">
                 <a:solidFill>
-                  <a:srgbClr val="1C1C1C"/>
+                  <a:srgbClr val="1F1942"/>
                 </a:solidFill>
                 <a:latin typeface="Arial"/>
               </a:rPr>
@@ -23141,7 +23141,7 @@
             <a:r>
               <a:rPr sz="950" b="0" i="0">
                 <a:solidFill>
-                  <a:srgbClr val="1C1C1C"/>
+                  <a:srgbClr val="1F1942"/>
                 </a:solidFill>
                 <a:latin typeface="Arial"/>
               </a:rPr>
@@ -23176,7 +23176,7 @@
             <a:r>
               <a:rPr sz="1050" b="1" i="0">
                 <a:solidFill>
-                  <a:srgbClr val="C3002B"/>
+                  <a:srgbClr val="2A2250"/>
                 </a:solidFill>
                 <a:latin typeface="Arial"/>
               </a:rPr>
@@ -23204,7 +23204,7 @@
           </a:solidFill>
           <a:ln w="6350">
             <a:solidFill>
-              <a:srgbClr val="E2E2E2"/>
+              <a:srgbClr val="E2DED6"/>
             </a:solidFill>
           </a:ln>
           <a:effectLst/>
@@ -23257,7 +23257,7 @@
             <a:r>
               <a:rPr sz="1050" b="1" i="0">
                 <a:solidFill>
-                  <a:srgbClr val="1C1C1C"/>
+                  <a:srgbClr val="1F1942"/>
                 </a:solidFill>
                 <a:latin typeface="Arial"/>
               </a:rPr>
@@ -23292,7 +23292,7 @@
             <a:r>
               <a:rPr sz="950" b="0" i="0">
                 <a:solidFill>
-                  <a:srgbClr val="1C1C1C"/>
+                  <a:srgbClr val="1F1942"/>
                 </a:solidFill>
                 <a:latin typeface="Arial"/>
               </a:rPr>
@@ -23327,7 +23327,7 @@
             <a:r>
               <a:rPr sz="1050" b="1" i="0">
                 <a:solidFill>
-                  <a:srgbClr val="C3002B"/>
+                  <a:srgbClr val="2A2250"/>
                 </a:solidFill>
                 <a:latin typeface="Arial"/>
               </a:rPr>
@@ -23351,11 +23351,11 @@
             <a:avLst/>
           </a:prstGeom>
           <a:solidFill>
-            <a:srgbClr val="F3F3F3"/>
+            <a:srgbClr val="F4EFE6"/>
           </a:solidFill>
           <a:ln w="6350">
             <a:solidFill>
-              <a:srgbClr val="E2E2E2"/>
+              <a:srgbClr val="E2DED6"/>
             </a:solidFill>
           </a:ln>
           <a:effectLst/>
@@ -23408,7 +23408,7 @@
             <a:r>
               <a:rPr sz="1050" b="1" i="0">
                 <a:solidFill>
-                  <a:srgbClr val="1C1C1C"/>
+                  <a:srgbClr val="1F1942"/>
                 </a:solidFill>
                 <a:latin typeface="Arial"/>
               </a:rPr>
@@ -23443,7 +23443,7 @@
             <a:r>
               <a:rPr sz="950" b="0" i="0">
                 <a:solidFill>
-                  <a:srgbClr val="1C1C1C"/>
+                  <a:srgbClr val="1F1942"/>
                 </a:solidFill>
                 <a:latin typeface="Arial"/>
               </a:rPr>
@@ -23478,7 +23478,7 @@
             <a:r>
               <a:rPr sz="1050" b="1" i="0">
                 <a:solidFill>
-                  <a:srgbClr val="C3002B"/>
+                  <a:srgbClr val="2A2250"/>
                 </a:solidFill>
                 <a:latin typeface="Arial"/>
               </a:rPr>
@@ -23502,11 +23502,11 @@
             <a:avLst/>
           </a:prstGeom>
           <a:solidFill>
-            <a:srgbClr val="F3F3F3"/>
+            <a:srgbClr val="F4EFE6"/>
           </a:solidFill>
           <a:ln w="6350">
             <a:solidFill>
-              <a:srgbClr val="E2E2E2"/>
+              <a:srgbClr val="E2DED6"/>
             </a:solidFill>
           </a:ln>
           <a:effectLst/>
@@ -23559,7 +23559,7 @@
             <a:r>
               <a:rPr sz="1100" b="1" i="0">
                 <a:solidFill>
-                  <a:srgbClr val="C3002B"/>
+                  <a:srgbClr val="2A2250"/>
                 </a:solidFill>
                 <a:latin typeface="Arial"/>
               </a:rPr>
@@ -23598,7 +23598,7 @@
             <a:r>
               <a:rPr sz="1000" b="0" i="0">
                 <a:solidFill>
-                  <a:srgbClr val="1C1C1C"/>
+                  <a:srgbClr val="1F1942"/>
                 </a:solidFill>
                 <a:latin typeface="Arial"/>
               </a:rPr>
@@ -23614,7 +23614,7 @@
             <a:r>
               <a:rPr sz="1000" b="0" i="0">
                 <a:solidFill>
-                  <a:srgbClr val="1C1C1C"/>
+                  <a:srgbClr val="1F1942"/>
                 </a:solidFill>
                 <a:latin typeface="Arial"/>
               </a:rPr>
@@ -23630,7 +23630,7 @@
             <a:r>
               <a:rPr sz="1000" b="0" i="0">
                 <a:solidFill>
-                  <a:srgbClr val="1C1C1C"/>
+                  <a:srgbClr val="1F1942"/>
                 </a:solidFill>
                 <a:latin typeface="Arial"/>
               </a:rPr>
@@ -23646,7 +23646,7 @@
             <a:r>
               <a:rPr sz="1000" b="0" i="0">
                 <a:solidFill>
-                  <a:srgbClr val="1C1C1C"/>
+                  <a:srgbClr val="1F1942"/>
                 </a:solidFill>
                 <a:latin typeface="Arial"/>
               </a:rPr>
@@ -23662,7 +23662,7 @@
             <a:r>
               <a:rPr sz="1000" b="0" i="0">
                 <a:solidFill>
-                  <a:srgbClr val="1C1C1C"/>
+                  <a:srgbClr val="1F1942"/>
                 </a:solidFill>
                 <a:latin typeface="Arial"/>
               </a:rPr>
@@ -23678,7 +23678,7 @@
             <a:r>
               <a:rPr sz="1000" b="0" i="0">
                 <a:solidFill>
-                  <a:srgbClr val="1C1C1C"/>
+                  <a:srgbClr val="1F1942"/>
                 </a:solidFill>
                 <a:latin typeface="Arial"/>
               </a:rPr>
@@ -23694,7 +23694,7 @@
             <a:r>
               <a:rPr sz="1000" b="0" i="0">
                 <a:solidFill>
-                  <a:srgbClr val="1C1C1C"/>
+                  <a:srgbClr val="1F1942"/>
                 </a:solidFill>
                 <a:latin typeface="Arial"/>
               </a:rPr>
@@ -23722,7 +23722,7 @@
           </a:solidFill>
           <a:ln w="6350">
             <a:solidFill>
-              <a:srgbClr val="E2E2E2"/>
+              <a:srgbClr val="E2DED6"/>
             </a:solidFill>
           </a:ln>
           <a:effectLst/>
@@ -23775,7 +23775,7 @@
             <a:r>
               <a:rPr sz="1100" b="1" i="0">
                 <a:solidFill>
-                  <a:srgbClr val="C3002B"/>
+                  <a:srgbClr val="2A2250"/>
                 </a:solidFill>
                 <a:latin typeface="Arial"/>
               </a:rPr>
@@ -23814,7 +23814,7 @@
             <a:r>
               <a:rPr sz="1000" b="0" i="0">
                 <a:solidFill>
-                  <a:srgbClr val="1C1C1C"/>
+                  <a:srgbClr val="1F1942"/>
                 </a:solidFill>
                 <a:latin typeface="Arial"/>
               </a:rPr>
@@ -23830,7 +23830,7 @@
             <a:r>
               <a:rPr sz="1000" b="0" i="0">
                 <a:solidFill>
-                  <a:srgbClr val="1C1C1C"/>
+                  <a:srgbClr val="1F1942"/>
                 </a:solidFill>
                 <a:latin typeface="Arial"/>
               </a:rPr>
@@ -23846,7 +23846,7 @@
             <a:r>
               <a:rPr sz="1000" b="0" i="0">
                 <a:solidFill>
-                  <a:srgbClr val="1C1C1C"/>
+                  <a:srgbClr val="1F1942"/>
                 </a:solidFill>
                 <a:latin typeface="Arial"/>
               </a:rPr>
@@ -23888,11 +23888,11 @@
             <a:avLst/>
           </a:prstGeom>
           <a:solidFill>
-            <a:srgbClr val="1C1C1C"/>
+            <a:srgbClr val="1F1942"/>
           </a:solidFill>
           <a:ln w="9525">
             <a:solidFill>
-              <a:srgbClr val="1C1C1C"/>
+              <a:srgbClr val="1F1942"/>
             </a:solidFill>
           </a:ln>
           <a:effectLst/>
@@ -23928,13 +23928,13 @@
         <p:spPr>
           <a:xfrm>
             <a:off x="0" y="0"/>
-            <a:ext cx="164592" cy="6858000"/>
+            <a:ext cx="128016" cy="6858000"/>
           </a:xfrm>
           <a:prstGeom prst="rect">
             <a:avLst/>
           </a:prstGeom>
           <a:solidFill>
-            <a:srgbClr val="C3002B"/>
+            <a:srgbClr val="F4B634"/>
           </a:solidFill>
           <a:ln>
             <a:noFill/>
@@ -23989,7 +23989,7 @@
             <a:r>
               <a:rPr sz="1100" b="1" i="0">
                 <a:solidFill>
-                  <a:srgbClr val="C3002B"/>
+                  <a:srgbClr val="F4B634"/>
                 </a:solidFill>
                 <a:latin typeface="Arial"/>
               </a:rPr>
@@ -24094,7 +24094,7 @@
             <a:r>
               <a:rPr sz="1200" b="1" i="0">
                 <a:solidFill>
-                  <a:srgbClr val="C3002B"/>
+                  <a:srgbClr val="2A2250"/>
                 </a:solidFill>
                 <a:latin typeface="Arial"/>
               </a:rPr>
@@ -24118,11 +24118,11 @@
             <a:avLst/>
           </a:prstGeom>
           <a:solidFill>
-            <a:srgbClr val="C3002B"/>
+            <a:srgbClr val="2A2250"/>
           </a:solidFill>
           <a:ln w="6350">
             <a:solidFill>
-              <a:srgbClr val="E2E2E2"/>
+              <a:srgbClr val="E2DED6"/>
             </a:solidFill>
           </a:ln>
           <a:effectLst/>
@@ -24210,7 +24210,7 @@
             <a:r>
               <a:rPr sz="1150" b="0" i="0">
                 <a:solidFill>
-                  <a:srgbClr val="1C1C1C"/>
+                  <a:srgbClr val="1F1942"/>
                 </a:solidFill>
                 <a:latin typeface="Arial"/>
               </a:rPr>
@@ -24245,7 +24245,7 @@
             <a:r>
               <a:rPr sz="950" b="0" i="1">
                 <a:solidFill>
-                  <a:srgbClr val="7A7A7A"/>
+                  <a:srgbClr val="6B6467"/>
                 </a:solidFill>
                 <a:latin typeface="Arial"/>
               </a:rPr>
@@ -24269,11 +24269,11 @@
             <a:avLst/>
           </a:prstGeom>
           <a:solidFill>
-            <a:srgbClr val="C3002B"/>
+            <a:srgbClr val="2A2250"/>
           </a:solidFill>
           <a:ln w="6350">
             <a:solidFill>
-              <a:srgbClr val="E2E2E2"/>
+              <a:srgbClr val="E2DED6"/>
             </a:solidFill>
           </a:ln>
           <a:effectLst/>
@@ -24361,7 +24361,7 @@
             <a:r>
               <a:rPr sz="1150" b="0" i="0">
                 <a:solidFill>
-                  <a:srgbClr val="1C1C1C"/>
+                  <a:srgbClr val="1F1942"/>
                 </a:solidFill>
                 <a:latin typeface="Arial"/>
               </a:rPr>
@@ -24396,7 +24396,7 @@
             <a:r>
               <a:rPr sz="950" b="0" i="1">
                 <a:solidFill>
-                  <a:srgbClr val="7A7A7A"/>
+                  <a:srgbClr val="6B6467"/>
                 </a:solidFill>
                 <a:latin typeface="Arial"/>
               </a:rPr>
@@ -24420,11 +24420,11 @@
             <a:avLst/>
           </a:prstGeom>
           <a:solidFill>
-            <a:srgbClr val="C3002B"/>
+            <a:srgbClr val="2A2250"/>
           </a:solidFill>
           <a:ln w="6350">
             <a:solidFill>
-              <a:srgbClr val="E2E2E2"/>
+              <a:srgbClr val="E2DED6"/>
             </a:solidFill>
           </a:ln>
           <a:effectLst/>
@@ -24512,7 +24512,7 @@
             <a:r>
               <a:rPr sz="1150" b="0" i="0">
                 <a:solidFill>
-                  <a:srgbClr val="1C1C1C"/>
+                  <a:srgbClr val="1F1942"/>
                 </a:solidFill>
                 <a:latin typeface="Arial"/>
               </a:rPr>
@@ -24547,7 +24547,7 @@
             <a:r>
               <a:rPr sz="950" b="0" i="1">
                 <a:solidFill>
-                  <a:srgbClr val="7A7A7A"/>
+                  <a:srgbClr val="6B6467"/>
                 </a:solidFill>
                 <a:latin typeface="Arial"/>
               </a:rPr>
@@ -24571,11 +24571,11 @@
             <a:avLst/>
           </a:prstGeom>
           <a:solidFill>
-            <a:srgbClr val="C3002B"/>
+            <a:srgbClr val="2A2250"/>
           </a:solidFill>
           <a:ln w="6350">
             <a:solidFill>
-              <a:srgbClr val="E2E2E2"/>
+              <a:srgbClr val="E2DED6"/>
             </a:solidFill>
           </a:ln>
           <a:effectLst/>
@@ -24663,7 +24663,7 @@
             <a:r>
               <a:rPr sz="1150" b="0" i="0">
                 <a:solidFill>
-                  <a:srgbClr val="1C1C1C"/>
+                  <a:srgbClr val="1F1942"/>
                 </a:solidFill>
                 <a:latin typeface="Arial"/>
               </a:rPr>
@@ -24698,7 +24698,7 @@
             <a:r>
               <a:rPr sz="950" b="0" i="1">
                 <a:solidFill>
-                  <a:srgbClr val="7A7A7A"/>
+                  <a:srgbClr val="6B6467"/>
                 </a:solidFill>
                 <a:latin typeface="Arial"/>
               </a:rPr>
@@ -24722,11 +24722,11 @@
             <a:avLst/>
           </a:prstGeom>
           <a:solidFill>
-            <a:srgbClr val="C3002B"/>
+            <a:srgbClr val="2A2250"/>
           </a:solidFill>
           <a:ln w="6350">
             <a:solidFill>
-              <a:srgbClr val="E2E2E2"/>
+              <a:srgbClr val="E2DED6"/>
             </a:solidFill>
           </a:ln>
           <a:effectLst/>
@@ -24814,7 +24814,7 @@
             <a:r>
               <a:rPr sz="1150" b="0" i="0">
                 <a:solidFill>
-                  <a:srgbClr val="1C1C1C"/>
+                  <a:srgbClr val="1F1942"/>
                 </a:solidFill>
                 <a:latin typeface="Arial"/>
               </a:rPr>
@@ -24849,7 +24849,7 @@
             <a:r>
               <a:rPr sz="950" b="0" i="1">
                 <a:solidFill>
-                  <a:srgbClr val="7A7A7A"/>
+                  <a:srgbClr val="6B6467"/>
                 </a:solidFill>
                 <a:latin typeface="Arial"/>
               </a:rPr>
@@ -24873,11 +24873,11 @@
             <a:avLst/>
           </a:prstGeom>
           <a:solidFill>
-            <a:srgbClr val="C3002B"/>
+            <a:srgbClr val="2A2250"/>
           </a:solidFill>
           <a:ln w="6350">
             <a:solidFill>
-              <a:srgbClr val="E2E2E2"/>
+              <a:srgbClr val="E2DED6"/>
             </a:solidFill>
           </a:ln>
           <a:effectLst/>
@@ -24966,13 +24966,13 @@
         <p:spPr>
           <a:xfrm>
             <a:off x="0" y="0"/>
-            <a:ext cx="164592" cy="6858000"/>
+            <a:ext cx="128016" cy="6858000"/>
           </a:xfrm>
           <a:prstGeom prst="rect">
             <a:avLst/>
           </a:prstGeom>
           <a:solidFill>
-            <a:srgbClr val="C3002B"/>
+            <a:srgbClr val="F4B634"/>
           </a:solidFill>
           <a:ln>
             <a:noFill/>
@@ -25027,7 +25027,7 @@
             <a:r>
               <a:rPr sz="1000" b="1" i="0">
                 <a:solidFill>
-                  <a:srgbClr val="C3002B"/>
+                  <a:srgbClr val="F4B634"/>
                 </a:solidFill>
                 <a:latin typeface="Arial"/>
               </a:rPr>
@@ -25062,7 +25062,7 @@
             <a:r>
               <a:rPr sz="2300" b="1" i="0">
                 <a:solidFill>
-                  <a:srgbClr val="1C1C1C"/>
+                  <a:srgbClr val="1F1942"/>
                 </a:solidFill>
                 <a:latin typeface="Arial"/>
               </a:rPr>
@@ -25097,7 +25097,7 @@
             <a:r>
               <a:rPr sz="800" b="0" i="0">
                 <a:solidFill>
-                  <a:srgbClr val="7A7A7A"/>
+                  <a:srgbClr val="6B6467"/>
                 </a:solidFill>
                 <a:latin typeface="Arial"/>
               </a:rPr>
@@ -25132,7 +25132,7 @@
             <a:r>
               <a:rPr sz="1000" b="0" i="0">
                 <a:solidFill>
-                  <a:srgbClr val="7A7A7A"/>
+                  <a:srgbClr val="6B6467"/>
                 </a:solidFill>
                 <a:latin typeface="Arial"/>
               </a:rPr>
@@ -25156,7 +25156,7 @@
             <a:avLst/>
           </a:prstGeom>
           <a:solidFill>
-            <a:srgbClr val="C3002B"/>
+            <a:srgbClr val="1F1942"/>
           </a:solidFill>
           <a:ln>
             <a:noFill/>
@@ -25211,7 +25211,7 @@
             <a:r>
               <a:rPr sz="800" b="1" i="0">
                 <a:solidFill>
-                  <a:srgbClr val="FFFFFF"/>
+                  <a:srgbClr val="F4B634"/>
                 </a:solidFill>
                 <a:latin typeface="Arial"/>
               </a:rPr>
@@ -25235,11 +25235,11 @@
             <a:avLst/>
           </a:prstGeom>
           <a:solidFill>
-            <a:srgbClr val="F3F3F3"/>
+            <a:srgbClr val="F4EFE6"/>
           </a:solidFill>
           <a:ln w="6350">
             <a:solidFill>
-              <a:srgbClr val="E2E2E2"/>
+              <a:srgbClr val="E2DED6"/>
             </a:solidFill>
           </a:ln>
           <a:effectLst/>
@@ -25292,7 +25292,7 @@
             <a:r>
               <a:rPr sz="2600" b="1" i="0">
                 <a:solidFill>
-                  <a:srgbClr val="C3002B"/>
+                  <a:srgbClr val="2A2250"/>
                 </a:solidFill>
                 <a:latin typeface="Arial"/>
               </a:rPr>
@@ -25327,7 +25327,7 @@
             <a:r>
               <a:rPr sz="1200" b="1" i="0">
                 <a:solidFill>
-                  <a:srgbClr val="1C1C1C"/>
+                  <a:srgbClr val="1F1942"/>
                 </a:solidFill>
                 <a:latin typeface="Arial"/>
               </a:rPr>
@@ -25362,7 +25362,7 @@
             <a:r>
               <a:rPr sz="950" b="0" i="0">
                 <a:solidFill>
-                  <a:srgbClr val="7A7A7A"/>
+                  <a:srgbClr val="6B6467"/>
                 </a:solidFill>
                 <a:latin typeface="Arial"/>
               </a:rPr>
@@ -25374,7 +25374,7 @@
             <a:r>
               <a:rPr sz="950" b="0" i="0">
                 <a:solidFill>
-                  <a:srgbClr val="7A7A7A"/>
+                  <a:srgbClr val="6B6467"/>
                 </a:solidFill>
                 <a:latin typeface="Arial"/>
               </a:rPr>
@@ -25398,11 +25398,11 @@
             <a:avLst/>
           </a:prstGeom>
           <a:solidFill>
-            <a:srgbClr val="F3F3F3"/>
+            <a:srgbClr val="F4EFE6"/>
           </a:solidFill>
           <a:ln w="6350">
             <a:solidFill>
-              <a:srgbClr val="E2E2E2"/>
+              <a:srgbClr val="E2DED6"/>
             </a:solidFill>
           </a:ln>
           <a:effectLst/>
@@ -25455,7 +25455,7 @@
             <a:r>
               <a:rPr sz="2600" b="1" i="0">
                 <a:solidFill>
-                  <a:srgbClr val="C3002B"/>
+                  <a:srgbClr val="2A2250"/>
                 </a:solidFill>
                 <a:latin typeface="Arial"/>
               </a:rPr>
@@ -25490,7 +25490,7 @@
             <a:r>
               <a:rPr sz="1200" b="1" i="0">
                 <a:solidFill>
-                  <a:srgbClr val="1C1C1C"/>
+                  <a:srgbClr val="1F1942"/>
                 </a:solidFill>
                 <a:latin typeface="Arial"/>
               </a:rPr>
@@ -25502,7 +25502,7 @@
             <a:r>
               <a:rPr sz="1200" b="1" i="0">
                 <a:solidFill>
-                  <a:srgbClr val="1C1C1C"/>
+                  <a:srgbClr val="1F1942"/>
                 </a:solidFill>
                 <a:latin typeface="Arial"/>
               </a:rPr>
@@ -25537,7 +25537,7 @@
             <a:r>
               <a:rPr sz="950" b="0" i="0">
                 <a:solidFill>
-                  <a:srgbClr val="7A7A7A"/>
+                  <a:srgbClr val="6B6467"/>
                 </a:solidFill>
                 <a:latin typeface="Arial"/>
               </a:rPr>
@@ -25549,7 +25549,7 @@
             <a:r>
               <a:rPr sz="950" b="0" i="0">
                 <a:solidFill>
-                  <a:srgbClr val="7A7A7A"/>
+                  <a:srgbClr val="6B6467"/>
                 </a:solidFill>
                 <a:latin typeface="Arial"/>
               </a:rPr>
@@ -25573,11 +25573,11 @@
             <a:avLst/>
           </a:prstGeom>
           <a:solidFill>
-            <a:srgbClr val="F3F3F3"/>
+            <a:srgbClr val="F4EFE6"/>
           </a:solidFill>
           <a:ln w="6350">
             <a:solidFill>
-              <a:srgbClr val="E2E2E2"/>
+              <a:srgbClr val="E2DED6"/>
             </a:solidFill>
           </a:ln>
           <a:effectLst/>
@@ -25630,7 +25630,7 @@
             <a:r>
               <a:rPr sz="2600" b="1" i="0">
                 <a:solidFill>
-                  <a:srgbClr val="C3002B"/>
+                  <a:srgbClr val="2A2250"/>
                 </a:solidFill>
                 <a:latin typeface="Arial"/>
               </a:rPr>
@@ -25665,7 +25665,7 @@
             <a:r>
               <a:rPr sz="1200" b="1" i="0">
                 <a:solidFill>
-                  <a:srgbClr val="1C1C1C"/>
+                  <a:srgbClr val="1F1942"/>
                 </a:solidFill>
                 <a:latin typeface="Arial"/>
               </a:rPr>
@@ -25700,7 +25700,7 @@
             <a:r>
               <a:rPr sz="950" b="0" i="0">
                 <a:solidFill>
-                  <a:srgbClr val="7A7A7A"/>
+                  <a:srgbClr val="6B6467"/>
                 </a:solidFill>
                 <a:latin typeface="Arial"/>
               </a:rPr>
@@ -25712,7 +25712,7 @@
             <a:r>
               <a:rPr sz="950" b="0" i="0">
                 <a:solidFill>
-                  <a:srgbClr val="7A7A7A"/>
+                  <a:srgbClr val="6B6467"/>
                 </a:solidFill>
                 <a:latin typeface="Arial"/>
               </a:rPr>
@@ -25736,11 +25736,11 @@
             <a:avLst/>
           </a:prstGeom>
           <a:solidFill>
-            <a:srgbClr val="F3F3F3"/>
+            <a:srgbClr val="F4EFE6"/>
           </a:solidFill>
           <a:ln w="6350">
             <a:solidFill>
-              <a:srgbClr val="E2E2E2"/>
+              <a:srgbClr val="E2DED6"/>
             </a:solidFill>
           </a:ln>
           <a:effectLst/>
@@ -25793,7 +25793,7 @@
             <a:r>
               <a:rPr sz="2600" b="1" i="0">
                 <a:solidFill>
-                  <a:srgbClr val="C3002B"/>
+                  <a:srgbClr val="2A2250"/>
                 </a:solidFill>
                 <a:latin typeface="Arial"/>
               </a:rPr>
@@ -25828,7 +25828,7 @@
             <a:r>
               <a:rPr sz="1200" b="1" i="0">
                 <a:solidFill>
-                  <a:srgbClr val="1C1C1C"/>
+                  <a:srgbClr val="1F1942"/>
                 </a:solidFill>
                 <a:latin typeface="Arial"/>
               </a:rPr>
@@ -25840,7 +25840,7 @@
             <a:r>
               <a:rPr sz="1200" b="1" i="0">
                 <a:solidFill>
-                  <a:srgbClr val="1C1C1C"/>
+                  <a:srgbClr val="1F1942"/>
                 </a:solidFill>
                 <a:latin typeface="Arial"/>
               </a:rPr>
@@ -25875,7 +25875,7 @@
             <a:r>
               <a:rPr sz="950" b="0" i="0">
                 <a:solidFill>
-                  <a:srgbClr val="7A7A7A"/>
+                  <a:srgbClr val="6B6467"/>
                 </a:solidFill>
                 <a:latin typeface="Arial"/>
               </a:rPr>
@@ -25887,7 +25887,7 @@
             <a:r>
               <a:rPr sz="950" b="0" i="0">
                 <a:solidFill>
-                  <a:srgbClr val="7A7A7A"/>
+                  <a:srgbClr val="6B6467"/>
                 </a:solidFill>
                 <a:latin typeface="Arial"/>
               </a:rPr>
@@ -25911,11 +25911,11 @@
             <a:avLst/>
           </a:prstGeom>
           <a:solidFill>
-            <a:srgbClr val="F3F3F3"/>
+            <a:srgbClr val="F4EFE6"/>
           </a:solidFill>
           <a:ln w="6350">
             <a:solidFill>
-              <a:srgbClr val="E2E2E2"/>
+              <a:srgbClr val="E2DED6"/>
             </a:solidFill>
           </a:ln>
           <a:effectLst/>
@@ -25968,7 +25968,7 @@
             <a:r>
               <a:rPr sz="2600" b="1" i="0">
                 <a:solidFill>
-                  <a:srgbClr val="C3002B"/>
+                  <a:srgbClr val="2A2250"/>
                 </a:solidFill>
                 <a:latin typeface="Arial"/>
               </a:rPr>
@@ -26003,7 +26003,7 @@
             <a:r>
               <a:rPr sz="1200" b="1" i="0">
                 <a:solidFill>
-                  <a:srgbClr val="1C1C1C"/>
+                  <a:srgbClr val="1F1942"/>
                 </a:solidFill>
                 <a:latin typeface="Arial"/>
               </a:rPr>
@@ -26015,7 +26015,7 @@
             <a:r>
               <a:rPr sz="1200" b="1" i="0">
                 <a:solidFill>
-                  <a:srgbClr val="1C1C1C"/>
+                  <a:srgbClr val="1F1942"/>
                 </a:solidFill>
                 <a:latin typeface="Arial"/>
               </a:rPr>
@@ -26050,7 +26050,7 @@
             <a:r>
               <a:rPr sz="950" b="0" i="0">
                 <a:solidFill>
-                  <a:srgbClr val="7A7A7A"/>
+                  <a:srgbClr val="6B6467"/>
                 </a:solidFill>
                 <a:latin typeface="Arial"/>
               </a:rPr>
@@ -26062,7 +26062,7 @@
             <a:r>
               <a:rPr sz="950" b="0" i="0">
                 <a:solidFill>
-                  <a:srgbClr val="7A7A7A"/>
+                  <a:srgbClr val="6B6467"/>
                 </a:solidFill>
                 <a:latin typeface="Arial"/>
               </a:rPr>
@@ -26086,11 +26086,11 @@
             <a:avLst/>
           </a:prstGeom>
           <a:solidFill>
-            <a:srgbClr val="F3F3F3"/>
+            <a:srgbClr val="F4EFE6"/>
           </a:solidFill>
           <a:ln w="6350">
             <a:solidFill>
-              <a:srgbClr val="E2E2E2"/>
+              <a:srgbClr val="E2DED6"/>
             </a:solidFill>
           </a:ln>
           <a:effectLst/>
@@ -26143,7 +26143,7 @@
             <a:r>
               <a:rPr sz="2600" b="1" i="0">
                 <a:solidFill>
-                  <a:srgbClr val="C3002B"/>
+                  <a:srgbClr val="2A2250"/>
                 </a:solidFill>
                 <a:latin typeface="Arial"/>
               </a:rPr>
@@ -26178,7 +26178,7 @@
             <a:r>
               <a:rPr sz="1200" b="1" i="0">
                 <a:solidFill>
-                  <a:srgbClr val="1C1C1C"/>
+                  <a:srgbClr val="1F1942"/>
                 </a:solidFill>
                 <a:latin typeface="Arial"/>
               </a:rPr>
@@ -26190,7 +26190,7 @@
             <a:r>
               <a:rPr sz="1200" b="1" i="0">
                 <a:solidFill>
-                  <a:srgbClr val="1C1C1C"/>
+                  <a:srgbClr val="1F1942"/>
                 </a:solidFill>
                 <a:latin typeface="Arial"/>
               </a:rPr>
@@ -26225,7 +26225,7 @@
             <a:r>
               <a:rPr sz="950" b="0" i="0">
                 <a:solidFill>
-                  <a:srgbClr val="7A7A7A"/>
+                  <a:srgbClr val="6B6467"/>
                 </a:solidFill>
                 <a:latin typeface="Arial"/>
               </a:rPr>
@@ -26237,7 +26237,7 @@
             <a:r>
               <a:rPr sz="950" b="0" i="0">
                 <a:solidFill>
-                  <a:srgbClr val="7A7A7A"/>
+                  <a:srgbClr val="6B6467"/>
                 </a:solidFill>
                 <a:latin typeface="Arial"/>
               </a:rPr>
@@ -26273,13 +26273,13 @@
         <p:spPr>
           <a:xfrm>
             <a:off x="0" y="0"/>
-            <a:ext cx="164592" cy="6858000"/>
+            <a:ext cx="128016" cy="6858000"/>
           </a:xfrm>
           <a:prstGeom prst="rect">
             <a:avLst/>
           </a:prstGeom>
           <a:solidFill>
-            <a:srgbClr val="C3002B"/>
+            <a:srgbClr val="F4B634"/>
           </a:solidFill>
           <a:ln>
             <a:noFill/>
@@ -26334,7 +26334,7 @@
             <a:r>
               <a:rPr sz="1000" b="1" i="0">
                 <a:solidFill>
-                  <a:srgbClr val="C3002B"/>
+                  <a:srgbClr val="F4B634"/>
                 </a:solidFill>
                 <a:latin typeface="Arial"/>
               </a:rPr>
@@ -26369,7 +26369,7 @@
             <a:r>
               <a:rPr sz="2300" b="1" i="0">
                 <a:solidFill>
-                  <a:srgbClr val="1C1C1C"/>
+                  <a:srgbClr val="1F1942"/>
                 </a:solidFill>
                 <a:latin typeface="Arial"/>
               </a:rPr>
@@ -26381,7 +26381,7 @@
             <a:r>
               <a:rPr sz="2300" b="1" i="0">
                 <a:solidFill>
-                  <a:srgbClr val="1C1C1C"/>
+                  <a:srgbClr val="1F1942"/>
                 </a:solidFill>
                 <a:latin typeface="Arial"/>
               </a:rPr>
@@ -26416,7 +26416,7 @@
             <a:r>
               <a:rPr sz="800" b="0" i="0">
                 <a:solidFill>
-                  <a:srgbClr val="7A7A7A"/>
+                  <a:srgbClr val="6B6467"/>
                 </a:solidFill>
                 <a:latin typeface="Arial"/>
               </a:rPr>
@@ -26451,7 +26451,7 @@
             <a:r>
               <a:rPr sz="1000" b="0" i="0">
                 <a:solidFill>
-                  <a:srgbClr val="7A7A7A"/>
+                  <a:srgbClr val="6B6467"/>
                 </a:solidFill>
                 <a:latin typeface="Arial"/>
               </a:rPr>
@@ -26475,7 +26475,7 @@
             <a:avLst/>
           </a:prstGeom>
           <a:solidFill>
-            <a:srgbClr val="C3002B"/>
+            <a:srgbClr val="1F1942"/>
           </a:solidFill>
           <a:ln>
             <a:noFill/>
@@ -26530,7 +26530,7 @@
             <a:r>
               <a:rPr sz="800" b="1" i="0">
                 <a:solidFill>
-                  <a:srgbClr val="FFFFFF"/>
+                  <a:srgbClr val="F4B634"/>
                 </a:solidFill>
                 <a:latin typeface="Arial"/>
               </a:rPr>
@@ -26558,7 +26558,7 @@
           </a:solidFill>
           <a:ln w="6350">
             <a:solidFill>
-              <a:srgbClr val="E2E2E2"/>
+              <a:srgbClr val="E2DED6"/>
             </a:solidFill>
           </a:ln>
           <a:effectLst/>
@@ -26611,7 +26611,7 @@
             <a:r>
               <a:rPr sz="1200" b="1" i="0">
                 <a:solidFill>
-                  <a:srgbClr val="C3002B"/>
+                  <a:srgbClr val="2A2250"/>
                 </a:solidFill>
                 <a:latin typeface="Arial"/>
               </a:rPr>
@@ -26646,7 +26646,7 @@
             <a:r>
               <a:rPr sz="1100" b="0" i="0">
                 <a:solidFill>
-                  <a:srgbClr val="1C1C1C"/>
+                  <a:srgbClr val="1F1942"/>
                 </a:solidFill>
                 <a:latin typeface="Arial"/>
               </a:rPr>
@@ -26674,7 +26674,7 @@
           </a:solidFill>
           <a:ln w="6350">
             <a:solidFill>
-              <a:srgbClr val="E2E2E2"/>
+              <a:srgbClr val="E2DED6"/>
             </a:solidFill>
           </a:ln>
           <a:effectLst/>
@@ -26727,7 +26727,7 @@
             <a:r>
               <a:rPr sz="1200" b="1" i="0">
                 <a:solidFill>
-                  <a:srgbClr val="C3002B"/>
+                  <a:srgbClr val="2A2250"/>
                 </a:solidFill>
                 <a:latin typeface="Arial"/>
               </a:rPr>
@@ -26762,7 +26762,7 @@
             <a:r>
               <a:rPr sz="1100" b="0" i="0">
                 <a:solidFill>
-                  <a:srgbClr val="1C1C1C"/>
+                  <a:srgbClr val="1F1942"/>
                 </a:solidFill>
                 <a:latin typeface="Arial"/>
               </a:rPr>
@@ -26790,7 +26790,7 @@
           </a:solidFill>
           <a:ln w="6350">
             <a:solidFill>
-              <a:srgbClr val="E2E2E2"/>
+              <a:srgbClr val="E2DED6"/>
             </a:solidFill>
           </a:ln>
           <a:effectLst/>
@@ -26843,7 +26843,7 @@
             <a:r>
               <a:rPr sz="1200" b="1" i="0">
                 <a:solidFill>
-                  <a:srgbClr val="C3002B"/>
+                  <a:srgbClr val="2A2250"/>
                 </a:solidFill>
                 <a:latin typeface="Arial"/>
               </a:rPr>
@@ -26878,7 +26878,7 @@
             <a:r>
               <a:rPr sz="1100" b="0" i="0">
                 <a:solidFill>
-                  <a:srgbClr val="1C1C1C"/>
+                  <a:srgbClr val="1F1942"/>
                 </a:solidFill>
                 <a:latin typeface="Arial"/>
               </a:rPr>
@@ -26906,7 +26906,7 @@
           </a:solidFill>
           <a:ln w="6350">
             <a:solidFill>
-              <a:srgbClr val="E2E2E2"/>
+              <a:srgbClr val="E2DED6"/>
             </a:solidFill>
           </a:ln>
           <a:effectLst/>
@@ -26959,7 +26959,7 @@
             <a:r>
               <a:rPr sz="1200" b="1" i="0">
                 <a:solidFill>
-                  <a:srgbClr val="C3002B"/>
+                  <a:srgbClr val="2A2250"/>
                 </a:solidFill>
                 <a:latin typeface="Arial"/>
               </a:rPr>
@@ -26994,7 +26994,7 @@
             <a:r>
               <a:rPr sz="1100" b="0" i="0">
                 <a:solidFill>
-                  <a:srgbClr val="1C1C1C"/>
+                  <a:srgbClr val="1F1942"/>
                 </a:solidFill>
                 <a:latin typeface="Arial"/>
               </a:rPr>
@@ -27018,11 +27018,11 @@
             <a:avLst/>
           </a:prstGeom>
           <a:solidFill>
-            <a:srgbClr val="F3F3F3"/>
+            <a:srgbClr val="F4EFE6"/>
           </a:solidFill>
           <a:ln w="6350">
             <a:solidFill>
-              <a:srgbClr val="E2E2E2"/>
+              <a:srgbClr val="E2DED6"/>
             </a:solidFill>
           </a:ln>
           <a:effectLst/>
@@ -27075,7 +27075,7 @@
             <a:r>
               <a:rPr sz="1200" b="1" i="0">
                 <a:solidFill>
-                  <a:srgbClr val="C3002B"/>
+                  <a:srgbClr val="2A2250"/>
                 </a:solidFill>
                 <a:latin typeface="Arial"/>
               </a:rPr>
@@ -27114,7 +27114,7 @@
             <a:r>
               <a:rPr sz="1100" b="0" i="0">
                 <a:solidFill>
-                  <a:srgbClr val="1C1C1C"/>
+                  <a:srgbClr val="1F1942"/>
                 </a:solidFill>
                 <a:latin typeface="Arial"/>
               </a:rPr>
@@ -27130,7 +27130,7 @@
             <a:r>
               <a:rPr sz="1100" b="0" i="0">
                 <a:solidFill>
-                  <a:srgbClr val="1C1C1C"/>
+                  <a:srgbClr val="1F1942"/>
                 </a:solidFill>
                 <a:latin typeface="Arial"/>
               </a:rPr>
@@ -27146,7 +27146,7 @@
             <a:r>
               <a:rPr sz="1100" b="0" i="0">
                 <a:solidFill>
-                  <a:srgbClr val="1C1C1C"/>
+                  <a:srgbClr val="1F1942"/>
                 </a:solidFill>
                 <a:latin typeface="Arial"/>
               </a:rPr>
@@ -27162,7 +27162,7 @@
             <a:r>
               <a:rPr sz="1100" b="0" i="0">
                 <a:solidFill>
-                  <a:srgbClr val="1C1C1C"/>
+                  <a:srgbClr val="1F1942"/>
                 </a:solidFill>
                 <a:latin typeface="Arial"/>
               </a:rPr>
@@ -27178,7 +27178,7 @@
             <a:r>
               <a:rPr sz="1100" b="0" i="0">
                 <a:solidFill>
-                  <a:srgbClr val="1C1C1C"/>
+                  <a:srgbClr val="1F1942"/>
                 </a:solidFill>
                 <a:latin typeface="Arial"/>
               </a:rPr>
@@ -27194,7 +27194,7 @@
             <a:r>
               <a:rPr sz="1100" b="0" i="0">
                 <a:solidFill>
-                  <a:srgbClr val="1C1C1C"/>
+                  <a:srgbClr val="1F1942"/>
                 </a:solidFill>
                 <a:latin typeface="Arial"/>
               </a:rPr>
@@ -27210,7 +27210,7 @@
             <a:r>
               <a:rPr sz="1100" b="0" i="0">
                 <a:solidFill>
-                  <a:srgbClr val="1C1C1C"/>
+                  <a:srgbClr val="1F1942"/>
                 </a:solidFill>
                 <a:latin typeface="Arial"/>
               </a:rPr>
@@ -27226,7 +27226,7 @@
             <a:r>
               <a:rPr sz="1100" b="0" i="0">
                 <a:solidFill>
-                  <a:srgbClr val="1C1C1C"/>
+                  <a:srgbClr val="1F1942"/>
                 </a:solidFill>
                 <a:latin typeface="Arial"/>
               </a:rPr>
@@ -27242,7 +27242,7 @@
             <a:r>
               <a:rPr sz="1100" b="0" i="0">
                 <a:solidFill>
-                  <a:srgbClr val="1C1C1C"/>
+                  <a:srgbClr val="1F1942"/>
                 </a:solidFill>
                 <a:latin typeface="Arial"/>
               </a:rPr>
@@ -27278,13 +27278,13 @@
         <p:spPr>
           <a:xfrm>
             <a:off x="0" y="0"/>
-            <a:ext cx="164592" cy="6858000"/>
+            <a:ext cx="128016" cy="6858000"/>
           </a:xfrm>
           <a:prstGeom prst="rect">
             <a:avLst/>
           </a:prstGeom>
           <a:solidFill>
-            <a:srgbClr val="C3002B"/>
+            <a:srgbClr val="F4B634"/>
           </a:solidFill>
           <a:ln>
             <a:noFill/>
@@ -27339,7 +27339,7 @@
             <a:r>
               <a:rPr sz="1000" b="1" i="0">
                 <a:solidFill>
-                  <a:srgbClr val="C3002B"/>
+                  <a:srgbClr val="F4B634"/>
                 </a:solidFill>
                 <a:latin typeface="Arial"/>
               </a:rPr>
@@ -27374,7 +27374,7 @@
             <a:r>
               <a:rPr sz="2300" b="1" i="0">
                 <a:solidFill>
-                  <a:srgbClr val="1C1C1C"/>
+                  <a:srgbClr val="1F1942"/>
                 </a:solidFill>
                 <a:latin typeface="Arial"/>
               </a:rPr>
@@ -27386,7 +27386,7 @@
             <a:r>
               <a:rPr sz="2300" b="1" i="0">
                 <a:solidFill>
-                  <a:srgbClr val="1C1C1C"/>
+                  <a:srgbClr val="1F1942"/>
                 </a:solidFill>
                 <a:latin typeface="Arial"/>
               </a:rPr>
@@ -27421,7 +27421,7 @@
             <a:r>
               <a:rPr sz="800" b="0" i="0">
                 <a:solidFill>
-                  <a:srgbClr val="7A7A7A"/>
+                  <a:srgbClr val="6B6467"/>
                 </a:solidFill>
                 <a:latin typeface="Arial"/>
               </a:rPr>
@@ -27456,7 +27456,7 @@
             <a:r>
               <a:rPr sz="1000" b="0" i="0">
                 <a:solidFill>
-                  <a:srgbClr val="7A7A7A"/>
+                  <a:srgbClr val="6B6467"/>
                 </a:solidFill>
                 <a:latin typeface="Arial"/>
               </a:rPr>
@@ -27480,7 +27480,7 @@
             <a:avLst/>
           </a:prstGeom>
           <a:solidFill>
-            <a:srgbClr val="C3002B"/>
+            <a:srgbClr val="1F1942"/>
           </a:solidFill>
           <a:ln>
             <a:noFill/>
@@ -27535,7 +27535,7 @@
             <a:r>
               <a:rPr sz="800" b="1" i="0">
                 <a:solidFill>
-                  <a:srgbClr val="FFFFFF"/>
+                  <a:srgbClr val="F4B634"/>
                 </a:solidFill>
                 <a:latin typeface="Arial"/>
               </a:rPr>
@@ -27563,7 +27563,7 @@
           </a:solidFill>
           <a:ln w="6350">
             <a:solidFill>
-              <a:srgbClr val="E2E2E2"/>
+              <a:srgbClr val="E2DED6"/>
             </a:solidFill>
           </a:ln>
           <a:effectLst/>
@@ -27605,11 +27605,11 @@
             <a:avLst/>
           </a:prstGeom>
           <a:solidFill>
-            <a:srgbClr val="C3002B"/>
+            <a:srgbClr val="2A2250"/>
           </a:solidFill>
           <a:ln w="6350">
             <a:solidFill>
-              <a:srgbClr val="E2E2E2"/>
+              <a:srgbClr val="E2DED6"/>
             </a:solidFill>
           </a:ln>
           <a:effectLst/>
@@ -27732,7 +27732,7 @@
             <a:r>
               <a:rPr sz="1100" b="1" i="1">
                 <a:solidFill>
-                  <a:srgbClr val="C3002B"/>
+                  <a:srgbClr val="2A2250"/>
                 </a:solidFill>
                 <a:latin typeface="Arial"/>
               </a:rPr>
@@ -27767,7 +27767,7 @@
             <a:r>
               <a:rPr sz="1050" b="0" i="0">
                 <a:solidFill>
-                  <a:srgbClr val="1C1C1C"/>
+                  <a:srgbClr val="1F1942"/>
                 </a:solidFill>
                 <a:latin typeface="Arial"/>
               </a:rPr>
@@ -27795,7 +27795,7 @@
           </a:solidFill>
           <a:ln w="6350">
             <a:solidFill>
-              <a:srgbClr val="E2E2E2"/>
+              <a:srgbClr val="E2DED6"/>
             </a:solidFill>
           </a:ln>
           <a:effectLst/>
@@ -27837,11 +27837,11 @@
             <a:avLst/>
           </a:prstGeom>
           <a:solidFill>
-            <a:srgbClr val="C3002B"/>
+            <a:srgbClr val="2A2250"/>
           </a:solidFill>
           <a:ln w="6350">
             <a:solidFill>
-              <a:srgbClr val="E2E2E2"/>
+              <a:srgbClr val="E2DED6"/>
             </a:solidFill>
           </a:ln>
           <a:effectLst/>
@@ -27964,7 +27964,7 @@
             <a:r>
               <a:rPr sz="1100" b="1" i="1">
                 <a:solidFill>
-                  <a:srgbClr val="C3002B"/>
+                  <a:srgbClr val="2A2250"/>
                 </a:solidFill>
                 <a:latin typeface="Arial"/>
               </a:rPr>
@@ -27999,7 +27999,7 @@
             <a:r>
               <a:rPr sz="1050" b="0" i="0">
                 <a:solidFill>
-                  <a:srgbClr val="1C1C1C"/>
+                  <a:srgbClr val="1F1942"/>
                 </a:solidFill>
                 <a:latin typeface="Arial"/>
               </a:rPr>
@@ -28027,7 +28027,7 @@
           </a:solidFill>
           <a:ln w="6350">
             <a:solidFill>
-              <a:srgbClr val="E2E2E2"/>
+              <a:srgbClr val="E2DED6"/>
             </a:solidFill>
           </a:ln>
           <a:effectLst/>
@@ -28069,11 +28069,11 @@
             <a:avLst/>
           </a:prstGeom>
           <a:solidFill>
-            <a:srgbClr val="C3002B"/>
+            <a:srgbClr val="2A2250"/>
           </a:solidFill>
           <a:ln w="6350">
             <a:solidFill>
-              <a:srgbClr val="E2E2E2"/>
+              <a:srgbClr val="E2DED6"/>
             </a:solidFill>
           </a:ln>
           <a:effectLst/>
@@ -28196,7 +28196,7 @@
             <a:r>
               <a:rPr sz="1100" b="1" i="1">
                 <a:solidFill>
-                  <a:srgbClr val="C3002B"/>
+                  <a:srgbClr val="2A2250"/>
                 </a:solidFill>
                 <a:latin typeface="Arial"/>
               </a:rPr>
@@ -28231,7 +28231,7 @@
             <a:r>
               <a:rPr sz="1050" b="0" i="0">
                 <a:solidFill>
-                  <a:srgbClr val="1C1C1C"/>
+                  <a:srgbClr val="1F1942"/>
                 </a:solidFill>
                 <a:latin typeface="Arial"/>
               </a:rPr>
@@ -28266,7 +28266,7 @@
             <a:r>
               <a:rPr sz="1100" b="1" i="1">
                 <a:solidFill>
-                  <a:srgbClr val="1C1C1C"/>
+                  <a:srgbClr val="1F1942"/>
                 </a:solidFill>
                 <a:latin typeface="Arial"/>
               </a:rPr>
@@ -28308,11 +28308,11 @@
             <a:avLst/>
           </a:prstGeom>
           <a:solidFill>
-            <a:srgbClr val="1C1C1C"/>
+            <a:srgbClr val="1F1942"/>
           </a:solidFill>
           <a:ln w="9525">
             <a:solidFill>
-              <a:srgbClr val="1C1C1C"/>
+              <a:srgbClr val="1F1942"/>
             </a:solidFill>
           </a:ln>
           <a:effectLst/>
@@ -28348,13 +28348,13 @@
         <p:spPr>
           <a:xfrm>
             <a:off x="0" y="0"/>
-            <a:ext cx="164592" cy="6858000"/>
+            <a:ext cx="128016" cy="6858000"/>
           </a:xfrm>
           <a:prstGeom prst="rect">
             <a:avLst/>
           </a:prstGeom>
           <a:solidFill>
-            <a:srgbClr val="C3002B"/>
+            <a:srgbClr val="F4B634"/>
           </a:solidFill>
           <a:ln>
             <a:noFill/>
@@ -28409,7 +28409,7 @@
             <a:r>
               <a:rPr sz="1200" b="1" i="0">
                 <a:solidFill>
-                  <a:srgbClr val="C3002B"/>
+                  <a:srgbClr val="F4B634"/>
                 </a:solidFill>
                 <a:latin typeface="Arial"/>
               </a:rPr>
@@ -28467,55 +28467,20 @@
       </p:sp>
       <p:sp>
         <p:nvSpPr>
-          <p:cNvPr id="6" name="TextBox 5"/>
-          <p:cNvSpPr txBox="1"/>
-          <p:nvPr/>
-        </p:nvSpPr>
-        <p:spPr>
-          <a:xfrm>
-            <a:off x="640080" y="3931920"/>
-            <a:ext cx="10789920" cy="1371600"/>
-          </a:xfrm>
-          <a:prstGeom prst="rect">
-            <a:avLst/>
-          </a:prstGeom>
-          <a:noFill/>
-        </p:spPr>
-        <p:txBody>
-          <a:bodyPr wrap="square" anchor="t">
-            <a:normAutofit/>
-          </a:bodyPr>
-          <a:lstStyle/>
-          <a:p>
-            <a:pPr algn="l"/>
-            <a:r>
-              <a:rPr sz="1500" b="0" i="0">
-                <a:solidFill>
-                  <a:srgbClr val="FFFFFF"/>
-                </a:solidFill>
-                <a:latin typeface="Arial"/>
-              </a:rPr>
-              <a:t>We deliver the entire Paris Proof transformation end-to-end and keep PwC fully aware and aligned at every step. You steer the asset; we run the works and the tenant relationship — and we bring you every decision, prepared, before it is needed.</a:t>
-            </a:r>
-          </a:p>
-        </p:txBody>
-      </p:sp>
-      <p:sp>
-        <p:nvSpPr>
-          <p:cNvPr id="7" name="Rounded Rectangle 6"/>
+          <p:cNvPr id="6" name="Rectangle 5"/>
           <p:cNvSpPr/>
           <p:nvPr/>
         </p:nvSpPr>
         <p:spPr>
           <a:xfrm>
-            <a:off x="640080" y="5669280"/>
-            <a:ext cx="5943600" cy="457200"/>
-          </a:xfrm>
-          <a:prstGeom prst="roundRect">
+            <a:off x="658368" y="3611880"/>
+            <a:ext cx="2926080" cy="54864"/>
+          </a:xfrm>
+          <a:prstGeom prst="rect">
             <a:avLst/>
           </a:prstGeom>
           <a:solidFill>
-            <a:srgbClr val="C3002B"/>
+            <a:srgbClr val="F4B634"/>
           </a:solidFill>
           <a:ln>
             <a:noFill/>
@@ -28546,7 +28511,88 @@
       </p:sp>
       <p:sp>
         <p:nvSpPr>
-          <p:cNvPr id="8" name="TextBox 7"/>
+          <p:cNvPr id="7" name="TextBox 6"/>
+          <p:cNvSpPr txBox="1"/>
+          <p:nvPr/>
+        </p:nvSpPr>
+        <p:spPr>
+          <a:xfrm>
+            <a:off x="640080" y="3931920"/>
+            <a:ext cx="10789920" cy="1371600"/>
+          </a:xfrm>
+          <a:prstGeom prst="rect">
+            <a:avLst/>
+          </a:prstGeom>
+          <a:noFill/>
+        </p:spPr>
+        <p:txBody>
+          <a:bodyPr wrap="square" anchor="t">
+            <a:normAutofit/>
+          </a:bodyPr>
+          <a:lstStyle/>
+          <a:p>
+            <a:pPr algn="l"/>
+            <a:r>
+              <a:rPr sz="1500" b="0" i="0">
+                <a:solidFill>
+                  <a:srgbClr val="FFFFFF"/>
+                </a:solidFill>
+                <a:latin typeface="Arial"/>
+              </a:rPr>
+              <a:t>We deliver the entire Paris Proof transformation end-to-end and keep PwC fully aware and aligned at every step. You steer the asset; we run the works and the tenant relationship — and we bring you every decision, prepared, before it is needed.</a:t>
+            </a:r>
+          </a:p>
+        </p:txBody>
+      </p:sp>
+      <p:sp>
+        <p:nvSpPr>
+          <p:cNvPr id="8" name="Rounded Rectangle 7"/>
+          <p:cNvSpPr/>
+          <p:nvPr/>
+        </p:nvSpPr>
+        <p:spPr>
+          <a:xfrm>
+            <a:off x="640080" y="5669280"/>
+            <a:ext cx="5943600" cy="457200"/>
+          </a:xfrm>
+          <a:prstGeom prst="roundRect">
+            <a:avLst/>
+          </a:prstGeom>
+          <a:solidFill>
+            <a:srgbClr val="2A2250"/>
+          </a:solidFill>
+          <a:ln w="12700">
+            <a:solidFill>
+              <a:srgbClr val="F4B634"/>
+            </a:solidFill>
+          </a:ln>
+          <a:effectLst/>
+        </p:spPr>
+        <p:style>
+          <a:lnRef idx="1">
+            <a:schemeClr val="accent1"/>
+          </a:lnRef>
+          <a:fillRef idx="3">
+            <a:schemeClr val="accent1"/>
+          </a:fillRef>
+          <a:effectRef idx="2">
+            <a:schemeClr val="accent1"/>
+          </a:effectRef>
+          <a:fontRef idx="minor">
+            <a:schemeClr val="lt1"/>
+          </a:fontRef>
+        </p:style>
+        <p:txBody>
+          <a:bodyPr rtlCol="0" anchor="ctr"/>
+          <a:lstStyle/>
+          <a:p>
+            <a:pPr algn="ctr"/>
+          </a:p>
+        </p:txBody>
+      </p:sp>
+      <p:sp>
+        <p:nvSpPr>
+          <p:cNvPr id="9" name="TextBox 8"/>
           <p:cNvSpPr txBox="1"/>
           <p:nvPr/>
         </p:nvSpPr>
@@ -28570,7 +28616,7 @@
             <a:r>
               <a:rPr sz="1200" b="1" i="0">
                 <a:solidFill>
-                  <a:srgbClr val="FFFFFF"/>
+                  <a:srgbClr val="F4B634"/>
                 </a:solidFill>
                 <a:latin typeface="Arial"/>
               </a:rPr>
@@ -28606,13 +28652,13 @@
         <p:spPr>
           <a:xfrm>
             <a:off x="0" y="0"/>
-            <a:ext cx="164592" cy="6858000"/>
+            <a:ext cx="128016" cy="6858000"/>
           </a:xfrm>
           <a:prstGeom prst="rect">
             <a:avLst/>
           </a:prstGeom>
           <a:solidFill>
-            <a:srgbClr val="C3002B"/>
+            <a:srgbClr val="F4B634"/>
           </a:solidFill>
           <a:ln>
             <a:noFill/>
@@ -28667,7 +28713,7 @@
             <a:r>
               <a:rPr sz="1000" b="1" i="0">
                 <a:solidFill>
-                  <a:srgbClr val="C3002B"/>
+                  <a:srgbClr val="F4B634"/>
                 </a:solidFill>
                 <a:latin typeface="Arial"/>
               </a:rPr>
@@ -28702,7 +28748,7 @@
             <a:r>
               <a:rPr sz="2300" b="1" i="0">
                 <a:solidFill>
-                  <a:srgbClr val="1C1C1C"/>
+                  <a:srgbClr val="1F1942"/>
                 </a:solidFill>
                 <a:latin typeface="Arial"/>
               </a:rPr>
@@ -28737,7 +28783,7 @@
             <a:r>
               <a:rPr sz="800" b="0" i="0">
                 <a:solidFill>
-                  <a:srgbClr val="7A7A7A"/>
+                  <a:srgbClr val="6B6467"/>
                 </a:solidFill>
                 <a:latin typeface="Arial"/>
               </a:rPr>
@@ -28772,7 +28818,7 @@
             <a:r>
               <a:rPr sz="1000" b="0" i="0">
                 <a:solidFill>
-                  <a:srgbClr val="7A7A7A"/>
+                  <a:srgbClr val="6B6467"/>
                 </a:solidFill>
                 <a:latin typeface="Arial"/>
               </a:rPr>
@@ -28796,7 +28842,7 @@
             <a:avLst/>
           </a:prstGeom>
           <a:solidFill>
-            <a:srgbClr val="C3002B"/>
+            <a:srgbClr val="1F1942"/>
           </a:solidFill>
           <a:ln>
             <a:noFill/>
@@ -28851,7 +28897,7 @@
             <a:r>
               <a:rPr sz="800" b="1" i="0">
                 <a:solidFill>
-                  <a:srgbClr val="FFFFFF"/>
+                  <a:srgbClr val="F4B634"/>
                 </a:solidFill>
                 <a:latin typeface="Arial"/>
               </a:rPr>
@@ -28879,7 +28925,7 @@
           </a:solidFill>
           <a:ln w="6350">
             <a:solidFill>
-              <a:srgbClr val="E2E2E2"/>
+              <a:srgbClr val="E2DED6"/>
             </a:solidFill>
           </a:ln>
           <a:effectLst/>
@@ -28921,11 +28967,11 @@
             <a:avLst/>
           </a:prstGeom>
           <a:solidFill>
-            <a:srgbClr val="C3002B"/>
+            <a:srgbClr val="2A2250"/>
           </a:solidFill>
           <a:ln w="6350">
             <a:solidFill>
-              <a:srgbClr val="E2E2E2"/>
+              <a:srgbClr val="E2DED6"/>
             </a:solidFill>
           </a:ln>
           <a:effectLst/>
@@ -29029,7 +29075,7 @@
             <a:r>
               <a:rPr sz="1100" b="0" i="0">
                 <a:solidFill>
-                  <a:srgbClr val="1C1C1C"/>
+                  <a:srgbClr val="1F1942"/>
                 </a:solidFill>
                 <a:latin typeface="Arial"/>
               </a:rPr>
@@ -29045,7 +29091,7 @@
             <a:r>
               <a:rPr sz="1100" b="0" i="0">
                 <a:solidFill>
-                  <a:srgbClr val="1C1C1C"/>
+                  <a:srgbClr val="1F1942"/>
                 </a:solidFill>
                 <a:latin typeface="Arial"/>
               </a:rPr>
@@ -29061,7 +29107,7 @@
             <a:r>
               <a:rPr sz="1100" b="0" i="0">
                 <a:solidFill>
-                  <a:srgbClr val="1C1C1C"/>
+                  <a:srgbClr val="1F1942"/>
                 </a:solidFill>
                 <a:latin typeface="Arial"/>
               </a:rPr>
@@ -29077,7 +29123,7 @@
             <a:r>
               <a:rPr sz="1100" b="0" i="0">
                 <a:solidFill>
-                  <a:srgbClr val="1C1C1C"/>
+                  <a:srgbClr val="1F1942"/>
                 </a:solidFill>
                 <a:latin typeface="Arial"/>
               </a:rPr>
@@ -29093,7 +29139,7 @@
             <a:r>
               <a:rPr sz="1100" b="0" i="0">
                 <a:solidFill>
-                  <a:srgbClr val="1C1C1C"/>
+                  <a:srgbClr val="1F1942"/>
                 </a:solidFill>
                 <a:latin typeface="Arial"/>
               </a:rPr>
@@ -29121,7 +29167,7 @@
           </a:solidFill>
           <a:ln w="6350">
             <a:solidFill>
-              <a:srgbClr val="E2E2E2"/>
+              <a:srgbClr val="E2DED6"/>
             </a:solidFill>
           </a:ln>
           <a:effectLst/>
@@ -29163,11 +29209,11 @@
             <a:avLst/>
           </a:prstGeom>
           <a:solidFill>
-            <a:srgbClr val="1C1C1C"/>
+            <a:srgbClr val="1F1942"/>
           </a:solidFill>
           <a:ln w="6350">
             <a:solidFill>
-              <a:srgbClr val="E2E2E2"/>
+              <a:srgbClr val="E2DED6"/>
             </a:solidFill>
           </a:ln>
           <a:effectLst/>
@@ -29271,7 +29317,7 @@
             <a:r>
               <a:rPr sz="1100" b="0" i="0">
                 <a:solidFill>
-                  <a:srgbClr val="1C1C1C"/>
+                  <a:srgbClr val="1F1942"/>
                 </a:solidFill>
                 <a:latin typeface="Arial"/>
               </a:rPr>
@@ -29287,7 +29333,7 @@
             <a:r>
               <a:rPr sz="1100" b="0" i="0">
                 <a:solidFill>
-                  <a:srgbClr val="1C1C1C"/>
+                  <a:srgbClr val="1F1942"/>
                 </a:solidFill>
                 <a:latin typeface="Arial"/>
               </a:rPr>
@@ -29303,7 +29349,7 @@
             <a:r>
               <a:rPr sz="1100" b="0" i="0">
                 <a:solidFill>
-                  <a:srgbClr val="1C1C1C"/>
+                  <a:srgbClr val="1F1942"/>
                 </a:solidFill>
                 <a:latin typeface="Arial"/>
               </a:rPr>
@@ -29319,7 +29365,7 @@
             <a:r>
               <a:rPr sz="1100" b="0" i="0">
                 <a:solidFill>
-                  <a:srgbClr val="1C1C1C"/>
+                  <a:srgbClr val="1F1942"/>
                 </a:solidFill>
                 <a:latin typeface="Arial"/>
               </a:rPr>
@@ -29335,7 +29381,7 @@
             <a:r>
               <a:rPr sz="1100" b="0" i="0">
                 <a:solidFill>
-                  <a:srgbClr val="1C1C1C"/>
+                  <a:srgbClr val="1F1942"/>
                 </a:solidFill>
                 <a:latin typeface="Arial"/>
               </a:rPr>
@@ -29363,7 +29409,7 @@
           </a:solidFill>
           <a:ln w="6350">
             <a:solidFill>
-              <a:srgbClr val="E2E2E2"/>
+              <a:srgbClr val="E2DED6"/>
             </a:solidFill>
           </a:ln>
           <a:effectLst/>
@@ -29405,11 +29451,11 @@
             <a:avLst/>
           </a:prstGeom>
           <a:solidFill>
-            <a:srgbClr val="C3002B"/>
+            <a:srgbClr val="2A2250"/>
           </a:solidFill>
           <a:ln w="6350">
             <a:solidFill>
-              <a:srgbClr val="E2E2E2"/>
+              <a:srgbClr val="E2DED6"/>
             </a:solidFill>
           </a:ln>
           <a:effectLst/>
@@ -29513,7 +29559,7 @@
             <a:r>
               <a:rPr sz="1100" b="0" i="0">
                 <a:solidFill>
-                  <a:srgbClr val="1C1C1C"/>
+                  <a:srgbClr val="1F1942"/>
                 </a:solidFill>
                 <a:latin typeface="Arial"/>
               </a:rPr>
@@ -29529,7 +29575,7 @@
             <a:r>
               <a:rPr sz="1100" b="0" i="0">
                 <a:solidFill>
-                  <a:srgbClr val="1C1C1C"/>
+                  <a:srgbClr val="1F1942"/>
                 </a:solidFill>
                 <a:latin typeface="Arial"/>
               </a:rPr>
@@ -29545,7 +29591,7 @@
             <a:r>
               <a:rPr sz="1100" b="0" i="0">
                 <a:solidFill>
-                  <a:srgbClr val="1C1C1C"/>
+                  <a:srgbClr val="1F1942"/>
                 </a:solidFill>
                 <a:latin typeface="Arial"/>
               </a:rPr>
@@ -29561,7 +29607,7 @@
             <a:r>
               <a:rPr sz="1100" b="0" i="0">
                 <a:solidFill>
-                  <a:srgbClr val="1C1C1C"/>
+                  <a:srgbClr val="1F1942"/>
                 </a:solidFill>
                 <a:latin typeface="Arial"/>
               </a:rPr>
@@ -29577,7 +29623,7 @@
             <a:r>
               <a:rPr sz="1100" b="0" i="0">
                 <a:solidFill>
-                  <a:srgbClr val="1C1C1C"/>
+                  <a:srgbClr val="1F1942"/>
                 </a:solidFill>
                 <a:latin typeface="Arial"/>
               </a:rPr>
@@ -29612,7 +29658,7 @@
             <a:r>
               <a:rPr sz="1100" b="1" i="1">
                 <a:solidFill>
-                  <a:srgbClr val="1C1C1C"/>
+                  <a:srgbClr val="1F1942"/>
                 </a:solidFill>
                 <a:latin typeface="Arial"/>
               </a:rPr>
@@ -29648,13 +29694,13 @@
         <p:spPr>
           <a:xfrm>
             <a:off x="0" y="0"/>
-            <a:ext cx="164592" cy="6858000"/>
+            <a:ext cx="128016" cy="6858000"/>
           </a:xfrm>
           <a:prstGeom prst="rect">
             <a:avLst/>
           </a:prstGeom>
           <a:solidFill>
-            <a:srgbClr val="C3002B"/>
+            <a:srgbClr val="F4B634"/>
           </a:solidFill>
           <a:ln>
             <a:noFill/>
@@ -29709,7 +29755,7 @@
             <a:r>
               <a:rPr sz="1000" b="1" i="0">
                 <a:solidFill>
-                  <a:srgbClr val="C3002B"/>
+                  <a:srgbClr val="F4B634"/>
                 </a:solidFill>
                 <a:latin typeface="Arial"/>
               </a:rPr>
@@ -29744,7 +29790,7 @@
             <a:r>
               <a:rPr sz="2300" b="1" i="0">
                 <a:solidFill>
-                  <a:srgbClr val="1C1C1C"/>
+                  <a:srgbClr val="1F1942"/>
                 </a:solidFill>
                 <a:latin typeface="Arial"/>
               </a:rPr>
@@ -29756,7 +29802,7 @@
             <a:r>
               <a:rPr sz="2300" b="1" i="0">
                 <a:solidFill>
-                  <a:srgbClr val="1C1C1C"/>
+                  <a:srgbClr val="1F1942"/>
                 </a:solidFill>
                 <a:latin typeface="Arial"/>
               </a:rPr>
@@ -29791,7 +29837,7 @@
             <a:r>
               <a:rPr sz="800" b="0" i="0">
                 <a:solidFill>
-                  <a:srgbClr val="7A7A7A"/>
+                  <a:srgbClr val="6B6467"/>
                 </a:solidFill>
                 <a:latin typeface="Arial"/>
               </a:rPr>
@@ -29826,7 +29872,7 @@
             <a:r>
               <a:rPr sz="1000" b="0" i="0">
                 <a:solidFill>
-                  <a:srgbClr val="7A7A7A"/>
+                  <a:srgbClr val="6B6467"/>
                 </a:solidFill>
                 <a:latin typeface="Arial"/>
               </a:rPr>
@@ -29850,7 +29896,7 @@
             <a:avLst/>
           </a:prstGeom>
           <a:solidFill>
-            <a:srgbClr val="C3002B"/>
+            <a:srgbClr val="1F1942"/>
           </a:solidFill>
           <a:ln>
             <a:noFill/>
@@ -29905,7 +29951,7 @@
             <a:r>
               <a:rPr sz="800" b="1" i="0">
                 <a:solidFill>
-                  <a:srgbClr val="FFFFFF"/>
+                  <a:srgbClr val="F4B634"/>
                 </a:solidFill>
                 <a:latin typeface="Arial"/>
               </a:rPr>
@@ -29929,11 +29975,11 @@
             <a:avLst/>
           </a:prstGeom>
           <a:solidFill>
-            <a:srgbClr val="F3F3F3"/>
+            <a:srgbClr val="F4EFE6"/>
           </a:solidFill>
           <a:ln w="6350">
             <a:solidFill>
-              <a:srgbClr val="E2E2E2"/>
+              <a:srgbClr val="E2DED6"/>
             </a:solidFill>
           </a:ln>
           <a:effectLst/>
@@ -29986,7 +30032,7 @@
             <a:r>
               <a:rPr sz="1200" b="1" i="0">
                 <a:solidFill>
-                  <a:srgbClr val="C3002B"/>
+                  <a:srgbClr val="2A2250"/>
                 </a:solidFill>
                 <a:latin typeface="Arial"/>
               </a:rPr>
@@ -30021,7 +30067,7 @@
             <a:r>
               <a:rPr sz="1100" b="1" i="0">
                 <a:solidFill>
-                  <a:srgbClr val="1C1C1C"/>
+                  <a:srgbClr val="1F1942"/>
                 </a:solidFill>
                 <a:latin typeface="Arial"/>
               </a:rPr>
@@ -30056,7 +30102,7 @@
             <a:r>
               <a:rPr sz="950" b="0" i="0">
                 <a:solidFill>
-                  <a:srgbClr val="1C1C1C"/>
+                  <a:srgbClr val="1F1942"/>
                 </a:solidFill>
                 <a:latin typeface="Arial"/>
               </a:rPr>
@@ -30091,7 +30137,7 @@
             <a:r>
               <a:rPr sz="1100" b="1" i="0">
                 <a:solidFill>
-                  <a:srgbClr val="1C1C1C"/>
+                  <a:srgbClr val="1F1942"/>
                 </a:solidFill>
                 <a:latin typeface="Arial"/>
               </a:rPr>
@@ -30126,7 +30172,7 @@
             <a:r>
               <a:rPr sz="950" b="0" i="0">
                 <a:solidFill>
-                  <a:srgbClr val="1C1C1C"/>
+                  <a:srgbClr val="1F1942"/>
                 </a:solidFill>
                 <a:latin typeface="Arial"/>
               </a:rPr>
@@ -30161,7 +30207,7 @@
             <a:r>
               <a:rPr sz="1100" b="1" i="0">
                 <a:solidFill>
-                  <a:srgbClr val="1C1C1C"/>
+                  <a:srgbClr val="1F1942"/>
                 </a:solidFill>
                 <a:latin typeface="Arial"/>
               </a:rPr>
@@ -30196,7 +30242,7 @@
             <a:r>
               <a:rPr sz="950" b="0" i="0">
                 <a:solidFill>
-                  <a:srgbClr val="1C1C1C"/>
+                  <a:srgbClr val="1F1942"/>
                 </a:solidFill>
                 <a:latin typeface="Arial"/>
               </a:rPr>
@@ -30231,7 +30277,7 @@
             <a:r>
               <a:rPr sz="1100" b="1" i="0">
                 <a:solidFill>
-                  <a:srgbClr val="1C1C1C"/>
+                  <a:srgbClr val="1F1942"/>
                 </a:solidFill>
                 <a:latin typeface="Arial"/>
               </a:rPr>
@@ -30266,7 +30312,7 @@
             <a:r>
               <a:rPr sz="950" b="0" i="0">
                 <a:solidFill>
-                  <a:srgbClr val="1C1C1C"/>
+                  <a:srgbClr val="1F1942"/>
                 </a:solidFill>
                 <a:latin typeface="Arial"/>
               </a:rPr>
@@ -30294,7 +30340,7 @@
           </a:solidFill>
           <a:ln w="6350">
             <a:solidFill>
-              <a:srgbClr val="E2E2E2"/>
+              <a:srgbClr val="E2DED6"/>
             </a:solidFill>
           </a:ln>
           <a:effectLst/>
@@ -30347,7 +30393,7 @@
             <a:r>
               <a:rPr sz="1200" b="1" i="0">
                 <a:solidFill>
-                  <a:srgbClr val="C3002B"/>
+                  <a:srgbClr val="2A2250"/>
                 </a:solidFill>
                 <a:latin typeface="Arial"/>
               </a:rPr>
@@ -30371,11 +30417,11 @@
             <a:avLst/>
           </a:prstGeom>
           <a:solidFill>
-            <a:srgbClr val="F3F3F3"/>
+            <a:srgbClr val="F4EFE6"/>
           </a:solidFill>
           <a:ln w="6350">
             <a:solidFill>
-              <a:srgbClr val="E2E2E2"/>
+              <a:srgbClr val="E2DED6"/>
             </a:solidFill>
           </a:ln>
           <a:effectLst/>
@@ -30428,7 +30474,7 @@
             <a:r>
               <a:rPr sz="1000" b="1" i="0">
                 <a:solidFill>
-                  <a:srgbClr val="1C1C1C"/>
+                  <a:srgbClr val="1F1942"/>
                 </a:solidFill>
                 <a:latin typeface="Arial"/>
               </a:rPr>
@@ -30452,11 +30498,11 @@
             <a:avLst/>
           </a:prstGeom>
           <a:solidFill>
-            <a:srgbClr val="F3F3F3"/>
+            <a:srgbClr val="F4EFE6"/>
           </a:solidFill>
           <a:ln w="6350">
             <a:solidFill>
-              <a:srgbClr val="E2E2E2"/>
+              <a:srgbClr val="E2DED6"/>
             </a:solidFill>
           </a:ln>
           <a:effectLst/>
@@ -30509,7 +30555,7 @@
             <a:r>
               <a:rPr sz="1000" b="1" i="0">
                 <a:solidFill>
-                  <a:srgbClr val="1C1C1C"/>
+                  <a:srgbClr val="1F1942"/>
                 </a:solidFill>
                 <a:latin typeface="Arial"/>
               </a:rPr>
@@ -30533,11 +30579,11 @@
             <a:avLst/>
           </a:prstGeom>
           <a:solidFill>
-            <a:srgbClr val="F3F3F3"/>
+            <a:srgbClr val="F4EFE6"/>
           </a:solidFill>
           <a:ln w="6350">
             <a:solidFill>
-              <a:srgbClr val="E2E2E2"/>
+              <a:srgbClr val="E2DED6"/>
             </a:solidFill>
           </a:ln>
           <a:effectLst/>
@@ -30590,7 +30636,7 @@
             <a:r>
               <a:rPr sz="1000" b="1" i="0">
                 <a:solidFill>
-                  <a:srgbClr val="1C1C1C"/>
+                  <a:srgbClr val="1F1942"/>
                 </a:solidFill>
                 <a:latin typeface="Arial"/>
               </a:rPr>
@@ -30614,11 +30660,11 @@
             <a:avLst/>
           </a:prstGeom>
           <a:solidFill>
-            <a:srgbClr val="F3F3F3"/>
+            <a:srgbClr val="F4EFE6"/>
           </a:solidFill>
           <a:ln w="6350">
             <a:solidFill>
-              <a:srgbClr val="E2E2E2"/>
+              <a:srgbClr val="E2DED6"/>
             </a:solidFill>
           </a:ln>
           <a:effectLst/>
@@ -30671,7 +30717,7 @@
             <a:r>
               <a:rPr sz="1000" b="1" i="0">
                 <a:solidFill>
-                  <a:srgbClr val="1C1C1C"/>
+                  <a:srgbClr val="1F1942"/>
                 </a:solidFill>
                 <a:latin typeface="Arial"/>
               </a:rPr>
@@ -30695,11 +30741,11 @@
             <a:avLst/>
           </a:prstGeom>
           <a:solidFill>
-            <a:srgbClr val="C3002B"/>
+            <a:srgbClr val="2A2250"/>
           </a:solidFill>
           <a:ln w="6350">
             <a:solidFill>
-              <a:srgbClr val="E2E2E2"/>
+              <a:srgbClr val="E2DED6"/>
             </a:solidFill>
           </a:ln>
           <a:effectLst/>
@@ -30812,13 +30858,13 @@
         <p:spPr>
           <a:xfrm>
             <a:off x="0" y="0"/>
-            <a:ext cx="164592" cy="6858000"/>
+            <a:ext cx="128016" cy="6858000"/>
           </a:xfrm>
           <a:prstGeom prst="rect">
             <a:avLst/>
           </a:prstGeom>
           <a:solidFill>
-            <a:srgbClr val="C3002B"/>
+            <a:srgbClr val="F4B634"/>
           </a:solidFill>
           <a:ln>
             <a:noFill/>
@@ -30873,7 +30919,7 @@
             <a:r>
               <a:rPr sz="1000" b="1" i="0">
                 <a:solidFill>
-                  <a:srgbClr val="C3002B"/>
+                  <a:srgbClr val="F4B634"/>
                 </a:solidFill>
                 <a:latin typeface="Arial"/>
               </a:rPr>
@@ -30908,7 +30954,7 @@
             <a:r>
               <a:rPr sz="2300" b="1" i="0">
                 <a:solidFill>
-                  <a:srgbClr val="1C1C1C"/>
+                  <a:srgbClr val="1F1942"/>
                 </a:solidFill>
                 <a:latin typeface="Arial"/>
               </a:rPr>
@@ -30920,7 +30966,7 @@
             <a:r>
               <a:rPr sz="2300" b="1" i="0">
                 <a:solidFill>
-                  <a:srgbClr val="1C1C1C"/>
+                  <a:srgbClr val="1F1942"/>
                 </a:solidFill>
                 <a:latin typeface="Arial"/>
               </a:rPr>
@@ -30955,7 +31001,7 @@
             <a:r>
               <a:rPr sz="800" b="0" i="0">
                 <a:solidFill>
-                  <a:srgbClr val="7A7A7A"/>
+                  <a:srgbClr val="6B6467"/>
                 </a:solidFill>
                 <a:latin typeface="Arial"/>
               </a:rPr>
@@ -30990,7 +31036,7 @@
             <a:r>
               <a:rPr sz="1000" b="0" i="0">
                 <a:solidFill>
-                  <a:srgbClr val="7A7A7A"/>
+                  <a:srgbClr val="6B6467"/>
                 </a:solidFill>
                 <a:latin typeface="Arial"/>
               </a:rPr>
@@ -31014,7 +31060,7 @@
             <a:avLst/>
           </a:prstGeom>
           <a:solidFill>
-            <a:srgbClr val="C3002B"/>
+            <a:srgbClr val="1F1942"/>
           </a:solidFill>
           <a:ln>
             <a:noFill/>
@@ -31069,7 +31115,7 @@
             <a:r>
               <a:rPr sz="800" b="1" i="0">
                 <a:solidFill>
-                  <a:srgbClr val="FFFFFF"/>
+                  <a:srgbClr val="F4B634"/>
                 </a:solidFill>
                 <a:latin typeface="Arial"/>
               </a:rPr>
@@ -31104,7 +31150,7 @@
             <a:r>
               <a:rPr sz="1050" b="0" i="1">
                 <a:solidFill>
-                  <a:srgbClr val="7A7A7A"/>
+                  <a:srgbClr val="6B6467"/>
                 </a:solidFill>
                 <a:latin typeface="Arial"/>
               </a:rPr>
@@ -31132,7 +31178,7 @@
           </a:solidFill>
           <a:ln w="6350">
             <a:solidFill>
-              <a:srgbClr val="E2E2E2"/>
+              <a:srgbClr val="E2DED6"/>
             </a:solidFill>
           </a:ln>
           <a:effectLst/>
@@ -31174,11 +31220,11 @@
             <a:avLst/>
           </a:prstGeom>
           <a:solidFill>
-            <a:srgbClr val="C3002B"/>
+            <a:srgbClr val="2A2250"/>
           </a:solidFill>
           <a:ln w="6350">
             <a:solidFill>
-              <a:srgbClr val="E2E2E2"/>
+              <a:srgbClr val="E2DED6"/>
             </a:solidFill>
           </a:ln>
           <a:effectLst/>
@@ -31270,7 +31316,7 @@
             <a:r>
               <a:rPr sz="1050" b="0" i="0">
                 <a:solidFill>
-                  <a:srgbClr val="1C1C1C"/>
+                  <a:srgbClr val="1F1942"/>
                 </a:solidFill>
                 <a:latin typeface="Arial"/>
               </a:rPr>
@@ -31286,7 +31332,7 @@
             <a:r>
               <a:rPr sz="1050" b="0" i="0">
                 <a:solidFill>
-                  <a:srgbClr val="1C1C1C"/>
+                  <a:srgbClr val="1F1942"/>
                 </a:solidFill>
                 <a:latin typeface="Arial"/>
               </a:rPr>
@@ -31302,7 +31348,7 @@
             <a:r>
               <a:rPr sz="1050" b="0" i="0">
                 <a:solidFill>
-                  <a:srgbClr val="1C1C1C"/>
+                  <a:srgbClr val="1F1942"/>
                 </a:solidFill>
                 <a:latin typeface="Arial"/>
               </a:rPr>
@@ -31318,7 +31364,7 @@
             <a:r>
               <a:rPr sz="1050" b="0" i="0">
                 <a:solidFill>
-                  <a:srgbClr val="1C1C1C"/>
+                  <a:srgbClr val="1F1942"/>
                 </a:solidFill>
                 <a:latin typeface="Arial"/>
               </a:rPr>
@@ -31334,7 +31380,7 @@
             <a:r>
               <a:rPr sz="1050" b="0" i="0">
                 <a:solidFill>
-                  <a:srgbClr val="1C1C1C"/>
+                  <a:srgbClr val="1F1942"/>
                 </a:solidFill>
                 <a:latin typeface="Arial"/>
               </a:rPr>
@@ -31350,7 +31396,7 @@
             <a:r>
               <a:rPr sz="1050" b="0" i="0">
                 <a:solidFill>
-                  <a:srgbClr val="1C1C1C"/>
+                  <a:srgbClr val="1F1942"/>
                 </a:solidFill>
                 <a:latin typeface="Arial"/>
               </a:rPr>
@@ -31366,7 +31412,7 @@
             <a:r>
               <a:rPr sz="1050" b="0" i="0">
                 <a:solidFill>
-                  <a:srgbClr val="1C1C1C"/>
+                  <a:srgbClr val="1F1942"/>
                 </a:solidFill>
                 <a:latin typeface="Arial"/>
               </a:rPr>
@@ -31394,7 +31440,7 @@
           </a:solidFill>
           <a:ln w="6350">
             <a:solidFill>
-              <a:srgbClr val="E2E2E2"/>
+              <a:srgbClr val="E2DED6"/>
             </a:solidFill>
           </a:ln>
           <a:effectLst/>
@@ -31436,11 +31482,11 @@
             <a:avLst/>
           </a:prstGeom>
           <a:solidFill>
-            <a:srgbClr val="1C1C1C"/>
+            <a:srgbClr val="1F1942"/>
           </a:solidFill>
           <a:ln w="6350">
             <a:solidFill>
-              <a:srgbClr val="E2E2E2"/>
+              <a:srgbClr val="E2DED6"/>
             </a:solidFill>
           </a:ln>
           <a:effectLst/>
@@ -31532,7 +31578,7 @@
             <a:r>
               <a:rPr sz="1050" b="0" i="0">
                 <a:solidFill>
-                  <a:srgbClr val="1C1C1C"/>
+                  <a:srgbClr val="1F1942"/>
                 </a:solidFill>
                 <a:latin typeface="Arial"/>
               </a:rPr>
@@ -31548,7 +31594,7 @@
             <a:r>
               <a:rPr sz="1050" b="0" i="0">
                 <a:solidFill>
-                  <a:srgbClr val="1C1C1C"/>
+                  <a:srgbClr val="1F1942"/>
                 </a:solidFill>
                 <a:latin typeface="Arial"/>
               </a:rPr>
@@ -31564,7 +31610,7 @@
             <a:r>
               <a:rPr sz="1050" b="0" i="0">
                 <a:solidFill>
-                  <a:srgbClr val="1C1C1C"/>
+                  <a:srgbClr val="1F1942"/>
                 </a:solidFill>
                 <a:latin typeface="Arial"/>
               </a:rPr>
@@ -31580,7 +31626,7 @@
             <a:r>
               <a:rPr sz="1050" b="0" i="0">
                 <a:solidFill>
-                  <a:srgbClr val="1C1C1C"/>
+                  <a:srgbClr val="1F1942"/>
                 </a:solidFill>
                 <a:latin typeface="Arial"/>
               </a:rPr>
@@ -31596,7 +31642,7 @@
             <a:r>
               <a:rPr sz="1050" b="0" i="0">
                 <a:solidFill>
-                  <a:srgbClr val="1C1C1C"/>
+                  <a:srgbClr val="1F1942"/>
                 </a:solidFill>
                 <a:latin typeface="Arial"/>
               </a:rPr>
@@ -31612,7 +31658,7 @@
             <a:r>
               <a:rPr sz="1050" b="0" i="0">
                 <a:solidFill>
-                  <a:srgbClr val="1C1C1C"/>
+                  <a:srgbClr val="1F1942"/>
                 </a:solidFill>
                 <a:latin typeface="Arial"/>
               </a:rPr>
@@ -31628,7 +31674,7 @@
             <a:r>
               <a:rPr sz="1050" b="0" i="0">
                 <a:solidFill>
-                  <a:srgbClr val="1C1C1C"/>
+                  <a:srgbClr val="1F1942"/>
                 </a:solidFill>
                 <a:latin typeface="Arial"/>
               </a:rPr>
@@ -31652,11 +31698,11 @@
             <a:avLst/>
           </a:prstGeom>
           <a:solidFill>
-            <a:srgbClr val="F3F3F3"/>
+            <a:srgbClr val="F4EFE6"/>
           </a:solidFill>
           <a:ln w="6350">
             <a:solidFill>
-              <a:srgbClr val="E2E2E2"/>
+              <a:srgbClr val="E2DED6"/>
             </a:solidFill>
           </a:ln>
           <a:effectLst/>
@@ -31709,7 +31755,7 @@
             <a:r>
               <a:rPr sz="1100" b="1" i="0">
                 <a:solidFill>
-                  <a:srgbClr val="1C1C1C"/>
+                  <a:srgbClr val="1F1942"/>
                 </a:solidFill>
                 <a:latin typeface="Arial"/>
               </a:rPr>

--- a/corum-pitch/Corum-Westgate-I-Pitch-STYLED.pptx
+++ b/corum-pitch/Corum-Westgate-I-Pitch-STYLED.pptx
@@ -19576,45 +19576,36 @@
       <p:grpSpPr/>
       <p:sp>
         <p:nvSpPr>
-          <p:cNvPr id="2" name="Rectangle 1"/>
-          <p:cNvSpPr/>
-          <p:nvPr/>
-        </p:nvSpPr>
-        <p:spPr>
-          <a:xfrm>
-            <a:off x="0" y="0"/>
-            <a:ext cx="128016" cy="6858000"/>
-          </a:xfrm>
-          <a:prstGeom prst="rect">
-            <a:avLst/>
-          </a:prstGeom>
-          <a:solidFill>
-            <a:srgbClr val="F4B634"/>
-          </a:solidFill>
-          <a:ln>
-            <a:noFill/>
-          </a:ln>
-          <a:effectLst/>
-        </p:spPr>
-        <p:style>
-          <a:lnRef idx="1">
-            <a:schemeClr val="accent1"/>
-          </a:lnRef>
-          <a:fillRef idx="3">
-            <a:schemeClr val="accent1"/>
-          </a:fillRef>
-          <a:effectRef idx="2">
-            <a:schemeClr val="accent1"/>
-          </a:effectRef>
-          <a:fontRef idx="minor">
-            <a:schemeClr val="lt1"/>
-          </a:fontRef>
-        </p:style>
-        <p:txBody>
-          <a:bodyPr rtlCol="0" anchor="ctr"/>
-          <a:lstStyle/>
-          <a:p>
-            <a:pPr algn="ctr"/>
+          <p:cNvPr id="2" name="TextBox 1"/>
+          <p:cNvSpPr txBox="1"/>
+          <p:nvPr/>
+        </p:nvSpPr>
+        <p:spPr>
+          <a:xfrm>
+            <a:off x="548640" y="420624"/>
+            <a:ext cx="10515600" cy="320040"/>
+          </a:xfrm>
+          <a:prstGeom prst="rect">
+            <a:avLst/>
+          </a:prstGeom>
+          <a:noFill/>
+        </p:spPr>
+        <p:txBody>
+          <a:bodyPr wrap="square" anchor="t">
+            <a:normAutofit/>
+          </a:bodyPr>
+          <a:lstStyle/>
+          <a:p>
+            <a:pPr algn="l"/>
+            <a:r>
+              <a:rPr sz="1300" b="1" i="0">
+                <a:solidFill>
+                  <a:srgbClr val="F4B634"/>
+                </a:solidFill>
+                <a:latin typeface="Arial"/>
+              </a:rPr>
+              <a:t>EXECUTIVE SUMMARY</a:t>
+            </a:r>
           </a:p>
         </p:txBody>
       </p:sp>
@@ -19626,29 +19617,29 @@
         </p:nvSpPr>
         <p:spPr>
           <a:xfrm>
-            <a:off x="411480" y="219456"/>
-            <a:ext cx="10058400" cy="274320"/>
-          </a:xfrm>
-          <a:prstGeom prst="rect">
-            <a:avLst/>
-          </a:prstGeom>
-          <a:noFill/>
-        </p:spPr>
-        <p:txBody>
-          <a:bodyPr wrap="square" anchor="t">
-            <a:normAutofit/>
-          </a:bodyPr>
-          <a:lstStyle/>
-          <a:p>
-            <a:pPr algn="l"/>
-            <a:r>
-              <a:rPr sz="1000" b="1" i="0">
-                <a:solidFill>
-                  <a:srgbClr val="F4B634"/>
-                </a:solidFill>
-                <a:latin typeface="Arial"/>
-              </a:rPr>
-              <a:t>EXECUTIVE SUMMARY — THE PROPOSAL ON ONE PAGE</a:t>
+            <a:off x="548640" y="749808"/>
+            <a:ext cx="10972800" cy="457200"/>
+          </a:xfrm>
+          <a:prstGeom prst="rect">
+            <a:avLst/>
+          </a:prstGeom>
+          <a:noFill/>
+        </p:spPr>
+        <p:txBody>
+          <a:bodyPr wrap="square" anchor="t">
+            <a:normAutofit/>
+          </a:bodyPr>
+          <a:lstStyle/>
+          <a:p>
+            <a:pPr algn="l"/>
+            <a:r>
+              <a:rPr sz="1800" b="1" i="0">
+                <a:solidFill>
+                  <a:srgbClr val="1F1942"/>
+                </a:solidFill>
+                <a:latin typeface="Arial"/>
+              </a:rPr>
+              <a:t>Appoint C&amp;W as your single point of control — you decide, we deliver</a:t>
             </a:r>
           </a:p>
         </p:txBody>
@@ -19661,41 +19652,29 @@
         </p:nvSpPr>
         <p:spPr>
           <a:xfrm>
-            <a:off x="411480" y="457200"/>
-            <a:ext cx="11155680" cy="868680"/>
-          </a:xfrm>
-          <a:prstGeom prst="rect">
-            <a:avLst/>
-          </a:prstGeom>
-          <a:noFill/>
-        </p:spPr>
-        <p:txBody>
-          <a:bodyPr wrap="square" anchor="t">
-            <a:normAutofit/>
-          </a:bodyPr>
-          <a:lstStyle/>
-          <a:p>
-            <a:pPr algn="l"/>
-            <a:r>
-              <a:rPr sz="2300" b="1" i="0">
-                <a:solidFill>
-                  <a:srgbClr val="1F1942"/>
-                </a:solidFill>
-                <a:latin typeface="Arial"/>
-              </a:rPr>
-              <a:t>Appoint C&amp;W as your single point of control: we deliver Paris Proof</a:t>
-            </a:r>
-          </a:p>
-          <a:p>
-            <a:pPr algn="l"/>
-            <a:r>
-              <a:rPr sz="2300" b="1" i="0">
-                <a:solidFill>
-                  <a:srgbClr val="1F1942"/>
-                </a:solidFill>
-                <a:latin typeface="Arial"/>
-              </a:rPr>
-              <a:t>with PwC fully aware and aligned — you decide, we deliver</a:t>
+            <a:off x="548640" y="6446520"/>
+            <a:ext cx="5486400" cy="274320"/>
+          </a:xfrm>
+          <a:prstGeom prst="rect">
+            <a:avLst/>
+          </a:prstGeom>
+          <a:noFill/>
+        </p:spPr>
+        <p:txBody>
+          <a:bodyPr wrap="square" anchor="t">
+            <a:normAutofit/>
+          </a:bodyPr>
+          <a:lstStyle/>
+          <a:p>
+            <a:pPr algn="l"/>
+            <a:r>
+              <a:rPr sz="800" b="0" i="0">
+                <a:solidFill>
+                  <a:srgbClr val="6B6467"/>
+                </a:solidFill>
+                <a:latin typeface="Arial"/>
+              </a:rPr>
+              <a:t>Cushman &amp; Wakefield  |  Corum A.M.  ·  Westgate I</a:t>
             </a:r>
           </a:p>
         </p:txBody>
@@ -19703,41 +19682,6 @@
       <p:sp>
         <p:nvSpPr>
           <p:cNvPr id="5" name="TextBox 4"/>
-          <p:cNvSpPr txBox="1"/>
-          <p:nvPr/>
-        </p:nvSpPr>
-        <p:spPr>
-          <a:xfrm>
-            <a:off x="411480" y="6446520"/>
-            <a:ext cx="5486400" cy="274320"/>
-          </a:xfrm>
-          <a:prstGeom prst="rect">
-            <a:avLst/>
-          </a:prstGeom>
-          <a:noFill/>
-        </p:spPr>
-        <p:txBody>
-          <a:bodyPr wrap="square" anchor="t">
-            <a:normAutofit/>
-          </a:bodyPr>
-          <a:lstStyle/>
-          <a:p>
-            <a:pPr algn="l"/>
-            <a:r>
-              <a:rPr sz="800" b="0" i="0">
-                <a:solidFill>
-                  <a:srgbClr val="6B6467"/>
-                </a:solidFill>
-                <a:latin typeface="Arial"/>
-              </a:rPr>
-              <a:t>CUSHMAN &amp; WAKEFIELD  |  CORUM A.M.  ·  WESTGATE I</a:t>
-            </a:r>
-          </a:p>
-        </p:txBody>
-      </p:sp>
-      <p:sp>
-        <p:nvSpPr>
-          <p:cNvPr id="6" name="TextBox 5"/>
           <p:cNvSpPr txBox="1"/>
           <p:nvPr/>
         </p:nvSpPr>
@@ -19772,7 +19716,7 @@
       </p:sp>
       <p:sp>
         <p:nvSpPr>
-          <p:cNvPr id="7" name="Rounded Rectangle 6"/>
+          <p:cNvPr id="6" name="Rounded Rectangle 5"/>
           <p:cNvSpPr/>
           <p:nvPr/>
         </p:nvSpPr>
@@ -19816,7 +19760,7 @@
       </p:sp>
       <p:sp>
         <p:nvSpPr>
-          <p:cNvPr id="8" name="TextBox 7"/>
+          <p:cNvPr id="7" name="TextBox 6"/>
           <p:cNvSpPr txBox="1"/>
           <p:nvPr/>
         </p:nvSpPr>
@@ -19851,14 +19795,235 @@
       </p:sp>
       <p:sp>
         <p:nvSpPr>
-          <p:cNvPr id="9" name="Rectangle 8"/>
+          <p:cNvPr id="8" name="Rectangle 7"/>
           <p:cNvSpPr/>
           <p:nvPr/>
         </p:nvSpPr>
         <p:spPr>
           <a:xfrm>
-            <a:off x="411480" y="1600200"/>
-            <a:ext cx="2103120" cy="932688"/>
+            <a:off x="548640" y="1600200"/>
+            <a:ext cx="41148" cy="3703320"/>
+          </a:xfrm>
+          <a:prstGeom prst="rect">
+            <a:avLst/>
+          </a:prstGeom>
+          <a:solidFill>
+            <a:srgbClr val="F4B634"/>
+          </a:solidFill>
+          <a:ln w="6350">
+            <a:solidFill>
+              <a:srgbClr val="E2DED6"/>
+            </a:solidFill>
+          </a:ln>
+          <a:effectLst/>
+        </p:spPr>
+        <p:style>
+          <a:lnRef idx="1">
+            <a:schemeClr val="accent1"/>
+          </a:lnRef>
+          <a:fillRef idx="3">
+            <a:schemeClr val="accent1"/>
+          </a:fillRef>
+          <a:effectRef idx="2">
+            <a:schemeClr val="accent1"/>
+          </a:effectRef>
+          <a:fontRef idx="minor">
+            <a:schemeClr val="lt1"/>
+          </a:fontRef>
+        </p:style>
+        <p:txBody>
+          <a:bodyPr rtlCol="0" anchor="ctr"/>
+          <a:lstStyle/>
+          <a:p>
+            <a:pPr algn="ctr"/>
+          </a:p>
+        </p:txBody>
+      </p:sp>
+      <p:sp>
+        <p:nvSpPr>
+          <p:cNvPr id="9" name="TextBox 8"/>
+          <p:cNvSpPr txBox="1"/>
+          <p:nvPr/>
+        </p:nvSpPr>
+        <p:spPr>
+          <a:xfrm>
+            <a:off x="777240" y="1627632"/>
+            <a:ext cx="4937760" cy="274320"/>
+          </a:xfrm>
+          <a:prstGeom prst="rect">
+            <a:avLst/>
+          </a:prstGeom>
+          <a:noFill/>
+        </p:spPr>
+        <p:txBody>
+          <a:bodyPr wrap="square" anchor="t">
+            <a:normAutofit/>
+          </a:bodyPr>
+          <a:lstStyle/>
+          <a:p>
+            <a:pPr algn="l"/>
+            <a:r>
+              <a:rPr sz="1200" b="1" i="0">
+                <a:solidFill>
+                  <a:srgbClr val="F4B634"/>
+                </a:solidFill>
+                <a:latin typeface="Arial"/>
+              </a:rPr>
+              <a:t>SITUATION</a:t>
+            </a:r>
+          </a:p>
+        </p:txBody>
+      </p:sp>
+      <p:sp>
+        <p:nvSpPr>
+          <p:cNvPr id="10" name="TextBox 9"/>
+          <p:cNvSpPr txBox="1"/>
+          <p:nvPr/>
+        </p:nvSpPr>
+        <p:spPr>
+          <a:xfrm>
+            <a:off x="777240" y="1938528"/>
+            <a:ext cx="5074920" cy="1371600"/>
+          </a:xfrm>
+          <a:prstGeom prst="rect">
+            <a:avLst/>
+          </a:prstGeom>
+          <a:noFill/>
+        </p:spPr>
+        <p:txBody>
+          <a:bodyPr wrap="square" anchor="t">
+            <a:normAutofit/>
+          </a:bodyPr>
+          <a:lstStyle/>
+          <a:p>
+            <a:pPr algn="l"/>
+            <a:r>
+              <a:rPr sz="1150" b="0" i="0">
+                <a:solidFill>
+                  <a:srgbClr val="1F1942"/>
+                </a:solidFill>
+                <a:latin typeface="Arial"/>
+              </a:rPr>
+              <a:t>Corum owns Westgate I — a prime 27,000 m² Amsterdam office, fully let to PwC — and has committed to make the building Paris Proof: a binding contractual obligation, not an ambition.</a:t>
+            </a:r>
+          </a:p>
+        </p:txBody>
+      </p:sp>
+      <p:sp>
+        <p:nvSpPr>
+          <p:cNvPr id="11" name="TextBox 10"/>
+          <p:cNvSpPr txBox="1"/>
+          <p:nvPr/>
+        </p:nvSpPr>
+        <p:spPr>
+          <a:xfrm>
+            <a:off x="777240" y="3520440"/>
+            <a:ext cx="4937760" cy="274320"/>
+          </a:xfrm>
+          <a:prstGeom prst="rect">
+            <a:avLst/>
+          </a:prstGeom>
+          <a:noFill/>
+        </p:spPr>
+        <p:txBody>
+          <a:bodyPr wrap="square" anchor="t">
+            <a:normAutofit/>
+          </a:bodyPr>
+          <a:lstStyle/>
+          <a:p>
+            <a:pPr algn="l"/>
+            <a:r>
+              <a:rPr sz="1200" b="1" i="0">
+                <a:solidFill>
+                  <a:srgbClr val="F4B634"/>
+                </a:solidFill>
+                <a:latin typeface="Arial"/>
+              </a:rPr>
+              <a:t>COMPLICATION</a:t>
+            </a:r>
+          </a:p>
+        </p:txBody>
+      </p:sp>
+      <p:sp>
+        <p:nvSpPr>
+          <p:cNvPr id="12" name="TextBox 11"/>
+          <p:cNvSpPr txBox="1"/>
+          <p:nvPr/>
+        </p:nvSpPr>
+        <p:spPr>
+          <a:xfrm>
+            <a:off x="777240" y="3831336"/>
+            <a:ext cx="5074920" cy="1463040"/>
+          </a:xfrm>
+          <a:prstGeom prst="rect">
+            <a:avLst/>
+          </a:prstGeom>
+          <a:noFill/>
+        </p:spPr>
+        <p:txBody>
+          <a:bodyPr wrap="square" anchor="t">
+            <a:normAutofit/>
+          </a:bodyPr>
+          <a:lstStyle/>
+          <a:p>
+            <a:pPr algn="l"/>
+            <a:r>
+              <a:rPr sz="1150" b="0" i="0">
+                <a:solidFill>
+                  <a:srgbClr val="1F1942"/>
+                </a:solidFill>
+                <a:latin typeface="Arial"/>
+              </a:rPr>
+              <a:t>The upgrade must happen inside a live, occupied building without losing PwC's confidence, on a fixed budget and against a hard deadline — steered from a distance by an investor, not a builder.</a:t>
+            </a:r>
+          </a:p>
+        </p:txBody>
+      </p:sp>
+      <p:sp>
+        <p:nvSpPr>
+          <p:cNvPr id="13" name="TextBox 12"/>
+          <p:cNvSpPr txBox="1"/>
+          <p:nvPr/>
+        </p:nvSpPr>
+        <p:spPr>
+          <a:xfrm>
+            <a:off x="6355080" y="1600200"/>
+            <a:ext cx="5394960" cy="1828800"/>
+          </a:xfrm>
+          <a:prstGeom prst="rect">
+            <a:avLst/>
+          </a:prstGeom>
+          <a:noFill/>
+        </p:spPr>
+        <p:txBody>
+          <a:bodyPr wrap="square" anchor="ctr">
+            <a:normAutofit/>
+          </a:bodyPr>
+          <a:lstStyle/>
+          <a:p>
+            <a:pPr algn="l"/>
+            <a:r>
+              <a:rPr sz="1900" b="0" i="1">
+                <a:solidFill>
+                  <a:srgbClr val="F4B634"/>
+                </a:solidFill>
+                <a:latin typeface="Georgia"/>
+              </a:rPr>
+              <a:t>How does Corum deliver Paris Proof and protect the PwC tenancy and the asset's value — without being pulled into day-to-day management in the Netherlands?</a:t>
+            </a:r>
+          </a:p>
+        </p:txBody>
+      </p:sp>
+      <p:sp>
+        <p:nvSpPr>
+          <p:cNvPr id="14" name="Rectangle 13"/>
+          <p:cNvSpPr/>
+          <p:nvPr/>
+        </p:nvSpPr>
+        <p:spPr>
+          <a:xfrm>
+            <a:off x="6355080" y="3657600"/>
+            <a:ext cx="5394960" cy="1783080"/>
           </a:xfrm>
           <a:prstGeom prst="rect">
             <a:avLst/>
@@ -19897,602 +20062,70 @@
       </p:sp>
       <p:sp>
         <p:nvSpPr>
-          <p:cNvPr id="10" name="TextBox 9"/>
-          <p:cNvSpPr txBox="1"/>
-          <p:nvPr/>
-        </p:nvSpPr>
-        <p:spPr>
-          <a:xfrm>
-            <a:off x="411480" y="1673352"/>
-            <a:ext cx="2103120" cy="457200"/>
-          </a:xfrm>
-          <a:prstGeom prst="rect">
-            <a:avLst/>
-          </a:prstGeom>
-          <a:noFill/>
-        </p:spPr>
-        <p:txBody>
-          <a:bodyPr wrap="square" anchor="ctr">
-            <a:normAutofit/>
-          </a:bodyPr>
-          <a:lstStyle/>
-          <a:p>
-            <a:pPr algn="ctr"/>
-            <a:r>
-              <a:rPr sz="1300" b="1" i="0">
+          <p:cNvPr id="15" name="TextBox 14"/>
+          <p:cNvSpPr txBox="1"/>
+          <p:nvPr/>
+        </p:nvSpPr>
+        <p:spPr>
+          <a:xfrm>
+            <a:off x="6583680" y="3822191"/>
+            <a:ext cx="5029200" cy="274320"/>
+          </a:xfrm>
+          <a:prstGeom prst="rect">
+            <a:avLst/>
+          </a:prstGeom>
+          <a:noFill/>
+        </p:spPr>
+        <p:txBody>
+          <a:bodyPr wrap="square" anchor="t">
+            <a:normAutofit/>
+          </a:bodyPr>
+          <a:lstStyle/>
+          <a:p>
+            <a:pPr algn="l"/>
+            <a:r>
+              <a:rPr sz="1200" b="1" i="0">
+                <a:solidFill>
+                  <a:srgbClr val="F4B634"/>
+                </a:solidFill>
+                <a:latin typeface="Arial"/>
+              </a:rPr>
+              <a:t>OUR ANSWER</a:t>
+            </a:r>
+          </a:p>
+        </p:txBody>
+      </p:sp>
+      <p:sp>
+        <p:nvSpPr>
+          <p:cNvPr id="16" name="TextBox 15"/>
+          <p:cNvSpPr txBox="1"/>
+          <p:nvPr/>
+        </p:nvSpPr>
+        <p:spPr>
+          <a:xfrm>
+            <a:off x="6583680" y="4151376"/>
+            <a:ext cx="4983480" cy="1188720"/>
+          </a:xfrm>
+          <a:prstGeom prst="rect">
+            <a:avLst/>
+          </a:prstGeom>
+          <a:noFill/>
+        </p:spPr>
+        <p:txBody>
+          <a:bodyPr wrap="square" anchor="t">
+            <a:normAutofit/>
+          </a:bodyPr>
+          <a:lstStyle/>
+          <a:p>
+            <a:pPr algn="l"/>
+            <a:r>
+              <a:rPr sz="1150" b="0" i="0">
                 <a:solidFill>
                   <a:srgbClr val="FFFFFF"/>
                 </a:solidFill>
                 <a:latin typeface="Arial"/>
               </a:rPr>
-              <a:t>SITUATION</a:t>
-            </a:r>
-          </a:p>
-        </p:txBody>
-      </p:sp>
-      <p:sp>
-        <p:nvSpPr>
-          <p:cNvPr id="11" name="Rectangle 10"/>
-          <p:cNvSpPr/>
-          <p:nvPr/>
-        </p:nvSpPr>
-        <p:spPr>
-          <a:xfrm>
-            <a:off x="2560320" y="1600200"/>
-            <a:ext cx="9189720" cy="932688"/>
-          </a:xfrm>
-          <a:prstGeom prst="rect">
-            <a:avLst/>
-          </a:prstGeom>
-          <a:solidFill>
-            <a:srgbClr val="F4EFE6"/>
-          </a:solidFill>
-          <a:ln w="9525">
-            <a:solidFill>
-              <a:srgbClr val="6B6467"/>
-            </a:solidFill>
-          </a:ln>
-          <a:effectLst/>
-        </p:spPr>
-        <p:style>
-          <a:lnRef idx="1">
-            <a:schemeClr val="accent1"/>
-          </a:lnRef>
-          <a:fillRef idx="3">
-            <a:schemeClr val="accent1"/>
-          </a:fillRef>
-          <a:effectRef idx="2">
-            <a:schemeClr val="accent1"/>
-          </a:effectRef>
-          <a:fontRef idx="minor">
-            <a:schemeClr val="lt1"/>
-          </a:fontRef>
-        </p:style>
-        <p:txBody>
-          <a:bodyPr rtlCol="0" anchor="ctr"/>
-          <a:lstStyle/>
-          <a:p>
-            <a:pPr algn="ctr"/>
-          </a:p>
-        </p:txBody>
-      </p:sp>
-      <p:sp>
-        <p:nvSpPr>
-          <p:cNvPr id="12" name="TextBox 11"/>
-          <p:cNvSpPr txBox="1"/>
-          <p:nvPr/>
-        </p:nvSpPr>
-        <p:spPr>
-          <a:xfrm>
-            <a:off x="2743200" y="1691640"/>
-            <a:ext cx="8869680" cy="749808"/>
-          </a:xfrm>
-          <a:prstGeom prst="rect">
-            <a:avLst/>
-          </a:prstGeom>
-          <a:noFill/>
-        </p:spPr>
-        <p:txBody>
-          <a:bodyPr wrap="square" anchor="ctr">
-            <a:normAutofit/>
-          </a:bodyPr>
-          <a:lstStyle/>
-          <a:p>
-            <a:pPr algn="l"/>
-            <a:r>
-              <a:rPr sz="1150" b="0" i="0">
-                <a:solidFill>
-                  <a:srgbClr val="1F1942"/>
-                </a:solidFill>
-                <a:latin typeface="Arial"/>
-              </a:rPr>
-              <a:t>Corum owns Westgate I — a prime 27,000 m² Amsterdam office, fully let to PwC — and has committed to make the building Paris Proof. This is a binding contractual obligation, not an ambition.</a:t>
-            </a:r>
-          </a:p>
-        </p:txBody>
-      </p:sp>
-      <p:sp>
-        <p:nvSpPr>
-          <p:cNvPr id="13" name="Rectangle 12"/>
-          <p:cNvSpPr/>
-          <p:nvPr/>
-        </p:nvSpPr>
-        <p:spPr>
-          <a:xfrm>
-            <a:off x="411480" y="2642616"/>
-            <a:ext cx="2103120" cy="1170432"/>
-          </a:xfrm>
-          <a:prstGeom prst="rect">
-            <a:avLst/>
-          </a:prstGeom>
-          <a:solidFill>
-            <a:srgbClr val="1F1942"/>
-          </a:solidFill>
-          <a:ln w="6350">
-            <a:solidFill>
-              <a:srgbClr val="E2DED6"/>
-            </a:solidFill>
-          </a:ln>
-          <a:effectLst/>
-        </p:spPr>
-        <p:style>
-          <a:lnRef idx="1">
-            <a:schemeClr val="accent1"/>
-          </a:lnRef>
-          <a:fillRef idx="3">
-            <a:schemeClr val="accent1"/>
-          </a:fillRef>
-          <a:effectRef idx="2">
-            <a:schemeClr val="accent1"/>
-          </a:effectRef>
-          <a:fontRef idx="minor">
-            <a:schemeClr val="lt1"/>
-          </a:fontRef>
-        </p:style>
-        <p:txBody>
-          <a:bodyPr rtlCol="0" anchor="ctr"/>
-          <a:lstStyle/>
-          <a:p>
-            <a:pPr algn="ctr"/>
-          </a:p>
-        </p:txBody>
-      </p:sp>
-      <p:sp>
-        <p:nvSpPr>
-          <p:cNvPr id="14" name="TextBox 13"/>
-          <p:cNvSpPr txBox="1"/>
-          <p:nvPr/>
-        </p:nvSpPr>
-        <p:spPr>
-          <a:xfrm>
-            <a:off x="411480" y="2715768"/>
-            <a:ext cx="2103120" cy="457200"/>
-          </a:xfrm>
-          <a:prstGeom prst="rect">
-            <a:avLst/>
-          </a:prstGeom>
-          <a:noFill/>
-        </p:spPr>
-        <p:txBody>
-          <a:bodyPr wrap="square" anchor="ctr">
-            <a:normAutofit/>
-          </a:bodyPr>
-          <a:lstStyle/>
-          <a:p>
-            <a:pPr algn="ctr"/>
-            <a:r>
-              <a:rPr sz="1300" b="1" i="0">
-                <a:solidFill>
-                  <a:srgbClr val="FFFFFF"/>
-                </a:solidFill>
-                <a:latin typeface="Arial"/>
-              </a:rPr>
-              <a:t>COMPLICATION</a:t>
-            </a:r>
-          </a:p>
-        </p:txBody>
-      </p:sp>
-      <p:sp>
-        <p:nvSpPr>
-          <p:cNvPr id="15" name="Rectangle 14"/>
-          <p:cNvSpPr/>
-          <p:nvPr/>
-        </p:nvSpPr>
-        <p:spPr>
-          <a:xfrm>
-            <a:off x="2560320" y="2642616"/>
-            <a:ext cx="9189720" cy="1170432"/>
-          </a:xfrm>
-          <a:prstGeom prst="rect">
-            <a:avLst/>
-          </a:prstGeom>
-          <a:solidFill>
-            <a:srgbClr val="F4EFE6"/>
-          </a:solidFill>
-          <a:ln w="9525">
-            <a:solidFill>
-              <a:srgbClr val="6B6467"/>
-            </a:solidFill>
-          </a:ln>
-          <a:effectLst/>
-        </p:spPr>
-        <p:style>
-          <a:lnRef idx="1">
-            <a:schemeClr val="accent1"/>
-          </a:lnRef>
-          <a:fillRef idx="3">
-            <a:schemeClr val="accent1"/>
-          </a:fillRef>
-          <a:effectRef idx="2">
-            <a:schemeClr val="accent1"/>
-          </a:effectRef>
-          <a:fontRef idx="minor">
-            <a:schemeClr val="lt1"/>
-          </a:fontRef>
-        </p:style>
-        <p:txBody>
-          <a:bodyPr rtlCol="0" anchor="ctr"/>
-          <a:lstStyle/>
-          <a:p>
-            <a:pPr algn="ctr"/>
-          </a:p>
-        </p:txBody>
-      </p:sp>
-      <p:sp>
-        <p:nvSpPr>
-          <p:cNvPr id="16" name="TextBox 15"/>
-          <p:cNvSpPr txBox="1"/>
-          <p:nvPr/>
-        </p:nvSpPr>
-        <p:spPr>
-          <a:xfrm>
-            <a:off x="2743200" y="2734056"/>
-            <a:ext cx="8869680" cy="987552"/>
-          </a:xfrm>
-          <a:prstGeom prst="rect">
-            <a:avLst/>
-          </a:prstGeom>
-          <a:noFill/>
-        </p:spPr>
-        <p:txBody>
-          <a:bodyPr wrap="square" anchor="ctr">
-            <a:normAutofit/>
-          </a:bodyPr>
-          <a:lstStyle/>
-          <a:p>
-            <a:pPr algn="l"/>
-            <a:r>
-              <a:rPr sz="1150" b="0" i="0">
-                <a:solidFill>
-                  <a:srgbClr val="1F1942"/>
-                </a:solidFill>
-                <a:latin typeface="Arial"/>
-              </a:rPr>
-              <a:t>The upgrade must happen inside a live, occupied building without losing PwC's confidence, within a fixed budget and against a hard sustainability deadline — while being steered from a distance by an owner whose core business is investment, not Dutch construction management.</a:t>
-            </a:r>
-          </a:p>
-        </p:txBody>
-      </p:sp>
-      <p:sp>
-        <p:nvSpPr>
-          <p:cNvPr id="17" name="Rectangle 16"/>
-          <p:cNvSpPr/>
-          <p:nvPr/>
-        </p:nvSpPr>
-        <p:spPr>
-          <a:xfrm>
-            <a:off x="411480" y="3922776"/>
-            <a:ext cx="2103120" cy="932688"/>
-          </a:xfrm>
-          <a:prstGeom prst="rect">
-            <a:avLst/>
-          </a:prstGeom>
-          <a:solidFill>
-            <a:srgbClr val="2A2250"/>
-          </a:solidFill>
-          <a:ln w="6350">
-            <a:solidFill>
-              <a:srgbClr val="E2DED6"/>
-            </a:solidFill>
-          </a:ln>
-          <a:effectLst/>
-        </p:spPr>
-        <p:style>
-          <a:lnRef idx="1">
-            <a:schemeClr val="accent1"/>
-          </a:lnRef>
-          <a:fillRef idx="3">
-            <a:schemeClr val="accent1"/>
-          </a:fillRef>
-          <a:effectRef idx="2">
-            <a:schemeClr val="accent1"/>
-          </a:effectRef>
-          <a:fontRef idx="minor">
-            <a:schemeClr val="lt1"/>
-          </a:fontRef>
-        </p:style>
-        <p:txBody>
-          <a:bodyPr rtlCol="0" anchor="ctr"/>
-          <a:lstStyle/>
-          <a:p>
-            <a:pPr algn="ctr"/>
-          </a:p>
-        </p:txBody>
-      </p:sp>
-      <p:sp>
-        <p:nvSpPr>
-          <p:cNvPr id="18" name="TextBox 17"/>
-          <p:cNvSpPr txBox="1"/>
-          <p:nvPr/>
-        </p:nvSpPr>
-        <p:spPr>
-          <a:xfrm>
-            <a:off x="411480" y="3995928"/>
-            <a:ext cx="2103120" cy="457200"/>
-          </a:xfrm>
-          <a:prstGeom prst="rect">
-            <a:avLst/>
-          </a:prstGeom>
-          <a:noFill/>
-        </p:spPr>
-        <p:txBody>
-          <a:bodyPr wrap="square" anchor="ctr">
-            <a:normAutofit/>
-          </a:bodyPr>
-          <a:lstStyle/>
-          <a:p>
-            <a:pPr algn="ctr"/>
-            <a:r>
-              <a:rPr sz="1300" b="1" i="0">
-                <a:solidFill>
-                  <a:srgbClr val="FFFFFF"/>
-                </a:solidFill>
-                <a:latin typeface="Arial"/>
-              </a:rPr>
-              <a:t>QUESTION</a:t>
-            </a:r>
-          </a:p>
-        </p:txBody>
-      </p:sp>
-      <p:sp>
-        <p:nvSpPr>
-          <p:cNvPr id="19" name="Rectangle 18"/>
-          <p:cNvSpPr/>
-          <p:nvPr/>
-        </p:nvSpPr>
-        <p:spPr>
-          <a:xfrm>
-            <a:off x="2560320" y="3922776"/>
-            <a:ext cx="9189720" cy="932688"/>
-          </a:xfrm>
-          <a:prstGeom prst="rect">
-            <a:avLst/>
-          </a:prstGeom>
-          <a:solidFill>
-            <a:srgbClr val="FFFFFF"/>
-          </a:solidFill>
-          <a:ln w="9525">
-            <a:solidFill>
-              <a:srgbClr val="2A2250"/>
-            </a:solidFill>
-          </a:ln>
-          <a:effectLst/>
-        </p:spPr>
-        <p:style>
-          <a:lnRef idx="1">
-            <a:schemeClr val="accent1"/>
-          </a:lnRef>
-          <a:fillRef idx="3">
-            <a:schemeClr val="accent1"/>
-          </a:fillRef>
-          <a:effectRef idx="2">
-            <a:schemeClr val="accent1"/>
-          </a:effectRef>
-          <a:fontRef idx="minor">
-            <a:schemeClr val="lt1"/>
-          </a:fontRef>
-        </p:style>
-        <p:txBody>
-          <a:bodyPr rtlCol="0" anchor="ctr"/>
-          <a:lstStyle/>
-          <a:p>
-            <a:pPr algn="ctr"/>
-          </a:p>
-        </p:txBody>
-      </p:sp>
-      <p:sp>
-        <p:nvSpPr>
-          <p:cNvPr id="20" name="TextBox 19"/>
-          <p:cNvSpPr txBox="1"/>
-          <p:nvPr/>
-        </p:nvSpPr>
-        <p:spPr>
-          <a:xfrm>
-            <a:off x="2743200" y="4014216"/>
-            <a:ext cx="8869680" cy="749808"/>
-          </a:xfrm>
-          <a:prstGeom prst="rect">
-            <a:avLst/>
-          </a:prstGeom>
-          <a:noFill/>
-        </p:spPr>
-        <p:txBody>
-          <a:bodyPr wrap="square" anchor="ctr">
-            <a:normAutofit/>
-          </a:bodyPr>
-          <a:lstStyle/>
-          <a:p>
-            <a:pPr algn="l"/>
-            <a:r>
-              <a:rPr sz="1150" b="1" i="0">
-                <a:solidFill>
-                  <a:srgbClr val="1F1942"/>
-                </a:solidFill>
-                <a:latin typeface="Arial"/>
-              </a:rPr>
-              <a:t>How does Corum deliver Paris Proof and protect both the PwC tenancy and the asset's value, without being pulled into day-to-day tenant and project management in the Netherlands?</a:t>
-            </a:r>
-          </a:p>
-        </p:txBody>
-      </p:sp>
-      <p:sp>
-        <p:nvSpPr>
-          <p:cNvPr id="21" name="Rectangle 20"/>
-          <p:cNvSpPr/>
-          <p:nvPr/>
-        </p:nvSpPr>
-        <p:spPr>
-          <a:xfrm>
-            <a:off x="411480" y="4965192"/>
-            <a:ext cx="2103120" cy="1170432"/>
-          </a:xfrm>
-          <a:prstGeom prst="rect">
-            <a:avLst/>
-          </a:prstGeom>
-          <a:solidFill>
-            <a:srgbClr val="2A2250"/>
-          </a:solidFill>
-          <a:ln w="6350">
-            <a:solidFill>
-              <a:srgbClr val="E2DED6"/>
-            </a:solidFill>
-          </a:ln>
-          <a:effectLst/>
-        </p:spPr>
-        <p:style>
-          <a:lnRef idx="1">
-            <a:schemeClr val="accent1"/>
-          </a:lnRef>
-          <a:fillRef idx="3">
-            <a:schemeClr val="accent1"/>
-          </a:fillRef>
-          <a:effectRef idx="2">
-            <a:schemeClr val="accent1"/>
-          </a:effectRef>
-          <a:fontRef idx="minor">
-            <a:schemeClr val="lt1"/>
-          </a:fontRef>
-        </p:style>
-        <p:txBody>
-          <a:bodyPr rtlCol="0" anchor="ctr"/>
-          <a:lstStyle/>
-          <a:p>
-            <a:pPr algn="ctr"/>
-          </a:p>
-        </p:txBody>
-      </p:sp>
-      <p:sp>
-        <p:nvSpPr>
-          <p:cNvPr id="22" name="TextBox 21"/>
-          <p:cNvSpPr txBox="1"/>
-          <p:nvPr/>
-        </p:nvSpPr>
-        <p:spPr>
-          <a:xfrm>
-            <a:off x="411480" y="5038344"/>
-            <a:ext cx="2103120" cy="457200"/>
-          </a:xfrm>
-          <a:prstGeom prst="rect">
-            <a:avLst/>
-          </a:prstGeom>
-          <a:noFill/>
-        </p:spPr>
-        <p:txBody>
-          <a:bodyPr wrap="square" anchor="ctr">
-            <a:normAutofit/>
-          </a:bodyPr>
-          <a:lstStyle/>
-          <a:p>
-            <a:pPr algn="ctr"/>
-            <a:r>
-              <a:rPr sz="1300" b="1" i="0">
-                <a:solidFill>
-                  <a:srgbClr val="FFFFFF"/>
-                </a:solidFill>
-                <a:latin typeface="Arial"/>
-              </a:rPr>
-              <a:t>ANSWER</a:t>
-            </a:r>
-          </a:p>
-        </p:txBody>
-      </p:sp>
-      <p:sp>
-        <p:nvSpPr>
-          <p:cNvPr id="23" name="Rectangle 22"/>
-          <p:cNvSpPr/>
-          <p:nvPr/>
-        </p:nvSpPr>
-        <p:spPr>
-          <a:xfrm>
-            <a:off x="2560320" y="4965192"/>
-            <a:ext cx="9189720" cy="1170432"/>
-          </a:xfrm>
-          <a:prstGeom prst="rect">
-            <a:avLst/>
-          </a:prstGeom>
-          <a:solidFill>
-            <a:srgbClr val="FFFFFF"/>
-          </a:solidFill>
-          <a:ln w="9525">
-            <a:solidFill>
-              <a:srgbClr val="2A2250"/>
-            </a:solidFill>
-          </a:ln>
-          <a:effectLst/>
-        </p:spPr>
-        <p:style>
-          <a:lnRef idx="1">
-            <a:schemeClr val="accent1"/>
-          </a:lnRef>
-          <a:fillRef idx="3">
-            <a:schemeClr val="accent1"/>
-          </a:fillRef>
-          <a:effectRef idx="2">
-            <a:schemeClr val="accent1"/>
-          </a:effectRef>
-          <a:fontRef idx="minor">
-            <a:schemeClr val="lt1"/>
-          </a:fontRef>
-        </p:style>
-        <p:txBody>
-          <a:bodyPr rtlCol="0" anchor="ctr"/>
-          <a:lstStyle/>
-          <a:p>
-            <a:pPr algn="ctr"/>
-          </a:p>
-        </p:txBody>
-      </p:sp>
-      <p:sp>
-        <p:nvSpPr>
-          <p:cNvPr id="24" name="TextBox 23"/>
-          <p:cNvSpPr txBox="1"/>
-          <p:nvPr/>
-        </p:nvSpPr>
-        <p:spPr>
-          <a:xfrm>
-            <a:off x="2743200" y="5056632"/>
-            <a:ext cx="8869680" cy="987552"/>
-          </a:xfrm>
-          <a:prstGeom prst="rect">
-            <a:avLst/>
-          </a:prstGeom>
-          <a:noFill/>
-        </p:spPr>
-        <p:txBody>
-          <a:bodyPr wrap="square" anchor="ctr">
-            <a:normAutofit/>
-          </a:bodyPr>
-          <a:lstStyle/>
-          <a:p>
-            <a:pPr algn="l"/>
-            <a:r>
-              <a:rPr sz="1150" b="1" i="0">
-                <a:solidFill>
-                  <a:srgbClr val="1F1942"/>
-                </a:solidFill>
-                <a:latin typeface="Arial"/>
-              </a:rPr>
-              <a:t>Appoint Cushman &amp; Wakefield as your single point of control. We deliver the Paris Proof transformation end-to-end and keep PwC fully aware and aligned throughout — from a low-commitment preparatory phase to verified handover. One contact, one report, no surprises.</a:t>
+              <a:t>Appoint Cushman &amp; Wakefield as your single point of control. We deliver the transformation end-to-end and keep PwC fully aware and aligned — from a low-commitment preparatory phase to verified handover. One contact, one report, no surprises.</a:t>
             </a:r>
           </a:p>
         </p:txBody>
